--- a/report/myrag总结.pptx
+++ b/report/myrag总结.pptx
@@ -5,22 +5,25 @@
     <p:sldMasterId id="2147483648" r:id="rId1"/>
   </p:sldMasterIdLst>
   <p:notesMasterIdLst>
-    <p:notesMasterId r:id="rId15"/>
+    <p:notesMasterId r:id="rId18"/>
   </p:notesMasterIdLst>
   <p:sldIdLst>
     <p:sldId id="256" r:id="rId2"/>
     <p:sldId id="273" r:id="rId3"/>
     <p:sldId id="258" r:id="rId4"/>
     <p:sldId id="260" r:id="rId5"/>
-    <p:sldId id="262" r:id="rId6"/>
-    <p:sldId id="263" r:id="rId7"/>
-    <p:sldId id="270" r:id="rId8"/>
-    <p:sldId id="259" r:id="rId9"/>
-    <p:sldId id="271" r:id="rId10"/>
-    <p:sldId id="264" r:id="rId11"/>
-    <p:sldId id="272" r:id="rId12"/>
-    <p:sldId id="261" r:id="rId13"/>
-    <p:sldId id="268" r:id="rId14"/>
+    <p:sldId id="274" r:id="rId6"/>
+    <p:sldId id="276" r:id="rId7"/>
+    <p:sldId id="277" r:id="rId8"/>
+    <p:sldId id="262" r:id="rId9"/>
+    <p:sldId id="263" r:id="rId10"/>
+    <p:sldId id="270" r:id="rId11"/>
+    <p:sldId id="259" r:id="rId12"/>
+    <p:sldId id="271" r:id="rId13"/>
+    <p:sldId id="264" r:id="rId14"/>
+    <p:sldId id="272" r:id="rId15"/>
+    <p:sldId id="261" r:id="rId16"/>
+    <p:sldId id="268" r:id="rId17"/>
   </p:sldIdLst>
   <p:sldSz cx="12192000" cy="6858000"/>
   <p:notesSz cx="6858000" cy="9144000"/>
@@ -436,11 +439,46 @@
           <a:bodyPr/>
           <a:lstStyle/>
           <a:p>
-            <a:endParaRPr/>
+            <a:pPr marL="0" marR="0" lvl="0" indent="0" algn="l" defTabSz="914400" eaLnBrk="1" fontAlgn="auto" latinLnBrk="0" hangingPunct="1">
+              <a:lnSpc>
+                <a:spcPct val="100000"/>
+              </a:lnSpc>
+              <a:spcBef>
+                <a:spcPts val="0"/>
+              </a:spcBef>
+              <a:spcAft>
+                <a:spcPts val="0"/>
+              </a:spcAft>
+              <a:buClrTx/>
+              <a:buSzTx/>
+              <a:buFontTx/>
+              <a:buNone/>
+              <a:tabLst/>
+              <a:defRPr/>
+            </a:pPr>
+            <a:endParaRPr kumimoji="0" sz="1800" b="0" i="0" u="none" strike="noStrike" kern="1200" cap="none" spc="0" normalizeH="0" baseline="0" noProof="0">
+              <a:ln>
+                <a:noFill/>
+              </a:ln>
+              <a:solidFill>
+                <a:prstClr val="black"/>
+              </a:solidFill>
+              <a:effectLst/>
+              <a:uLnTx/>
+              <a:uFillTx/>
+              <a:latin typeface="Arial"/>
+              <a:ea typeface="STZhongsong"/>
+              <a:cs typeface="+mn-cs"/>
+            </a:endParaRPr>
           </a:p>
         </p:txBody>
       </p:sp>
     </p:spTree>
+    <p:extLst>
+      <p:ext uri="{BB962C8B-B14F-4D97-AF65-F5344CB8AC3E}">
+        <p14:creationId xmlns:p14="http://schemas.microsoft.com/office/powerpoint/2010/main" val="1321021020"/>
+      </p:ext>
+    </p:extLst>
   </p:cSld>
   <p:clrMapOvr>
     <a:masterClrMapping/>
@@ -511,46 +549,11 @@
           <a:bodyPr/>
           <a:lstStyle/>
           <a:p>
-            <a:pPr marL="0" marR="0" lvl="0" indent="0" algn="l" defTabSz="914400" eaLnBrk="1" fontAlgn="auto" latinLnBrk="0" hangingPunct="1">
-              <a:lnSpc>
-                <a:spcPct val="100000"/>
-              </a:lnSpc>
-              <a:spcBef>
-                <a:spcPts val="0"/>
-              </a:spcBef>
-              <a:spcAft>
-                <a:spcPts val="0"/>
-              </a:spcAft>
-              <a:buClrTx/>
-              <a:buSzTx/>
-              <a:buFontTx/>
-              <a:buNone/>
-              <a:tabLst/>
-              <a:defRPr/>
-            </a:pPr>
-            <a:endParaRPr kumimoji="0" sz="1800" b="0" i="0" u="none" strike="noStrike" kern="1200" cap="none" spc="0" normalizeH="0" baseline="0" noProof="0">
-              <a:ln>
-                <a:noFill/>
-              </a:ln>
-              <a:solidFill>
-                <a:prstClr val="black"/>
-              </a:solidFill>
-              <a:effectLst/>
-              <a:uLnTx/>
-              <a:uFillTx/>
-              <a:latin typeface="Arial"/>
-              <a:ea typeface="STZhongsong"/>
-              <a:cs typeface="+mn-cs"/>
-            </a:endParaRPr>
+            <a:endParaRPr/>
           </a:p>
         </p:txBody>
       </p:sp>
     </p:spTree>
-    <p:extLst>
-      <p:ext uri="{BB962C8B-B14F-4D97-AF65-F5344CB8AC3E}">
-        <p14:creationId xmlns:p14="http://schemas.microsoft.com/office/powerpoint/2010/main" val="567967028"/>
-      </p:ext>
-    </p:extLst>
   </p:cSld>
   <p:clrMapOvr>
     <a:masterClrMapping/>
@@ -621,6 +624,116 @@
           <a:bodyPr/>
           <a:lstStyle/>
           <a:p>
+            <a:pPr marL="0" marR="0" lvl="0" indent="0" algn="l" defTabSz="914400" eaLnBrk="1" fontAlgn="auto" latinLnBrk="0" hangingPunct="1">
+              <a:lnSpc>
+                <a:spcPct val="100000"/>
+              </a:lnSpc>
+              <a:spcBef>
+                <a:spcPts val="0"/>
+              </a:spcBef>
+              <a:spcAft>
+                <a:spcPts val="0"/>
+              </a:spcAft>
+              <a:buClrTx/>
+              <a:buSzTx/>
+              <a:buFontTx/>
+              <a:buNone/>
+              <a:tabLst/>
+              <a:defRPr/>
+            </a:pPr>
+            <a:endParaRPr kumimoji="0" sz="1800" b="0" i="0" u="none" strike="noStrike" kern="1200" cap="none" spc="0" normalizeH="0" baseline="0" noProof="0">
+              <a:ln>
+                <a:noFill/>
+              </a:ln>
+              <a:solidFill>
+                <a:prstClr val="black"/>
+              </a:solidFill>
+              <a:effectLst/>
+              <a:uLnTx/>
+              <a:uFillTx/>
+              <a:latin typeface="Arial"/>
+              <a:ea typeface="STZhongsong"/>
+              <a:cs typeface="+mn-cs"/>
+            </a:endParaRPr>
+          </a:p>
+        </p:txBody>
+      </p:sp>
+    </p:spTree>
+    <p:extLst>
+      <p:ext uri="{BB962C8B-B14F-4D97-AF65-F5344CB8AC3E}">
+        <p14:creationId xmlns:p14="http://schemas.microsoft.com/office/powerpoint/2010/main" val="207738448"/>
+      </p:ext>
+    </p:extLst>
+  </p:cSld>
+  <p:clrMapOvr>
+    <a:masterClrMapping/>
+  </p:clrMapOvr>
+</p:notes>
+</file>
+
+<file path=ppt/notesSlides/notesSlide13.xml><?xml version="1.0" encoding="utf-8"?>
+<p:notes xmlns:a="http://schemas.openxmlformats.org/drawingml/2006/main" xmlns:r="http://schemas.openxmlformats.org/officeDocument/2006/relationships" xmlns:p="http://schemas.openxmlformats.org/presentationml/2006/main">
+  <p:cSld>
+    <p:spTree>
+      <p:nvGrpSpPr>
+        <p:cNvPr id="1" name=""/>
+        <p:cNvGrpSpPr/>
+        <p:nvPr/>
+      </p:nvGrpSpPr>
+      <p:grpSpPr>
+        <a:xfrm>
+          <a:off x="0" y="0"/>
+          <a:ext cx="0" cy="0"/>
+          <a:chOff x="0" y="0"/>
+          <a:chExt cx="0" cy="0"/>
+        </a:xfrm>
+      </p:grpSpPr>
+      <p:sp>
+        <p:nvSpPr>
+          <p:cNvPr id="2" name="Slide Image Placeholder 1"/>
+          <p:cNvSpPr>
+            <a:spLocks noGrp="1" noRot="1" noChangeAspect="1"/>
+          </p:cNvSpPr>
+          <p:nvPr>
+            <p:ph type="sldImg"/>
+          </p:nvPr>
+        </p:nvSpPr>
+        <p:spPr/>
+      </p:sp>
+      <p:sp>
+        <p:nvSpPr>
+          <p:cNvPr id="3" name="Notes Placeholder 2"/>
+          <p:cNvSpPr>
+            <a:spLocks noGrp="1"/>
+          </p:cNvSpPr>
+          <p:nvPr>
+            <p:ph type="body" idx="1"/>
+          </p:nvPr>
+        </p:nvSpPr>
+        <p:spPr/>
+        <p:txBody>
+          <a:bodyPr/>
+          <a:lstStyle/>
+          <a:p>
+            <a:endParaRPr/>
+          </a:p>
+        </p:txBody>
+      </p:sp>
+      <p:sp>
+        <p:nvSpPr>
+          <p:cNvPr id="4" name="Slide Number Placeholder 3"/>
+          <p:cNvSpPr>
+            <a:spLocks noGrp="1"/>
+          </p:cNvSpPr>
+          <p:nvPr>
+            <p:ph type="sldNum" idx="5"/>
+          </p:nvPr>
+        </p:nvSpPr>
+        <p:spPr/>
+        <p:txBody>
+          <a:bodyPr/>
+          <a:lstStyle/>
+          <a:p>
             <a:endParaRPr/>
           </a:p>
         </p:txBody>
@@ -633,7 +746,192 @@
 </p:notes>
 </file>
 
-<file path=ppt/notesSlides/notesSlide13.xml><?xml version="1.0" encoding="utf-8"?>
+<file path=ppt/notesSlides/notesSlide14.xml><?xml version="1.0" encoding="utf-8"?>
+<p:notes xmlns:a="http://schemas.openxmlformats.org/drawingml/2006/main" xmlns:r="http://schemas.openxmlformats.org/officeDocument/2006/relationships" xmlns:p="http://schemas.openxmlformats.org/presentationml/2006/main">
+  <p:cSld>
+    <p:spTree>
+      <p:nvGrpSpPr>
+        <p:cNvPr id="1" name=""/>
+        <p:cNvGrpSpPr/>
+        <p:nvPr/>
+      </p:nvGrpSpPr>
+      <p:grpSpPr>
+        <a:xfrm>
+          <a:off x="0" y="0"/>
+          <a:ext cx="0" cy="0"/>
+          <a:chOff x="0" y="0"/>
+          <a:chExt cx="0" cy="0"/>
+        </a:xfrm>
+      </p:grpSpPr>
+      <p:sp>
+        <p:nvSpPr>
+          <p:cNvPr id="2" name="Slide Image Placeholder 1"/>
+          <p:cNvSpPr>
+            <a:spLocks noGrp="1" noRot="1" noChangeAspect="1"/>
+          </p:cNvSpPr>
+          <p:nvPr>
+            <p:ph type="sldImg"/>
+          </p:nvPr>
+        </p:nvSpPr>
+        <p:spPr/>
+      </p:sp>
+      <p:sp>
+        <p:nvSpPr>
+          <p:cNvPr id="3" name="Notes Placeholder 2"/>
+          <p:cNvSpPr>
+            <a:spLocks noGrp="1"/>
+          </p:cNvSpPr>
+          <p:nvPr>
+            <p:ph type="body" idx="1"/>
+          </p:nvPr>
+        </p:nvSpPr>
+        <p:spPr/>
+        <p:txBody>
+          <a:bodyPr/>
+          <a:lstStyle/>
+          <a:p>
+            <a:endParaRPr/>
+          </a:p>
+        </p:txBody>
+      </p:sp>
+      <p:sp>
+        <p:nvSpPr>
+          <p:cNvPr id="4" name="Slide Number Placeholder 3"/>
+          <p:cNvSpPr>
+            <a:spLocks noGrp="1"/>
+          </p:cNvSpPr>
+          <p:nvPr>
+            <p:ph type="sldNum" idx="5"/>
+          </p:nvPr>
+        </p:nvSpPr>
+        <p:spPr/>
+        <p:txBody>
+          <a:bodyPr/>
+          <a:lstStyle/>
+          <a:p>
+            <a:pPr marL="0" marR="0" lvl="0" indent="0" algn="l" defTabSz="914400" eaLnBrk="1" fontAlgn="auto" latinLnBrk="0" hangingPunct="1">
+              <a:lnSpc>
+                <a:spcPct val="100000"/>
+              </a:lnSpc>
+              <a:spcBef>
+                <a:spcPts val="0"/>
+              </a:spcBef>
+              <a:spcAft>
+                <a:spcPts val="0"/>
+              </a:spcAft>
+              <a:buClrTx/>
+              <a:buSzTx/>
+              <a:buFontTx/>
+              <a:buNone/>
+              <a:tabLst/>
+              <a:defRPr/>
+            </a:pPr>
+            <a:endParaRPr kumimoji="0" sz="1800" b="0" i="0" u="none" strike="noStrike" kern="1200" cap="none" spc="0" normalizeH="0" baseline="0" noProof="0">
+              <a:ln>
+                <a:noFill/>
+              </a:ln>
+              <a:solidFill>
+                <a:prstClr val="black"/>
+              </a:solidFill>
+              <a:effectLst/>
+              <a:uLnTx/>
+              <a:uFillTx/>
+              <a:latin typeface="Arial"/>
+              <a:ea typeface="STZhongsong"/>
+              <a:cs typeface="+mn-cs"/>
+            </a:endParaRPr>
+          </a:p>
+        </p:txBody>
+      </p:sp>
+    </p:spTree>
+    <p:extLst>
+      <p:ext uri="{BB962C8B-B14F-4D97-AF65-F5344CB8AC3E}">
+        <p14:creationId xmlns:p14="http://schemas.microsoft.com/office/powerpoint/2010/main" val="567967028"/>
+      </p:ext>
+    </p:extLst>
+  </p:cSld>
+  <p:clrMapOvr>
+    <a:masterClrMapping/>
+  </p:clrMapOvr>
+</p:notes>
+</file>
+
+<file path=ppt/notesSlides/notesSlide15.xml><?xml version="1.0" encoding="utf-8"?>
+<p:notes xmlns:a="http://schemas.openxmlformats.org/drawingml/2006/main" xmlns:r="http://schemas.openxmlformats.org/officeDocument/2006/relationships" xmlns:p="http://schemas.openxmlformats.org/presentationml/2006/main">
+  <p:cSld>
+    <p:spTree>
+      <p:nvGrpSpPr>
+        <p:cNvPr id="1" name=""/>
+        <p:cNvGrpSpPr/>
+        <p:nvPr/>
+      </p:nvGrpSpPr>
+      <p:grpSpPr>
+        <a:xfrm>
+          <a:off x="0" y="0"/>
+          <a:ext cx="0" cy="0"/>
+          <a:chOff x="0" y="0"/>
+          <a:chExt cx="0" cy="0"/>
+        </a:xfrm>
+      </p:grpSpPr>
+      <p:sp>
+        <p:nvSpPr>
+          <p:cNvPr id="2" name="Slide Image Placeholder 1"/>
+          <p:cNvSpPr>
+            <a:spLocks noGrp="1" noRot="1" noChangeAspect="1"/>
+          </p:cNvSpPr>
+          <p:nvPr>
+            <p:ph type="sldImg"/>
+          </p:nvPr>
+        </p:nvSpPr>
+        <p:spPr/>
+      </p:sp>
+      <p:sp>
+        <p:nvSpPr>
+          <p:cNvPr id="3" name="Notes Placeholder 2"/>
+          <p:cNvSpPr>
+            <a:spLocks noGrp="1"/>
+          </p:cNvSpPr>
+          <p:nvPr>
+            <p:ph type="body" idx="1"/>
+          </p:nvPr>
+        </p:nvSpPr>
+        <p:spPr/>
+        <p:txBody>
+          <a:bodyPr/>
+          <a:lstStyle/>
+          <a:p>
+            <a:endParaRPr/>
+          </a:p>
+        </p:txBody>
+      </p:sp>
+      <p:sp>
+        <p:nvSpPr>
+          <p:cNvPr id="4" name="Slide Number Placeholder 3"/>
+          <p:cNvSpPr>
+            <a:spLocks noGrp="1"/>
+          </p:cNvSpPr>
+          <p:nvPr>
+            <p:ph type="sldNum" idx="5"/>
+          </p:nvPr>
+        </p:nvSpPr>
+        <p:spPr/>
+        <p:txBody>
+          <a:bodyPr/>
+          <a:lstStyle/>
+          <a:p>
+            <a:endParaRPr/>
+          </a:p>
+        </p:txBody>
+      </p:sp>
+    </p:spTree>
+  </p:cSld>
+  <p:clrMapOvr>
+    <a:masterClrMapping/>
+  </p:clrMapOvr>
+</p:notes>
+</file>
+
+<file path=ppt/notesSlides/notesSlide16.xml><?xml version="1.0" encoding="utf-8"?>
 <p:notes xmlns:a="http://schemas.openxmlformats.org/drawingml/2006/main" xmlns:r="http://schemas.openxmlformats.org/officeDocument/2006/relationships" xmlns:p="http://schemas.openxmlformats.org/presentationml/2006/main">
   <p:cSld>
     <p:spTree>
@@ -973,7 +1271,13 @@
   <p:cSld>
     <p:spTree>
       <p:nvGrpSpPr>
-        <p:cNvPr id="1" name=""/>
+        <p:cNvPr id="1" name="">
+          <a:extLst>
+            <a:ext uri="{FF2B5EF4-FFF2-40B4-BE49-F238E27FC236}">
+              <a16:creationId xmlns:a16="http://schemas.microsoft.com/office/drawing/2014/main" id="{0C917EDB-D4CB-2243-53CF-A0C5A275C993}"/>
+            </a:ext>
+          </a:extLst>
+        </p:cNvPr>
         <p:cNvGrpSpPr/>
         <p:nvPr/>
       </p:nvGrpSpPr>
@@ -987,7 +1291,13 @@
       </p:grpSpPr>
       <p:sp>
         <p:nvSpPr>
-          <p:cNvPr id="2" name="Slide Image Placeholder 1"/>
+          <p:cNvPr id="2" name="Slide Image Placeholder 1">
+            <a:extLst>
+              <a:ext uri="{FF2B5EF4-FFF2-40B4-BE49-F238E27FC236}">
+                <a16:creationId xmlns:a16="http://schemas.microsoft.com/office/drawing/2014/main" id="{8BCF1735-152C-F705-8774-2BC6DA60827E}"/>
+              </a:ext>
+            </a:extLst>
+          </p:cNvPr>
           <p:cNvSpPr>
             <a:spLocks noGrp="1" noRot="1" noChangeAspect="1"/>
           </p:cNvSpPr>
@@ -999,7 +1309,13 @@
       </p:sp>
       <p:sp>
         <p:nvSpPr>
-          <p:cNvPr id="3" name="Notes Placeholder 2"/>
+          <p:cNvPr id="3" name="Notes Placeholder 2">
+            <a:extLst>
+              <a:ext uri="{FF2B5EF4-FFF2-40B4-BE49-F238E27FC236}">
+                <a16:creationId xmlns:a16="http://schemas.microsoft.com/office/drawing/2014/main" id="{17799527-331A-AAD1-3D3A-FD789856D613}"/>
+              </a:ext>
+            </a:extLst>
+          </p:cNvPr>
           <p:cNvSpPr>
             <a:spLocks noGrp="1"/>
           </p:cNvSpPr>
@@ -1018,7 +1334,13 @@
       </p:sp>
       <p:sp>
         <p:nvSpPr>
-          <p:cNvPr id="4" name="Slide Number Placeholder 3"/>
+          <p:cNvPr id="4" name="Slide Number Placeholder 3">
+            <a:extLst>
+              <a:ext uri="{FF2B5EF4-FFF2-40B4-BE49-F238E27FC236}">
+                <a16:creationId xmlns:a16="http://schemas.microsoft.com/office/drawing/2014/main" id="{67180789-788A-04A3-FD44-79AB00AE0FD5}"/>
+              </a:ext>
+            </a:extLst>
+          </p:cNvPr>
           <p:cNvSpPr>
             <a:spLocks noGrp="1"/>
           </p:cNvSpPr>
@@ -1036,6 +1358,11 @@
         </p:txBody>
       </p:sp>
     </p:spTree>
+    <p:extLst>
+      <p:ext uri="{BB962C8B-B14F-4D97-AF65-F5344CB8AC3E}">
+        <p14:creationId xmlns:p14="http://schemas.microsoft.com/office/powerpoint/2010/main" val="1826526091"/>
+      </p:ext>
+    </p:extLst>
   </p:cSld>
   <p:clrMapOvr>
     <a:masterClrMapping/>
@@ -1048,7 +1375,13 @@
   <p:cSld>
     <p:spTree>
       <p:nvGrpSpPr>
-        <p:cNvPr id="1" name=""/>
+        <p:cNvPr id="1" name="">
+          <a:extLst>
+            <a:ext uri="{FF2B5EF4-FFF2-40B4-BE49-F238E27FC236}">
+              <a16:creationId xmlns:a16="http://schemas.microsoft.com/office/drawing/2014/main" id="{3F4A63F2-5107-130F-4955-6775C4046F07}"/>
+            </a:ext>
+          </a:extLst>
+        </p:cNvPr>
         <p:cNvGrpSpPr/>
         <p:nvPr/>
       </p:nvGrpSpPr>
@@ -1062,7 +1395,13 @@
       </p:grpSpPr>
       <p:sp>
         <p:nvSpPr>
-          <p:cNvPr id="2" name="Slide Image Placeholder 1"/>
+          <p:cNvPr id="2" name="Slide Image Placeholder 1">
+            <a:extLst>
+              <a:ext uri="{FF2B5EF4-FFF2-40B4-BE49-F238E27FC236}">
+                <a16:creationId xmlns:a16="http://schemas.microsoft.com/office/drawing/2014/main" id="{5143D1C4-4AF1-C94B-B6AD-9C9E7D4ECC07}"/>
+              </a:ext>
+            </a:extLst>
+          </p:cNvPr>
           <p:cNvSpPr>
             <a:spLocks noGrp="1" noRot="1" noChangeAspect="1"/>
           </p:cNvSpPr>
@@ -1074,7 +1413,13 @@
       </p:sp>
       <p:sp>
         <p:nvSpPr>
-          <p:cNvPr id="3" name="Notes Placeholder 2"/>
+          <p:cNvPr id="3" name="Notes Placeholder 2">
+            <a:extLst>
+              <a:ext uri="{FF2B5EF4-FFF2-40B4-BE49-F238E27FC236}">
+                <a16:creationId xmlns:a16="http://schemas.microsoft.com/office/drawing/2014/main" id="{A048AA87-4150-9FF1-65B5-394E33EB143F}"/>
+              </a:ext>
+            </a:extLst>
+          </p:cNvPr>
           <p:cNvSpPr>
             <a:spLocks noGrp="1"/>
           </p:cNvSpPr>
@@ -1093,7 +1438,13 @@
       </p:sp>
       <p:sp>
         <p:nvSpPr>
-          <p:cNvPr id="4" name="Slide Number Placeholder 3"/>
+          <p:cNvPr id="4" name="Slide Number Placeholder 3">
+            <a:extLst>
+              <a:ext uri="{FF2B5EF4-FFF2-40B4-BE49-F238E27FC236}">
+                <a16:creationId xmlns:a16="http://schemas.microsoft.com/office/drawing/2014/main" id="{31F033AE-A701-A09C-94C6-9DFA8B933B92}"/>
+              </a:ext>
+            </a:extLst>
+          </p:cNvPr>
           <p:cNvSpPr>
             <a:spLocks noGrp="1"/>
           </p:cNvSpPr>
@@ -1111,6 +1462,11 @@
         </p:txBody>
       </p:sp>
     </p:spTree>
+    <p:extLst>
+      <p:ext uri="{BB962C8B-B14F-4D97-AF65-F5344CB8AC3E}">
+        <p14:creationId xmlns:p14="http://schemas.microsoft.com/office/powerpoint/2010/main" val="1381465874"/>
+      </p:ext>
+    </p:extLst>
   </p:cSld>
   <p:clrMapOvr>
     <a:masterClrMapping/>
@@ -1123,7 +1479,13 @@
   <p:cSld>
     <p:spTree>
       <p:nvGrpSpPr>
-        <p:cNvPr id="1" name=""/>
+        <p:cNvPr id="1" name="">
+          <a:extLst>
+            <a:ext uri="{FF2B5EF4-FFF2-40B4-BE49-F238E27FC236}">
+              <a16:creationId xmlns:a16="http://schemas.microsoft.com/office/drawing/2014/main" id="{5FE928E6-7D44-3906-7CED-972C17F6F0D2}"/>
+            </a:ext>
+          </a:extLst>
+        </p:cNvPr>
         <p:cNvGrpSpPr/>
         <p:nvPr/>
       </p:nvGrpSpPr>
@@ -1137,7 +1499,13 @@
       </p:grpSpPr>
       <p:sp>
         <p:nvSpPr>
-          <p:cNvPr id="2" name="Slide Image Placeholder 1"/>
+          <p:cNvPr id="2" name="Slide Image Placeholder 1">
+            <a:extLst>
+              <a:ext uri="{FF2B5EF4-FFF2-40B4-BE49-F238E27FC236}">
+                <a16:creationId xmlns:a16="http://schemas.microsoft.com/office/drawing/2014/main" id="{1E2AFAA0-1F63-6A85-60EE-8AF1B237C4AD}"/>
+              </a:ext>
+            </a:extLst>
+          </p:cNvPr>
           <p:cNvSpPr>
             <a:spLocks noGrp="1" noRot="1" noChangeAspect="1"/>
           </p:cNvSpPr>
@@ -1149,7 +1517,13 @@
       </p:sp>
       <p:sp>
         <p:nvSpPr>
-          <p:cNvPr id="3" name="Notes Placeholder 2"/>
+          <p:cNvPr id="3" name="Notes Placeholder 2">
+            <a:extLst>
+              <a:ext uri="{FF2B5EF4-FFF2-40B4-BE49-F238E27FC236}">
+                <a16:creationId xmlns:a16="http://schemas.microsoft.com/office/drawing/2014/main" id="{868D5434-5297-C859-0033-D40401EF879E}"/>
+              </a:ext>
+            </a:extLst>
+          </p:cNvPr>
           <p:cNvSpPr>
             <a:spLocks noGrp="1"/>
           </p:cNvSpPr>
@@ -1168,7 +1542,13 @@
       </p:sp>
       <p:sp>
         <p:nvSpPr>
-          <p:cNvPr id="4" name="Slide Number Placeholder 3"/>
+          <p:cNvPr id="4" name="Slide Number Placeholder 3">
+            <a:extLst>
+              <a:ext uri="{FF2B5EF4-FFF2-40B4-BE49-F238E27FC236}">
+                <a16:creationId xmlns:a16="http://schemas.microsoft.com/office/drawing/2014/main" id="{B1E5CC0B-DB9D-910B-F658-5674DA72E949}"/>
+              </a:ext>
+            </a:extLst>
+          </p:cNvPr>
           <p:cNvSpPr>
             <a:spLocks noGrp="1"/>
           </p:cNvSpPr>
@@ -1181,44 +1561,14 @@
           <a:bodyPr/>
           <a:lstStyle/>
           <a:p>
-            <a:pPr marL="0" marR="0" lvl="0" indent="0" algn="l" defTabSz="914400" eaLnBrk="1" fontAlgn="auto" latinLnBrk="0" hangingPunct="1">
-              <a:lnSpc>
-                <a:spcPct val="100000"/>
-              </a:lnSpc>
-              <a:spcBef>
-                <a:spcPts val="0"/>
-              </a:spcBef>
-              <a:spcAft>
-                <a:spcPts val="0"/>
-              </a:spcAft>
-              <a:buClrTx/>
-              <a:buSzTx/>
-              <a:buFontTx/>
-              <a:buNone/>
-              <a:tabLst/>
-              <a:defRPr/>
-            </a:pPr>
-            <a:endParaRPr kumimoji="0" sz="1800" b="0" i="0" u="none" strike="noStrike" kern="1200" cap="none" spc="0" normalizeH="0" baseline="0" noProof="0">
-              <a:ln>
-                <a:noFill/>
-              </a:ln>
-              <a:solidFill>
-                <a:prstClr val="black"/>
-              </a:solidFill>
-              <a:effectLst/>
-              <a:uLnTx/>
-              <a:uFillTx/>
-              <a:latin typeface="Arial"/>
-              <a:ea typeface="STZhongsong"/>
-              <a:cs typeface="+mn-cs"/>
-            </a:endParaRPr>
+            <a:endParaRPr/>
           </a:p>
         </p:txBody>
       </p:sp>
     </p:spTree>
     <p:extLst>
       <p:ext uri="{BB962C8B-B14F-4D97-AF65-F5344CB8AC3E}">
-        <p14:creationId xmlns:p14="http://schemas.microsoft.com/office/powerpoint/2010/main" val="1321021020"/>
+        <p14:creationId xmlns:p14="http://schemas.microsoft.com/office/powerpoint/2010/main" val="1536964420"/>
       </p:ext>
     </p:extLst>
   </p:cSld>
@@ -1366,46 +1716,11 @@
           <a:bodyPr/>
           <a:lstStyle/>
           <a:p>
-            <a:pPr marL="0" marR="0" lvl="0" indent="0" algn="l" defTabSz="914400" eaLnBrk="1" fontAlgn="auto" latinLnBrk="0" hangingPunct="1">
-              <a:lnSpc>
-                <a:spcPct val="100000"/>
-              </a:lnSpc>
-              <a:spcBef>
-                <a:spcPts val="0"/>
-              </a:spcBef>
-              <a:spcAft>
-                <a:spcPts val="0"/>
-              </a:spcAft>
-              <a:buClrTx/>
-              <a:buSzTx/>
-              <a:buFontTx/>
-              <a:buNone/>
-              <a:tabLst/>
-              <a:defRPr/>
-            </a:pPr>
-            <a:endParaRPr kumimoji="0" sz="1800" b="0" i="0" u="none" strike="noStrike" kern="1200" cap="none" spc="0" normalizeH="0" baseline="0" noProof="0">
-              <a:ln>
-                <a:noFill/>
-              </a:ln>
-              <a:solidFill>
-                <a:prstClr val="black"/>
-              </a:solidFill>
-              <a:effectLst/>
-              <a:uLnTx/>
-              <a:uFillTx/>
-              <a:latin typeface="Arial"/>
-              <a:ea typeface="STZhongsong"/>
-              <a:cs typeface="+mn-cs"/>
-            </a:endParaRPr>
+            <a:endParaRPr/>
           </a:p>
         </p:txBody>
       </p:sp>
     </p:spTree>
-    <p:extLst>
-      <p:ext uri="{BB962C8B-B14F-4D97-AF65-F5344CB8AC3E}">
-        <p14:creationId xmlns:p14="http://schemas.microsoft.com/office/powerpoint/2010/main" val="207738448"/>
-      </p:ext>
-    </p:extLst>
   </p:cSld>
   <p:clrMapOvr>
     <a:masterClrMapping/>
@@ -1558,7 +1873,7 @@
           <a:lstStyle/>
           <a:p>
             <a:fld id="{A653A8F1-9EDF-49EF-A14D-E495AD864F8A}" type="datetimeFigureOut">
-              <a:t>2026/6/15</a:t>
+              <a:t>2026.6.15</a:t>
             </a:fld>
             <a:endParaRPr/>
           </a:p>
@@ -1753,7 +2068,7 @@
           <a:lstStyle/>
           <a:p>
             <a:fld id="{A653A8F1-9EDF-49EF-A14D-E495AD864F8A}" type="datetimeFigureOut">
-              <a:t>2026/6/15</a:t>
+              <a:t>2026.6.15</a:t>
             </a:fld>
             <a:endParaRPr/>
           </a:p>
@@ -1958,7 +2273,7 @@
           <a:lstStyle/>
           <a:p>
             <a:fld id="{A653A8F1-9EDF-49EF-A14D-E495AD864F8A}" type="datetimeFigureOut">
-              <a:t>2026/6/15</a:t>
+              <a:t>2026.6.15</a:t>
             </a:fld>
             <a:endParaRPr/>
           </a:p>
@@ -2153,7 +2468,7 @@
           <a:lstStyle/>
           <a:p>
             <a:fld id="{A653A8F1-9EDF-49EF-A14D-E495AD864F8A}" type="datetimeFigureOut">
-              <a:t>2026/6/15</a:t>
+              <a:t>2026.6.15</a:t>
             </a:fld>
             <a:endParaRPr/>
           </a:p>
@@ -2422,7 +2737,7 @@
           <a:lstStyle/>
           <a:p>
             <a:fld id="{A653A8F1-9EDF-49EF-A14D-E495AD864F8A}" type="datetimeFigureOut">
-              <a:t>2026/6/15</a:t>
+              <a:t>2026.6.15</a:t>
             </a:fld>
             <a:endParaRPr/>
           </a:p>
@@ -2689,7 +3004,7 @@
           <a:lstStyle/>
           <a:p>
             <a:fld id="{A653A8F1-9EDF-49EF-A14D-E495AD864F8A}" type="datetimeFigureOut">
-              <a:t>2026/6/15</a:t>
+              <a:t>2026.6.15</a:t>
             </a:fld>
             <a:endParaRPr/>
           </a:p>
@@ -3105,7 +3420,7 @@
           <a:lstStyle/>
           <a:p>
             <a:fld id="{A653A8F1-9EDF-49EF-A14D-E495AD864F8A}" type="datetimeFigureOut">
-              <a:t>2026/6/15</a:t>
+              <a:t>2026.6.15</a:t>
             </a:fld>
             <a:endParaRPr/>
           </a:p>
@@ -3238,7 +3553,7 @@
           <a:lstStyle/>
           <a:p>
             <a:fld id="{A653A8F1-9EDF-49EF-A14D-E495AD864F8A}" type="datetimeFigureOut">
-              <a:t>2026/6/15</a:t>
+              <a:t>2026.6.15</a:t>
             </a:fld>
             <a:endParaRPr/>
           </a:p>
@@ -3344,7 +3659,7 @@
           <a:lstStyle/>
           <a:p>
             <a:fld id="{A653A8F1-9EDF-49EF-A14D-E495AD864F8A}" type="datetimeFigureOut">
-              <a:t>2026/6/15</a:t>
+              <a:t>2026.6.15</a:t>
             </a:fld>
             <a:endParaRPr/>
           </a:p>
@@ -3663,7 +3978,7 @@
           <a:lstStyle/>
           <a:p>
             <a:fld id="{A653A8F1-9EDF-49EF-A14D-E495AD864F8A}" type="datetimeFigureOut">
-              <a:t>2026/6/15</a:t>
+              <a:t>2026.6.15</a:t>
             </a:fld>
             <a:endParaRPr/>
           </a:p>
@@ -3945,7 +4260,7 @@
           <a:lstStyle/>
           <a:p>
             <a:fld id="{A653A8F1-9EDF-49EF-A14D-E495AD864F8A}" type="datetimeFigureOut">
-              <a:t>2026/6/15</a:t>
+              <a:t>2026.6.15</a:t>
             </a:fld>
             <a:endParaRPr/>
           </a:p>
@@ -4184,7 +4499,7 @@
           </a:lstStyle>
           <a:p>
             <a:fld id="{A653A8F1-9EDF-49EF-A14D-E495AD864F8A}" type="datetimeFigureOut">
-              <a:t>2026/6/15</a:t>
+              <a:t>2026.6.15</a:t>
             </a:fld>
             <a:endParaRPr/>
           </a:p>
@@ -5129,7 +5444,7 @@
     <p:bg>
       <p:bgPr>
         <a:solidFill>
-          <a:srgbClr val="F7F7F4"/>
+          <a:srgbClr val="253A2A"/>
         </a:solidFill>
         <a:effectLst/>
       </p:bgPr>
@@ -5150,10 +5465,211 @@
       </p:grpSpPr>
       <p:sp>
         <p:nvSpPr>
+          <p:cNvPr id="11" name="文本框 10">
+            <a:extLst>
+              <a:ext uri="{FF2B5EF4-FFF2-40B4-BE49-F238E27FC236}">
+                <a16:creationId xmlns:a16="http://schemas.microsoft.com/office/drawing/2014/main" id="{642171A4-C23A-4145-BED1-2E8834D0E5B1}"/>
+              </a:ext>
+            </a:extLst>
+          </p:cNvPr>
+          <p:cNvSpPr>
+            <a:spLocks noGrp="1"/>
+          </p:cNvSpPr>
+          <p:nvPr/>
+        </p:nvSpPr>
+        <p:spPr>
+          <a:xfrm>
+            <a:off x="2614979" y="2321005"/>
+            <a:ext cx="2604077" cy="2215991"/>
+          </a:xfrm>
+          <a:prstGeom prst="rect">
+            <a:avLst/>
+          </a:prstGeom>
+          <a:noFill/>
+        </p:spPr>
+        <p:txBody>
+          <a:bodyPr wrap="square">
+            <a:spAutoFit/>
+          </a:bodyPr>
+          <a:lstStyle/>
+          <a:p>
+            <a:pPr marL="0" marR="0" lvl="0" indent="0" algn="ctr" defTabSz="914400" eaLnBrk="1" fontAlgn="auto" latinLnBrk="0" hangingPunct="1">
+              <a:lnSpc>
+                <a:spcPct val="100000"/>
+              </a:lnSpc>
+              <a:spcBef>
+                <a:spcPts val="0"/>
+              </a:spcBef>
+              <a:spcAft>
+                <a:spcPts val="0"/>
+              </a:spcAft>
+              <a:buClrTx/>
+              <a:buSzTx/>
+              <a:buFontTx/>
+              <a:buNone/>
+              <a:tabLst/>
+              <a:defRPr/>
+            </a:pPr>
+            <a:r>
+              <a:rPr kumimoji="0" sz="13800" b="0" i="0" u="none" strike="noStrike" kern="1200" cap="none" spc="0" normalizeH="0" baseline="0" noProof="0" dirty="0">
+                <a:ln>
+                  <a:noFill/>
+                </a:ln>
+                <a:solidFill>
+                  <a:srgbClr val="F5F4F9"/>
+                </a:solidFill>
+                <a:effectLst/>
+                <a:uLnTx/>
+                <a:uFillTx/>
+                <a:latin typeface="Arial"/>
+                <a:ea typeface="STZhongsong"/>
+                <a:cs typeface="+mn-cs"/>
+              </a:rPr>
+              <a:t>0</a:t>
+            </a:r>
+            <a:r>
+              <a:rPr lang="en-US" sz="13800" dirty="0">
+                <a:solidFill>
+                  <a:srgbClr val="F5F4F9"/>
+                </a:solidFill>
+                <a:latin typeface="Arial"/>
+                <a:ea typeface="STZhongsong"/>
+              </a:rPr>
+              <a:t>4</a:t>
+            </a:r>
+            <a:endParaRPr kumimoji="0" sz="13800" b="0" i="0" u="none" strike="noStrike" kern="1200" cap="none" spc="0" normalizeH="0" baseline="0" noProof="0" dirty="0">
+              <a:ln>
+                <a:noFill/>
+              </a:ln>
+              <a:solidFill>
+                <a:srgbClr val="F5F4F9"/>
+              </a:solidFill>
+              <a:effectLst/>
+              <a:uLnTx/>
+              <a:uFillTx/>
+              <a:latin typeface="Arial"/>
+              <a:ea typeface="STZhongsong"/>
+              <a:cs typeface="+mn-cs"/>
+            </a:endParaRPr>
+          </a:p>
+        </p:txBody>
+      </p:sp>
+      <p:sp>
+        <p:nvSpPr>
           <p:cNvPr id="13" name="矩形 12">
             <a:extLst>
               <a:ext uri="{FF2B5EF4-FFF2-40B4-BE49-F238E27FC236}">
-                <a16:creationId xmlns:a16="http://schemas.microsoft.com/office/drawing/2014/main" id="{49C5998F-8D86-4862-8469-086DC510390B}"/>
+                <a16:creationId xmlns:a16="http://schemas.microsoft.com/office/drawing/2014/main" id="{638E2919-D9D9-4496-93DC-FD75812F9CF1}"/>
+              </a:ext>
+            </a:extLst>
+          </p:cNvPr>
+          <p:cNvSpPr>
+            <a:spLocks noGrp="1"/>
+          </p:cNvSpPr>
+          <p:nvPr/>
+        </p:nvSpPr>
+        <p:spPr>
+          <a:xfrm>
+            <a:off x="6331761" y="2685166"/>
+            <a:ext cx="2262159" cy="923330"/>
+          </a:xfrm>
+          <a:prstGeom prst="rect">
+            <a:avLst/>
+          </a:prstGeom>
+        </p:spPr>
+        <p:txBody>
+          <a:bodyPr wrap="none">
+            <a:spAutoFit/>
+          </a:bodyPr>
+          <a:lstStyle/>
+          <a:p>
+            <a:pPr marL="0" marR="0" lvl="0" indent="0" algn="ctr" defTabSz="914400" eaLnBrk="1" fontAlgn="auto" latinLnBrk="0" hangingPunct="1">
+              <a:lnSpc>
+                <a:spcPct val="100000"/>
+              </a:lnSpc>
+              <a:spcBef>
+                <a:spcPts val="0"/>
+              </a:spcBef>
+              <a:spcAft>
+                <a:spcPts val="0"/>
+              </a:spcAft>
+              <a:buClrTx/>
+              <a:buSzTx/>
+              <a:buFontTx/>
+              <a:buNone/>
+              <a:tabLst/>
+              <a:defRPr/>
+            </a:pPr>
+            <a:r>
+              <a:rPr kumimoji="0" lang="zh-CN" altLang="en-US" sz="5400" b="1" i="0" u="none" strike="noStrike" kern="1200" cap="none" spc="0" normalizeH="0" baseline="0" noProof="0" dirty="0">
+                <a:ln>
+                  <a:noFill/>
+                </a:ln>
+                <a:solidFill>
+                  <a:prstClr val="white"/>
+                </a:solidFill>
+                <a:effectLst/>
+                <a:uLnTx/>
+                <a:uFillTx/>
+                <a:latin typeface="Arial"/>
+                <a:ea typeface="STZhongsong"/>
+                <a:cs typeface="+mn-cs"/>
+              </a:rPr>
+              <a:t>李嘉轩</a:t>
+            </a:r>
+            <a:endParaRPr kumimoji="0" sz="5400" b="1" i="0" u="none" strike="noStrike" kern="1200" cap="none" spc="0" normalizeH="0" baseline="0" noProof="0" dirty="0">
+              <a:ln>
+                <a:noFill/>
+              </a:ln>
+              <a:solidFill>
+                <a:prstClr val="white"/>
+              </a:solidFill>
+              <a:effectLst/>
+              <a:uLnTx/>
+              <a:uFillTx/>
+              <a:latin typeface="Arial"/>
+              <a:ea typeface="STZhongsong"/>
+              <a:cs typeface="+mn-cs"/>
+            </a:endParaRPr>
+          </a:p>
+        </p:txBody>
+      </p:sp>
+    </p:spTree>
+    <p:extLst>
+      <p:ext uri="{BB962C8B-B14F-4D97-AF65-F5344CB8AC3E}">
+        <p14:creationId xmlns:p14="http://schemas.microsoft.com/office/powerpoint/2010/main" val="2232598541"/>
+      </p:ext>
+    </p:extLst>
+  </p:cSld>
+  <p:clrMapOvr>
+    <a:masterClrMapping/>
+  </p:clrMapOvr>
+</p:sld>
+</file>
+
+<file path=ppt/slides/slide11.xml><?xml version="1.0" encoding="utf-8"?>
+<p:sld xmlns:a="http://schemas.openxmlformats.org/drawingml/2006/main" xmlns:r="http://schemas.openxmlformats.org/officeDocument/2006/relationships" xmlns:p="http://schemas.openxmlformats.org/presentationml/2006/main">
+  <p:cSld>
+    <p:spTree>
+      <p:nvGrpSpPr>
+        <p:cNvPr id="1" name=""/>
+        <p:cNvGrpSpPr/>
+        <p:nvPr/>
+      </p:nvGrpSpPr>
+      <p:grpSpPr>
+        <a:xfrm>
+          <a:off x="0" y="0"/>
+          <a:ext cx="0" cy="0"/>
+          <a:chOff x="0" y="0"/>
+          <a:chExt cx="0" cy="0"/>
+        </a:xfrm>
+      </p:grpSpPr>
+      <p:sp>
+        <p:nvSpPr>
+          <p:cNvPr id="13" name="矩形 12">
+            <a:extLst>
+              <a:ext uri="{FF2B5EF4-FFF2-40B4-BE49-F238E27FC236}">
+                <a16:creationId xmlns:a16="http://schemas.microsoft.com/office/drawing/2014/main" id="{0AE95B23-90A2-47EB-9DB0-EF921EB2D2A6}"/>
               </a:ext>
             </a:extLst>
           </p:cNvPr>
@@ -5186,7 +5702,7 @@
           <p:cNvPr id="2" name="矩形 1">
             <a:extLst>
               <a:ext uri="{FF2B5EF4-FFF2-40B4-BE49-F238E27FC236}">
-                <a16:creationId xmlns:a16="http://schemas.microsoft.com/office/drawing/2014/main" id="{7014062F-B6B3-42D0-923B-A7424561BC77}"/>
+                <a16:creationId xmlns:a16="http://schemas.microsoft.com/office/drawing/2014/main" id="{6C42F653-EC31-48A4-A29A-2DDE93A0D539}"/>
               </a:ext>
             </a:extLst>
           </p:cNvPr>
@@ -5234,7 +5750,7 @@
                   <a:srgbClr val="2D4A33"/>
                 </a:solidFill>
               </a:rPr>
-              <a:t>唐熙雷</a:t>
+              <a:t>李嘉轩</a:t>
             </a:r>
             <a:endParaRPr sz="2550" b="1" dirty="0">
               <a:solidFill>
@@ -5249,7 +5765,7 @@
           <p:cNvPr id="4" name="矩形 3">
             <a:extLst>
               <a:ext uri="{FF2B5EF4-FFF2-40B4-BE49-F238E27FC236}">
-                <a16:creationId xmlns:a16="http://schemas.microsoft.com/office/drawing/2014/main" id="{C6221659-10CA-473D-B608-E2633E14E235}"/>
+                <a16:creationId xmlns:a16="http://schemas.microsoft.com/office/drawing/2014/main" id="{7BD7F060-279B-476B-ADD0-60F9D22D690F}"/>
               </a:ext>
             </a:extLst>
           </p:cNvPr>
@@ -5260,8 +5776,8 @@
         </p:nvSpPr>
         <p:spPr>
           <a:xfrm>
-            <a:off x="857250" y="1619250"/>
-            <a:ext cx="4762500" cy="1619250"/>
+            <a:off x="1498600" y="1481665"/>
+            <a:ext cx="9465733" cy="2057401"/>
           </a:xfrm>
           <a:prstGeom prst="rect">
             <a:avLst/>
@@ -5282,7 +5798,7 @@
           <p:cNvPr id="5" name="矩形 4">
             <a:extLst>
               <a:ext uri="{FF2B5EF4-FFF2-40B4-BE49-F238E27FC236}">
-                <a16:creationId xmlns:a16="http://schemas.microsoft.com/office/drawing/2014/main" id="{BE326CC3-10C1-4780-ADEA-D2C23EB4593B}"/>
+                <a16:creationId xmlns:a16="http://schemas.microsoft.com/office/drawing/2014/main" id="{B5B9DCD3-3DCB-492D-A18F-7F83A194A750}"/>
               </a:ext>
             </a:extLst>
           </p:cNvPr>
@@ -5293,7 +5809,7 @@
         </p:nvSpPr>
         <p:spPr>
           <a:xfrm>
-            <a:off x="1085850" y="1790700"/>
+            <a:off x="1634067" y="1678782"/>
             <a:ext cx="4305300" cy="323850"/>
           </a:xfrm>
           <a:prstGeom prst="rect">
@@ -5325,13 +5841,18 @@
               </a:defRPr>
             </a:pPr>
             <a:r>
-              <a:rPr sz="1650" b="1">
+              <a:rPr lang="zh-CN" altLang="en-US" sz="3200" b="1" dirty="0">
                 <a:solidFill>
                   <a:srgbClr val="2D4A33"/>
                 </a:solidFill>
               </a:rPr>
-              <a:t>Faiss</a:t>
-            </a:r>
+              <a:t>文件解析</a:t>
+            </a:r>
+            <a:endParaRPr sz="3200" b="1" dirty="0">
+              <a:solidFill>
+                <a:srgbClr val="2D4A33"/>
+              </a:solidFill>
+            </a:endParaRPr>
           </a:p>
         </p:txBody>
       </p:sp>
@@ -5340,7 +5861,7 @@
           <p:cNvPr id="6" name="矩形 5">
             <a:extLst>
               <a:ext uri="{FF2B5EF4-FFF2-40B4-BE49-F238E27FC236}">
-                <a16:creationId xmlns:a16="http://schemas.microsoft.com/office/drawing/2014/main" id="{30F903FA-7735-436D-AA14-6FDE08DB3204}"/>
+                <a16:creationId xmlns:a16="http://schemas.microsoft.com/office/drawing/2014/main" id="{47E76C44-57B2-4BCD-969D-2F43D77383C3}"/>
               </a:ext>
             </a:extLst>
           </p:cNvPr>
@@ -5351,8 +5872,8 @@
         </p:nvSpPr>
         <p:spPr>
           <a:xfrm>
-            <a:off x="1085850" y="2228850"/>
-            <a:ext cx="4305300" cy="857250"/>
+            <a:off x="1634067" y="2091531"/>
+            <a:ext cx="9059333" cy="1358635"/>
           </a:xfrm>
           <a:prstGeom prst="rect">
             <a:avLst/>
@@ -5383,13 +5904,190 @@
               </a:defRPr>
             </a:pPr>
             <a:r>
-              <a:rPr sz="1350" b="0">
-                <a:solidFill>
-                  <a:srgbClr val="1F2D22"/>
-                </a:solidFill>
-              </a:rPr>
-              <a:t>替换 / 增强向量检索底座</a:t>
-            </a:r>
+              <a:rPr lang="zh-CN" altLang="en-US" sz="2000" dirty="0">
+                <a:solidFill>
+                  <a:srgbClr val="1F2D22"/>
+                </a:solidFill>
+                <a:latin typeface="ui-monospace"/>
+              </a:rPr>
+              <a:t>新增了 </a:t>
+            </a:r>
+            <a:r>
+              <a:rPr lang="en-US" altLang="zh-CN" sz="2000" dirty="0" err="1">
+                <a:solidFill>
+                  <a:srgbClr val="1F2D22"/>
+                </a:solidFill>
+                <a:latin typeface="ui-monospace"/>
+              </a:rPr>
+              <a:t>structured_blocks</a:t>
+            </a:r>
+            <a:r>
+              <a:rPr lang="en-US" altLang="zh-CN" sz="2000" dirty="0">
+                <a:solidFill>
+                  <a:srgbClr val="1F2D22"/>
+                </a:solidFill>
+                <a:latin typeface="ui-monospace"/>
+              </a:rPr>
+              <a:t> </a:t>
+            </a:r>
+            <a:r>
+              <a:rPr lang="zh-CN" altLang="en-US" sz="2000" dirty="0">
+                <a:solidFill>
+                  <a:srgbClr val="1F2D22"/>
+                </a:solidFill>
+                <a:latin typeface="ui-monospace"/>
+              </a:rPr>
+              <a:t>解析模式，把论文 </a:t>
+            </a:r>
+            <a:r>
+              <a:rPr lang="en-US" altLang="zh-CN" sz="2000" dirty="0">
+                <a:solidFill>
+                  <a:srgbClr val="1F2D22"/>
+                </a:solidFill>
+                <a:latin typeface="ui-monospace"/>
+              </a:rPr>
+              <a:t>PDF </a:t>
+            </a:r>
+            <a:r>
+              <a:rPr lang="zh-CN" altLang="en-US" sz="2000" dirty="0">
+                <a:solidFill>
+                  <a:srgbClr val="1F2D22"/>
+                </a:solidFill>
+                <a:latin typeface="ui-monospace"/>
+              </a:rPr>
+              <a:t>解析成统一 </a:t>
+            </a:r>
+            <a:r>
+              <a:rPr lang="en-US" altLang="zh-CN" sz="2000" dirty="0">
+                <a:solidFill>
+                  <a:srgbClr val="1F2D22"/>
+                </a:solidFill>
+                <a:latin typeface="ui-monospace"/>
+              </a:rPr>
+              <a:t>block </a:t>
+            </a:r>
+            <a:r>
+              <a:rPr lang="zh-CN" altLang="en-US" sz="2000" dirty="0">
+                <a:solidFill>
+                  <a:srgbClr val="1F2D22"/>
+                </a:solidFill>
+                <a:latin typeface="ui-monospace"/>
+              </a:rPr>
+              <a:t>结构</a:t>
+            </a:r>
+            <a:endParaRPr lang="en-US" altLang="zh-CN" sz="2000" dirty="0">
+              <a:solidFill>
+                <a:srgbClr val="1F2D22"/>
+              </a:solidFill>
+              <a:latin typeface="ui-monospace"/>
+            </a:endParaRPr>
+          </a:p>
+          <a:p>
+            <a:pPr algn="l"/>
+            <a:r>
+              <a:rPr lang="zh-CN" altLang="en-US" sz="2000" dirty="0">
+                <a:solidFill>
+                  <a:srgbClr val="1F2D22"/>
+                </a:solidFill>
+                <a:latin typeface="ui-monospace"/>
+              </a:rPr>
+              <a:t>基于 </a:t>
+            </a:r>
+            <a:r>
+              <a:rPr lang="en-US" altLang="zh-CN" sz="2000" dirty="0" err="1">
+                <a:solidFill>
+                  <a:srgbClr val="1F2D22"/>
+                </a:solidFill>
+                <a:latin typeface="ui-monospace"/>
+              </a:rPr>
+              <a:t>PyMuPDF</a:t>
+            </a:r>
+            <a:r>
+              <a:rPr lang="en-US" altLang="zh-CN" sz="2000" dirty="0">
+                <a:solidFill>
+                  <a:srgbClr val="1F2D22"/>
+                </a:solidFill>
+                <a:latin typeface="ui-monospace"/>
+              </a:rPr>
+              <a:t> </a:t>
+            </a:r>
+            <a:r>
+              <a:rPr lang="zh-CN" altLang="en-US" sz="2000" dirty="0">
+                <a:solidFill>
+                  <a:srgbClr val="1F2D22"/>
+                </a:solidFill>
+                <a:latin typeface="ui-monospace"/>
+              </a:rPr>
+              <a:t>提取版面块、字号、粗体、</a:t>
+            </a:r>
+            <a:r>
+              <a:rPr lang="en-US" altLang="zh-CN" sz="2000" dirty="0" err="1">
+                <a:solidFill>
+                  <a:srgbClr val="1F2D22"/>
+                </a:solidFill>
+                <a:latin typeface="ui-monospace"/>
+              </a:rPr>
+              <a:t>bbox</a:t>
+            </a:r>
+            <a:r>
+              <a:rPr lang="zh-CN" altLang="en-US" sz="2000" dirty="0">
+                <a:solidFill>
+                  <a:srgbClr val="1F2D22"/>
+                </a:solidFill>
+                <a:latin typeface="ui-monospace"/>
+              </a:rPr>
+              <a:t>、列信息</a:t>
+            </a:r>
+          </a:p>
+          <a:p>
+            <a:pPr>
+              <a:defRPr sz="1350" b="0">
+                <a:solidFill>
+                  <a:srgbClr val="1F2D22"/>
+                </a:solidFill>
+              </a:defRPr>
+            </a:pPr>
+            <a:r>
+              <a:rPr lang="zh-CN" altLang="en-US" sz="2000" dirty="0">
+                <a:solidFill>
+                  <a:srgbClr val="1F2D22"/>
+                </a:solidFill>
+                <a:latin typeface="ui-monospace"/>
+              </a:rPr>
+              <a:t>过滤重复页眉页脚噪声，精确分类为正确的</a:t>
+            </a:r>
+            <a:r>
+              <a:rPr lang="en-US" altLang="zh-CN" sz="2000" dirty="0">
+                <a:solidFill>
+                  <a:srgbClr val="1F2D22"/>
+                </a:solidFill>
+                <a:latin typeface="ui-monospace"/>
+              </a:rPr>
+              <a:t>block</a:t>
+            </a:r>
+            <a:r>
+              <a:rPr lang="zh-CN" altLang="en-US" sz="2000" dirty="0">
+                <a:solidFill>
+                  <a:srgbClr val="1F2D22"/>
+                </a:solidFill>
+                <a:latin typeface="ui-monospace"/>
+              </a:rPr>
+              <a:t>类别</a:t>
+            </a:r>
+          </a:p>
+          <a:p>
+            <a:pPr algn="l">
+              <a:defRPr sz="1350" b="0">
+                <a:solidFill>
+                  <a:srgbClr val="1F2D22"/>
+                </a:solidFill>
+              </a:defRPr>
+            </a:pPr>
+            <a:endParaRPr sz="1350" b="0" dirty="0">
+              <a:solidFill>
+                <a:srgbClr val="1F2D22"/>
+              </a:solidFill>
+            </a:endParaRPr>
           </a:p>
         </p:txBody>
       </p:sp>
@@ -5398,7 +6096,7 @@
           <p:cNvPr id="7" name="矩形 6">
             <a:extLst>
               <a:ext uri="{FF2B5EF4-FFF2-40B4-BE49-F238E27FC236}">
-                <a16:creationId xmlns:a16="http://schemas.microsoft.com/office/drawing/2014/main" id="{5C63DCCE-58D8-46C2-8CD3-78F707B6307B}"/>
+                <a16:creationId xmlns:a16="http://schemas.microsoft.com/office/drawing/2014/main" id="{34797A82-E8A1-4FD5-A480-1468A75DCB41}"/>
               </a:ext>
             </a:extLst>
           </p:cNvPr>
@@ -5409,8 +6107,8 @@
         </p:nvSpPr>
         <p:spPr>
           <a:xfrm>
-            <a:off x="6572250" y="1619250"/>
-            <a:ext cx="4762500" cy="1619250"/>
+            <a:off x="1498600" y="4171950"/>
+            <a:ext cx="9465733" cy="1619250"/>
           </a:xfrm>
           <a:prstGeom prst="rect">
             <a:avLst/>
@@ -5431,7 +6129,7 @@
           <p:cNvPr id="8" name="矩形 7">
             <a:extLst>
               <a:ext uri="{FF2B5EF4-FFF2-40B4-BE49-F238E27FC236}">
-                <a16:creationId xmlns:a16="http://schemas.microsoft.com/office/drawing/2014/main" id="{BE864F01-824A-4742-BCDE-992C14CE649A}"/>
+                <a16:creationId xmlns:a16="http://schemas.microsoft.com/office/drawing/2014/main" id="{CAF760D5-7BD6-4703-9C53-D0A2A5E3F7A2}"/>
               </a:ext>
             </a:extLst>
           </p:cNvPr>
@@ -5442,7 +6140,7 @@
         </p:nvSpPr>
         <p:spPr>
           <a:xfrm>
-            <a:off x="6800850" y="1790700"/>
+            <a:off x="1634067" y="4362450"/>
             <a:ext cx="4305300" cy="323850"/>
           </a:xfrm>
           <a:prstGeom prst="rect">
@@ -5474,13 +6172,18 @@
               </a:defRPr>
             </a:pPr>
             <a:r>
-              <a:rPr sz="1650" b="1">
+              <a:rPr lang="zh-CN" altLang="en-US" sz="3200" b="1" dirty="0">
                 <a:solidFill>
                   <a:srgbClr val="2D4A33"/>
                 </a:solidFill>
               </a:rPr>
-              <a:t>多检索</a:t>
-            </a:r>
+              <a:t>知识分块</a:t>
+            </a:r>
+            <a:endParaRPr sz="3200" b="1" dirty="0">
+              <a:solidFill>
+                <a:srgbClr val="2D4A33"/>
+              </a:solidFill>
+            </a:endParaRPr>
           </a:p>
         </p:txBody>
       </p:sp>
@@ -5489,7 +6192,7 @@
           <p:cNvPr id="9" name="矩形 8">
             <a:extLst>
               <a:ext uri="{FF2B5EF4-FFF2-40B4-BE49-F238E27FC236}">
-                <a16:creationId xmlns:a16="http://schemas.microsoft.com/office/drawing/2014/main" id="{02E654C1-4FDB-491C-8E0F-675E749870C4}"/>
+                <a16:creationId xmlns:a16="http://schemas.microsoft.com/office/drawing/2014/main" id="{78ECD07B-701D-4861-812E-B364FA3E3C92}"/>
               </a:ext>
             </a:extLst>
           </p:cNvPr>
@@ -5500,8 +6203,8 @@
         </p:nvSpPr>
         <p:spPr>
           <a:xfrm>
-            <a:off x="6800850" y="2228850"/>
-            <a:ext cx="4305300" cy="857250"/>
+            <a:off x="1634067" y="4677833"/>
+            <a:ext cx="9330266" cy="977900"/>
           </a:xfrm>
           <a:prstGeom prst="rect">
             <a:avLst/>
@@ -5524,7 +6227,7 @@
           <a:bodyPr anchor="ctr"/>
           <a:lstStyle/>
           <a:p>
-            <a:pPr algn="l">
+            <a:pPr>
               <a:defRPr sz="1350" b="0">
                 <a:solidFill>
                   <a:srgbClr val="1F2D22"/>
@@ -5532,161 +6235,106 @@
               </a:defRPr>
             </a:pPr>
             <a:r>
-              <a:rPr sz="1350" b="0">
-                <a:solidFill>
-                  <a:srgbClr val="1F2D22"/>
-                </a:solidFill>
-              </a:rPr>
-              <a:t>支持多种召回方式并行比较</a:t>
-            </a:r>
-          </a:p>
-        </p:txBody>
-      </p:sp>
-      <p:sp>
-        <p:nvSpPr>
-          <p:cNvPr id="10" name="矩形 9">
-            <a:extLst>
-              <a:ext uri="{FF2B5EF4-FFF2-40B4-BE49-F238E27FC236}">
-                <a16:creationId xmlns:a16="http://schemas.microsoft.com/office/drawing/2014/main" id="{36D0BD11-F236-4FBA-8154-83D3D2A1D76A}"/>
-              </a:ext>
-            </a:extLst>
-          </p:cNvPr>
-          <p:cNvSpPr>
-            <a:spLocks noGrp="1"/>
-          </p:cNvSpPr>
-          <p:nvPr/>
-        </p:nvSpPr>
-        <p:spPr>
-          <a:xfrm>
-            <a:off x="2000250" y="3714750"/>
-            <a:ext cx="8191500" cy="1428750"/>
-          </a:xfrm>
-          <a:prstGeom prst="rect">
-            <a:avLst/>
-          </a:prstGeom>
-          <a:solidFill>
-            <a:srgbClr val="FFFFFF"/>
-          </a:solidFill>
-          <a:ln w="9525">
-            <a:solidFill>
-              <a:srgbClr val="C7D0C4"/>
-            </a:solidFill>
-            <a:prstDash val="solid"/>
-          </a:ln>
-        </p:spPr>
-      </p:sp>
-      <p:sp>
-        <p:nvSpPr>
-          <p:cNvPr id="11" name="矩形 10">
-            <a:extLst>
-              <a:ext uri="{FF2B5EF4-FFF2-40B4-BE49-F238E27FC236}">
-                <a16:creationId xmlns:a16="http://schemas.microsoft.com/office/drawing/2014/main" id="{7E12BFA7-42DC-4404-8442-3A427F38924F}"/>
-              </a:ext>
-            </a:extLst>
-          </p:cNvPr>
-          <p:cNvSpPr>
-            <a:spLocks noGrp="1"/>
-          </p:cNvSpPr>
-          <p:nvPr/>
-        </p:nvSpPr>
-        <p:spPr>
-          <a:xfrm>
-            <a:off x="2228850" y="3886200"/>
-            <a:ext cx="7734300" cy="323850"/>
-          </a:xfrm>
-          <a:prstGeom prst="rect">
-            <a:avLst/>
-          </a:prstGeom>
-          <a:solidFill>
-            <a:srgbClr val="000000">
-              <a:alpha val="0"/>
-            </a:srgbClr>
-          </a:solidFill>
-          <a:ln w="0">
-            <a:solidFill>
-              <a:srgbClr val="000000">
-                <a:alpha val="0"/>
-              </a:srgbClr>
-            </a:solidFill>
-            <a:prstDash val="solid"/>
-          </a:ln>
-        </p:spPr>
-        <p:txBody>
-          <a:bodyPr anchor="ctr"/>
-          <a:lstStyle/>
-          <a:p>
-            <a:pPr algn="l">
-              <a:defRPr sz="1650" b="1">
-                <a:solidFill>
-                  <a:srgbClr val="2D4A33"/>
-                </a:solidFill>
-              </a:defRPr>
-            </a:pPr>
-            <a:r>
-              <a:rPr sz="1650" b="1">
-                <a:solidFill>
-                  <a:srgbClr val="2D4A33"/>
-                </a:solidFill>
-              </a:rPr>
-              <a:t>结果</a:t>
-            </a:r>
-          </a:p>
-        </p:txBody>
-      </p:sp>
-      <p:sp>
-        <p:nvSpPr>
-          <p:cNvPr id="12" name="矩形 11">
-            <a:extLst>
-              <a:ext uri="{FF2B5EF4-FFF2-40B4-BE49-F238E27FC236}">
-                <a16:creationId xmlns:a16="http://schemas.microsoft.com/office/drawing/2014/main" id="{8D583150-E769-40CD-B44A-9B1246362845}"/>
-              </a:ext>
-            </a:extLst>
-          </p:cNvPr>
-          <p:cNvSpPr>
-            <a:spLocks noGrp="1"/>
-          </p:cNvSpPr>
-          <p:nvPr/>
-        </p:nvSpPr>
-        <p:spPr>
-          <a:xfrm>
-            <a:off x="2228850" y="4324350"/>
-            <a:ext cx="7734300" cy="666750"/>
-          </a:xfrm>
-          <a:prstGeom prst="rect">
-            <a:avLst/>
-          </a:prstGeom>
-          <a:solidFill>
-            <a:srgbClr val="000000">
-              <a:alpha val="0"/>
-            </a:srgbClr>
-          </a:solidFill>
-          <a:ln w="0">
-            <a:solidFill>
-              <a:srgbClr val="000000">
-                <a:alpha val="0"/>
-              </a:srgbClr>
-            </a:solidFill>
-            <a:prstDash val="solid"/>
-          </a:ln>
-        </p:spPr>
-        <p:txBody>
-          <a:bodyPr anchor="ctr"/>
-          <a:lstStyle/>
-          <a:p>
-            <a:pPr algn="l">
-              <a:defRPr sz="1350" b="0">
-                <a:solidFill>
-                  <a:srgbClr val="1F2D22"/>
-                </a:solidFill>
-              </a:defRPr>
-            </a:pPr>
-            <a:r>
-              <a:rPr sz="1350" b="0">
-                <a:solidFill>
-                  <a:srgbClr val="1F2D22"/>
-                </a:solidFill>
-              </a:rPr>
-              <a:t>索引与召回更灵活，检索能力明显增强。</a:t>
+              <a:rPr lang="zh-CN" altLang="en-US" sz="2000" dirty="0">
+                <a:solidFill>
+                  <a:srgbClr val="1F2D22"/>
+                </a:solidFill>
+                <a:latin typeface="ui-monospace"/>
+              </a:rPr>
+              <a:t>按解析块分块：基本一个结构块生成一个 </a:t>
+            </a:r>
+            <a:r>
+              <a:rPr lang="en-US" altLang="zh-CN" sz="2000" dirty="0">
+                <a:solidFill>
+                  <a:srgbClr val="1F2D22"/>
+                </a:solidFill>
+                <a:latin typeface="ui-monospace"/>
+              </a:rPr>
+              <a:t>chunk</a:t>
+            </a:r>
+          </a:p>
+          <a:p>
+            <a:pPr algn="l"/>
+            <a:r>
+              <a:rPr lang="zh-CN" altLang="en-US" sz="2000" dirty="0">
+                <a:solidFill>
+                  <a:srgbClr val="1F2D22"/>
+                </a:solidFill>
+                <a:latin typeface="ui-monospace"/>
+              </a:rPr>
+              <a:t>按章节分块：先按 </a:t>
+            </a:r>
+            <a:r>
+              <a:rPr lang="en-US" altLang="zh-CN" sz="2000" dirty="0" err="1">
+                <a:solidFill>
+                  <a:srgbClr val="1F2D22"/>
+                </a:solidFill>
+                <a:latin typeface="ui-monospace"/>
+              </a:rPr>
+              <a:t>section_path</a:t>
+            </a:r>
+            <a:r>
+              <a:rPr lang="en-US" altLang="zh-CN" sz="2000" dirty="0">
+                <a:solidFill>
+                  <a:srgbClr val="1F2D22"/>
+                </a:solidFill>
+                <a:latin typeface="ui-monospace"/>
+              </a:rPr>
+              <a:t> </a:t>
+            </a:r>
+            <a:r>
+              <a:rPr lang="zh-CN" altLang="en-US" sz="2000" dirty="0">
+                <a:solidFill>
+                  <a:srgbClr val="1F2D22"/>
+                </a:solidFill>
+                <a:latin typeface="ui-monospace"/>
+              </a:rPr>
+              <a:t>聚合同章节 </a:t>
+            </a:r>
+            <a:r>
+              <a:rPr lang="en-US" altLang="zh-CN" sz="2000" dirty="0">
+                <a:solidFill>
+                  <a:srgbClr val="1F2D22"/>
+                </a:solidFill>
+                <a:latin typeface="ui-monospace"/>
+              </a:rPr>
+              <a:t>block</a:t>
+            </a:r>
+            <a:r>
+              <a:rPr lang="zh-CN" altLang="en-US" sz="2000" dirty="0">
+                <a:solidFill>
+                  <a:srgbClr val="1F2D22"/>
+                </a:solidFill>
+                <a:latin typeface="ui-monospace"/>
+              </a:rPr>
+              <a:t>，再按 </a:t>
+            </a:r>
+            <a:r>
+              <a:rPr lang="en-US" altLang="zh-CN" sz="2000" dirty="0" err="1">
+                <a:solidFill>
+                  <a:srgbClr val="1F2D22"/>
+                </a:solidFill>
+                <a:latin typeface="ui-monospace"/>
+              </a:rPr>
+              <a:t>chunk_size</a:t>
+            </a:r>
+            <a:r>
+              <a:rPr lang="en-US" altLang="zh-CN" sz="2000" dirty="0">
+                <a:solidFill>
+                  <a:srgbClr val="1F2D22"/>
+                </a:solidFill>
+                <a:latin typeface="ui-monospace"/>
+              </a:rPr>
+              <a:t> </a:t>
+            </a:r>
+            <a:r>
+              <a:rPr lang="zh-CN" altLang="en-US" sz="2000" dirty="0">
+                <a:solidFill>
+                  <a:srgbClr val="1F2D22"/>
+                </a:solidFill>
+                <a:latin typeface="ui-monospace"/>
+              </a:rPr>
+              <a:t>做递归切分</a:t>
             </a:r>
           </a:p>
         </p:txBody>
@@ -5694,7 +6342,7 @@
     </p:spTree>
     <p:extLst>
       <p:ext uri="{BB962C8B-B14F-4D97-AF65-F5344CB8AC3E}">
-        <p14:creationId xmlns:p14="http://schemas.microsoft.com/office/powerpoint/2010/main" val="3301625095"/>
+        <p14:creationId xmlns:p14="http://schemas.microsoft.com/office/powerpoint/2010/main" val="1941770515"/>
       </p:ext>
     </p:extLst>
   </p:cSld>
@@ -5704,7 +6352,7 @@
 </p:sld>
 </file>
 
-<file path=ppt/slides/slide11.xml><?xml version="1.0" encoding="utf-8"?>
+<file path=ppt/slides/slide12.xml><?xml version="1.0" encoding="utf-8"?>
 <p:sld xmlns:a="http://schemas.openxmlformats.org/drawingml/2006/main" xmlns:r="http://schemas.openxmlformats.org/officeDocument/2006/relationships" xmlns:p="http://schemas.openxmlformats.org/presentationml/2006/main">
   <p:cSld>
     <p:bg>
@@ -5808,7 +6456,7 @@
                 <a:ea typeface="STZhongsong"/>
                 <a:cs typeface="+mn-cs"/>
               </a:rPr>
-              <a:t>6</a:t>
+              <a:t>5</a:t>
             </a:r>
             <a:endParaRPr kumimoji="0" sz="13800" b="0" i="0" u="none" strike="noStrike" kern="1200" cap="none" spc="0" normalizeH="0" baseline="0" noProof="0" dirty="0">
               <a:ln>
@@ -5843,8 +6491,8 @@
         </p:nvSpPr>
         <p:spPr>
           <a:xfrm>
-            <a:off x="6331762" y="2685166"/>
-            <a:ext cx="2262158" cy="923330"/>
+            <a:off x="6293290" y="2685166"/>
+            <a:ext cx="2339103" cy="923330"/>
           </a:xfrm>
           <a:prstGeom prst="rect">
             <a:avLst/>
@@ -5856,25 +6504,39 @@
           </a:bodyPr>
           <a:lstStyle/>
           <a:p>
-            <a:pPr algn="ctr">
+            <a:pPr marL="0" marR="0" lvl="0" indent="0" algn="ctr" defTabSz="914400" eaLnBrk="1" fontAlgn="auto" latinLnBrk="0" hangingPunct="1">
+              <a:lnSpc>
+                <a:spcPct val="100000"/>
+              </a:lnSpc>
+              <a:spcBef>
+                <a:spcPts val="0"/>
+              </a:spcBef>
+              <a:spcAft>
+                <a:spcPts val="0"/>
+              </a:spcAft>
+              <a:buClrTx/>
+              <a:buSzTx/>
+              <a:buFontTx/>
+              <a:buNone/>
+              <a:tabLst/>
               <a:defRPr/>
             </a:pPr>
             <a:r>
-              <a:rPr lang="zh-CN" altLang="en-US" sz="5400" b="0" i="0" dirty="0">
-                <a:solidFill>
-                  <a:schemeClr val="bg1"/>
-                </a:solidFill>
-                <a:effectLst/>
-                <a:latin typeface="Color Emoji"/>
-              </a:rPr>
-              <a:t>邢泽雷</a:t>
-            </a:r>
-            <a:endParaRPr kumimoji="0" lang="zh-CN" altLang="en-US" sz="5400" b="1" i="0" u="none" strike="noStrike" kern="1200" cap="none" spc="0" normalizeH="0" baseline="0" noProof="0" dirty="0">
+              <a:rPr lang="zh-CN" altLang="en-US" sz="5400" b="1" dirty="0">
+                <a:solidFill>
+                  <a:prstClr val="white"/>
+                </a:solidFill>
+                <a:latin typeface="Arial"/>
+                <a:ea typeface="STZhongsong"/>
+              </a:rPr>
+              <a:t>唐熙雷</a:t>
+            </a:r>
+            <a:endParaRPr kumimoji="0" sz="5400" b="1" i="0" u="none" strike="noStrike" kern="1200" cap="none" spc="0" normalizeH="0" baseline="0" noProof="0" dirty="0">
               <a:ln>
                 <a:noFill/>
               </a:ln>
               <a:solidFill>
-                <a:schemeClr val="bg1"/>
+                <a:prstClr val="white"/>
               </a:solidFill>
               <a:effectLst/>
               <a:uLnTx/>
@@ -5889,7 +6551,7 @@
     </p:spTree>
     <p:extLst>
       <p:ext uri="{BB962C8B-B14F-4D97-AF65-F5344CB8AC3E}">
-        <p14:creationId xmlns:p14="http://schemas.microsoft.com/office/powerpoint/2010/main" val="2604580078"/>
+        <p14:creationId xmlns:p14="http://schemas.microsoft.com/office/powerpoint/2010/main" val="969448289"/>
       </p:ext>
     </p:extLst>
   </p:cSld>
@@ -5899,9 +6561,17 @@
 </p:sld>
 </file>
 
-<file path=ppt/slides/slide12.xml><?xml version="1.0" encoding="utf-8"?>
+<file path=ppt/slides/slide13.xml><?xml version="1.0" encoding="utf-8"?>
 <p:sld xmlns:a="http://schemas.openxmlformats.org/drawingml/2006/main" xmlns:r="http://schemas.openxmlformats.org/officeDocument/2006/relationships" xmlns:p="http://schemas.openxmlformats.org/presentationml/2006/main">
   <p:cSld>
+    <p:bg>
+      <p:bgPr>
+        <a:solidFill>
+          <a:srgbClr val="F7F7F4"/>
+        </a:solidFill>
+        <a:effectLst/>
+      </p:bgPr>
+    </p:bg>
     <p:spTree>
       <p:nvGrpSpPr>
         <p:cNvPr id="1" name=""/>
@@ -5921,7 +6591,7 @@
           <p:cNvPr id="13" name="矩形 12">
             <a:extLst>
               <a:ext uri="{FF2B5EF4-FFF2-40B4-BE49-F238E27FC236}">
-                <a16:creationId xmlns:a16="http://schemas.microsoft.com/office/drawing/2014/main" id="{CB19A068-375C-44CD-B486-A2E0564D9945}"/>
+                <a16:creationId xmlns:a16="http://schemas.microsoft.com/office/drawing/2014/main" id="{49C5998F-8D86-4862-8469-086DC510390B}"/>
               </a:ext>
             </a:extLst>
           </p:cNvPr>
@@ -5954,7 +6624,7 @@
           <p:cNvPr id="2" name="矩形 1">
             <a:extLst>
               <a:ext uri="{FF2B5EF4-FFF2-40B4-BE49-F238E27FC236}">
-                <a16:creationId xmlns:a16="http://schemas.microsoft.com/office/drawing/2014/main" id="{78EDCF9F-E0B5-4603-A825-182C7732172E}"/>
+                <a16:creationId xmlns:a16="http://schemas.microsoft.com/office/drawing/2014/main" id="{7014062F-B6B3-42D0-923B-A7424561BC77}"/>
               </a:ext>
             </a:extLst>
           </p:cNvPr>
@@ -5997,13 +6667,18 @@
               </a:defRPr>
             </a:pPr>
             <a:r>
-              <a:rPr lang="zh-CN" altLang="en-US" sz="2800" b="0" i="0" dirty="0">
-                <a:effectLst/>
-                <a:latin typeface="Color Emoji"/>
-              </a:rPr>
-              <a:t>邢泽雷</a:t>
-            </a:r>
-            <a:endParaRPr sz="2550" b="1" dirty="0"/>
+              <a:rPr lang="zh-CN" altLang="en-US" sz="2550" b="1" dirty="0">
+                <a:solidFill>
+                  <a:srgbClr val="2D4A33"/>
+                </a:solidFill>
+              </a:rPr>
+              <a:t>唐熙雷</a:t>
+            </a:r>
+            <a:endParaRPr sz="2550" b="1" dirty="0">
+              <a:solidFill>
+                <a:srgbClr val="2D4A33"/>
+              </a:solidFill>
+            </a:endParaRPr>
           </a:p>
         </p:txBody>
       </p:sp>
@@ -6012,7 +6687,7 @@
           <p:cNvPr id="4" name="矩形 3">
             <a:extLst>
               <a:ext uri="{FF2B5EF4-FFF2-40B4-BE49-F238E27FC236}">
-                <a16:creationId xmlns:a16="http://schemas.microsoft.com/office/drawing/2014/main" id="{0CCF3AAA-E565-49A5-9E5D-12AB5BEA2BCC}"/>
+                <a16:creationId xmlns:a16="http://schemas.microsoft.com/office/drawing/2014/main" id="{C6221659-10CA-473D-B608-E2633E14E235}"/>
               </a:ext>
             </a:extLst>
           </p:cNvPr>
@@ -6045,7 +6720,7 @@
           <p:cNvPr id="5" name="矩形 4">
             <a:extLst>
               <a:ext uri="{FF2B5EF4-FFF2-40B4-BE49-F238E27FC236}">
-                <a16:creationId xmlns:a16="http://schemas.microsoft.com/office/drawing/2014/main" id="{ECC68CB8-D28B-4FBA-BFEE-BA369B649486}"/>
+                <a16:creationId xmlns:a16="http://schemas.microsoft.com/office/drawing/2014/main" id="{BE326CC3-10C1-4780-ADEA-D2C23EB4593B}"/>
               </a:ext>
             </a:extLst>
           </p:cNvPr>
@@ -6088,18 +6763,13 @@
               </a:defRPr>
             </a:pPr>
             <a:r>
-              <a:rPr sz="3200" b="1" dirty="0" err="1">
+              <a:rPr sz="1650" b="1">
                 <a:solidFill>
                   <a:srgbClr val="2D4A33"/>
                 </a:solidFill>
               </a:rPr>
-              <a:t>检索前</a:t>
-            </a:r>
-            <a:endParaRPr sz="3200" b="1" dirty="0">
-              <a:solidFill>
-                <a:srgbClr val="2D4A33"/>
-              </a:solidFill>
-            </a:endParaRPr>
+              <a:t>Faiss</a:t>
+            </a:r>
           </a:p>
         </p:txBody>
       </p:sp>
@@ -6108,7 +6778,7 @@
           <p:cNvPr id="6" name="矩形 5">
             <a:extLst>
               <a:ext uri="{FF2B5EF4-FFF2-40B4-BE49-F238E27FC236}">
-                <a16:creationId xmlns:a16="http://schemas.microsoft.com/office/drawing/2014/main" id="{80F4B1FB-DFE4-43C7-98D1-891507107452}"/>
+                <a16:creationId xmlns:a16="http://schemas.microsoft.com/office/drawing/2014/main" id="{30F903FA-7735-436D-AA14-6FDE08DB3204}"/>
               </a:ext>
             </a:extLst>
           </p:cNvPr>
@@ -6151,68 +6821,13 @@
               </a:defRPr>
             </a:pPr>
             <a:r>
-              <a:rPr sz="2000" dirty="0" err="1">
-                <a:solidFill>
-                  <a:srgbClr val="1F2D22"/>
-                </a:solidFill>
-                <a:latin typeface="ui-monospace"/>
-              </a:rPr>
-              <a:t>查询优化</a:t>
-            </a:r>
-            <a:endParaRPr sz="2000" dirty="0">
-              <a:solidFill>
-                <a:srgbClr val="1F2D22"/>
-              </a:solidFill>
-              <a:latin typeface="ui-monospace"/>
-            </a:endParaRPr>
-          </a:p>
-          <a:p>
-            <a:pPr algn="l">
-              <a:defRPr sz="1350" b="0">
-                <a:solidFill>
-                  <a:srgbClr val="1F2D22"/>
-                </a:solidFill>
-              </a:defRPr>
-            </a:pPr>
-            <a:r>
-              <a:rPr sz="2000" dirty="0" err="1">
-                <a:solidFill>
-                  <a:srgbClr val="1F2D22"/>
-                </a:solidFill>
-                <a:latin typeface="ui-monospace"/>
-              </a:rPr>
-              <a:t>检索提示</a:t>
-            </a:r>
-            <a:endParaRPr sz="2000" dirty="0">
-              <a:solidFill>
-                <a:srgbClr val="1F2D22"/>
-              </a:solidFill>
-              <a:latin typeface="ui-monospace"/>
-            </a:endParaRPr>
-          </a:p>
-          <a:p>
-            <a:pPr algn="l">
-              <a:defRPr sz="1350" b="0">
-                <a:solidFill>
-                  <a:srgbClr val="1F2D22"/>
-                </a:solidFill>
-              </a:defRPr>
-            </a:pPr>
-            <a:r>
-              <a:rPr sz="2000" dirty="0" err="1">
-                <a:solidFill>
-                  <a:srgbClr val="1F2D22"/>
-                </a:solidFill>
-                <a:latin typeface="ui-monospace"/>
-              </a:rPr>
-              <a:t>问题改写</a:t>
-            </a:r>
-            <a:endParaRPr sz="2000" dirty="0">
-              <a:solidFill>
-                <a:srgbClr val="1F2D22"/>
-              </a:solidFill>
-              <a:latin typeface="ui-monospace"/>
-            </a:endParaRPr>
+              <a:rPr sz="1350" b="0">
+                <a:solidFill>
+                  <a:srgbClr val="1F2D22"/>
+                </a:solidFill>
+              </a:rPr>
+              <a:t>替换 / 增强向量检索底座</a:t>
+            </a:r>
           </a:p>
         </p:txBody>
       </p:sp>
@@ -6221,7 +6836,7 @@
           <p:cNvPr id="7" name="矩形 6">
             <a:extLst>
               <a:ext uri="{FF2B5EF4-FFF2-40B4-BE49-F238E27FC236}">
-                <a16:creationId xmlns:a16="http://schemas.microsoft.com/office/drawing/2014/main" id="{02F5307D-47AA-4496-B027-2EBC00B0661D}"/>
+                <a16:creationId xmlns:a16="http://schemas.microsoft.com/office/drawing/2014/main" id="{5C63DCCE-58D8-46C2-8CD3-78F707B6307B}"/>
               </a:ext>
             </a:extLst>
           </p:cNvPr>
@@ -6254,7 +6869,7 @@
           <p:cNvPr id="8" name="矩形 7">
             <a:extLst>
               <a:ext uri="{FF2B5EF4-FFF2-40B4-BE49-F238E27FC236}">
-                <a16:creationId xmlns:a16="http://schemas.microsoft.com/office/drawing/2014/main" id="{E8ED42BD-464C-42DE-BDFA-1C3FED5B7ACA}"/>
+                <a16:creationId xmlns:a16="http://schemas.microsoft.com/office/drawing/2014/main" id="{BE864F01-824A-4742-BCDE-992C14CE649A}"/>
               </a:ext>
             </a:extLst>
           </p:cNvPr>
@@ -6289,7 +6904,7 @@
           <a:bodyPr anchor="ctr"/>
           <a:lstStyle/>
           <a:p>
-            <a:pPr>
+            <a:pPr algn="l">
               <a:defRPr sz="1650" b="1">
                 <a:solidFill>
                   <a:srgbClr val="2D4A33"/>
@@ -6297,18 +6912,13 @@
               </a:defRPr>
             </a:pPr>
             <a:r>
-              <a:rPr sz="3200" b="1" dirty="0" err="1">
+              <a:rPr sz="1650" b="1">
                 <a:solidFill>
                   <a:srgbClr val="2D4A33"/>
                 </a:solidFill>
               </a:rPr>
-              <a:t>检索后</a:t>
-            </a:r>
-            <a:endParaRPr sz="3200" b="1" dirty="0">
-              <a:solidFill>
-                <a:srgbClr val="2D4A33"/>
-              </a:solidFill>
-            </a:endParaRPr>
+              <a:t>多检索</a:t>
+            </a:r>
           </a:p>
         </p:txBody>
       </p:sp>
@@ -6317,7 +6927,7 @@
           <p:cNvPr id="9" name="矩形 8">
             <a:extLst>
               <a:ext uri="{FF2B5EF4-FFF2-40B4-BE49-F238E27FC236}">
-                <a16:creationId xmlns:a16="http://schemas.microsoft.com/office/drawing/2014/main" id="{0396FB42-E968-4370-8713-7F8120653B23}"/>
+                <a16:creationId xmlns:a16="http://schemas.microsoft.com/office/drawing/2014/main" id="{02E654C1-4FDB-491C-8E0F-675E749870C4}"/>
               </a:ext>
             </a:extLst>
           </p:cNvPr>
@@ -6360,44 +6970,13 @@
               </a:defRPr>
             </a:pPr>
             <a:r>
-              <a:rPr sz="2000" dirty="0" err="1">
-                <a:solidFill>
-                  <a:srgbClr val="1F2D22"/>
-                </a:solidFill>
-                <a:latin typeface="ui-monospace"/>
-              </a:rPr>
-              <a:t>自我反思</a:t>
-            </a:r>
-            <a:endParaRPr sz="2000" dirty="0">
-              <a:solidFill>
-                <a:srgbClr val="1F2D22"/>
-              </a:solidFill>
-              <a:latin typeface="ui-monospace"/>
-            </a:endParaRPr>
-          </a:p>
-          <a:p>
-            <a:pPr algn="l">
-              <a:defRPr sz="1350" b="0">
-                <a:solidFill>
-                  <a:srgbClr val="1F2D22"/>
-                </a:solidFill>
-              </a:defRPr>
-            </a:pPr>
-            <a:r>
-              <a:rPr sz="2000" dirty="0" err="1">
-                <a:solidFill>
-                  <a:srgbClr val="1F2D22"/>
-                </a:solidFill>
-                <a:latin typeface="ui-monospace"/>
-              </a:rPr>
-              <a:t>答案校正</a:t>
-            </a:r>
-            <a:endParaRPr sz="2000" dirty="0">
-              <a:solidFill>
-                <a:srgbClr val="1F2D22"/>
-              </a:solidFill>
-              <a:latin typeface="ui-monospace"/>
-            </a:endParaRPr>
+              <a:rPr sz="1350" b="0">
+                <a:solidFill>
+                  <a:srgbClr val="1F2D22"/>
+                </a:solidFill>
+              </a:rPr>
+              <a:t>支持多种召回方式并行比较</a:t>
+            </a:r>
           </a:p>
         </p:txBody>
       </p:sp>
@@ -6406,7 +6985,7 @@
           <p:cNvPr id="10" name="矩形 9">
             <a:extLst>
               <a:ext uri="{FF2B5EF4-FFF2-40B4-BE49-F238E27FC236}">
-                <a16:creationId xmlns:a16="http://schemas.microsoft.com/office/drawing/2014/main" id="{E5C669DF-CAC4-4D06-92B2-8A85E452067E}"/>
+                <a16:creationId xmlns:a16="http://schemas.microsoft.com/office/drawing/2014/main" id="{36D0BD11-F236-4FBA-8154-83D3D2A1D76A}"/>
               </a:ext>
             </a:extLst>
           </p:cNvPr>
@@ -6439,7 +7018,7 @@
           <p:cNvPr id="11" name="矩形 10">
             <a:extLst>
               <a:ext uri="{FF2B5EF4-FFF2-40B4-BE49-F238E27FC236}">
-                <a16:creationId xmlns:a16="http://schemas.microsoft.com/office/drawing/2014/main" id="{AA327DB0-DBD6-42E5-85A2-3C88543BC4E9}"/>
+                <a16:creationId xmlns:a16="http://schemas.microsoft.com/office/drawing/2014/main" id="{7E12BFA7-42DC-4404-8442-3A427F38924F}"/>
               </a:ext>
             </a:extLst>
           </p:cNvPr>
@@ -6474,7 +7053,7 @@
           <a:bodyPr anchor="ctr"/>
           <a:lstStyle/>
           <a:p>
-            <a:pPr>
+            <a:pPr algn="l">
               <a:defRPr sz="1650" b="1">
                 <a:solidFill>
                   <a:srgbClr val="2D4A33"/>
@@ -6482,18 +7061,13 @@
               </a:defRPr>
             </a:pPr>
             <a:r>
-              <a:rPr sz="3200" b="1" dirty="0" err="1">
+              <a:rPr sz="1650" b="1">
                 <a:solidFill>
                   <a:srgbClr val="2D4A33"/>
                 </a:solidFill>
               </a:rPr>
               <a:t>结果</a:t>
             </a:r>
-            <a:endParaRPr sz="3200" b="1" dirty="0">
-              <a:solidFill>
-                <a:srgbClr val="2D4A33"/>
-              </a:solidFill>
-            </a:endParaRPr>
           </a:p>
         </p:txBody>
       </p:sp>
@@ -6502,7 +7076,7 @@
           <p:cNvPr id="12" name="矩形 11">
             <a:extLst>
               <a:ext uri="{FF2B5EF4-FFF2-40B4-BE49-F238E27FC236}">
-                <a16:creationId xmlns:a16="http://schemas.microsoft.com/office/drawing/2014/main" id="{E7E24D30-F662-4C81-B43C-F0978EE590E4}"/>
+                <a16:creationId xmlns:a16="http://schemas.microsoft.com/office/drawing/2014/main" id="{8D583150-E769-40CD-B44A-9B1246362845}"/>
               </a:ext>
             </a:extLst>
           </p:cNvPr>
@@ -6545,6 +7119,870 @@
               </a:defRPr>
             </a:pPr>
             <a:r>
+              <a:rPr sz="1350" b="0">
+                <a:solidFill>
+                  <a:srgbClr val="1F2D22"/>
+                </a:solidFill>
+              </a:rPr>
+              <a:t>索引与召回更灵活，检索能力明显增强。</a:t>
+            </a:r>
+          </a:p>
+        </p:txBody>
+      </p:sp>
+    </p:spTree>
+    <p:extLst>
+      <p:ext uri="{BB962C8B-B14F-4D97-AF65-F5344CB8AC3E}">
+        <p14:creationId xmlns:p14="http://schemas.microsoft.com/office/powerpoint/2010/main" val="3301625095"/>
+      </p:ext>
+    </p:extLst>
+  </p:cSld>
+  <p:clrMapOvr>
+    <a:masterClrMapping/>
+  </p:clrMapOvr>
+</p:sld>
+</file>
+
+<file path=ppt/slides/slide14.xml><?xml version="1.0" encoding="utf-8"?>
+<p:sld xmlns:a="http://schemas.openxmlformats.org/drawingml/2006/main" xmlns:r="http://schemas.openxmlformats.org/officeDocument/2006/relationships" xmlns:p="http://schemas.openxmlformats.org/presentationml/2006/main">
+  <p:cSld>
+    <p:bg>
+      <p:bgPr>
+        <a:solidFill>
+          <a:srgbClr val="253A2A"/>
+        </a:solidFill>
+        <a:effectLst/>
+      </p:bgPr>
+    </p:bg>
+    <p:spTree>
+      <p:nvGrpSpPr>
+        <p:cNvPr id="1" name=""/>
+        <p:cNvGrpSpPr/>
+        <p:nvPr/>
+      </p:nvGrpSpPr>
+      <p:grpSpPr>
+        <a:xfrm>
+          <a:off x="0" y="0"/>
+          <a:ext cx="0" cy="0"/>
+          <a:chOff x="0" y="0"/>
+          <a:chExt cx="0" cy="0"/>
+        </a:xfrm>
+      </p:grpSpPr>
+      <p:sp>
+        <p:nvSpPr>
+          <p:cNvPr id="11" name="文本框 10">
+            <a:extLst>
+              <a:ext uri="{FF2B5EF4-FFF2-40B4-BE49-F238E27FC236}">
+                <a16:creationId xmlns:a16="http://schemas.microsoft.com/office/drawing/2014/main" id="{642171A4-C23A-4145-BED1-2E8834D0E5B1}"/>
+              </a:ext>
+            </a:extLst>
+          </p:cNvPr>
+          <p:cNvSpPr>
+            <a:spLocks noGrp="1"/>
+          </p:cNvSpPr>
+          <p:nvPr/>
+        </p:nvSpPr>
+        <p:spPr>
+          <a:xfrm>
+            <a:off x="2614979" y="2321005"/>
+            <a:ext cx="2604077" cy="2215991"/>
+          </a:xfrm>
+          <a:prstGeom prst="rect">
+            <a:avLst/>
+          </a:prstGeom>
+          <a:noFill/>
+        </p:spPr>
+        <p:txBody>
+          <a:bodyPr wrap="square">
+            <a:spAutoFit/>
+          </a:bodyPr>
+          <a:lstStyle/>
+          <a:p>
+            <a:pPr marL="0" marR="0" lvl="0" indent="0" algn="ctr" defTabSz="914400" eaLnBrk="1" fontAlgn="auto" latinLnBrk="0" hangingPunct="1">
+              <a:lnSpc>
+                <a:spcPct val="100000"/>
+              </a:lnSpc>
+              <a:spcBef>
+                <a:spcPts val="0"/>
+              </a:spcBef>
+              <a:spcAft>
+                <a:spcPts val="0"/>
+              </a:spcAft>
+              <a:buClrTx/>
+              <a:buSzTx/>
+              <a:buFontTx/>
+              <a:buNone/>
+              <a:tabLst/>
+              <a:defRPr/>
+            </a:pPr>
+            <a:r>
+              <a:rPr kumimoji="0" sz="13800" b="0" i="0" u="none" strike="noStrike" kern="1200" cap="none" spc="0" normalizeH="0" baseline="0" noProof="0" dirty="0">
+                <a:ln>
+                  <a:noFill/>
+                </a:ln>
+                <a:solidFill>
+                  <a:srgbClr val="F5F4F9"/>
+                </a:solidFill>
+                <a:effectLst/>
+                <a:uLnTx/>
+                <a:uFillTx/>
+                <a:latin typeface="Arial"/>
+                <a:ea typeface="STZhongsong"/>
+                <a:cs typeface="+mn-cs"/>
+              </a:rPr>
+              <a:t>0</a:t>
+            </a:r>
+            <a:r>
+              <a:rPr kumimoji="0" lang="en-US" sz="13800" b="0" i="0" u="none" strike="noStrike" kern="1200" cap="none" spc="0" normalizeH="0" baseline="0" noProof="0" dirty="0">
+                <a:ln>
+                  <a:noFill/>
+                </a:ln>
+                <a:solidFill>
+                  <a:srgbClr val="F5F4F9"/>
+                </a:solidFill>
+                <a:effectLst/>
+                <a:uLnTx/>
+                <a:uFillTx/>
+                <a:latin typeface="Arial"/>
+                <a:ea typeface="STZhongsong"/>
+                <a:cs typeface="+mn-cs"/>
+              </a:rPr>
+              <a:t>6</a:t>
+            </a:r>
+            <a:endParaRPr kumimoji="0" sz="13800" b="0" i="0" u="none" strike="noStrike" kern="1200" cap="none" spc="0" normalizeH="0" baseline="0" noProof="0" dirty="0">
+              <a:ln>
+                <a:noFill/>
+              </a:ln>
+              <a:solidFill>
+                <a:srgbClr val="F5F4F9"/>
+              </a:solidFill>
+              <a:effectLst/>
+              <a:uLnTx/>
+              <a:uFillTx/>
+              <a:latin typeface="Arial"/>
+              <a:ea typeface="STZhongsong"/>
+              <a:cs typeface="+mn-cs"/>
+            </a:endParaRPr>
+          </a:p>
+        </p:txBody>
+      </p:sp>
+      <p:sp>
+        <p:nvSpPr>
+          <p:cNvPr id="13" name="矩形 12">
+            <a:extLst>
+              <a:ext uri="{FF2B5EF4-FFF2-40B4-BE49-F238E27FC236}">
+                <a16:creationId xmlns:a16="http://schemas.microsoft.com/office/drawing/2014/main" id="{638E2919-D9D9-4496-93DC-FD75812F9CF1}"/>
+              </a:ext>
+            </a:extLst>
+          </p:cNvPr>
+          <p:cNvSpPr>
+            <a:spLocks noGrp="1"/>
+          </p:cNvSpPr>
+          <p:nvPr/>
+        </p:nvSpPr>
+        <p:spPr>
+          <a:xfrm>
+            <a:off x="6331762" y="2685166"/>
+            <a:ext cx="2262158" cy="923330"/>
+          </a:xfrm>
+          <a:prstGeom prst="rect">
+            <a:avLst/>
+          </a:prstGeom>
+        </p:spPr>
+        <p:txBody>
+          <a:bodyPr wrap="none">
+            <a:spAutoFit/>
+          </a:bodyPr>
+          <a:lstStyle/>
+          <a:p>
+            <a:pPr algn="ctr">
+              <a:defRPr/>
+            </a:pPr>
+            <a:r>
+              <a:rPr lang="zh-CN" altLang="en-US" sz="5400" b="0" i="0" dirty="0">
+                <a:solidFill>
+                  <a:schemeClr val="bg1"/>
+                </a:solidFill>
+                <a:effectLst/>
+                <a:latin typeface="Color Emoji"/>
+              </a:rPr>
+              <a:t>邢泽雷</a:t>
+            </a:r>
+            <a:endParaRPr kumimoji="0" lang="zh-CN" altLang="en-US" sz="5400" b="1" i="0" u="none" strike="noStrike" kern="1200" cap="none" spc="0" normalizeH="0" baseline="0" noProof="0" dirty="0">
+              <a:ln>
+                <a:noFill/>
+              </a:ln>
+              <a:solidFill>
+                <a:schemeClr val="bg1"/>
+              </a:solidFill>
+              <a:effectLst/>
+              <a:uLnTx/>
+              <a:uFillTx/>
+              <a:latin typeface="Arial"/>
+              <a:ea typeface="STZhongsong"/>
+              <a:cs typeface="+mn-cs"/>
+            </a:endParaRPr>
+          </a:p>
+        </p:txBody>
+      </p:sp>
+    </p:spTree>
+    <p:extLst>
+      <p:ext uri="{BB962C8B-B14F-4D97-AF65-F5344CB8AC3E}">
+        <p14:creationId xmlns:p14="http://schemas.microsoft.com/office/powerpoint/2010/main" val="2604580078"/>
+      </p:ext>
+    </p:extLst>
+  </p:cSld>
+  <p:clrMapOvr>
+    <a:masterClrMapping/>
+  </p:clrMapOvr>
+</p:sld>
+</file>
+
+<file path=ppt/slides/slide15.xml><?xml version="1.0" encoding="utf-8"?>
+<p:sld xmlns:a="http://schemas.openxmlformats.org/drawingml/2006/main" xmlns:r="http://schemas.openxmlformats.org/officeDocument/2006/relationships" xmlns:p="http://schemas.openxmlformats.org/presentationml/2006/main">
+  <p:cSld>
+    <p:spTree>
+      <p:nvGrpSpPr>
+        <p:cNvPr id="1" name=""/>
+        <p:cNvGrpSpPr/>
+        <p:nvPr/>
+      </p:nvGrpSpPr>
+      <p:grpSpPr>
+        <a:xfrm>
+          <a:off x="0" y="0"/>
+          <a:ext cx="0" cy="0"/>
+          <a:chOff x="0" y="0"/>
+          <a:chExt cx="0" cy="0"/>
+        </a:xfrm>
+      </p:grpSpPr>
+      <p:sp>
+        <p:nvSpPr>
+          <p:cNvPr id="13" name="矩形 12">
+            <a:extLst>
+              <a:ext uri="{FF2B5EF4-FFF2-40B4-BE49-F238E27FC236}">
+                <a16:creationId xmlns:a16="http://schemas.microsoft.com/office/drawing/2014/main" id="{CB19A068-375C-44CD-B486-A2E0564D9945}"/>
+              </a:ext>
+            </a:extLst>
+          </p:cNvPr>
+          <p:cNvSpPr>
+            <a:spLocks noGrp="1"/>
+          </p:cNvSpPr>
+          <p:nvPr/>
+        </p:nvSpPr>
+        <p:spPr>
+          <a:xfrm>
+            <a:off x="0" y="0"/>
+            <a:ext cx="12192000" cy="114300"/>
+          </a:xfrm>
+          <a:prstGeom prst="rect">
+            <a:avLst/>
+          </a:prstGeom>
+          <a:solidFill>
+            <a:srgbClr val="2D4A33"/>
+          </a:solidFill>
+          <a:ln w="0">
+            <a:solidFill>
+              <a:srgbClr val="2D4A33"/>
+            </a:solidFill>
+            <a:prstDash val="solid"/>
+          </a:ln>
+        </p:spPr>
+      </p:sp>
+      <p:sp>
+        <p:nvSpPr>
+          <p:cNvPr id="2" name="矩形 1">
+            <a:extLst>
+              <a:ext uri="{FF2B5EF4-FFF2-40B4-BE49-F238E27FC236}">
+                <a16:creationId xmlns:a16="http://schemas.microsoft.com/office/drawing/2014/main" id="{78EDCF9F-E0B5-4603-A825-182C7732172E}"/>
+              </a:ext>
+            </a:extLst>
+          </p:cNvPr>
+          <p:cNvSpPr>
+            <a:spLocks noGrp="1"/>
+          </p:cNvSpPr>
+          <p:nvPr/>
+        </p:nvSpPr>
+        <p:spPr>
+          <a:xfrm>
+            <a:off x="762000" y="400050"/>
+            <a:ext cx="10668000" cy="457200"/>
+          </a:xfrm>
+          <a:prstGeom prst="rect">
+            <a:avLst/>
+          </a:prstGeom>
+          <a:solidFill>
+            <a:srgbClr val="000000">
+              <a:alpha val="0"/>
+            </a:srgbClr>
+          </a:solidFill>
+          <a:ln w="0">
+            <a:solidFill>
+              <a:srgbClr val="000000">
+                <a:alpha val="0"/>
+              </a:srgbClr>
+            </a:solidFill>
+            <a:prstDash val="solid"/>
+          </a:ln>
+        </p:spPr>
+        <p:txBody>
+          <a:bodyPr anchor="ctr"/>
+          <a:lstStyle/>
+          <a:p>
+            <a:pPr algn="ctr">
+              <a:defRPr sz="2550" b="1">
+                <a:solidFill>
+                  <a:srgbClr val="2D4A33"/>
+                </a:solidFill>
+              </a:defRPr>
+            </a:pPr>
+            <a:r>
+              <a:rPr lang="zh-CN" altLang="en-US" sz="2800" b="0" i="0" dirty="0">
+                <a:effectLst/>
+                <a:latin typeface="Color Emoji"/>
+              </a:rPr>
+              <a:t>邢泽雷</a:t>
+            </a:r>
+            <a:endParaRPr sz="2550" b="1" dirty="0"/>
+          </a:p>
+        </p:txBody>
+      </p:sp>
+      <p:sp>
+        <p:nvSpPr>
+          <p:cNvPr id="4" name="矩形 3">
+            <a:extLst>
+              <a:ext uri="{FF2B5EF4-FFF2-40B4-BE49-F238E27FC236}">
+                <a16:creationId xmlns:a16="http://schemas.microsoft.com/office/drawing/2014/main" id="{0CCF3AAA-E565-49A5-9E5D-12AB5BEA2BCC}"/>
+              </a:ext>
+            </a:extLst>
+          </p:cNvPr>
+          <p:cNvSpPr>
+            <a:spLocks noGrp="1"/>
+          </p:cNvSpPr>
+          <p:nvPr/>
+        </p:nvSpPr>
+        <p:spPr>
+          <a:xfrm>
+            <a:off x="857250" y="1619250"/>
+            <a:ext cx="4762500" cy="1619250"/>
+          </a:xfrm>
+          <a:prstGeom prst="rect">
+            <a:avLst/>
+          </a:prstGeom>
+          <a:solidFill>
+            <a:srgbClr val="FFFFFF"/>
+          </a:solidFill>
+          <a:ln w="9525">
+            <a:solidFill>
+              <a:srgbClr val="C7D0C4"/>
+            </a:solidFill>
+            <a:prstDash val="solid"/>
+          </a:ln>
+        </p:spPr>
+      </p:sp>
+      <p:sp>
+        <p:nvSpPr>
+          <p:cNvPr id="5" name="矩形 4">
+            <a:extLst>
+              <a:ext uri="{FF2B5EF4-FFF2-40B4-BE49-F238E27FC236}">
+                <a16:creationId xmlns:a16="http://schemas.microsoft.com/office/drawing/2014/main" id="{ECC68CB8-D28B-4FBA-BFEE-BA369B649486}"/>
+              </a:ext>
+            </a:extLst>
+          </p:cNvPr>
+          <p:cNvSpPr>
+            <a:spLocks noGrp="1"/>
+          </p:cNvSpPr>
+          <p:nvPr/>
+        </p:nvSpPr>
+        <p:spPr>
+          <a:xfrm>
+            <a:off x="1085850" y="1790700"/>
+            <a:ext cx="4305300" cy="323850"/>
+          </a:xfrm>
+          <a:prstGeom prst="rect">
+            <a:avLst/>
+          </a:prstGeom>
+          <a:solidFill>
+            <a:srgbClr val="000000">
+              <a:alpha val="0"/>
+            </a:srgbClr>
+          </a:solidFill>
+          <a:ln w="0">
+            <a:solidFill>
+              <a:srgbClr val="000000">
+                <a:alpha val="0"/>
+              </a:srgbClr>
+            </a:solidFill>
+            <a:prstDash val="solid"/>
+          </a:ln>
+        </p:spPr>
+        <p:txBody>
+          <a:bodyPr anchor="ctr"/>
+          <a:lstStyle/>
+          <a:p>
+            <a:pPr algn="l">
+              <a:defRPr sz="1650" b="1">
+                <a:solidFill>
+                  <a:srgbClr val="2D4A33"/>
+                </a:solidFill>
+              </a:defRPr>
+            </a:pPr>
+            <a:r>
+              <a:rPr sz="3200" b="1" dirty="0" err="1">
+                <a:solidFill>
+                  <a:srgbClr val="2D4A33"/>
+                </a:solidFill>
+              </a:rPr>
+              <a:t>检索前</a:t>
+            </a:r>
+            <a:endParaRPr sz="3200" b="1" dirty="0">
+              <a:solidFill>
+                <a:srgbClr val="2D4A33"/>
+              </a:solidFill>
+            </a:endParaRPr>
+          </a:p>
+        </p:txBody>
+      </p:sp>
+      <p:sp>
+        <p:nvSpPr>
+          <p:cNvPr id="6" name="矩形 5">
+            <a:extLst>
+              <a:ext uri="{FF2B5EF4-FFF2-40B4-BE49-F238E27FC236}">
+                <a16:creationId xmlns:a16="http://schemas.microsoft.com/office/drawing/2014/main" id="{80F4B1FB-DFE4-43C7-98D1-891507107452}"/>
+              </a:ext>
+            </a:extLst>
+          </p:cNvPr>
+          <p:cNvSpPr>
+            <a:spLocks noGrp="1"/>
+          </p:cNvSpPr>
+          <p:nvPr/>
+        </p:nvSpPr>
+        <p:spPr>
+          <a:xfrm>
+            <a:off x="1085850" y="2228850"/>
+            <a:ext cx="4305300" cy="857250"/>
+          </a:xfrm>
+          <a:prstGeom prst="rect">
+            <a:avLst/>
+          </a:prstGeom>
+          <a:solidFill>
+            <a:srgbClr val="000000">
+              <a:alpha val="0"/>
+            </a:srgbClr>
+          </a:solidFill>
+          <a:ln w="0">
+            <a:solidFill>
+              <a:srgbClr val="000000">
+                <a:alpha val="0"/>
+              </a:srgbClr>
+            </a:solidFill>
+            <a:prstDash val="solid"/>
+          </a:ln>
+        </p:spPr>
+        <p:txBody>
+          <a:bodyPr anchor="ctr"/>
+          <a:lstStyle/>
+          <a:p>
+            <a:pPr algn="l">
+              <a:defRPr sz="1350" b="0">
+                <a:solidFill>
+                  <a:srgbClr val="1F2D22"/>
+                </a:solidFill>
+              </a:defRPr>
+            </a:pPr>
+            <a:r>
+              <a:rPr sz="2000" dirty="0" err="1">
+                <a:solidFill>
+                  <a:srgbClr val="1F2D22"/>
+                </a:solidFill>
+                <a:latin typeface="ui-monospace"/>
+              </a:rPr>
+              <a:t>查询优化</a:t>
+            </a:r>
+            <a:endParaRPr sz="2000" dirty="0">
+              <a:solidFill>
+                <a:srgbClr val="1F2D22"/>
+              </a:solidFill>
+              <a:latin typeface="ui-monospace"/>
+            </a:endParaRPr>
+          </a:p>
+          <a:p>
+            <a:pPr algn="l">
+              <a:defRPr sz="1350" b="0">
+                <a:solidFill>
+                  <a:srgbClr val="1F2D22"/>
+                </a:solidFill>
+              </a:defRPr>
+            </a:pPr>
+            <a:r>
+              <a:rPr sz="2000" dirty="0" err="1">
+                <a:solidFill>
+                  <a:srgbClr val="1F2D22"/>
+                </a:solidFill>
+                <a:latin typeface="ui-monospace"/>
+              </a:rPr>
+              <a:t>检索提示</a:t>
+            </a:r>
+            <a:endParaRPr sz="2000" dirty="0">
+              <a:solidFill>
+                <a:srgbClr val="1F2D22"/>
+              </a:solidFill>
+              <a:latin typeface="ui-monospace"/>
+            </a:endParaRPr>
+          </a:p>
+          <a:p>
+            <a:pPr algn="l">
+              <a:defRPr sz="1350" b="0">
+                <a:solidFill>
+                  <a:srgbClr val="1F2D22"/>
+                </a:solidFill>
+              </a:defRPr>
+            </a:pPr>
+            <a:r>
+              <a:rPr sz="2000" dirty="0" err="1">
+                <a:solidFill>
+                  <a:srgbClr val="1F2D22"/>
+                </a:solidFill>
+                <a:latin typeface="ui-monospace"/>
+              </a:rPr>
+              <a:t>问题改写</a:t>
+            </a:r>
+            <a:endParaRPr sz="2000" dirty="0">
+              <a:solidFill>
+                <a:srgbClr val="1F2D22"/>
+              </a:solidFill>
+              <a:latin typeface="ui-monospace"/>
+            </a:endParaRPr>
+          </a:p>
+        </p:txBody>
+      </p:sp>
+      <p:sp>
+        <p:nvSpPr>
+          <p:cNvPr id="7" name="矩形 6">
+            <a:extLst>
+              <a:ext uri="{FF2B5EF4-FFF2-40B4-BE49-F238E27FC236}">
+                <a16:creationId xmlns:a16="http://schemas.microsoft.com/office/drawing/2014/main" id="{02F5307D-47AA-4496-B027-2EBC00B0661D}"/>
+              </a:ext>
+            </a:extLst>
+          </p:cNvPr>
+          <p:cNvSpPr>
+            <a:spLocks noGrp="1"/>
+          </p:cNvSpPr>
+          <p:nvPr/>
+        </p:nvSpPr>
+        <p:spPr>
+          <a:xfrm>
+            <a:off x="6572250" y="1619250"/>
+            <a:ext cx="4762500" cy="1619250"/>
+          </a:xfrm>
+          <a:prstGeom prst="rect">
+            <a:avLst/>
+          </a:prstGeom>
+          <a:solidFill>
+            <a:srgbClr val="FFFFFF"/>
+          </a:solidFill>
+          <a:ln w="9525">
+            <a:solidFill>
+              <a:srgbClr val="C7D0C4"/>
+            </a:solidFill>
+            <a:prstDash val="solid"/>
+          </a:ln>
+        </p:spPr>
+      </p:sp>
+      <p:sp>
+        <p:nvSpPr>
+          <p:cNvPr id="8" name="矩形 7">
+            <a:extLst>
+              <a:ext uri="{FF2B5EF4-FFF2-40B4-BE49-F238E27FC236}">
+                <a16:creationId xmlns:a16="http://schemas.microsoft.com/office/drawing/2014/main" id="{E8ED42BD-464C-42DE-BDFA-1C3FED5B7ACA}"/>
+              </a:ext>
+            </a:extLst>
+          </p:cNvPr>
+          <p:cNvSpPr>
+            <a:spLocks noGrp="1"/>
+          </p:cNvSpPr>
+          <p:nvPr/>
+        </p:nvSpPr>
+        <p:spPr>
+          <a:xfrm>
+            <a:off x="6800850" y="1790700"/>
+            <a:ext cx="4305300" cy="323850"/>
+          </a:xfrm>
+          <a:prstGeom prst="rect">
+            <a:avLst/>
+          </a:prstGeom>
+          <a:solidFill>
+            <a:srgbClr val="000000">
+              <a:alpha val="0"/>
+            </a:srgbClr>
+          </a:solidFill>
+          <a:ln w="0">
+            <a:solidFill>
+              <a:srgbClr val="000000">
+                <a:alpha val="0"/>
+              </a:srgbClr>
+            </a:solidFill>
+            <a:prstDash val="solid"/>
+          </a:ln>
+        </p:spPr>
+        <p:txBody>
+          <a:bodyPr anchor="ctr"/>
+          <a:lstStyle/>
+          <a:p>
+            <a:pPr>
+              <a:defRPr sz="1650" b="1">
+                <a:solidFill>
+                  <a:srgbClr val="2D4A33"/>
+                </a:solidFill>
+              </a:defRPr>
+            </a:pPr>
+            <a:r>
+              <a:rPr sz="3200" b="1" dirty="0" err="1">
+                <a:solidFill>
+                  <a:srgbClr val="2D4A33"/>
+                </a:solidFill>
+              </a:rPr>
+              <a:t>检索后</a:t>
+            </a:r>
+            <a:endParaRPr sz="3200" b="1" dirty="0">
+              <a:solidFill>
+                <a:srgbClr val="2D4A33"/>
+              </a:solidFill>
+            </a:endParaRPr>
+          </a:p>
+        </p:txBody>
+      </p:sp>
+      <p:sp>
+        <p:nvSpPr>
+          <p:cNvPr id="9" name="矩形 8">
+            <a:extLst>
+              <a:ext uri="{FF2B5EF4-FFF2-40B4-BE49-F238E27FC236}">
+                <a16:creationId xmlns:a16="http://schemas.microsoft.com/office/drawing/2014/main" id="{0396FB42-E968-4370-8713-7F8120653B23}"/>
+              </a:ext>
+            </a:extLst>
+          </p:cNvPr>
+          <p:cNvSpPr>
+            <a:spLocks noGrp="1"/>
+          </p:cNvSpPr>
+          <p:nvPr/>
+        </p:nvSpPr>
+        <p:spPr>
+          <a:xfrm>
+            <a:off x="6800850" y="2228850"/>
+            <a:ext cx="4305300" cy="857250"/>
+          </a:xfrm>
+          <a:prstGeom prst="rect">
+            <a:avLst/>
+          </a:prstGeom>
+          <a:solidFill>
+            <a:srgbClr val="000000">
+              <a:alpha val="0"/>
+            </a:srgbClr>
+          </a:solidFill>
+          <a:ln w="0">
+            <a:solidFill>
+              <a:srgbClr val="000000">
+                <a:alpha val="0"/>
+              </a:srgbClr>
+            </a:solidFill>
+            <a:prstDash val="solid"/>
+          </a:ln>
+        </p:spPr>
+        <p:txBody>
+          <a:bodyPr anchor="ctr"/>
+          <a:lstStyle/>
+          <a:p>
+            <a:pPr algn="l">
+              <a:defRPr sz="1350" b="0">
+                <a:solidFill>
+                  <a:srgbClr val="1F2D22"/>
+                </a:solidFill>
+              </a:defRPr>
+            </a:pPr>
+            <a:r>
+              <a:rPr sz="2000" dirty="0" err="1">
+                <a:solidFill>
+                  <a:srgbClr val="1F2D22"/>
+                </a:solidFill>
+                <a:latin typeface="ui-monospace"/>
+              </a:rPr>
+              <a:t>自我反思</a:t>
+            </a:r>
+            <a:endParaRPr sz="2000" dirty="0">
+              <a:solidFill>
+                <a:srgbClr val="1F2D22"/>
+              </a:solidFill>
+              <a:latin typeface="ui-monospace"/>
+            </a:endParaRPr>
+          </a:p>
+          <a:p>
+            <a:pPr algn="l">
+              <a:defRPr sz="1350" b="0">
+                <a:solidFill>
+                  <a:srgbClr val="1F2D22"/>
+                </a:solidFill>
+              </a:defRPr>
+            </a:pPr>
+            <a:r>
+              <a:rPr sz="2000" dirty="0" err="1">
+                <a:solidFill>
+                  <a:srgbClr val="1F2D22"/>
+                </a:solidFill>
+                <a:latin typeface="ui-monospace"/>
+              </a:rPr>
+              <a:t>答案校正</a:t>
+            </a:r>
+            <a:endParaRPr sz="2000" dirty="0">
+              <a:solidFill>
+                <a:srgbClr val="1F2D22"/>
+              </a:solidFill>
+              <a:latin typeface="ui-monospace"/>
+            </a:endParaRPr>
+          </a:p>
+        </p:txBody>
+      </p:sp>
+      <p:sp>
+        <p:nvSpPr>
+          <p:cNvPr id="10" name="矩形 9">
+            <a:extLst>
+              <a:ext uri="{FF2B5EF4-FFF2-40B4-BE49-F238E27FC236}">
+                <a16:creationId xmlns:a16="http://schemas.microsoft.com/office/drawing/2014/main" id="{E5C669DF-CAC4-4D06-92B2-8A85E452067E}"/>
+              </a:ext>
+            </a:extLst>
+          </p:cNvPr>
+          <p:cNvSpPr>
+            <a:spLocks noGrp="1"/>
+          </p:cNvSpPr>
+          <p:nvPr/>
+        </p:nvSpPr>
+        <p:spPr>
+          <a:xfrm>
+            <a:off x="2000250" y="3714750"/>
+            <a:ext cx="8191500" cy="1428750"/>
+          </a:xfrm>
+          <a:prstGeom prst="rect">
+            <a:avLst/>
+          </a:prstGeom>
+          <a:solidFill>
+            <a:srgbClr val="FFFFFF"/>
+          </a:solidFill>
+          <a:ln w="9525">
+            <a:solidFill>
+              <a:srgbClr val="C7D0C4"/>
+            </a:solidFill>
+            <a:prstDash val="solid"/>
+          </a:ln>
+        </p:spPr>
+      </p:sp>
+      <p:sp>
+        <p:nvSpPr>
+          <p:cNvPr id="11" name="矩形 10">
+            <a:extLst>
+              <a:ext uri="{FF2B5EF4-FFF2-40B4-BE49-F238E27FC236}">
+                <a16:creationId xmlns:a16="http://schemas.microsoft.com/office/drawing/2014/main" id="{AA327DB0-DBD6-42E5-85A2-3C88543BC4E9}"/>
+              </a:ext>
+            </a:extLst>
+          </p:cNvPr>
+          <p:cNvSpPr>
+            <a:spLocks noGrp="1"/>
+          </p:cNvSpPr>
+          <p:nvPr/>
+        </p:nvSpPr>
+        <p:spPr>
+          <a:xfrm>
+            <a:off x="2228850" y="3886200"/>
+            <a:ext cx="7734300" cy="323850"/>
+          </a:xfrm>
+          <a:prstGeom prst="rect">
+            <a:avLst/>
+          </a:prstGeom>
+          <a:solidFill>
+            <a:srgbClr val="000000">
+              <a:alpha val="0"/>
+            </a:srgbClr>
+          </a:solidFill>
+          <a:ln w="0">
+            <a:solidFill>
+              <a:srgbClr val="000000">
+                <a:alpha val="0"/>
+              </a:srgbClr>
+            </a:solidFill>
+            <a:prstDash val="solid"/>
+          </a:ln>
+        </p:spPr>
+        <p:txBody>
+          <a:bodyPr anchor="ctr"/>
+          <a:lstStyle/>
+          <a:p>
+            <a:pPr>
+              <a:defRPr sz="1650" b="1">
+                <a:solidFill>
+                  <a:srgbClr val="2D4A33"/>
+                </a:solidFill>
+              </a:defRPr>
+            </a:pPr>
+            <a:r>
+              <a:rPr sz="3200" b="1" dirty="0" err="1">
+                <a:solidFill>
+                  <a:srgbClr val="2D4A33"/>
+                </a:solidFill>
+              </a:rPr>
+              <a:t>结果</a:t>
+            </a:r>
+            <a:endParaRPr sz="3200" b="1" dirty="0">
+              <a:solidFill>
+                <a:srgbClr val="2D4A33"/>
+              </a:solidFill>
+            </a:endParaRPr>
+          </a:p>
+        </p:txBody>
+      </p:sp>
+      <p:sp>
+        <p:nvSpPr>
+          <p:cNvPr id="12" name="矩形 11">
+            <a:extLst>
+              <a:ext uri="{FF2B5EF4-FFF2-40B4-BE49-F238E27FC236}">
+                <a16:creationId xmlns:a16="http://schemas.microsoft.com/office/drawing/2014/main" id="{E7E24D30-F662-4C81-B43C-F0978EE590E4}"/>
+              </a:ext>
+            </a:extLst>
+          </p:cNvPr>
+          <p:cNvSpPr>
+            <a:spLocks noGrp="1"/>
+          </p:cNvSpPr>
+          <p:nvPr/>
+        </p:nvSpPr>
+        <p:spPr>
+          <a:xfrm>
+            <a:off x="2228850" y="4324350"/>
+            <a:ext cx="7734300" cy="666750"/>
+          </a:xfrm>
+          <a:prstGeom prst="rect">
+            <a:avLst/>
+          </a:prstGeom>
+          <a:solidFill>
+            <a:srgbClr val="000000">
+              <a:alpha val="0"/>
+            </a:srgbClr>
+          </a:solidFill>
+          <a:ln w="0">
+            <a:solidFill>
+              <a:srgbClr val="000000">
+                <a:alpha val="0"/>
+              </a:srgbClr>
+            </a:solidFill>
+            <a:prstDash val="solid"/>
+          </a:ln>
+        </p:spPr>
+        <p:txBody>
+          <a:bodyPr anchor="ctr"/>
+          <a:lstStyle/>
+          <a:p>
+            <a:pPr algn="l">
+              <a:defRPr sz="1350" b="0">
+                <a:solidFill>
+                  <a:srgbClr val="1F2D22"/>
+                </a:solidFill>
+              </a:defRPr>
+            </a:pPr>
+            <a:r>
               <a:rPr lang="zh-CN" altLang="en-US" sz="2000" dirty="0">
                 <a:solidFill>
                   <a:srgbClr val="1F2D22"/>
@@ -6578,7 +8016,7 @@
 </p:sld>
 </file>
 
-<file path=ppt/slides/slide13.xml><?xml version="1.0" encoding="utf-8"?>
+<file path=ppt/slides/slide16.xml><?xml version="1.0" encoding="utf-8"?>
 <p:sld xmlns:a="http://schemas.openxmlformats.org/drawingml/2006/main" xmlns:r="http://schemas.openxmlformats.org/officeDocument/2006/relationships" xmlns:p="http://schemas.openxmlformats.org/presentationml/2006/main">
   <p:cSld>
     <p:spTree>
@@ -7902,7 +9340,7 @@
                   <a:srgbClr val="1F2D22"/>
                 </a:solidFill>
               </a:rPr>
-              <a:t>项目环境开箱即用</a:t>
+              <a:t>消除部署过程中的环境依赖问题项目，环境开箱即用</a:t>
             </a:r>
             <a:endParaRPr lang="en-US" altLang="zh-CN" sz="1350" b="0" dirty="0">
               <a:solidFill>
@@ -7924,8 +9362,22 @@
                   <a:srgbClr val="1F2D22"/>
                 </a:solidFill>
               </a:rPr>
-              <a:t>模型开箱即用</a:t>
-            </a:r>
+              <a:t>嵌入模型和大语言模型开箱即用</a:t>
+            </a:r>
+            <a:endParaRPr lang="en-US" altLang="zh-CN" sz="1350" dirty="0">
+              <a:solidFill>
+                <a:srgbClr val="1F2D22"/>
+              </a:solidFill>
+            </a:endParaRPr>
+          </a:p>
+          <a:p>
+            <a:pPr algn="l">
+              <a:defRPr sz="1350" b="0">
+                <a:solidFill>
+                  <a:srgbClr val="1F2D22"/>
+                </a:solidFill>
+              </a:defRPr>
+            </a:pPr>
             <a:endParaRPr sz="1350" b="0" dirty="0">
               <a:solidFill>
                 <a:srgbClr val="1F2D22"/>
@@ -7943,6 +9395,492 @@
 </file>
 
 <file path=ppt/slides/slide5.xml><?xml version="1.0" encoding="utf-8"?>
+<p:sld xmlns:a="http://schemas.openxmlformats.org/drawingml/2006/main" xmlns:r="http://schemas.openxmlformats.org/officeDocument/2006/relationships" xmlns:p="http://schemas.openxmlformats.org/presentationml/2006/main">
+  <p:cSld>
+    <p:spTree>
+      <p:nvGrpSpPr>
+        <p:cNvPr id="1" name="">
+          <a:extLst>
+            <a:ext uri="{FF2B5EF4-FFF2-40B4-BE49-F238E27FC236}">
+              <a16:creationId xmlns:a16="http://schemas.microsoft.com/office/drawing/2014/main" id="{D8A84291-61E8-C166-69F2-55BED54446C9}"/>
+            </a:ext>
+          </a:extLst>
+        </p:cNvPr>
+        <p:cNvGrpSpPr/>
+        <p:nvPr/>
+      </p:nvGrpSpPr>
+      <p:grpSpPr>
+        <a:xfrm>
+          <a:off x="0" y="0"/>
+          <a:ext cx="0" cy="0"/>
+          <a:chOff x="0" y="0"/>
+          <a:chExt cx="0" cy="0"/>
+        </a:xfrm>
+      </p:grpSpPr>
+      <p:sp>
+        <p:nvSpPr>
+          <p:cNvPr id="13" name="矩形 12">
+            <a:extLst>
+              <a:ext uri="{FF2B5EF4-FFF2-40B4-BE49-F238E27FC236}">
+                <a16:creationId xmlns:a16="http://schemas.microsoft.com/office/drawing/2014/main" id="{3179BFBF-CB10-1515-9976-F4881809D019}"/>
+              </a:ext>
+            </a:extLst>
+          </p:cNvPr>
+          <p:cNvSpPr>
+            <a:spLocks noGrp="1"/>
+          </p:cNvSpPr>
+          <p:nvPr/>
+        </p:nvSpPr>
+        <p:spPr>
+          <a:xfrm>
+            <a:off x="0" y="0"/>
+            <a:ext cx="12192000" cy="114300"/>
+          </a:xfrm>
+          <a:prstGeom prst="rect">
+            <a:avLst/>
+          </a:prstGeom>
+          <a:solidFill>
+            <a:srgbClr val="2D4A33"/>
+          </a:solidFill>
+          <a:ln w="0">
+            <a:solidFill>
+              <a:srgbClr val="2D4A33"/>
+            </a:solidFill>
+            <a:prstDash val="solid"/>
+          </a:ln>
+        </p:spPr>
+      </p:sp>
+      <p:sp>
+        <p:nvSpPr>
+          <p:cNvPr id="2" name="矩形 1">
+            <a:extLst>
+              <a:ext uri="{FF2B5EF4-FFF2-40B4-BE49-F238E27FC236}">
+                <a16:creationId xmlns:a16="http://schemas.microsoft.com/office/drawing/2014/main" id="{C15BD8E1-4A07-86F8-A24B-DD8AA200120B}"/>
+              </a:ext>
+            </a:extLst>
+          </p:cNvPr>
+          <p:cNvSpPr>
+            <a:spLocks noGrp="1"/>
+          </p:cNvSpPr>
+          <p:nvPr/>
+        </p:nvSpPr>
+        <p:spPr>
+          <a:xfrm>
+            <a:off x="762000" y="400050"/>
+            <a:ext cx="10668000" cy="457200"/>
+          </a:xfrm>
+          <a:prstGeom prst="rect">
+            <a:avLst/>
+          </a:prstGeom>
+          <a:solidFill>
+            <a:srgbClr val="000000">
+              <a:alpha val="0"/>
+            </a:srgbClr>
+          </a:solidFill>
+          <a:ln w="0">
+            <a:solidFill>
+              <a:srgbClr val="000000">
+                <a:alpha val="0"/>
+              </a:srgbClr>
+            </a:solidFill>
+            <a:prstDash val="solid"/>
+          </a:ln>
+        </p:spPr>
+        <p:txBody>
+          <a:bodyPr anchor="ctr"/>
+          <a:lstStyle/>
+          <a:p>
+            <a:pPr algn="ctr">
+              <a:defRPr sz="2550" b="1">
+                <a:solidFill>
+                  <a:srgbClr val="2D4A33"/>
+                </a:solidFill>
+              </a:defRPr>
+            </a:pPr>
+            <a:r>
+              <a:rPr lang="zh-CN" altLang="en-US" sz="2550" b="1" dirty="0">
+                <a:solidFill>
+                  <a:srgbClr val="2D4A33"/>
+                </a:solidFill>
+              </a:rPr>
+              <a:t>项目界面演示</a:t>
+            </a:r>
+            <a:endParaRPr sz="2550" b="1" dirty="0">
+              <a:solidFill>
+                <a:srgbClr val="2D4A33"/>
+              </a:solidFill>
+            </a:endParaRPr>
+          </a:p>
+        </p:txBody>
+      </p:sp>
+      <p:pic>
+        <p:nvPicPr>
+          <p:cNvPr id="7" name="图片 6">
+            <a:extLst>
+              <a:ext uri="{FF2B5EF4-FFF2-40B4-BE49-F238E27FC236}">
+                <a16:creationId xmlns:a16="http://schemas.microsoft.com/office/drawing/2014/main" id="{D8572E09-49AE-C729-E7F9-134B225BFBE4}"/>
+              </a:ext>
+            </a:extLst>
+          </p:cNvPr>
+          <p:cNvPicPr>
+            <a:picLocks noChangeAspect="1"/>
+          </p:cNvPicPr>
+          <p:nvPr/>
+        </p:nvPicPr>
+        <p:blipFill>
+          <a:blip r:embed="rId3"/>
+          <a:stretch>
+            <a:fillRect/>
+          </a:stretch>
+        </p:blipFill>
+        <p:spPr>
+          <a:xfrm>
+            <a:off x="829632" y="857250"/>
+            <a:ext cx="10532736" cy="5805413"/>
+          </a:xfrm>
+          <a:prstGeom prst="rect">
+            <a:avLst/>
+          </a:prstGeom>
+        </p:spPr>
+      </p:pic>
+    </p:spTree>
+    <p:extLst>
+      <p:ext uri="{BB962C8B-B14F-4D97-AF65-F5344CB8AC3E}">
+        <p14:creationId xmlns:p14="http://schemas.microsoft.com/office/powerpoint/2010/main" val="1740664248"/>
+      </p:ext>
+    </p:extLst>
+  </p:cSld>
+  <p:clrMapOvr>
+    <a:masterClrMapping/>
+  </p:clrMapOvr>
+</p:sld>
+</file>
+
+<file path=ppt/slides/slide6.xml><?xml version="1.0" encoding="utf-8"?>
+<p:sld xmlns:a="http://schemas.openxmlformats.org/drawingml/2006/main" xmlns:r="http://schemas.openxmlformats.org/officeDocument/2006/relationships" xmlns:p="http://schemas.openxmlformats.org/presentationml/2006/main">
+  <p:cSld>
+    <p:spTree>
+      <p:nvGrpSpPr>
+        <p:cNvPr id="1" name="">
+          <a:extLst>
+            <a:ext uri="{FF2B5EF4-FFF2-40B4-BE49-F238E27FC236}">
+              <a16:creationId xmlns:a16="http://schemas.microsoft.com/office/drawing/2014/main" id="{1704B2DA-E618-2815-E839-C9B5B095ED5F}"/>
+            </a:ext>
+          </a:extLst>
+        </p:cNvPr>
+        <p:cNvGrpSpPr/>
+        <p:nvPr/>
+      </p:nvGrpSpPr>
+      <p:grpSpPr>
+        <a:xfrm>
+          <a:off x="0" y="0"/>
+          <a:ext cx="0" cy="0"/>
+          <a:chOff x="0" y="0"/>
+          <a:chExt cx="0" cy="0"/>
+        </a:xfrm>
+      </p:grpSpPr>
+      <p:sp>
+        <p:nvSpPr>
+          <p:cNvPr id="13" name="矩形 12">
+            <a:extLst>
+              <a:ext uri="{FF2B5EF4-FFF2-40B4-BE49-F238E27FC236}">
+                <a16:creationId xmlns:a16="http://schemas.microsoft.com/office/drawing/2014/main" id="{E6E9BBE4-51BA-CCE7-EB4F-177E7A10C672}"/>
+              </a:ext>
+            </a:extLst>
+          </p:cNvPr>
+          <p:cNvSpPr>
+            <a:spLocks noGrp="1"/>
+          </p:cNvSpPr>
+          <p:nvPr/>
+        </p:nvSpPr>
+        <p:spPr>
+          <a:xfrm>
+            <a:off x="0" y="0"/>
+            <a:ext cx="12192000" cy="114300"/>
+          </a:xfrm>
+          <a:prstGeom prst="rect">
+            <a:avLst/>
+          </a:prstGeom>
+          <a:solidFill>
+            <a:srgbClr val="2D4A33"/>
+          </a:solidFill>
+          <a:ln w="0">
+            <a:solidFill>
+              <a:srgbClr val="2D4A33"/>
+            </a:solidFill>
+            <a:prstDash val="solid"/>
+          </a:ln>
+        </p:spPr>
+      </p:sp>
+      <p:sp>
+        <p:nvSpPr>
+          <p:cNvPr id="2" name="矩形 1">
+            <a:extLst>
+              <a:ext uri="{FF2B5EF4-FFF2-40B4-BE49-F238E27FC236}">
+                <a16:creationId xmlns:a16="http://schemas.microsoft.com/office/drawing/2014/main" id="{05F6FC7A-C110-D682-D687-CA93D2D5128F}"/>
+              </a:ext>
+            </a:extLst>
+          </p:cNvPr>
+          <p:cNvSpPr>
+            <a:spLocks noGrp="1"/>
+          </p:cNvSpPr>
+          <p:nvPr/>
+        </p:nvSpPr>
+        <p:spPr>
+          <a:xfrm>
+            <a:off x="762000" y="400050"/>
+            <a:ext cx="10668000" cy="457200"/>
+          </a:xfrm>
+          <a:prstGeom prst="rect">
+            <a:avLst/>
+          </a:prstGeom>
+          <a:solidFill>
+            <a:srgbClr val="000000">
+              <a:alpha val="0"/>
+            </a:srgbClr>
+          </a:solidFill>
+          <a:ln w="0">
+            <a:solidFill>
+              <a:srgbClr val="000000">
+                <a:alpha val="0"/>
+              </a:srgbClr>
+            </a:solidFill>
+            <a:prstDash val="solid"/>
+          </a:ln>
+        </p:spPr>
+        <p:txBody>
+          <a:bodyPr anchor="ctr"/>
+          <a:lstStyle/>
+          <a:p>
+            <a:pPr algn="ctr">
+              <a:defRPr sz="2550" b="1">
+                <a:solidFill>
+                  <a:srgbClr val="2D4A33"/>
+                </a:solidFill>
+              </a:defRPr>
+            </a:pPr>
+            <a:r>
+              <a:rPr lang="zh-CN" altLang="en-US" sz="2550" b="1" dirty="0">
+                <a:solidFill>
+                  <a:srgbClr val="2D4A33"/>
+                </a:solidFill>
+              </a:rPr>
+              <a:t>嵌入模型演示</a:t>
+            </a:r>
+            <a:endParaRPr sz="2550" b="1" dirty="0">
+              <a:solidFill>
+                <a:srgbClr val="2D4A33"/>
+              </a:solidFill>
+            </a:endParaRPr>
+          </a:p>
+        </p:txBody>
+      </p:sp>
+      <p:pic>
+        <p:nvPicPr>
+          <p:cNvPr id="4" name="图片 3">
+            <a:extLst>
+              <a:ext uri="{FF2B5EF4-FFF2-40B4-BE49-F238E27FC236}">
+                <a16:creationId xmlns:a16="http://schemas.microsoft.com/office/drawing/2014/main" id="{EE3AC917-7EA2-BE82-F887-25B14163A995}"/>
+              </a:ext>
+            </a:extLst>
+          </p:cNvPr>
+          <p:cNvPicPr>
+            <a:picLocks noChangeAspect="1"/>
+          </p:cNvPicPr>
+          <p:nvPr/>
+        </p:nvPicPr>
+        <p:blipFill>
+          <a:blip r:embed="rId3"/>
+          <a:stretch>
+            <a:fillRect/>
+          </a:stretch>
+        </p:blipFill>
+        <p:spPr>
+          <a:xfrm>
+            <a:off x="890984" y="857250"/>
+            <a:ext cx="10410032" cy="5737781"/>
+          </a:xfrm>
+          <a:prstGeom prst="rect">
+            <a:avLst/>
+          </a:prstGeom>
+        </p:spPr>
+      </p:pic>
+    </p:spTree>
+    <p:extLst>
+      <p:ext uri="{BB962C8B-B14F-4D97-AF65-F5344CB8AC3E}">
+        <p14:creationId xmlns:p14="http://schemas.microsoft.com/office/powerpoint/2010/main" val="1908367782"/>
+      </p:ext>
+    </p:extLst>
+  </p:cSld>
+  <p:clrMapOvr>
+    <a:masterClrMapping/>
+  </p:clrMapOvr>
+</p:sld>
+</file>
+
+<file path=ppt/slides/slide7.xml><?xml version="1.0" encoding="utf-8"?>
+<p:sld xmlns:a="http://schemas.openxmlformats.org/drawingml/2006/main" xmlns:r="http://schemas.openxmlformats.org/officeDocument/2006/relationships" xmlns:p="http://schemas.openxmlformats.org/presentationml/2006/main">
+  <p:cSld>
+    <p:spTree>
+      <p:nvGrpSpPr>
+        <p:cNvPr id="1" name="">
+          <a:extLst>
+            <a:ext uri="{FF2B5EF4-FFF2-40B4-BE49-F238E27FC236}">
+              <a16:creationId xmlns:a16="http://schemas.microsoft.com/office/drawing/2014/main" id="{B20DDB41-2C70-E31A-AD40-785BA3B9D98A}"/>
+            </a:ext>
+          </a:extLst>
+        </p:cNvPr>
+        <p:cNvGrpSpPr/>
+        <p:nvPr/>
+      </p:nvGrpSpPr>
+      <p:grpSpPr>
+        <a:xfrm>
+          <a:off x="0" y="0"/>
+          <a:ext cx="0" cy="0"/>
+          <a:chOff x="0" y="0"/>
+          <a:chExt cx="0" cy="0"/>
+        </a:xfrm>
+      </p:grpSpPr>
+      <p:sp>
+        <p:nvSpPr>
+          <p:cNvPr id="13" name="矩形 12">
+            <a:extLst>
+              <a:ext uri="{FF2B5EF4-FFF2-40B4-BE49-F238E27FC236}">
+                <a16:creationId xmlns:a16="http://schemas.microsoft.com/office/drawing/2014/main" id="{97D67701-D833-E84C-260A-E4253B545D62}"/>
+              </a:ext>
+            </a:extLst>
+          </p:cNvPr>
+          <p:cNvSpPr>
+            <a:spLocks noGrp="1"/>
+          </p:cNvSpPr>
+          <p:nvPr/>
+        </p:nvSpPr>
+        <p:spPr>
+          <a:xfrm>
+            <a:off x="0" y="0"/>
+            <a:ext cx="12192000" cy="114300"/>
+          </a:xfrm>
+          <a:prstGeom prst="rect">
+            <a:avLst/>
+          </a:prstGeom>
+          <a:solidFill>
+            <a:srgbClr val="2D4A33"/>
+          </a:solidFill>
+          <a:ln w="0">
+            <a:solidFill>
+              <a:srgbClr val="2D4A33"/>
+            </a:solidFill>
+            <a:prstDash val="solid"/>
+          </a:ln>
+        </p:spPr>
+      </p:sp>
+      <p:sp>
+        <p:nvSpPr>
+          <p:cNvPr id="2" name="矩形 1">
+            <a:extLst>
+              <a:ext uri="{FF2B5EF4-FFF2-40B4-BE49-F238E27FC236}">
+                <a16:creationId xmlns:a16="http://schemas.microsoft.com/office/drawing/2014/main" id="{DC5312F8-9F62-B5C1-5D8F-50AB97A0633D}"/>
+              </a:ext>
+            </a:extLst>
+          </p:cNvPr>
+          <p:cNvSpPr>
+            <a:spLocks noGrp="1"/>
+          </p:cNvSpPr>
+          <p:nvPr/>
+        </p:nvSpPr>
+        <p:spPr>
+          <a:xfrm>
+            <a:off x="762000" y="400050"/>
+            <a:ext cx="10668000" cy="457200"/>
+          </a:xfrm>
+          <a:prstGeom prst="rect">
+            <a:avLst/>
+          </a:prstGeom>
+          <a:solidFill>
+            <a:srgbClr val="000000">
+              <a:alpha val="0"/>
+            </a:srgbClr>
+          </a:solidFill>
+          <a:ln w="0">
+            <a:solidFill>
+              <a:srgbClr val="000000">
+                <a:alpha val="0"/>
+              </a:srgbClr>
+            </a:solidFill>
+            <a:prstDash val="solid"/>
+          </a:ln>
+        </p:spPr>
+        <p:txBody>
+          <a:bodyPr anchor="ctr"/>
+          <a:lstStyle/>
+          <a:p>
+            <a:pPr algn="ctr">
+              <a:defRPr sz="2550" b="1">
+                <a:solidFill>
+                  <a:srgbClr val="2D4A33"/>
+                </a:solidFill>
+              </a:defRPr>
+            </a:pPr>
+            <a:r>
+              <a:rPr lang="zh-CN" altLang="en-US" sz="2550" b="1" dirty="0">
+                <a:solidFill>
+                  <a:srgbClr val="2D4A33"/>
+                </a:solidFill>
+              </a:rPr>
+              <a:t>大模型生成演示</a:t>
+            </a:r>
+            <a:endParaRPr sz="2550" b="1" dirty="0">
+              <a:solidFill>
+                <a:srgbClr val="2D4A33"/>
+              </a:solidFill>
+            </a:endParaRPr>
+          </a:p>
+        </p:txBody>
+      </p:sp>
+      <p:pic>
+        <p:nvPicPr>
+          <p:cNvPr id="7" name="图片 6">
+            <a:extLst>
+              <a:ext uri="{FF2B5EF4-FFF2-40B4-BE49-F238E27FC236}">
+                <a16:creationId xmlns:a16="http://schemas.microsoft.com/office/drawing/2014/main" id="{BABF733A-23C1-BBFD-1BC0-14678D180FB2}"/>
+              </a:ext>
+            </a:extLst>
+          </p:cNvPr>
+          <p:cNvPicPr>
+            <a:picLocks noChangeAspect="1"/>
+          </p:cNvPicPr>
+          <p:nvPr/>
+        </p:nvPicPr>
+        <p:blipFill>
+          <a:blip r:embed="rId3"/>
+          <a:stretch>
+            <a:fillRect/>
+          </a:stretch>
+        </p:blipFill>
+        <p:spPr>
+          <a:xfrm>
+            <a:off x="1320582" y="857250"/>
+            <a:ext cx="9550836" cy="5263193"/>
+          </a:xfrm>
+          <a:prstGeom prst="rect">
+            <a:avLst/>
+          </a:prstGeom>
+        </p:spPr>
+      </p:pic>
+    </p:spTree>
+    <p:extLst>
+      <p:ext uri="{BB962C8B-B14F-4D97-AF65-F5344CB8AC3E}">
+        <p14:creationId xmlns:p14="http://schemas.microsoft.com/office/powerpoint/2010/main" val="2461346215"/>
+      </p:ext>
+    </p:extLst>
+  </p:cSld>
+  <p:clrMapOvr>
+    <a:masterClrMapping/>
+  </p:clrMapOvr>
+</p:sld>
+</file>
+
+<file path=ppt/slides/slide8.xml><?xml version="1.0" encoding="utf-8"?>
 <p:sld xmlns:a="http://schemas.openxmlformats.org/drawingml/2006/main" xmlns:r="http://schemas.openxmlformats.org/officeDocument/2006/relationships" xmlns:p="http://schemas.openxmlformats.org/presentationml/2006/main">
   <p:cSld>
     <p:bg>
@@ -8085,7 +10023,7 @@
 </p:sld>
 </file>
 
-<file path=ppt/slides/slide6.xml><?xml version="1.0" encoding="utf-8"?>
+<file path=ppt/slides/slide9.xml><?xml version="1.0" encoding="utf-8"?>
 <p:sld xmlns:a="http://schemas.openxmlformats.org/drawingml/2006/main" xmlns:r="http://schemas.openxmlformats.org/officeDocument/2006/relationships" xmlns:p="http://schemas.openxmlformats.org/presentationml/2006/main">
   <p:cSld>
     <p:spTree>
@@ -9060,1129 +10998,6 @@
         </p:txBody>
       </p:sp>
     </p:spTree>
-  </p:cSld>
-  <p:clrMapOvr>
-    <a:masterClrMapping/>
-  </p:clrMapOvr>
-</p:sld>
-</file>
-
-<file path=ppt/slides/slide7.xml><?xml version="1.0" encoding="utf-8"?>
-<p:sld xmlns:a="http://schemas.openxmlformats.org/drawingml/2006/main" xmlns:r="http://schemas.openxmlformats.org/officeDocument/2006/relationships" xmlns:p="http://schemas.openxmlformats.org/presentationml/2006/main">
-  <p:cSld>
-    <p:bg>
-      <p:bgPr>
-        <a:solidFill>
-          <a:srgbClr val="253A2A"/>
-        </a:solidFill>
-        <a:effectLst/>
-      </p:bgPr>
-    </p:bg>
-    <p:spTree>
-      <p:nvGrpSpPr>
-        <p:cNvPr id="1" name=""/>
-        <p:cNvGrpSpPr/>
-        <p:nvPr/>
-      </p:nvGrpSpPr>
-      <p:grpSpPr>
-        <a:xfrm>
-          <a:off x="0" y="0"/>
-          <a:ext cx="0" cy="0"/>
-          <a:chOff x="0" y="0"/>
-          <a:chExt cx="0" cy="0"/>
-        </a:xfrm>
-      </p:grpSpPr>
-      <p:sp>
-        <p:nvSpPr>
-          <p:cNvPr id="11" name="文本框 10">
-            <a:extLst>
-              <a:ext uri="{FF2B5EF4-FFF2-40B4-BE49-F238E27FC236}">
-                <a16:creationId xmlns:a16="http://schemas.microsoft.com/office/drawing/2014/main" id="{642171A4-C23A-4145-BED1-2E8834D0E5B1}"/>
-              </a:ext>
-            </a:extLst>
-          </p:cNvPr>
-          <p:cNvSpPr>
-            <a:spLocks noGrp="1"/>
-          </p:cNvSpPr>
-          <p:nvPr/>
-        </p:nvSpPr>
-        <p:spPr>
-          <a:xfrm>
-            <a:off x="2614979" y="2321005"/>
-            <a:ext cx="2604077" cy="2215991"/>
-          </a:xfrm>
-          <a:prstGeom prst="rect">
-            <a:avLst/>
-          </a:prstGeom>
-          <a:noFill/>
-        </p:spPr>
-        <p:txBody>
-          <a:bodyPr wrap="square">
-            <a:spAutoFit/>
-          </a:bodyPr>
-          <a:lstStyle/>
-          <a:p>
-            <a:pPr marL="0" marR="0" lvl="0" indent="0" algn="ctr" defTabSz="914400" eaLnBrk="1" fontAlgn="auto" latinLnBrk="0" hangingPunct="1">
-              <a:lnSpc>
-                <a:spcPct val="100000"/>
-              </a:lnSpc>
-              <a:spcBef>
-                <a:spcPts val="0"/>
-              </a:spcBef>
-              <a:spcAft>
-                <a:spcPts val="0"/>
-              </a:spcAft>
-              <a:buClrTx/>
-              <a:buSzTx/>
-              <a:buFontTx/>
-              <a:buNone/>
-              <a:tabLst/>
-              <a:defRPr/>
-            </a:pPr>
-            <a:r>
-              <a:rPr kumimoji="0" sz="13800" b="0" i="0" u="none" strike="noStrike" kern="1200" cap="none" spc="0" normalizeH="0" baseline="0" noProof="0" dirty="0">
-                <a:ln>
-                  <a:noFill/>
-                </a:ln>
-                <a:solidFill>
-                  <a:srgbClr val="F5F4F9"/>
-                </a:solidFill>
-                <a:effectLst/>
-                <a:uLnTx/>
-                <a:uFillTx/>
-                <a:latin typeface="Arial"/>
-                <a:ea typeface="STZhongsong"/>
-                <a:cs typeface="+mn-cs"/>
-              </a:rPr>
-              <a:t>0</a:t>
-            </a:r>
-            <a:r>
-              <a:rPr lang="en-US" sz="13800" dirty="0">
-                <a:solidFill>
-                  <a:srgbClr val="F5F4F9"/>
-                </a:solidFill>
-                <a:latin typeface="Arial"/>
-                <a:ea typeface="STZhongsong"/>
-              </a:rPr>
-              <a:t>4</a:t>
-            </a:r>
-            <a:endParaRPr kumimoji="0" sz="13800" b="0" i="0" u="none" strike="noStrike" kern="1200" cap="none" spc="0" normalizeH="0" baseline="0" noProof="0" dirty="0">
-              <a:ln>
-                <a:noFill/>
-              </a:ln>
-              <a:solidFill>
-                <a:srgbClr val="F5F4F9"/>
-              </a:solidFill>
-              <a:effectLst/>
-              <a:uLnTx/>
-              <a:uFillTx/>
-              <a:latin typeface="Arial"/>
-              <a:ea typeface="STZhongsong"/>
-              <a:cs typeface="+mn-cs"/>
-            </a:endParaRPr>
-          </a:p>
-        </p:txBody>
-      </p:sp>
-      <p:sp>
-        <p:nvSpPr>
-          <p:cNvPr id="13" name="矩形 12">
-            <a:extLst>
-              <a:ext uri="{FF2B5EF4-FFF2-40B4-BE49-F238E27FC236}">
-                <a16:creationId xmlns:a16="http://schemas.microsoft.com/office/drawing/2014/main" id="{638E2919-D9D9-4496-93DC-FD75812F9CF1}"/>
-              </a:ext>
-            </a:extLst>
-          </p:cNvPr>
-          <p:cNvSpPr>
-            <a:spLocks noGrp="1"/>
-          </p:cNvSpPr>
-          <p:nvPr/>
-        </p:nvSpPr>
-        <p:spPr>
-          <a:xfrm>
-            <a:off x="6331761" y="2685166"/>
-            <a:ext cx="2262159" cy="923330"/>
-          </a:xfrm>
-          <a:prstGeom prst="rect">
-            <a:avLst/>
-          </a:prstGeom>
-        </p:spPr>
-        <p:txBody>
-          <a:bodyPr wrap="none">
-            <a:spAutoFit/>
-          </a:bodyPr>
-          <a:lstStyle/>
-          <a:p>
-            <a:pPr marL="0" marR="0" lvl="0" indent="0" algn="ctr" defTabSz="914400" eaLnBrk="1" fontAlgn="auto" latinLnBrk="0" hangingPunct="1">
-              <a:lnSpc>
-                <a:spcPct val="100000"/>
-              </a:lnSpc>
-              <a:spcBef>
-                <a:spcPts val="0"/>
-              </a:spcBef>
-              <a:spcAft>
-                <a:spcPts val="0"/>
-              </a:spcAft>
-              <a:buClrTx/>
-              <a:buSzTx/>
-              <a:buFontTx/>
-              <a:buNone/>
-              <a:tabLst/>
-              <a:defRPr/>
-            </a:pPr>
-            <a:r>
-              <a:rPr kumimoji="0" lang="zh-CN" altLang="en-US" sz="5400" b="1" i="0" u="none" strike="noStrike" kern="1200" cap="none" spc="0" normalizeH="0" baseline="0" noProof="0" dirty="0">
-                <a:ln>
-                  <a:noFill/>
-                </a:ln>
-                <a:solidFill>
-                  <a:prstClr val="white"/>
-                </a:solidFill>
-                <a:effectLst/>
-                <a:uLnTx/>
-                <a:uFillTx/>
-                <a:latin typeface="Arial"/>
-                <a:ea typeface="STZhongsong"/>
-                <a:cs typeface="+mn-cs"/>
-              </a:rPr>
-              <a:t>李嘉轩</a:t>
-            </a:r>
-            <a:endParaRPr kumimoji="0" sz="5400" b="1" i="0" u="none" strike="noStrike" kern="1200" cap="none" spc="0" normalizeH="0" baseline="0" noProof="0" dirty="0">
-              <a:ln>
-                <a:noFill/>
-              </a:ln>
-              <a:solidFill>
-                <a:prstClr val="white"/>
-              </a:solidFill>
-              <a:effectLst/>
-              <a:uLnTx/>
-              <a:uFillTx/>
-              <a:latin typeface="Arial"/>
-              <a:ea typeface="STZhongsong"/>
-              <a:cs typeface="+mn-cs"/>
-            </a:endParaRPr>
-          </a:p>
-        </p:txBody>
-      </p:sp>
-    </p:spTree>
-    <p:extLst>
-      <p:ext uri="{BB962C8B-B14F-4D97-AF65-F5344CB8AC3E}">
-        <p14:creationId xmlns:p14="http://schemas.microsoft.com/office/powerpoint/2010/main" val="2232598541"/>
-      </p:ext>
-    </p:extLst>
-  </p:cSld>
-  <p:clrMapOvr>
-    <a:masterClrMapping/>
-  </p:clrMapOvr>
-</p:sld>
-</file>
-
-<file path=ppt/slides/slide8.xml><?xml version="1.0" encoding="utf-8"?>
-<p:sld xmlns:a="http://schemas.openxmlformats.org/drawingml/2006/main" xmlns:r="http://schemas.openxmlformats.org/officeDocument/2006/relationships" xmlns:p="http://schemas.openxmlformats.org/presentationml/2006/main">
-  <p:cSld>
-    <p:spTree>
-      <p:nvGrpSpPr>
-        <p:cNvPr id="1" name=""/>
-        <p:cNvGrpSpPr/>
-        <p:nvPr/>
-      </p:nvGrpSpPr>
-      <p:grpSpPr>
-        <a:xfrm>
-          <a:off x="0" y="0"/>
-          <a:ext cx="0" cy="0"/>
-          <a:chOff x="0" y="0"/>
-          <a:chExt cx="0" cy="0"/>
-        </a:xfrm>
-      </p:grpSpPr>
-      <p:sp>
-        <p:nvSpPr>
-          <p:cNvPr id="13" name="矩形 12">
-            <a:extLst>
-              <a:ext uri="{FF2B5EF4-FFF2-40B4-BE49-F238E27FC236}">
-                <a16:creationId xmlns:a16="http://schemas.microsoft.com/office/drawing/2014/main" id="{0AE95B23-90A2-47EB-9DB0-EF921EB2D2A6}"/>
-              </a:ext>
-            </a:extLst>
-          </p:cNvPr>
-          <p:cNvSpPr>
-            <a:spLocks noGrp="1"/>
-          </p:cNvSpPr>
-          <p:nvPr/>
-        </p:nvSpPr>
-        <p:spPr>
-          <a:xfrm>
-            <a:off x="0" y="0"/>
-            <a:ext cx="12192000" cy="114300"/>
-          </a:xfrm>
-          <a:prstGeom prst="rect">
-            <a:avLst/>
-          </a:prstGeom>
-          <a:solidFill>
-            <a:srgbClr val="2D4A33"/>
-          </a:solidFill>
-          <a:ln w="0">
-            <a:solidFill>
-              <a:srgbClr val="2D4A33"/>
-            </a:solidFill>
-            <a:prstDash val="solid"/>
-          </a:ln>
-        </p:spPr>
-      </p:sp>
-      <p:sp>
-        <p:nvSpPr>
-          <p:cNvPr id="2" name="矩形 1">
-            <a:extLst>
-              <a:ext uri="{FF2B5EF4-FFF2-40B4-BE49-F238E27FC236}">
-                <a16:creationId xmlns:a16="http://schemas.microsoft.com/office/drawing/2014/main" id="{6C42F653-EC31-48A4-A29A-2DDE93A0D539}"/>
-              </a:ext>
-            </a:extLst>
-          </p:cNvPr>
-          <p:cNvSpPr>
-            <a:spLocks noGrp="1"/>
-          </p:cNvSpPr>
-          <p:nvPr/>
-        </p:nvSpPr>
-        <p:spPr>
-          <a:xfrm>
-            <a:off x="762000" y="400050"/>
-            <a:ext cx="10668000" cy="457200"/>
-          </a:xfrm>
-          <a:prstGeom prst="rect">
-            <a:avLst/>
-          </a:prstGeom>
-          <a:solidFill>
-            <a:srgbClr val="000000">
-              <a:alpha val="0"/>
-            </a:srgbClr>
-          </a:solidFill>
-          <a:ln w="0">
-            <a:solidFill>
-              <a:srgbClr val="000000">
-                <a:alpha val="0"/>
-              </a:srgbClr>
-            </a:solidFill>
-            <a:prstDash val="solid"/>
-          </a:ln>
-        </p:spPr>
-        <p:txBody>
-          <a:bodyPr anchor="ctr"/>
-          <a:lstStyle/>
-          <a:p>
-            <a:pPr algn="ctr">
-              <a:defRPr sz="2550" b="1">
-                <a:solidFill>
-                  <a:srgbClr val="2D4A33"/>
-                </a:solidFill>
-              </a:defRPr>
-            </a:pPr>
-            <a:r>
-              <a:rPr lang="zh-CN" altLang="en-US" sz="2550" b="1" dirty="0">
-                <a:solidFill>
-                  <a:srgbClr val="2D4A33"/>
-                </a:solidFill>
-              </a:rPr>
-              <a:t>李嘉轩</a:t>
-            </a:r>
-            <a:endParaRPr sz="2550" b="1" dirty="0">
-              <a:solidFill>
-                <a:srgbClr val="2D4A33"/>
-              </a:solidFill>
-            </a:endParaRPr>
-          </a:p>
-        </p:txBody>
-      </p:sp>
-      <p:sp>
-        <p:nvSpPr>
-          <p:cNvPr id="4" name="矩形 3">
-            <a:extLst>
-              <a:ext uri="{FF2B5EF4-FFF2-40B4-BE49-F238E27FC236}">
-                <a16:creationId xmlns:a16="http://schemas.microsoft.com/office/drawing/2014/main" id="{7BD7F060-279B-476B-ADD0-60F9D22D690F}"/>
-              </a:ext>
-            </a:extLst>
-          </p:cNvPr>
-          <p:cNvSpPr>
-            <a:spLocks noGrp="1"/>
-          </p:cNvSpPr>
-          <p:nvPr/>
-        </p:nvSpPr>
-        <p:spPr>
-          <a:xfrm>
-            <a:off x="1498600" y="1481665"/>
-            <a:ext cx="9465733" cy="2057401"/>
-          </a:xfrm>
-          <a:prstGeom prst="rect">
-            <a:avLst/>
-          </a:prstGeom>
-          <a:solidFill>
-            <a:srgbClr val="FFFFFF"/>
-          </a:solidFill>
-          <a:ln w="9525">
-            <a:solidFill>
-              <a:srgbClr val="C7D0C4"/>
-            </a:solidFill>
-            <a:prstDash val="solid"/>
-          </a:ln>
-        </p:spPr>
-      </p:sp>
-      <p:sp>
-        <p:nvSpPr>
-          <p:cNvPr id="5" name="矩形 4">
-            <a:extLst>
-              <a:ext uri="{FF2B5EF4-FFF2-40B4-BE49-F238E27FC236}">
-                <a16:creationId xmlns:a16="http://schemas.microsoft.com/office/drawing/2014/main" id="{B5B9DCD3-3DCB-492D-A18F-7F83A194A750}"/>
-              </a:ext>
-            </a:extLst>
-          </p:cNvPr>
-          <p:cNvSpPr>
-            <a:spLocks noGrp="1"/>
-          </p:cNvSpPr>
-          <p:nvPr/>
-        </p:nvSpPr>
-        <p:spPr>
-          <a:xfrm>
-            <a:off x="1634067" y="1678782"/>
-            <a:ext cx="4305300" cy="323850"/>
-          </a:xfrm>
-          <a:prstGeom prst="rect">
-            <a:avLst/>
-          </a:prstGeom>
-          <a:solidFill>
-            <a:srgbClr val="000000">
-              <a:alpha val="0"/>
-            </a:srgbClr>
-          </a:solidFill>
-          <a:ln w="0">
-            <a:solidFill>
-              <a:srgbClr val="000000">
-                <a:alpha val="0"/>
-              </a:srgbClr>
-            </a:solidFill>
-            <a:prstDash val="solid"/>
-          </a:ln>
-        </p:spPr>
-        <p:txBody>
-          <a:bodyPr anchor="ctr"/>
-          <a:lstStyle/>
-          <a:p>
-            <a:pPr algn="l">
-              <a:defRPr sz="1650" b="1">
-                <a:solidFill>
-                  <a:srgbClr val="2D4A33"/>
-                </a:solidFill>
-              </a:defRPr>
-            </a:pPr>
-            <a:r>
-              <a:rPr lang="zh-CN" altLang="en-US" sz="3200" b="1" dirty="0">
-                <a:solidFill>
-                  <a:srgbClr val="2D4A33"/>
-                </a:solidFill>
-              </a:rPr>
-              <a:t>文件解析</a:t>
-            </a:r>
-            <a:endParaRPr sz="3200" b="1" dirty="0">
-              <a:solidFill>
-                <a:srgbClr val="2D4A33"/>
-              </a:solidFill>
-            </a:endParaRPr>
-          </a:p>
-        </p:txBody>
-      </p:sp>
-      <p:sp>
-        <p:nvSpPr>
-          <p:cNvPr id="6" name="矩形 5">
-            <a:extLst>
-              <a:ext uri="{FF2B5EF4-FFF2-40B4-BE49-F238E27FC236}">
-                <a16:creationId xmlns:a16="http://schemas.microsoft.com/office/drawing/2014/main" id="{47E76C44-57B2-4BCD-969D-2F43D77383C3}"/>
-              </a:ext>
-            </a:extLst>
-          </p:cNvPr>
-          <p:cNvSpPr>
-            <a:spLocks noGrp="1"/>
-          </p:cNvSpPr>
-          <p:nvPr/>
-        </p:nvSpPr>
-        <p:spPr>
-          <a:xfrm>
-            <a:off x="1634067" y="2091531"/>
-            <a:ext cx="9059333" cy="1358635"/>
-          </a:xfrm>
-          <a:prstGeom prst="rect">
-            <a:avLst/>
-          </a:prstGeom>
-          <a:solidFill>
-            <a:srgbClr val="000000">
-              <a:alpha val="0"/>
-            </a:srgbClr>
-          </a:solidFill>
-          <a:ln w="0">
-            <a:solidFill>
-              <a:srgbClr val="000000">
-                <a:alpha val="0"/>
-              </a:srgbClr>
-            </a:solidFill>
-            <a:prstDash val="solid"/>
-          </a:ln>
-        </p:spPr>
-        <p:txBody>
-          <a:bodyPr anchor="ctr"/>
-          <a:lstStyle/>
-          <a:p>
-            <a:pPr algn="l">
-              <a:defRPr sz="1350" b="0">
-                <a:solidFill>
-                  <a:srgbClr val="1F2D22"/>
-                </a:solidFill>
-              </a:defRPr>
-            </a:pPr>
-            <a:r>
-              <a:rPr lang="zh-CN" altLang="en-US" sz="2000" dirty="0">
-                <a:solidFill>
-                  <a:srgbClr val="1F2D22"/>
-                </a:solidFill>
-                <a:latin typeface="ui-monospace"/>
-              </a:rPr>
-              <a:t>新增了 </a:t>
-            </a:r>
-            <a:r>
-              <a:rPr lang="en-US" altLang="zh-CN" sz="2000" dirty="0" err="1">
-                <a:solidFill>
-                  <a:srgbClr val="1F2D22"/>
-                </a:solidFill>
-                <a:latin typeface="ui-monospace"/>
-              </a:rPr>
-              <a:t>structured_blocks</a:t>
-            </a:r>
-            <a:r>
-              <a:rPr lang="en-US" altLang="zh-CN" sz="2000" dirty="0">
-                <a:solidFill>
-                  <a:srgbClr val="1F2D22"/>
-                </a:solidFill>
-                <a:latin typeface="ui-monospace"/>
-              </a:rPr>
-              <a:t> </a:t>
-            </a:r>
-            <a:r>
-              <a:rPr lang="zh-CN" altLang="en-US" sz="2000" dirty="0">
-                <a:solidFill>
-                  <a:srgbClr val="1F2D22"/>
-                </a:solidFill>
-                <a:latin typeface="ui-monospace"/>
-              </a:rPr>
-              <a:t>解析模式，把论文 </a:t>
-            </a:r>
-            <a:r>
-              <a:rPr lang="en-US" altLang="zh-CN" sz="2000" dirty="0">
-                <a:solidFill>
-                  <a:srgbClr val="1F2D22"/>
-                </a:solidFill>
-                <a:latin typeface="ui-monospace"/>
-              </a:rPr>
-              <a:t>PDF </a:t>
-            </a:r>
-            <a:r>
-              <a:rPr lang="zh-CN" altLang="en-US" sz="2000" dirty="0">
-                <a:solidFill>
-                  <a:srgbClr val="1F2D22"/>
-                </a:solidFill>
-                <a:latin typeface="ui-monospace"/>
-              </a:rPr>
-              <a:t>解析成统一 </a:t>
-            </a:r>
-            <a:r>
-              <a:rPr lang="en-US" altLang="zh-CN" sz="2000" dirty="0">
-                <a:solidFill>
-                  <a:srgbClr val="1F2D22"/>
-                </a:solidFill>
-                <a:latin typeface="ui-monospace"/>
-              </a:rPr>
-              <a:t>block </a:t>
-            </a:r>
-            <a:r>
-              <a:rPr lang="zh-CN" altLang="en-US" sz="2000" dirty="0">
-                <a:solidFill>
-                  <a:srgbClr val="1F2D22"/>
-                </a:solidFill>
-                <a:latin typeface="ui-monospace"/>
-              </a:rPr>
-              <a:t>结构</a:t>
-            </a:r>
-            <a:endParaRPr lang="en-US" altLang="zh-CN" sz="2000" dirty="0">
-              <a:solidFill>
-                <a:srgbClr val="1F2D22"/>
-              </a:solidFill>
-              <a:latin typeface="ui-monospace"/>
-            </a:endParaRPr>
-          </a:p>
-          <a:p>
-            <a:pPr algn="l"/>
-            <a:r>
-              <a:rPr lang="zh-CN" altLang="en-US" sz="2000" dirty="0">
-                <a:solidFill>
-                  <a:srgbClr val="1F2D22"/>
-                </a:solidFill>
-                <a:latin typeface="ui-monospace"/>
-              </a:rPr>
-              <a:t>基于 </a:t>
-            </a:r>
-            <a:r>
-              <a:rPr lang="en-US" altLang="zh-CN" sz="2000" dirty="0" err="1">
-                <a:solidFill>
-                  <a:srgbClr val="1F2D22"/>
-                </a:solidFill>
-                <a:latin typeface="ui-monospace"/>
-              </a:rPr>
-              <a:t>PyMuPDF</a:t>
-            </a:r>
-            <a:r>
-              <a:rPr lang="en-US" altLang="zh-CN" sz="2000" dirty="0">
-                <a:solidFill>
-                  <a:srgbClr val="1F2D22"/>
-                </a:solidFill>
-                <a:latin typeface="ui-monospace"/>
-              </a:rPr>
-              <a:t> </a:t>
-            </a:r>
-            <a:r>
-              <a:rPr lang="zh-CN" altLang="en-US" sz="2000" dirty="0">
-                <a:solidFill>
-                  <a:srgbClr val="1F2D22"/>
-                </a:solidFill>
-                <a:latin typeface="ui-monospace"/>
-              </a:rPr>
-              <a:t>提取版面块、字号、粗体、</a:t>
-            </a:r>
-            <a:r>
-              <a:rPr lang="en-US" altLang="zh-CN" sz="2000" dirty="0" err="1">
-                <a:solidFill>
-                  <a:srgbClr val="1F2D22"/>
-                </a:solidFill>
-                <a:latin typeface="ui-monospace"/>
-              </a:rPr>
-              <a:t>bbox</a:t>
-            </a:r>
-            <a:r>
-              <a:rPr lang="zh-CN" altLang="en-US" sz="2000" dirty="0">
-                <a:solidFill>
-                  <a:srgbClr val="1F2D22"/>
-                </a:solidFill>
-                <a:latin typeface="ui-monospace"/>
-              </a:rPr>
-              <a:t>、列信息</a:t>
-            </a:r>
-          </a:p>
-          <a:p>
-            <a:pPr>
-              <a:defRPr sz="1350" b="0">
-                <a:solidFill>
-                  <a:srgbClr val="1F2D22"/>
-                </a:solidFill>
-              </a:defRPr>
-            </a:pPr>
-            <a:r>
-              <a:rPr lang="zh-CN" altLang="en-US" sz="2000" dirty="0">
-                <a:solidFill>
-                  <a:srgbClr val="1F2D22"/>
-                </a:solidFill>
-                <a:latin typeface="ui-monospace"/>
-              </a:rPr>
-              <a:t>过滤重复页眉页脚噪声，精确分类为正确的</a:t>
-            </a:r>
-            <a:r>
-              <a:rPr lang="en-US" altLang="zh-CN" sz="2000" dirty="0">
-                <a:solidFill>
-                  <a:srgbClr val="1F2D22"/>
-                </a:solidFill>
-                <a:latin typeface="ui-monospace"/>
-              </a:rPr>
-              <a:t>block</a:t>
-            </a:r>
-            <a:r>
-              <a:rPr lang="zh-CN" altLang="en-US" sz="2000" dirty="0">
-                <a:solidFill>
-                  <a:srgbClr val="1F2D22"/>
-                </a:solidFill>
-                <a:latin typeface="ui-monospace"/>
-              </a:rPr>
-              <a:t>类别</a:t>
-            </a:r>
-          </a:p>
-          <a:p>
-            <a:pPr algn="l">
-              <a:defRPr sz="1350" b="0">
-                <a:solidFill>
-                  <a:srgbClr val="1F2D22"/>
-                </a:solidFill>
-              </a:defRPr>
-            </a:pPr>
-            <a:endParaRPr sz="1350" b="0" dirty="0">
-              <a:solidFill>
-                <a:srgbClr val="1F2D22"/>
-              </a:solidFill>
-            </a:endParaRPr>
-          </a:p>
-        </p:txBody>
-      </p:sp>
-      <p:sp>
-        <p:nvSpPr>
-          <p:cNvPr id="7" name="矩形 6">
-            <a:extLst>
-              <a:ext uri="{FF2B5EF4-FFF2-40B4-BE49-F238E27FC236}">
-                <a16:creationId xmlns:a16="http://schemas.microsoft.com/office/drawing/2014/main" id="{34797A82-E8A1-4FD5-A480-1468A75DCB41}"/>
-              </a:ext>
-            </a:extLst>
-          </p:cNvPr>
-          <p:cNvSpPr>
-            <a:spLocks noGrp="1"/>
-          </p:cNvSpPr>
-          <p:nvPr/>
-        </p:nvSpPr>
-        <p:spPr>
-          <a:xfrm>
-            <a:off x="1498600" y="4171950"/>
-            <a:ext cx="9465733" cy="1619250"/>
-          </a:xfrm>
-          <a:prstGeom prst="rect">
-            <a:avLst/>
-          </a:prstGeom>
-          <a:solidFill>
-            <a:srgbClr val="FFFFFF"/>
-          </a:solidFill>
-          <a:ln w="9525">
-            <a:solidFill>
-              <a:srgbClr val="C7D0C4"/>
-            </a:solidFill>
-            <a:prstDash val="solid"/>
-          </a:ln>
-        </p:spPr>
-      </p:sp>
-      <p:sp>
-        <p:nvSpPr>
-          <p:cNvPr id="8" name="矩形 7">
-            <a:extLst>
-              <a:ext uri="{FF2B5EF4-FFF2-40B4-BE49-F238E27FC236}">
-                <a16:creationId xmlns:a16="http://schemas.microsoft.com/office/drawing/2014/main" id="{CAF760D5-7BD6-4703-9C53-D0A2A5E3F7A2}"/>
-              </a:ext>
-            </a:extLst>
-          </p:cNvPr>
-          <p:cNvSpPr>
-            <a:spLocks noGrp="1"/>
-          </p:cNvSpPr>
-          <p:nvPr/>
-        </p:nvSpPr>
-        <p:spPr>
-          <a:xfrm>
-            <a:off x="1634067" y="4362450"/>
-            <a:ext cx="4305300" cy="323850"/>
-          </a:xfrm>
-          <a:prstGeom prst="rect">
-            <a:avLst/>
-          </a:prstGeom>
-          <a:solidFill>
-            <a:srgbClr val="000000">
-              <a:alpha val="0"/>
-            </a:srgbClr>
-          </a:solidFill>
-          <a:ln w="0">
-            <a:solidFill>
-              <a:srgbClr val="000000">
-                <a:alpha val="0"/>
-              </a:srgbClr>
-            </a:solidFill>
-            <a:prstDash val="solid"/>
-          </a:ln>
-        </p:spPr>
-        <p:txBody>
-          <a:bodyPr anchor="ctr"/>
-          <a:lstStyle/>
-          <a:p>
-            <a:pPr algn="l">
-              <a:defRPr sz="1650" b="1">
-                <a:solidFill>
-                  <a:srgbClr val="2D4A33"/>
-                </a:solidFill>
-              </a:defRPr>
-            </a:pPr>
-            <a:r>
-              <a:rPr lang="zh-CN" altLang="en-US" sz="3200" b="1" dirty="0">
-                <a:solidFill>
-                  <a:srgbClr val="2D4A33"/>
-                </a:solidFill>
-              </a:rPr>
-              <a:t>知识分块</a:t>
-            </a:r>
-            <a:endParaRPr sz="3200" b="1" dirty="0">
-              <a:solidFill>
-                <a:srgbClr val="2D4A33"/>
-              </a:solidFill>
-            </a:endParaRPr>
-          </a:p>
-        </p:txBody>
-      </p:sp>
-      <p:sp>
-        <p:nvSpPr>
-          <p:cNvPr id="9" name="矩形 8">
-            <a:extLst>
-              <a:ext uri="{FF2B5EF4-FFF2-40B4-BE49-F238E27FC236}">
-                <a16:creationId xmlns:a16="http://schemas.microsoft.com/office/drawing/2014/main" id="{78ECD07B-701D-4861-812E-B364FA3E3C92}"/>
-              </a:ext>
-            </a:extLst>
-          </p:cNvPr>
-          <p:cNvSpPr>
-            <a:spLocks noGrp="1"/>
-          </p:cNvSpPr>
-          <p:nvPr/>
-        </p:nvSpPr>
-        <p:spPr>
-          <a:xfrm>
-            <a:off x="1634067" y="4677833"/>
-            <a:ext cx="9330266" cy="977900"/>
-          </a:xfrm>
-          <a:prstGeom prst="rect">
-            <a:avLst/>
-          </a:prstGeom>
-          <a:solidFill>
-            <a:srgbClr val="000000">
-              <a:alpha val="0"/>
-            </a:srgbClr>
-          </a:solidFill>
-          <a:ln w="0">
-            <a:solidFill>
-              <a:srgbClr val="000000">
-                <a:alpha val="0"/>
-              </a:srgbClr>
-            </a:solidFill>
-            <a:prstDash val="solid"/>
-          </a:ln>
-        </p:spPr>
-        <p:txBody>
-          <a:bodyPr anchor="ctr"/>
-          <a:lstStyle/>
-          <a:p>
-            <a:pPr>
-              <a:defRPr sz="1350" b="0">
-                <a:solidFill>
-                  <a:srgbClr val="1F2D22"/>
-                </a:solidFill>
-              </a:defRPr>
-            </a:pPr>
-            <a:r>
-              <a:rPr lang="zh-CN" altLang="en-US" sz="2000" dirty="0">
-                <a:solidFill>
-                  <a:srgbClr val="1F2D22"/>
-                </a:solidFill>
-                <a:latin typeface="ui-monospace"/>
-              </a:rPr>
-              <a:t>按解析块分块：基本一个结构块生成一个 </a:t>
-            </a:r>
-            <a:r>
-              <a:rPr lang="en-US" altLang="zh-CN" sz="2000" dirty="0">
-                <a:solidFill>
-                  <a:srgbClr val="1F2D22"/>
-                </a:solidFill>
-                <a:latin typeface="ui-monospace"/>
-              </a:rPr>
-              <a:t>chunk</a:t>
-            </a:r>
-          </a:p>
-          <a:p>
-            <a:pPr algn="l"/>
-            <a:r>
-              <a:rPr lang="zh-CN" altLang="en-US" sz="2000" dirty="0">
-                <a:solidFill>
-                  <a:srgbClr val="1F2D22"/>
-                </a:solidFill>
-                <a:latin typeface="ui-monospace"/>
-              </a:rPr>
-              <a:t>按章节分块：先按 </a:t>
-            </a:r>
-            <a:r>
-              <a:rPr lang="en-US" altLang="zh-CN" sz="2000" dirty="0" err="1">
-                <a:solidFill>
-                  <a:srgbClr val="1F2D22"/>
-                </a:solidFill>
-                <a:latin typeface="ui-monospace"/>
-              </a:rPr>
-              <a:t>section_path</a:t>
-            </a:r>
-            <a:r>
-              <a:rPr lang="en-US" altLang="zh-CN" sz="2000" dirty="0">
-                <a:solidFill>
-                  <a:srgbClr val="1F2D22"/>
-                </a:solidFill>
-                <a:latin typeface="ui-monospace"/>
-              </a:rPr>
-              <a:t> </a:t>
-            </a:r>
-            <a:r>
-              <a:rPr lang="zh-CN" altLang="en-US" sz="2000" dirty="0">
-                <a:solidFill>
-                  <a:srgbClr val="1F2D22"/>
-                </a:solidFill>
-                <a:latin typeface="ui-monospace"/>
-              </a:rPr>
-              <a:t>聚合同章节 </a:t>
-            </a:r>
-            <a:r>
-              <a:rPr lang="en-US" altLang="zh-CN" sz="2000" dirty="0">
-                <a:solidFill>
-                  <a:srgbClr val="1F2D22"/>
-                </a:solidFill>
-                <a:latin typeface="ui-monospace"/>
-              </a:rPr>
-              <a:t>block</a:t>
-            </a:r>
-            <a:r>
-              <a:rPr lang="zh-CN" altLang="en-US" sz="2000" dirty="0">
-                <a:solidFill>
-                  <a:srgbClr val="1F2D22"/>
-                </a:solidFill>
-                <a:latin typeface="ui-monospace"/>
-              </a:rPr>
-              <a:t>，再按 </a:t>
-            </a:r>
-            <a:r>
-              <a:rPr lang="en-US" altLang="zh-CN" sz="2000" dirty="0" err="1">
-                <a:solidFill>
-                  <a:srgbClr val="1F2D22"/>
-                </a:solidFill>
-                <a:latin typeface="ui-monospace"/>
-              </a:rPr>
-              <a:t>chunk_size</a:t>
-            </a:r>
-            <a:r>
-              <a:rPr lang="en-US" altLang="zh-CN" sz="2000" dirty="0">
-                <a:solidFill>
-                  <a:srgbClr val="1F2D22"/>
-                </a:solidFill>
-                <a:latin typeface="ui-monospace"/>
-              </a:rPr>
-              <a:t> </a:t>
-            </a:r>
-            <a:r>
-              <a:rPr lang="zh-CN" altLang="en-US" sz="2000" dirty="0">
-                <a:solidFill>
-                  <a:srgbClr val="1F2D22"/>
-                </a:solidFill>
-                <a:latin typeface="ui-monospace"/>
-              </a:rPr>
-              <a:t>做递归切分</a:t>
-            </a:r>
-          </a:p>
-        </p:txBody>
-      </p:sp>
-    </p:spTree>
-    <p:extLst>
-      <p:ext uri="{BB962C8B-B14F-4D97-AF65-F5344CB8AC3E}">
-        <p14:creationId xmlns:p14="http://schemas.microsoft.com/office/powerpoint/2010/main" val="1941770515"/>
-      </p:ext>
-    </p:extLst>
-  </p:cSld>
-  <p:clrMapOvr>
-    <a:masterClrMapping/>
-  </p:clrMapOvr>
-</p:sld>
-</file>
-
-<file path=ppt/slides/slide9.xml><?xml version="1.0" encoding="utf-8"?>
-<p:sld xmlns:a="http://schemas.openxmlformats.org/drawingml/2006/main" xmlns:r="http://schemas.openxmlformats.org/officeDocument/2006/relationships" xmlns:p="http://schemas.openxmlformats.org/presentationml/2006/main">
-  <p:cSld>
-    <p:bg>
-      <p:bgPr>
-        <a:solidFill>
-          <a:srgbClr val="253A2A"/>
-        </a:solidFill>
-        <a:effectLst/>
-      </p:bgPr>
-    </p:bg>
-    <p:spTree>
-      <p:nvGrpSpPr>
-        <p:cNvPr id="1" name=""/>
-        <p:cNvGrpSpPr/>
-        <p:nvPr/>
-      </p:nvGrpSpPr>
-      <p:grpSpPr>
-        <a:xfrm>
-          <a:off x="0" y="0"/>
-          <a:ext cx="0" cy="0"/>
-          <a:chOff x="0" y="0"/>
-          <a:chExt cx="0" cy="0"/>
-        </a:xfrm>
-      </p:grpSpPr>
-      <p:sp>
-        <p:nvSpPr>
-          <p:cNvPr id="11" name="文本框 10">
-            <a:extLst>
-              <a:ext uri="{FF2B5EF4-FFF2-40B4-BE49-F238E27FC236}">
-                <a16:creationId xmlns:a16="http://schemas.microsoft.com/office/drawing/2014/main" id="{642171A4-C23A-4145-BED1-2E8834D0E5B1}"/>
-              </a:ext>
-            </a:extLst>
-          </p:cNvPr>
-          <p:cNvSpPr>
-            <a:spLocks noGrp="1"/>
-          </p:cNvSpPr>
-          <p:nvPr/>
-        </p:nvSpPr>
-        <p:spPr>
-          <a:xfrm>
-            <a:off x="2614979" y="2321005"/>
-            <a:ext cx="2604077" cy="2215991"/>
-          </a:xfrm>
-          <a:prstGeom prst="rect">
-            <a:avLst/>
-          </a:prstGeom>
-          <a:noFill/>
-        </p:spPr>
-        <p:txBody>
-          <a:bodyPr wrap="square">
-            <a:spAutoFit/>
-          </a:bodyPr>
-          <a:lstStyle/>
-          <a:p>
-            <a:pPr marL="0" marR="0" lvl="0" indent="0" algn="ctr" defTabSz="914400" eaLnBrk="1" fontAlgn="auto" latinLnBrk="0" hangingPunct="1">
-              <a:lnSpc>
-                <a:spcPct val="100000"/>
-              </a:lnSpc>
-              <a:spcBef>
-                <a:spcPts val="0"/>
-              </a:spcBef>
-              <a:spcAft>
-                <a:spcPts val="0"/>
-              </a:spcAft>
-              <a:buClrTx/>
-              <a:buSzTx/>
-              <a:buFontTx/>
-              <a:buNone/>
-              <a:tabLst/>
-              <a:defRPr/>
-            </a:pPr>
-            <a:r>
-              <a:rPr kumimoji="0" sz="13800" b="0" i="0" u="none" strike="noStrike" kern="1200" cap="none" spc="0" normalizeH="0" baseline="0" noProof="0" dirty="0">
-                <a:ln>
-                  <a:noFill/>
-                </a:ln>
-                <a:solidFill>
-                  <a:srgbClr val="F5F4F9"/>
-                </a:solidFill>
-                <a:effectLst/>
-                <a:uLnTx/>
-                <a:uFillTx/>
-                <a:latin typeface="Arial"/>
-                <a:ea typeface="STZhongsong"/>
-                <a:cs typeface="+mn-cs"/>
-              </a:rPr>
-              <a:t>0</a:t>
-            </a:r>
-            <a:r>
-              <a:rPr kumimoji="0" lang="en-US" sz="13800" b="0" i="0" u="none" strike="noStrike" kern="1200" cap="none" spc="0" normalizeH="0" baseline="0" noProof="0" dirty="0">
-                <a:ln>
-                  <a:noFill/>
-                </a:ln>
-                <a:solidFill>
-                  <a:srgbClr val="F5F4F9"/>
-                </a:solidFill>
-                <a:effectLst/>
-                <a:uLnTx/>
-                <a:uFillTx/>
-                <a:latin typeface="Arial"/>
-                <a:ea typeface="STZhongsong"/>
-                <a:cs typeface="+mn-cs"/>
-              </a:rPr>
-              <a:t>5</a:t>
-            </a:r>
-            <a:endParaRPr kumimoji="0" sz="13800" b="0" i="0" u="none" strike="noStrike" kern="1200" cap="none" spc="0" normalizeH="0" baseline="0" noProof="0" dirty="0">
-              <a:ln>
-                <a:noFill/>
-              </a:ln>
-              <a:solidFill>
-                <a:srgbClr val="F5F4F9"/>
-              </a:solidFill>
-              <a:effectLst/>
-              <a:uLnTx/>
-              <a:uFillTx/>
-              <a:latin typeface="Arial"/>
-              <a:ea typeface="STZhongsong"/>
-              <a:cs typeface="+mn-cs"/>
-            </a:endParaRPr>
-          </a:p>
-        </p:txBody>
-      </p:sp>
-      <p:sp>
-        <p:nvSpPr>
-          <p:cNvPr id="13" name="矩形 12">
-            <a:extLst>
-              <a:ext uri="{FF2B5EF4-FFF2-40B4-BE49-F238E27FC236}">
-                <a16:creationId xmlns:a16="http://schemas.microsoft.com/office/drawing/2014/main" id="{638E2919-D9D9-4496-93DC-FD75812F9CF1}"/>
-              </a:ext>
-            </a:extLst>
-          </p:cNvPr>
-          <p:cNvSpPr>
-            <a:spLocks noGrp="1"/>
-          </p:cNvSpPr>
-          <p:nvPr/>
-        </p:nvSpPr>
-        <p:spPr>
-          <a:xfrm>
-            <a:off x="6293290" y="2685166"/>
-            <a:ext cx="2339103" cy="923330"/>
-          </a:xfrm>
-          <a:prstGeom prst="rect">
-            <a:avLst/>
-          </a:prstGeom>
-        </p:spPr>
-        <p:txBody>
-          <a:bodyPr wrap="none">
-            <a:spAutoFit/>
-          </a:bodyPr>
-          <a:lstStyle/>
-          <a:p>
-            <a:pPr marL="0" marR="0" lvl="0" indent="0" algn="ctr" defTabSz="914400" eaLnBrk="1" fontAlgn="auto" latinLnBrk="0" hangingPunct="1">
-              <a:lnSpc>
-                <a:spcPct val="100000"/>
-              </a:lnSpc>
-              <a:spcBef>
-                <a:spcPts val="0"/>
-              </a:spcBef>
-              <a:spcAft>
-                <a:spcPts val="0"/>
-              </a:spcAft>
-              <a:buClrTx/>
-              <a:buSzTx/>
-              <a:buFontTx/>
-              <a:buNone/>
-              <a:tabLst/>
-              <a:defRPr/>
-            </a:pPr>
-            <a:r>
-              <a:rPr lang="zh-CN" altLang="en-US" sz="5400" b="1" dirty="0">
-                <a:solidFill>
-                  <a:prstClr val="white"/>
-                </a:solidFill>
-                <a:latin typeface="Arial"/>
-                <a:ea typeface="STZhongsong"/>
-              </a:rPr>
-              <a:t>唐熙雷</a:t>
-            </a:r>
-            <a:endParaRPr kumimoji="0" sz="5400" b="1" i="0" u="none" strike="noStrike" kern="1200" cap="none" spc="0" normalizeH="0" baseline="0" noProof="0" dirty="0">
-              <a:ln>
-                <a:noFill/>
-              </a:ln>
-              <a:solidFill>
-                <a:prstClr val="white"/>
-              </a:solidFill>
-              <a:effectLst/>
-              <a:uLnTx/>
-              <a:uFillTx/>
-              <a:latin typeface="Arial"/>
-              <a:ea typeface="STZhongsong"/>
-              <a:cs typeface="+mn-cs"/>
-            </a:endParaRPr>
-          </a:p>
-        </p:txBody>
-      </p:sp>
-    </p:spTree>
-    <p:extLst>
-      <p:ext uri="{BB962C8B-B14F-4D97-AF65-F5344CB8AC3E}">
-        <p14:creationId xmlns:p14="http://schemas.microsoft.com/office/powerpoint/2010/main" val="969448289"/>
-      </p:ext>
-    </p:extLst>
   </p:cSld>
   <p:clrMapOvr>
     <a:masterClrMapping/>

--- a/report/myrag总结.pptx
+++ b/report/myrag总结.pptx
@@ -1873,7 +1873,7 @@
           <a:lstStyle/>
           <a:p>
             <a:fld id="{A653A8F1-9EDF-49EF-A14D-E495AD864F8A}" type="datetimeFigureOut">
-              <a:t>2026.6.15</a:t>
+              <a:t>2026/6/16</a:t>
             </a:fld>
             <a:endParaRPr/>
           </a:p>
@@ -2068,7 +2068,7 @@
           <a:lstStyle/>
           <a:p>
             <a:fld id="{A653A8F1-9EDF-49EF-A14D-E495AD864F8A}" type="datetimeFigureOut">
-              <a:t>2026.6.15</a:t>
+              <a:t>2026/6/16</a:t>
             </a:fld>
             <a:endParaRPr/>
           </a:p>
@@ -2273,7 +2273,7 @@
           <a:lstStyle/>
           <a:p>
             <a:fld id="{A653A8F1-9EDF-49EF-A14D-E495AD864F8A}" type="datetimeFigureOut">
-              <a:t>2026.6.15</a:t>
+              <a:t>2026/6/16</a:t>
             </a:fld>
             <a:endParaRPr/>
           </a:p>
@@ -2468,7 +2468,7 @@
           <a:lstStyle/>
           <a:p>
             <a:fld id="{A653A8F1-9EDF-49EF-A14D-E495AD864F8A}" type="datetimeFigureOut">
-              <a:t>2026.6.15</a:t>
+              <a:t>2026/6/16</a:t>
             </a:fld>
             <a:endParaRPr/>
           </a:p>
@@ -2737,7 +2737,7 @@
           <a:lstStyle/>
           <a:p>
             <a:fld id="{A653A8F1-9EDF-49EF-A14D-E495AD864F8A}" type="datetimeFigureOut">
-              <a:t>2026.6.15</a:t>
+              <a:t>2026/6/16</a:t>
             </a:fld>
             <a:endParaRPr/>
           </a:p>
@@ -3004,7 +3004,7 @@
           <a:lstStyle/>
           <a:p>
             <a:fld id="{A653A8F1-9EDF-49EF-A14D-E495AD864F8A}" type="datetimeFigureOut">
-              <a:t>2026.6.15</a:t>
+              <a:t>2026/6/16</a:t>
             </a:fld>
             <a:endParaRPr/>
           </a:p>
@@ -3420,7 +3420,7 @@
           <a:lstStyle/>
           <a:p>
             <a:fld id="{A653A8F1-9EDF-49EF-A14D-E495AD864F8A}" type="datetimeFigureOut">
-              <a:t>2026.6.15</a:t>
+              <a:t>2026/6/16</a:t>
             </a:fld>
             <a:endParaRPr/>
           </a:p>
@@ -3553,7 +3553,7 @@
           <a:lstStyle/>
           <a:p>
             <a:fld id="{A653A8F1-9EDF-49EF-A14D-E495AD864F8A}" type="datetimeFigureOut">
-              <a:t>2026.6.15</a:t>
+              <a:t>2026/6/16</a:t>
             </a:fld>
             <a:endParaRPr/>
           </a:p>
@@ -3659,7 +3659,7 @@
           <a:lstStyle/>
           <a:p>
             <a:fld id="{A653A8F1-9EDF-49EF-A14D-E495AD864F8A}" type="datetimeFigureOut">
-              <a:t>2026.6.15</a:t>
+              <a:t>2026/6/16</a:t>
             </a:fld>
             <a:endParaRPr/>
           </a:p>
@@ -3978,7 +3978,7 @@
           <a:lstStyle/>
           <a:p>
             <a:fld id="{A653A8F1-9EDF-49EF-A14D-E495AD864F8A}" type="datetimeFigureOut">
-              <a:t>2026.6.15</a:t>
+              <a:t>2026/6/16</a:t>
             </a:fld>
             <a:endParaRPr/>
           </a:p>
@@ -4260,7 +4260,7 @@
           <a:lstStyle/>
           <a:p>
             <a:fld id="{A653A8F1-9EDF-49EF-A14D-E495AD864F8A}" type="datetimeFigureOut">
-              <a:t>2026.6.15</a:t>
+              <a:t>2026/6/16</a:t>
             </a:fld>
             <a:endParaRPr/>
           </a:p>
@@ -4499,7 +4499,7 @@
           </a:lstStyle>
           <a:p>
             <a:fld id="{A653A8F1-9EDF-49EF-A14D-E495AD864F8A}" type="datetimeFigureOut">
-              <a:t>2026.6.15</a:t>
+              <a:t>2026/6/16</a:t>
             </a:fld>
             <a:endParaRPr/>
           </a:p>
@@ -7461,8 +7461,8 @@
         </p:nvSpPr>
         <p:spPr>
           <a:xfrm>
-            <a:off x="857250" y="1619250"/>
-            <a:ext cx="4762500" cy="1619250"/>
+            <a:off x="857250" y="1571625"/>
+            <a:ext cx="4762500" cy="2209800"/>
           </a:xfrm>
           <a:prstGeom prst="rect">
             <a:avLst/>
@@ -7477,6 +7477,13 @@
             <a:prstDash val="solid"/>
           </a:ln>
         </p:spPr>
+        <p:txBody>
+          <a:bodyPr/>
+          <a:lstStyle/>
+          <a:p>
+            <a:endParaRPr lang="zh-CN" altLang="en-US" dirty="0"/>
+          </a:p>
+        </p:txBody>
       </p:sp>
       <p:sp>
         <p:nvSpPr>
@@ -7494,7 +7501,7 @@
         </p:nvSpPr>
         <p:spPr>
           <a:xfrm>
-            <a:off x="1085850" y="1790700"/>
+            <a:off x="1085850" y="1643063"/>
             <a:ext cx="4305300" cy="323850"/>
           </a:xfrm>
           <a:prstGeom prst="rect">
@@ -7558,7 +7565,7 @@
         <p:spPr>
           <a:xfrm>
             <a:off x="1085850" y="2228850"/>
-            <a:ext cx="4305300" cy="857250"/>
+            <a:ext cx="4305300" cy="1466850"/>
           </a:xfrm>
           <a:prstGeom prst="rect">
             <a:avLst/>
@@ -7581,76 +7588,10 @@
           <a:bodyPr anchor="ctr"/>
           <a:lstStyle/>
           <a:p>
-            <a:pPr algn="l">
-              <a:defRPr sz="1350" b="0">
-                <a:solidFill>
-                  <a:srgbClr val="1F2D22"/>
-                </a:solidFill>
-              </a:defRPr>
-            </a:pPr>
-            <a:r>
-              <a:rPr sz="2000" dirty="0" err="1">
-                <a:solidFill>
-                  <a:srgbClr val="1F2D22"/>
-                </a:solidFill>
-                <a:latin typeface="ui-monospace"/>
-              </a:rPr>
-              <a:t>查询优化</a:t>
-            </a:r>
-            <a:endParaRPr sz="2000" dirty="0">
-              <a:solidFill>
-                <a:srgbClr val="1F2D22"/>
-              </a:solidFill>
-              <a:latin typeface="ui-monospace"/>
-            </a:endParaRPr>
-          </a:p>
-          <a:p>
-            <a:pPr algn="l">
-              <a:defRPr sz="1350" b="0">
-                <a:solidFill>
-                  <a:srgbClr val="1F2D22"/>
-                </a:solidFill>
-              </a:defRPr>
-            </a:pPr>
-            <a:r>
-              <a:rPr sz="2000" dirty="0" err="1">
-                <a:solidFill>
-                  <a:srgbClr val="1F2D22"/>
-                </a:solidFill>
-                <a:latin typeface="ui-monospace"/>
-              </a:rPr>
-              <a:t>检索提示</a:t>
-            </a:r>
-            <a:endParaRPr sz="2000" dirty="0">
-              <a:solidFill>
-                <a:srgbClr val="1F2D22"/>
-              </a:solidFill>
-              <a:latin typeface="ui-monospace"/>
-            </a:endParaRPr>
-          </a:p>
-          <a:p>
-            <a:pPr algn="l">
-              <a:defRPr sz="1350" b="0">
-                <a:solidFill>
-                  <a:srgbClr val="1F2D22"/>
-                </a:solidFill>
-              </a:defRPr>
-            </a:pPr>
-            <a:r>
-              <a:rPr sz="2000" dirty="0" err="1">
-                <a:solidFill>
-                  <a:srgbClr val="1F2D22"/>
-                </a:solidFill>
-                <a:latin typeface="ui-monospace"/>
-              </a:rPr>
-              <a:t>问题改写</a:t>
-            </a:r>
-            <a:endParaRPr sz="2000" dirty="0">
-              <a:solidFill>
-                <a:srgbClr val="1F2D22"/>
-              </a:solidFill>
-              <a:latin typeface="ui-monospace"/>
-            </a:endParaRPr>
+            <a:r>
+              <a:rPr lang="zh-CN" altLang="zh-CN" dirty="0"/>
+              <a:t>系统不再只使用用户原始 query 进行一次检索，而是在检索前调用大模型生成多个不同角度的查询变体。随后系统对每个 query 分别生成 embedding 并查询 Chroma，最后将所有结果去重、排序、截取最终 Top K。</a:t>
+            </a:r>
           </a:p>
         </p:txBody>
       </p:sp>
@@ -7671,7 +7612,7 @@
         <p:spPr>
           <a:xfrm>
             <a:off x="6572250" y="1619250"/>
-            <a:ext cx="4762500" cy="1619250"/>
+            <a:ext cx="4762500" cy="4133850"/>
           </a:xfrm>
           <a:prstGeom prst="rect">
             <a:avLst/>
@@ -7766,8 +7707,8 @@
         </p:nvSpPr>
         <p:spPr>
           <a:xfrm>
-            <a:off x="6800850" y="2228850"/>
-            <a:ext cx="4305300" cy="857250"/>
+            <a:off x="6800850" y="2114550"/>
+            <a:ext cx="4305300" cy="3638550"/>
           </a:xfrm>
           <a:prstGeom prst="rect">
             <a:avLst/>
@@ -7790,52 +7731,46 @@
           <a:bodyPr anchor="ctr"/>
           <a:lstStyle/>
           <a:p>
-            <a:pPr algn="l">
-              <a:defRPr sz="1350" b="0">
-                <a:solidFill>
-                  <a:srgbClr val="1F2D22"/>
-                </a:solidFill>
-              </a:defRPr>
-            </a:pPr>
-            <a:r>
-              <a:rPr sz="2000" dirty="0" err="1">
-                <a:solidFill>
-                  <a:srgbClr val="1F2D22"/>
-                </a:solidFill>
-                <a:latin typeface="ui-monospace"/>
-              </a:rPr>
-              <a:t>自我反思</a:t>
-            </a:r>
-            <a:endParaRPr sz="2000" dirty="0">
-              <a:solidFill>
-                <a:srgbClr val="1F2D22"/>
-              </a:solidFill>
-              <a:latin typeface="ui-monospace"/>
-            </a:endParaRPr>
-          </a:p>
-          <a:p>
-            <a:pPr algn="l">
-              <a:defRPr sz="1350" b="0">
-                <a:solidFill>
-                  <a:srgbClr val="1F2D22"/>
-                </a:solidFill>
-              </a:defRPr>
-            </a:pPr>
-            <a:r>
-              <a:rPr sz="2000" dirty="0" err="1">
-                <a:solidFill>
-                  <a:srgbClr val="1F2D22"/>
-                </a:solidFill>
-                <a:latin typeface="ui-monospace"/>
-              </a:rPr>
-              <a:t>答案校正</a:t>
-            </a:r>
-            <a:endParaRPr sz="2000" dirty="0">
-              <a:solidFill>
-                <a:srgbClr val="1F2D22"/>
-              </a:solidFill>
-              <a:latin typeface="ui-monospace"/>
-            </a:endParaRPr>
+            <a:r>
+              <a:rPr lang="zh-CN" altLang="zh-CN" dirty="0"/>
+              <a:t>生成服务现在不会在初稿生成后立即返回，而是先进入审查阶段。系统会把以下三类信息交给大模型：</a:t>
+            </a:r>
+          </a:p>
+          <a:p>
+            <a:br>
+              <a:rPr lang="zh-CN" altLang="zh-CN" dirty="0"/>
+            </a:br>
+            <a:endParaRPr lang="zh-CN" altLang="zh-CN" dirty="0"/>
+          </a:p>
+          <a:p>
+            <a:r>
+              <a:rPr lang="zh-CN" altLang="zh-CN" dirty="0"/>
+              <a:t>1. 用户原始问题。</a:t>
+            </a:r>
+          </a:p>
+          <a:p>
+            <a:r>
+              <a:rPr lang="zh-CN" altLang="zh-CN" dirty="0"/>
+              <a:t>2. 检索结果拼接出的上下文。</a:t>
+            </a:r>
+          </a:p>
+          <a:p>
+            <a:r>
+              <a:rPr lang="zh-CN" altLang="zh-CN" dirty="0"/>
+              <a:t>3. 刚生成的回答草案。</a:t>
+            </a:r>
+          </a:p>
+          <a:p>
+            <a:br>
+              <a:rPr lang="zh-CN" altLang="zh-CN" dirty="0"/>
+            </a:br>
+            <a:endParaRPr lang="zh-CN" altLang="zh-CN" dirty="0"/>
+          </a:p>
+          <a:p>
+            <a:r>
+              <a:rPr lang="zh-CN" altLang="zh-CN" dirty="0"/>
+              <a:t>审查模型需要判断回答草案是否严格基于上下文，是否存在幻觉，是否遗漏了问题关键点。</a:t>
+            </a:r>
           </a:p>
         </p:txBody>
       </p:sp>
@@ -7855,8 +7790,8 @@
         </p:nvSpPr>
         <p:spPr>
           <a:xfrm>
-            <a:off x="2000250" y="3714750"/>
-            <a:ext cx="8191500" cy="1428750"/>
+            <a:off x="1485900" y="3852863"/>
+            <a:ext cx="5029200" cy="2605087"/>
           </a:xfrm>
           <a:prstGeom prst="rect">
             <a:avLst/>
@@ -7888,7 +7823,7 @@
         </p:nvSpPr>
         <p:spPr>
           <a:xfrm>
-            <a:off x="2228850" y="3886200"/>
+            <a:off x="1752600" y="3876675"/>
             <a:ext cx="7734300" cy="323850"/>
           </a:xfrm>
           <a:prstGeom prst="rect">
@@ -7951,8 +7886,8 @@
         </p:nvSpPr>
         <p:spPr>
           <a:xfrm>
-            <a:off x="2228850" y="4324350"/>
-            <a:ext cx="7734300" cy="666750"/>
+            <a:off x="1905000" y="4629150"/>
+            <a:ext cx="4514850" cy="1666875"/>
           </a:xfrm>
           <a:prstGeom prst="rect">
             <a:avLst/>
@@ -7975,31 +7910,20 @@
           <a:bodyPr anchor="ctr"/>
           <a:lstStyle/>
           <a:p>
-            <a:pPr algn="l">
-              <a:defRPr sz="1350" b="0">
-                <a:solidFill>
-                  <a:srgbClr val="1F2D22"/>
-                </a:solidFill>
-              </a:defRPr>
-            </a:pPr>
-            <a:r>
-              <a:rPr lang="zh-CN" altLang="en-US" sz="2000" dirty="0">
-                <a:solidFill>
-                  <a:srgbClr val="1F2D22"/>
-                </a:solidFill>
-                <a:latin typeface="ui-monospace"/>
-              </a:rPr>
-              <a:t>提高结果准确性</a:t>
-            </a:r>
-            <a:r>
-              <a:rPr sz="2000" dirty="0">
-                <a:solidFill>
-                  <a:srgbClr val="1F2D22"/>
-                </a:solidFill>
-                <a:latin typeface="ui-monospace"/>
-              </a:rPr>
-              <a:t>。</a:t>
-            </a:r>
+            <a:r>
+              <a:rPr lang="zh-CN" altLang="zh-CN" dirty="0"/>
+              <a:t>多查询拆分可以缓解用户问题表达不完整的问题。相比单查询检索，它更容易覆盖同义表达、近义表达和不同问题角度，从而提升相关 chunk 被召回的概率。</a:t>
+            </a:r>
+            <a:endParaRPr lang="en-US" altLang="zh-CN" dirty="0"/>
+          </a:p>
+          <a:p>
+            <a:r>
+              <a:rPr lang="zh-CN" altLang="zh-CN" dirty="0"/>
+              <a:t>自我纠错机制可以在最终返回前进行一次事实审查，降低模型脱离上下文自由发挥的概率，提高回答与文档内容的一致性。</a:t>
+            </a:r>
+          </a:p>
+          <a:p>
+            <a:endParaRPr lang="zh-CN" altLang="zh-CN" dirty="0"/>
           </a:p>
         </p:txBody>
       </p:sp>

--- a/report/myrag总结.pptx
+++ b/report/myrag总结.pptx
@@ -5,7 +5,7 @@
     <p:sldMasterId id="2147483648" r:id="rId1"/>
   </p:sldMasterIdLst>
   <p:notesMasterIdLst>
-    <p:notesMasterId r:id="rId18"/>
+    <p:notesMasterId r:id="rId20"/>
   </p:notesMasterIdLst>
   <p:sldIdLst>
     <p:sldId id="256" r:id="rId2"/>
@@ -23,7 +23,9 @@
     <p:sldId id="264" r:id="rId14"/>
     <p:sldId id="272" r:id="rId15"/>
     <p:sldId id="261" r:id="rId16"/>
-    <p:sldId id="268" r:id="rId17"/>
+    <p:sldId id="278" r:id="rId17"/>
+    <p:sldId id="279" r:id="rId18"/>
+    <p:sldId id="268" r:id="rId19"/>
   </p:sldIdLst>
   <p:sldSz cx="12192000" cy="6858000"/>
   <p:notesSz cx="6858000" cy="9144000"/>
@@ -932,6 +934,196 @@
 </file>
 
 <file path=ppt/notesSlides/notesSlide16.xml><?xml version="1.0" encoding="utf-8"?>
+<p:notes xmlns:a="http://schemas.openxmlformats.org/drawingml/2006/main" xmlns:r="http://schemas.openxmlformats.org/officeDocument/2006/relationships" xmlns:p="http://schemas.openxmlformats.org/presentationml/2006/main">
+  <p:cSld>
+    <p:spTree>
+      <p:nvGrpSpPr>
+        <p:cNvPr id="1" name=""/>
+        <p:cNvGrpSpPr/>
+        <p:nvPr/>
+      </p:nvGrpSpPr>
+      <p:grpSpPr>
+        <a:xfrm>
+          <a:off x="0" y="0"/>
+          <a:ext cx="0" cy="0"/>
+          <a:chOff x="0" y="0"/>
+          <a:chExt cx="0" cy="0"/>
+        </a:xfrm>
+      </p:grpSpPr>
+      <p:sp>
+        <p:nvSpPr>
+          <p:cNvPr id="2" name="Slide Image Placeholder 1"/>
+          <p:cNvSpPr>
+            <a:spLocks noGrp="1" noRot="1" noChangeAspect="1"/>
+          </p:cNvSpPr>
+          <p:nvPr>
+            <p:ph type="sldImg"/>
+          </p:nvPr>
+        </p:nvSpPr>
+        <p:spPr/>
+      </p:sp>
+      <p:sp>
+        <p:nvSpPr>
+          <p:cNvPr id="3" name="Notes Placeholder 2"/>
+          <p:cNvSpPr>
+            <a:spLocks noGrp="1"/>
+          </p:cNvSpPr>
+          <p:nvPr>
+            <p:ph type="body" idx="1"/>
+          </p:nvPr>
+        </p:nvSpPr>
+        <p:spPr/>
+        <p:txBody>
+          <a:bodyPr/>
+          <a:lstStyle/>
+          <a:p>
+            <a:endParaRPr/>
+          </a:p>
+        </p:txBody>
+      </p:sp>
+      <p:sp>
+        <p:nvSpPr>
+          <p:cNvPr id="4" name="Slide Number Placeholder 3"/>
+          <p:cNvSpPr>
+            <a:spLocks noGrp="1"/>
+          </p:cNvSpPr>
+          <p:nvPr>
+            <p:ph type="sldNum" idx="5"/>
+          </p:nvPr>
+        </p:nvSpPr>
+        <p:spPr/>
+        <p:txBody>
+          <a:bodyPr/>
+          <a:lstStyle/>
+          <a:p>
+            <a:pPr marL="0" marR="0" lvl="0" indent="0" algn="l" defTabSz="914400" eaLnBrk="1" fontAlgn="auto" latinLnBrk="0" hangingPunct="1">
+              <a:lnSpc>
+                <a:spcPct val="100000"/>
+              </a:lnSpc>
+              <a:spcBef>
+                <a:spcPts val="0"/>
+              </a:spcBef>
+              <a:spcAft>
+                <a:spcPts val="0"/>
+              </a:spcAft>
+              <a:buClrTx/>
+              <a:buSzTx/>
+              <a:buFontTx/>
+              <a:buNone/>
+              <a:tabLst/>
+              <a:defRPr/>
+            </a:pPr>
+            <a:endParaRPr kumimoji="0" sz="1800" b="0" i="0" u="none" strike="noStrike" kern="1200" cap="none" spc="0" normalizeH="0" baseline="0" noProof="0">
+              <a:ln>
+                <a:noFill/>
+              </a:ln>
+              <a:solidFill>
+                <a:prstClr val="black"/>
+              </a:solidFill>
+              <a:effectLst/>
+              <a:uLnTx/>
+              <a:uFillTx/>
+              <a:latin typeface="Arial"/>
+              <a:ea typeface="STZhongsong"/>
+              <a:cs typeface="+mn-cs"/>
+            </a:endParaRPr>
+          </a:p>
+        </p:txBody>
+      </p:sp>
+    </p:spTree>
+    <p:extLst>
+      <p:ext uri="{BB962C8B-B14F-4D97-AF65-F5344CB8AC3E}">
+        <p14:creationId xmlns:p14="http://schemas.microsoft.com/office/powerpoint/2010/main" val="1972127434"/>
+      </p:ext>
+    </p:extLst>
+  </p:cSld>
+  <p:clrMapOvr>
+    <a:masterClrMapping/>
+  </p:clrMapOvr>
+</p:notes>
+</file>
+
+<file path=ppt/notesSlides/notesSlide17.xml><?xml version="1.0" encoding="utf-8"?>
+<p:notes xmlns:a="http://schemas.openxmlformats.org/drawingml/2006/main" xmlns:r="http://schemas.openxmlformats.org/officeDocument/2006/relationships" xmlns:p="http://schemas.openxmlformats.org/presentationml/2006/main">
+  <p:cSld>
+    <p:spTree>
+      <p:nvGrpSpPr>
+        <p:cNvPr id="1" name=""/>
+        <p:cNvGrpSpPr/>
+        <p:nvPr/>
+      </p:nvGrpSpPr>
+      <p:grpSpPr>
+        <a:xfrm>
+          <a:off x="0" y="0"/>
+          <a:ext cx="0" cy="0"/>
+          <a:chOff x="0" y="0"/>
+          <a:chExt cx="0" cy="0"/>
+        </a:xfrm>
+      </p:grpSpPr>
+      <p:sp>
+        <p:nvSpPr>
+          <p:cNvPr id="2" name="Slide Image Placeholder 1"/>
+          <p:cNvSpPr>
+            <a:spLocks noGrp="1" noRot="1" noChangeAspect="1"/>
+          </p:cNvSpPr>
+          <p:nvPr>
+            <p:ph type="sldImg"/>
+          </p:nvPr>
+        </p:nvSpPr>
+        <p:spPr/>
+      </p:sp>
+      <p:sp>
+        <p:nvSpPr>
+          <p:cNvPr id="3" name="Notes Placeholder 2"/>
+          <p:cNvSpPr>
+            <a:spLocks noGrp="1"/>
+          </p:cNvSpPr>
+          <p:nvPr>
+            <p:ph type="body" idx="1"/>
+          </p:nvPr>
+        </p:nvSpPr>
+        <p:spPr/>
+        <p:txBody>
+          <a:bodyPr/>
+          <a:lstStyle/>
+          <a:p>
+            <a:endParaRPr/>
+          </a:p>
+        </p:txBody>
+      </p:sp>
+      <p:sp>
+        <p:nvSpPr>
+          <p:cNvPr id="4" name="Slide Number Placeholder 3"/>
+          <p:cNvSpPr>
+            <a:spLocks noGrp="1"/>
+          </p:cNvSpPr>
+          <p:nvPr>
+            <p:ph type="sldNum" idx="5"/>
+          </p:nvPr>
+        </p:nvSpPr>
+        <p:spPr/>
+        <p:txBody>
+          <a:bodyPr/>
+          <a:lstStyle/>
+          <a:p>
+            <a:endParaRPr/>
+          </a:p>
+        </p:txBody>
+      </p:sp>
+    </p:spTree>
+    <p:extLst>
+      <p:ext uri="{BB962C8B-B14F-4D97-AF65-F5344CB8AC3E}">
+        <p14:creationId xmlns:p14="http://schemas.microsoft.com/office/powerpoint/2010/main" val="1158624808"/>
+      </p:ext>
+    </p:extLst>
+  </p:cSld>
+  <p:clrMapOvr>
+    <a:masterClrMapping/>
+  </p:clrMapOvr>
+</p:notes>
+</file>
+
+<file path=ppt/notesSlides/notesSlide18.xml><?xml version="1.0" encoding="utf-8"?>
 <p:notes xmlns:a="http://schemas.openxmlformats.org/drawingml/2006/main" xmlns:r="http://schemas.openxmlformats.org/officeDocument/2006/relationships" xmlns:p="http://schemas.openxmlformats.org/presentationml/2006/main">
   <p:cSld>
     <p:spTree>
@@ -7943,6 +8135,1001 @@
 <file path=ppt/slides/slide16.xml><?xml version="1.0" encoding="utf-8"?>
 <p:sld xmlns:a="http://schemas.openxmlformats.org/drawingml/2006/main" xmlns:r="http://schemas.openxmlformats.org/officeDocument/2006/relationships" xmlns:p="http://schemas.openxmlformats.org/presentationml/2006/main">
   <p:cSld>
+    <p:bg>
+      <p:bgPr>
+        <a:solidFill>
+          <a:srgbClr val="253A2A"/>
+        </a:solidFill>
+        <a:effectLst/>
+      </p:bgPr>
+    </p:bg>
+    <p:spTree>
+      <p:nvGrpSpPr>
+        <p:cNvPr id="1" name=""/>
+        <p:cNvGrpSpPr/>
+        <p:nvPr/>
+      </p:nvGrpSpPr>
+      <p:grpSpPr>
+        <a:xfrm>
+          <a:off x="0" y="0"/>
+          <a:ext cx="0" cy="0"/>
+          <a:chOff x="0" y="0"/>
+          <a:chExt cx="0" cy="0"/>
+        </a:xfrm>
+      </p:grpSpPr>
+      <p:sp>
+        <p:nvSpPr>
+          <p:cNvPr id="11" name="文本框 10">
+            <a:extLst>
+              <a:ext uri="{FF2B5EF4-FFF2-40B4-BE49-F238E27FC236}">
+                <a16:creationId xmlns:a16="http://schemas.microsoft.com/office/drawing/2014/main" id="{642171A4-C23A-4145-BED1-2E8834D0E5B1}"/>
+              </a:ext>
+            </a:extLst>
+          </p:cNvPr>
+          <p:cNvSpPr>
+            <a:spLocks noGrp="1"/>
+          </p:cNvSpPr>
+          <p:nvPr/>
+        </p:nvSpPr>
+        <p:spPr>
+          <a:xfrm>
+            <a:off x="2614979" y="2321005"/>
+            <a:ext cx="2604077" cy="2215991"/>
+          </a:xfrm>
+          <a:prstGeom prst="rect">
+            <a:avLst/>
+          </a:prstGeom>
+          <a:noFill/>
+        </p:spPr>
+        <p:txBody>
+          <a:bodyPr wrap="square">
+            <a:spAutoFit/>
+          </a:bodyPr>
+          <a:lstStyle/>
+          <a:p>
+            <a:pPr marL="0" marR="0" lvl="0" indent="0" algn="ctr" defTabSz="914400" eaLnBrk="1" fontAlgn="auto" latinLnBrk="0" hangingPunct="1">
+              <a:lnSpc>
+                <a:spcPct val="100000"/>
+              </a:lnSpc>
+              <a:spcBef>
+                <a:spcPts val="0"/>
+              </a:spcBef>
+              <a:spcAft>
+                <a:spcPts val="0"/>
+              </a:spcAft>
+              <a:buClrTx/>
+              <a:buSzTx/>
+              <a:buFontTx/>
+              <a:buNone/>
+              <a:tabLst/>
+              <a:defRPr/>
+            </a:pPr>
+            <a:r>
+              <a:rPr kumimoji="0" sz="13800" b="0" i="0" u="none" strike="noStrike" kern="1200" cap="none" spc="0" normalizeH="0" baseline="0" noProof="0" dirty="0">
+                <a:ln>
+                  <a:noFill/>
+                </a:ln>
+                <a:solidFill>
+                  <a:srgbClr val="F5F4F9"/>
+                </a:solidFill>
+                <a:effectLst/>
+                <a:uLnTx/>
+                <a:uFillTx/>
+                <a:latin typeface="Arial"/>
+                <a:ea typeface="STZhongsong"/>
+                <a:cs typeface="+mn-cs"/>
+              </a:rPr>
+              <a:t>0</a:t>
+            </a:r>
+            <a:r>
+              <a:rPr lang="en-US" sz="13800" dirty="0">
+                <a:solidFill>
+                  <a:srgbClr val="F5F4F9"/>
+                </a:solidFill>
+                <a:latin typeface="Arial"/>
+                <a:ea typeface="STZhongsong"/>
+              </a:rPr>
+              <a:t>7</a:t>
+            </a:r>
+            <a:endParaRPr kumimoji="0" sz="13800" b="0" i="0" u="none" strike="noStrike" kern="1200" cap="none" spc="0" normalizeH="0" baseline="0" noProof="0" dirty="0">
+              <a:ln>
+                <a:noFill/>
+              </a:ln>
+              <a:solidFill>
+                <a:srgbClr val="F5F4F9"/>
+              </a:solidFill>
+              <a:effectLst/>
+              <a:uLnTx/>
+              <a:uFillTx/>
+              <a:latin typeface="Arial"/>
+              <a:ea typeface="STZhongsong"/>
+              <a:cs typeface="+mn-cs"/>
+            </a:endParaRPr>
+          </a:p>
+        </p:txBody>
+      </p:sp>
+      <p:sp>
+        <p:nvSpPr>
+          <p:cNvPr id="13" name="矩形 12">
+            <a:extLst>
+              <a:ext uri="{FF2B5EF4-FFF2-40B4-BE49-F238E27FC236}">
+                <a16:creationId xmlns:a16="http://schemas.microsoft.com/office/drawing/2014/main" id="{638E2919-D9D9-4496-93DC-FD75812F9CF1}"/>
+              </a:ext>
+            </a:extLst>
+          </p:cNvPr>
+          <p:cNvSpPr>
+            <a:spLocks noGrp="1"/>
+          </p:cNvSpPr>
+          <p:nvPr/>
+        </p:nvSpPr>
+        <p:spPr>
+          <a:xfrm>
+            <a:off x="6331762" y="2685166"/>
+            <a:ext cx="2262158" cy="923330"/>
+          </a:xfrm>
+          <a:prstGeom prst="rect">
+            <a:avLst/>
+          </a:prstGeom>
+        </p:spPr>
+        <p:txBody>
+          <a:bodyPr wrap="none">
+            <a:spAutoFit/>
+          </a:bodyPr>
+          <a:lstStyle/>
+          <a:p>
+            <a:pPr algn="ctr">
+              <a:defRPr/>
+            </a:pPr>
+            <a:r>
+              <a:rPr lang="zh-CN" altLang="en-US" sz="5400" b="0" i="0" dirty="0">
+                <a:solidFill>
+                  <a:schemeClr val="bg1"/>
+                </a:solidFill>
+                <a:effectLst/>
+                <a:latin typeface="Color Emoji"/>
+              </a:rPr>
+              <a:t>谢羿衡</a:t>
+            </a:r>
+            <a:endParaRPr kumimoji="0" lang="zh-CN" altLang="en-US" sz="5400" b="1" i="0" u="none" strike="noStrike" kern="1200" cap="none" spc="0" normalizeH="0" baseline="0" noProof="0" dirty="0">
+              <a:ln>
+                <a:noFill/>
+              </a:ln>
+              <a:solidFill>
+                <a:schemeClr val="bg1"/>
+              </a:solidFill>
+              <a:effectLst/>
+              <a:uLnTx/>
+              <a:uFillTx/>
+              <a:latin typeface="Arial"/>
+              <a:ea typeface="STZhongsong"/>
+              <a:cs typeface="+mn-cs"/>
+            </a:endParaRPr>
+          </a:p>
+        </p:txBody>
+      </p:sp>
+    </p:spTree>
+    <p:extLst>
+      <p:ext uri="{BB962C8B-B14F-4D97-AF65-F5344CB8AC3E}">
+        <p14:creationId xmlns:p14="http://schemas.microsoft.com/office/powerpoint/2010/main" val="3439686848"/>
+      </p:ext>
+    </p:extLst>
+  </p:cSld>
+  <p:clrMapOvr>
+    <a:masterClrMapping/>
+  </p:clrMapOvr>
+</p:sld>
+</file>
+
+<file path=ppt/slides/slide17.xml><?xml version="1.0" encoding="utf-8"?>
+<p:sld xmlns:a="http://schemas.openxmlformats.org/drawingml/2006/main" xmlns:r="http://schemas.openxmlformats.org/officeDocument/2006/relationships" xmlns:p="http://schemas.openxmlformats.org/presentationml/2006/main">
+  <p:cSld>
+    <p:spTree>
+      <p:nvGrpSpPr>
+        <p:cNvPr id="1" name=""/>
+        <p:cNvGrpSpPr/>
+        <p:nvPr/>
+      </p:nvGrpSpPr>
+      <p:grpSpPr>
+        <a:xfrm>
+          <a:off x="0" y="0"/>
+          <a:ext cx="0" cy="0"/>
+          <a:chOff x="0" y="0"/>
+          <a:chExt cx="0" cy="0"/>
+        </a:xfrm>
+      </p:grpSpPr>
+      <p:sp>
+        <p:nvSpPr>
+          <p:cNvPr id="13" name="矩形 12">
+            <a:extLst>
+              <a:ext uri="{FF2B5EF4-FFF2-40B4-BE49-F238E27FC236}">
+                <a16:creationId xmlns:a16="http://schemas.microsoft.com/office/drawing/2014/main" id="{CB19A068-375C-44CD-B486-A2E0564D9945}"/>
+              </a:ext>
+            </a:extLst>
+          </p:cNvPr>
+          <p:cNvSpPr>
+            <a:spLocks noGrp="1"/>
+          </p:cNvSpPr>
+          <p:nvPr/>
+        </p:nvSpPr>
+        <p:spPr>
+          <a:xfrm>
+            <a:off x="0" y="0"/>
+            <a:ext cx="12192000" cy="114300"/>
+          </a:xfrm>
+          <a:prstGeom prst="rect">
+            <a:avLst/>
+          </a:prstGeom>
+          <a:solidFill>
+            <a:srgbClr val="2D4A33"/>
+          </a:solidFill>
+          <a:ln w="0">
+            <a:solidFill>
+              <a:srgbClr val="2D4A33"/>
+            </a:solidFill>
+            <a:prstDash val="solid"/>
+          </a:ln>
+        </p:spPr>
+      </p:sp>
+      <p:sp>
+        <p:nvSpPr>
+          <p:cNvPr id="2" name="矩形 1">
+            <a:extLst>
+              <a:ext uri="{FF2B5EF4-FFF2-40B4-BE49-F238E27FC236}">
+                <a16:creationId xmlns:a16="http://schemas.microsoft.com/office/drawing/2014/main" id="{78EDCF9F-E0B5-4603-A825-182C7732172E}"/>
+              </a:ext>
+            </a:extLst>
+          </p:cNvPr>
+          <p:cNvSpPr>
+            <a:spLocks noGrp="1"/>
+          </p:cNvSpPr>
+          <p:nvPr/>
+        </p:nvSpPr>
+        <p:spPr>
+          <a:xfrm>
+            <a:off x="762000" y="400050"/>
+            <a:ext cx="10668000" cy="457200"/>
+          </a:xfrm>
+          <a:prstGeom prst="rect">
+            <a:avLst/>
+          </a:prstGeom>
+          <a:solidFill>
+            <a:srgbClr val="000000">
+              <a:alpha val="0"/>
+            </a:srgbClr>
+          </a:solidFill>
+          <a:ln w="0">
+            <a:solidFill>
+              <a:srgbClr val="000000">
+                <a:alpha val="0"/>
+              </a:srgbClr>
+            </a:solidFill>
+            <a:prstDash val="solid"/>
+          </a:ln>
+        </p:spPr>
+        <p:txBody>
+          <a:bodyPr anchor="ctr"/>
+          <a:lstStyle/>
+          <a:p>
+            <a:pPr algn="ctr">
+              <a:defRPr sz="2550" b="1">
+                <a:solidFill>
+                  <a:srgbClr val="2D4A33"/>
+                </a:solidFill>
+              </a:defRPr>
+            </a:pPr>
+            <a:r>
+              <a:rPr lang="zh-CN" altLang="en-US" sz="2800" b="0" i="0" dirty="0">
+                <a:effectLst/>
+                <a:latin typeface="Color Emoji"/>
+              </a:rPr>
+              <a:t>谢羿衡</a:t>
+            </a:r>
+            <a:endParaRPr sz="2550" b="1" dirty="0"/>
+          </a:p>
+        </p:txBody>
+      </p:sp>
+      <p:sp>
+        <p:nvSpPr>
+          <p:cNvPr id="4" name="矩形 3">
+            <a:extLst>
+              <a:ext uri="{FF2B5EF4-FFF2-40B4-BE49-F238E27FC236}">
+                <a16:creationId xmlns:a16="http://schemas.microsoft.com/office/drawing/2014/main" id="{0CCF3AAA-E565-49A5-9E5D-12AB5BEA2BCC}"/>
+              </a:ext>
+            </a:extLst>
+          </p:cNvPr>
+          <p:cNvSpPr>
+            <a:spLocks noGrp="1"/>
+          </p:cNvSpPr>
+          <p:nvPr/>
+        </p:nvSpPr>
+        <p:spPr>
+          <a:xfrm>
+            <a:off x="484716" y="1250155"/>
+            <a:ext cx="5763683" cy="2542911"/>
+          </a:xfrm>
+          <a:prstGeom prst="rect">
+            <a:avLst/>
+          </a:prstGeom>
+          <a:solidFill>
+            <a:srgbClr val="FFFFFF"/>
+          </a:solidFill>
+          <a:ln w="9525">
+            <a:solidFill>
+              <a:srgbClr val="C7D0C4"/>
+            </a:solidFill>
+            <a:prstDash val="solid"/>
+          </a:ln>
+        </p:spPr>
+        <p:txBody>
+          <a:bodyPr/>
+          <a:lstStyle/>
+          <a:p>
+            <a:endParaRPr lang="zh-CN" altLang="en-US" dirty="0"/>
+          </a:p>
+        </p:txBody>
+      </p:sp>
+      <p:sp>
+        <p:nvSpPr>
+          <p:cNvPr id="5" name="矩形 4">
+            <a:extLst>
+              <a:ext uri="{FF2B5EF4-FFF2-40B4-BE49-F238E27FC236}">
+                <a16:creationId xmlns:a16="http://schemas.microsoft.com/office/drawing/2014/main" id="{ECC68CB8-D28B-4FBA-BFEE-BA369B649486}"/>
+              </a:ext>
+            </a:extLst>
+          </p:cNvPr>
+          <p:cNvSpPr>
+            <a:spLocks noGrp="1"/>
+          </p:cNvSpPr>
+          <p:nvPr/>
+        </p:nvSpPr>
+        <p:spPr>
+          <a:xfrm>
+            <a:off x="1736195" y="1450181"/>
+            <a:ext cx="4305300" cy="323850"/>
+          </a:xfrm>
+          <a:prstGeom prst="rect">
+            <a:avLst/>
+          </a:prstGeom>
+          <a:solidFill>
+            <a:srgbClr val="000000">
+              <a:alpha val="0"/>
+            </a:srgbClr>
+          </a:solidFill>
+          <a:ln w="0">
+            <a:solidFill>
+              <a:srgbClr val="000000">
+                <a:alpha val="0"/>
+              </a:srgbClr>
+            </a:solidFill>
+            <a:prstDash val="solid"/>
+          </a:ln>
+        </p:spPr>
+        <p:txBody>
+          <a:bodyPr anchor="ctr"/>
+          <a:lstStyle/>
+          <a:p>
+            <a:pPr algn="l">
+              <a:defRPr sz="1650" b="1">
+                <a:solidFill>
+                  <a:srgbClr val="2D4A33"/>
+                </a:solidFill>
+              </a:defRPr>
+            </a:pPr>
+            <a:r>
+              <a:rPr lang="zh-CN" altLang="en-US" sz="3200" b="1" dirty="0">
+                <a:solidFill>
+                  <a:srgbClr val="2D4A33"/>
+                </a:solidFill>
+              </a:rPr>
+              <a:t>中文文本切分改进</a:t>
+            </a:r>
+            <a:endParaRPr sz="3200" b="1" dirty="0">
+              <a:solidFill>
+                <a:srgbClr val="2D4A33"/>
+              </a:solidFill>
+            </a:endParaRPr>
+          </a:p>
+        </p:txBody>
+      </p:sp>
+      <p:sp>
+        <p:nvSpPr>
+          <p:cNvPr id="6" name="矩形 5">
+            <a:extLst>
+              <a:ext uri="{FF2B5EF4-FFF2-40B4-BE49-F238E27FC236}">
+                <a16:creationId xmlns:a16="http://schemas.microsoft.com/office/drawing/2014/main" id="{80F4B1FB-DFE4-43C7-98D1-891507107452}"/>
+              </a:ext>
+            </a:extLst>
+          </p:cNvPr>
+          <p:cNvSpPr>
+            <a:spLocks noGrp="1"/>
+          </p:cNvSpPr>
+          <p:nvPr/>
+        </p:nvSpPr>
+        <p:spPr>
+          <a:xfrm>
+            <a:off x="699557" y="1867430"/>
+            <a:ext cx="5334000" cy="1728787"/>
+          </a:xfrm>
+          <a:prstGeom prst="rect">
+            <a:avLst/>
+          </a:prstGeom>
+          <a:solidFill>
+            <a:srgbClr val="000000">
+              <a:alpha val="0"/>
+            </a:srgbClr>
+          </a:solidFill>
+          <a:ln w="0">
+            <a:solidFill>
+              <a:srgbClr val="000000">
+                <a:alpha val="0"/>
+              </a:srgbClr>
+            </a:solidFill>
+            <a:prstDash val="solid"/>
+          </a:ln>
+        </p:spPr>
+        <p:txBody>
+          <a:bodyPr anchor="ctr"/>
+          <a:lstStyle/>
+          <a:p>
+            <a:r>
+              <a:rPr lang="zh-CN" altLang="en-US" dirty="0"/>
+              <a:t>分隔符扩展为中英文混合</a:t>
+            </a:r>
+            <a:r>
+              <a:rPr lang="en-US" altLang="zh-CN" dirty="0"/>
+              <a:t>:</a:t>
+            </a:r>
+            <a:r>
+              <a:rPr lang="zh-CN" altLang="en-US" dirty="0"/>
+              <a:t>。！？； </a:t>
+            </a:r>
+            <a:r>
+              <a:rPr lang="en-US" altLang="zh-CN" dirty="0"/>
+              <a:t>+ .!?</a:t>
+            </a:r>
+          </a:p>
+          <a:p>
+            <a:endParaRPr lang="en-US" altLang="zh-CN" dirty="0"/>
+          </a:p>
+          <a:p>
+            <a:r>
+              <a:rPr lang="zh-CN" altLang="en-US" dirty="0"/>
+              <a:t>句子分块用正则 </a:t>
+            </a:r>
+            <a:r>
+              <a:rPr lang="en-US" altLang="zh-CN" dirty="0"/>
+              <a:t>(?&lt;=[</a:t>
+            </a:r>
+            <a:r>
+              <a:rPr lang="zh-CN" altLang="en-US" dirty="0"/>
+              <a:t>。！？；</a:t>
+            </a:r>
+            <a:r>
+              <a:rPr lang="en-US" altLang="zh-CN" dirty="0"/>
+              <a:t>.!?])\s* </a:t>
+            </a:r>
+            <a:r>
+              <a:rPr lang="zh-CN" altLang="en-US" dirty="0"/>
+              <a:t>识别边界</a:t>
+            </a:r>
+            <a:endParaRPr lang="en-US" altLang="zh-CN" dirty="0"/>
+          </a:p>
+          <a:p>
+            <a:endParaRPr lang="zh-CN" altLang="en-US" dirty="0"/>
+          </a:p>
+          <a:p>
+            <a:r>
+              <a:rPr lang="zh-CN" altLang="en-US" dirty="0"/>
+              <a:t>超长句</a:t>
+            </a:r>
+            <a:r>
+              <a:rPr lang="en-US" altLang="zh-CN" dirty="0"/>
+              <a:t>(&gt;1000</a:t>
+            </a:r>
+            <a:r>
+              <a:rPr lang="zh-CN" altLang="en-US" dirty="0"/>
+              <a:t>字</a:t>
+            </a:r>
+            <a:r>
+              <a:rPr lang="en-US" altLang="zh-CN" dirty="0"/>
+              <a:t>)</a:t>
+            </a:r>
+            <a:r>
+              <a:rPr lang="zh-CN" altLang="en-US" dirty="0"/>
+              <a:t>自动二次切分</a:t>
+            </a:r>
+            <a:r>
+              <a:rPr lang="en-US" altLang="zh-CN" dirty="0"/>
+              <a:t>,</a:t>
+            </a:r>
+            <a:r>
+              <a:rPr lang="zh-CN" altLang="en-US" dirty="0"/>
+              <a:t>兼容中英混排</a:t>
+            </a:r>
+            <a:endParaRPr lang="zh-CN" altLang="zh-CN" dirty="0"/>
+          </a:p>
+        </p:txBody>
+      </p:sp>
+      <p:sp>
+        <p:nvSpPr>
+          <p:cNvPr id="7" name="矩形 6">
+            <a:extLst>
+              <a:ext uri="{FF2B5EF4-FFF2-40B4-BE49-F238E27FC236}">
+                <a16:creationId xmlns:a16="http://schemas.microsoft.com/office/drawing/2014/main" id="{02F5307D-47AA-4496-B027-2EBC00B0661D}"/>
+              </a:ext>
+            </a:extLst>
+          </p:cNvPr>
+          <p:cNvSpPr>
+            <a:spLocks noGrp="1"/>
+          </p:cNvSpPr>
+          <p:nvPr/>
+        </p:nvSpPr>
+        <p:spPr>
+          <a:xfrm>
+            <a:off x="6515100" y="1250154"/>
+            <a:ext cx="4762500" cy="5207795"/>
+          </a:xfrm>
+          <a:prstGeom prst="rect">
+            <a:avLst/>
+          </a:prstGeom>
+          <a:solidFill>
+            <a:srgbClr val="FFFFFF"/>
+          </a:solidFill>
+          <a:ln w="9525">
+            <a:solidFill>
+              <a:srgbClr val="C7D0C4"/>
+            </a:solidFill>
+            <a:prstDash val="solid"/>
+          </a:ln>
+        </p:spPr>
+      </p:sp>
+      <p:sp>
+        <p:nvSpPr>
+          <p:cNvPr id="8" name="矩形 7">
+            <a:extLst>
+              <a:ext uri="{FF2B5EF4-FFF2-40B4-BE49-F238E27FC236}">
+                <a16:creationId xmlns:a16="http://schemas.microsoft.com/office/drawing/2014/main" id="{E8ED42BD-464C-42DE-BDFA-1C3FED5B7ACA}"/>
+              </a:ext>
+            </a:extLst>
+          </p:cNvPr>
+          <p:cNvSpPr>
+            <a:spLocks noGrp="1"/>
+          </p:cNvSpPr>
+          <p:nvPr/>
+        </p:nvSpPr>
+        <p:spPr>
+          <a:xfrm>
+            <a:off x="6800850" y="1685925"/>
+            <a:ext cx="4305300" cy="323850"/>
+          </a:xfrm>
+          <a:prstGeom prst="rect">
+            <a:avLst/>
+          </a:prstGeom>
+          <a:solidFill>
+            <a:srgbClr val="000000">
+              <a:alpha val="0"/>
+            </a:srgbClr>
+          </a:solidFill>
+          <a:ln w="0">
+            <a:solidFill>
+              <a:srgbClr val="000000">
+                <a:alpha val="0"/>
+              </a:srgbClr>
+            </a:solidFill>
+            <a:prstDash val="solid"/>
+          </a:ln>
+        </p:spPr>
+        <p:txBody>
+          <a:bodyPr anchor="ctr"/>
+          <a:lstStyle/>
+          <a:p>
+            <a:pPr>
+              <a:defRPr sz="1650" b="1">
+                <a:solidFill>
+                  <a:srgbClr val="2D4A33"/>
+                </a:solidFill>
+              </a:defRPr>
+            </a:pPr>
+            <a:r>
+              <a:rPr lang="en-US" sz="3200" b="1" dirty="0">
+                <a:solidFill>
+                  <a:srgbClr val="2D4A33"/>
+                </a:solidFill>
+              </a:rPr>
+              <a:t>Windows FAISS </a:t>
+            </a:r>
+          </a:p>
+          <a:p>
+            <a:pPr>
+              <a:defRPr sz="1650" b="1">
+                <a:solidFill>
+                  <a:srgbClr val="2D4A33"/>
+                </a:solidFill>
+              </a:defRPr>
+            </a:pPr>
+            <a:r>
+              <a:rPr lang="zh-CN" altLang="en-US" sz="3200" b="1" dirty="0">
+                <a:solidFill>
+                  <a:srgbClr val="2D4A33"/>
+                </a:solidFill>
+              </a:rPr>
+              <a:t>中文路径修复</a:t>
+            </a:r>
+            <a:endParaRPr sz="3200" b="1" dirty="0">
+              <a:solidFill>
+                <a:srgbClr val="2D4A33"/>
+              </a:solidFill>
+            </a:endParaRPr>
+          </a:p>
+        </p:txBody>
+      </p:sp>
+      <p:sp>
+        <p:nvSpPr>
+          <p:cNvPr id="9" name="矩形 8">
+            <a:extLst>
+              <a:ext uri="{FF2B5EF4-FFF2-40B4-BE49-F238E27FC236}">
+                <a16:creationId xmlns:a16="http://schemas.microsoft.com/office/drawing/2014/main" id="{0396FB42-E968-4370-8713-7F8120653B23}"/>
+              </a:ext>
+            </a:extLst>
+          </p:cNvPr>
+          <p:cNvSpPr>
+            <a:spLocks noGrp="1"/>
+          </p:cNvSpPr>
+          <p:nvPr/>
+        </p:nvSpPr>
+        <p:spPr>
+          <a:xfrm>
+            <a:off x="6729941" y="2226733"/>
+            <a:ext cx="4539192" cy="2234141"/>
+          </a:xfrm>
+          <a:prstGeom prst="rect">
+            <a:avLst/>
+          </a:prstGeom>
+          <a:solidFill>
+            <a:srgbClr val="000000">
+              <a:alpha val="0"/>
+            </a:srgbClr>
+          </a:solidFill>
+          <a:ln w="0">
+            <a:solidFill>
+              <a:srgbClr val="000000">
+                <a:alpha val="0"/>
+              </a:srgbClr>
+            </a:solidFill>
+            <a:prstDash val="solid"/>
+          </a:ln>
+        </p:spPr>
+        <p:txBody>
+          <a:bodyPr anchor="ctr"/>
+          <a:lstStyle/>
+          <a:p>
+            <a:r>
+              <a:rPr lang="zh-CN" altLang="en-US" dirty="0"/>
+              <a:t>痛点</a:t>
+            </a:r>
+            <a:r>
+              <a:rPr lang="en-US" altLang="zh-CN" dirty="0"/>
+              <a:t>:</a:t>
+            </a:r>
+            <a:r>
+              <a:rPr lang="en-US" altLang="zh-CN" dirty="0" err="1"/>
+              <a:t>read_index</a:t>
+            </a:r>
+            <a:r>
+              <a:rPr lang="en-US" altLang="zh-CN" dirty="0"/>
+              <a:t>/</a:t>
+            </a:r>
+            <a:r>
+              <a:rPr lang="en-US" altLang="zh-CN" dirty="0" err="1"/>
+              <a:t>write_index</a:t>
+            </a:r>
+            <a:r>
+              <a:rPr lang="en-US" altLang="zh-CN" dirty="0"/>
+              <a:t> </a:t>
+            </a:r>
+            <a:r>
+              <a:rPr lang="zh-CN" altLang="en-US" dirty="0"/>
+              <a:t>遇中文路径打开失败</a:t>
+            </a:r>
+            <a:endParaRPr lang="en-US" altLang="zh-CN" dirty="0"/>
+          </a:p>
+          <a:p>
+            <a:endParaRPr lang="zh-CN" altLang="en-US" dirty="0"/>
+          </a:p>
+          <a:p>
+            <a:r>
+              <a:rPr lang="zh-CN" altLang="en-US" dirty="0"/>
+              <a:t>改用 </a:t>
+            </a:r>
+            <a:r>
+              <a:rPr lang="en-US" altLang="zh-CN" dirty="0"/>
+              <a:t>serialize/</a:t>
+            </a:r>
+            <a:r>
+              <a:rPr lang="en-US" altLang="zh-CN" dirty="0" err="1"/>
+              <a:t>deserialize_index</a:t>
+            </a:r>
+            <a:r>
+              <a:rPr lang="en-US" altLang="zh-CN" dirty="0"/>
+              <a:t> + Python </a:t>
+            </a:r>
+            <a:r>
+              <a:rPr lang="zh-CN" altLang="en-US" dirty="0"/>
+              <a:t>原生文件流</a:t>
+            </a:r>
+            <a:endParaRPr lang="en-US" altLang="zh-CN" dirty="0"/>
+          </a:p>
+          <a:p>
+            <a:endParaRPr lang="zh-CN" altLang="en-US" dirty="0"/>
+          </a:p>
+          <a:p>
+            <a:r>
+              <a:rPr lang="zh-CN" altLang="en-US" dirty="0"/>
+              <a:t>中文知识库名</a:t>
+            </a:r>
+            <a:r>
+              <a:rPr lang="en-US" altLang="zh-CN" dirty="0"/>
+              <a:t>/</a:t>
+            </a:r>
+            <a:r>
+              <a:rPr lang="zh-CN" altLang="en-US" dirty="0"/>
+              <a:t>文档名均可正常索引读写</a:t>
+            </a:r>
+            <a:endParaRPr lang="zh-CN" altLang="zh-CN" dirty="0"/>
+          </a:p>
+        </p:txBody>
+      </p:sp>
+      <p:sp>
+        <p:nvSpPr>
+          <p:cNvPr id="10" name="矩形 9">
+            <a:extLst>
+              <a:ext uri="{FF2B5EF4-FFF2-40B4-BE49-F238E27FC236}">
+                <a16:creationId xmlns:a16="http://schemas.microsoft.com/office/drawing/2014/main" id="{E5C669DF-CAC4-4D06-92B2-8A85E452067E}"/>
+              </a:ext>
+            </a:extLst>
+          </p:cNvPr>
+          <p:cNvSpPr>
+            <a:spLocks noGrp="1"/>
+          </p:cNvSpPr>
+          <p:nvPr/>
+        </p:nvSpPr>
+        <p:spPr>
+          <a:xfrm>
+            <a:off x="484716" y="3852863"/>
+            <a:ext cx="5763683" cy="2605087"/>
+          </a:xfrm>
+          <a:prstGeom prst="rect">
+            <a:avLst/>
+          </a:prstGeom>
+          <a:solidFill>
+            <a:srgbClr val="FFFFFF"/>
+          </a:solidFill>
+          <a:ln w="9525">
+            <a:solidFill>
+              <a:srgbClr val="C7D0C4"/>
+            </a:solidFill>
+            <a:prstDash val="solid"/>
+          </a:ln>
+        </p:spPr>
+      </p:sp>
+      <p:sp>
+        <p:nvSpPr>
+          <p:cNvPr id="11" name="矩形 10">
+            <a:extLst>
+              <a:ext uri="{FF2B5EF4-FFF2-40B4-BE49-F238E27FC236}">
+                <a16:creationId xmlns:a16="http://schemas.microsoft.com/office/drawing/2014/main" id="{AA327DB0-DBD6-42E5-85A2-3C88543BC4E9}"/>
+              </a:ext>
+            </a:extLst>
+          </p:cNvPr>
+          <p:cNvSpPr>
+            <a:spLocks noGrp="1"/>
+          </p:cNvSpPr>
+          <p:nvPr/>
+        </p:nvSpPr>
+        <p:spPr>
+          <a:xfrm>
+            <a:off x="1752600" y="3876675"/>
+            <a:ext cx="3638550" cy="323850"/>
+          </a:xfrm>
+          <a:prstGeom prst="rect">
+            <a:avLst/>
+          </a:prstGeom>
+          <a:solidFill>
+            <a:srgbClr val="000000">
+              <a:alpha val="0"/>
+            </a:srgbClr>
+          </a:solidFill>
+          <a:ln w="0">
+            <a:solidFill>
+              <a:srgbClr val="000000">
+                <a:alpha val="0"/>
+              </a:srgbClr>
+            </a:solidFill>
+            <a:prstDash val="solid"/>
+          </a:ln>
+        </p:spPr>
+        <p:txBody>
+          <a:bodyPr anchor="ctr"/>
+          <a:lstStyle/>
+          <a:p>
+            <a:pPr>
+              <a:defRPr sz="1650" b="1">
+                <a:solidFill>
+                  <a:srgbClr val="2D4A33"/>
+                </a:solidFill>
+              </a:defRPr>
+            </a:pPr>
+            <a:r>
+              <a:rPr lang="zh-CN" altLang="en-US" sz="3200" b="1" dirty="0">
+                <a:solidFill>
+                  <a:srgbClr val="2D4A33"/>
+                </a:solidFill>
+              </a:rPr>
+              <a:t>中文字数统计优化</a:t>
+            </a:r>
+            <a:endParaRPr sz="3200" b="1" dirty="0">
+              <a:solidFill>
+                <a:srgbClr val="2D4A33"/>
+              </a:solidFill>
+            </a:endParaRPr>
+          </a:p>
+        </p:txBody>
+      </p:sp>
+      <p:sp>
+        <p:nvSpPr>
+          <p:cNvPr id="12" name="矩形 11">
+            <a:extLst>
+              <a:ext uri="{FF2B5EF4-FFF2-40B4-BE49-F238E27FC236}">
+                <a16:creationId xmlns:a16="http://schemas.microsoft.com/office/drawing/2014/main" id="{E7E24D30-F662-4C81-B43C-F0978EE590E4}"/>
+              </a:ext>
+            </a:extLst>
+          </p:cNvPr>
+          <p:cNvSpPr>
+            <a:spLocks noGrp="1"/>
+          </p:cNvSpPr>
+          <p:nvPr/>
+        </p:nvSpPr>
+        <p:spPr>
+          <a:xfrm>
+            <a:off x="699557" y="4292070"/>
+            <a:ext cx="6378576" cy="1666875"/>
+          </a:xfrm>
+          <a:prstGeom prst="rect">
+            <a:avLst/>
+          </a:prstGeom>
+          <a:solidFill>
+            <a:srgbClr val="000000">
+              <a:alpha val="0"/>
+            </a:srgbClr>
+          </a:solidFill>
+          <a:ln w="0">
+            <a:solidFill>
+              <a:srgbClr val="000000">
+                <a:alpha val="0"/>
+              </a:srgbClr>
+            </a:solidFill>
+            <a:prstDash val="solid"/>
+          </a:ln>
+        </p:spPr>
+        <p:txBody>
+          <a:bodyPr anchor="ctr"/>
+          <a:lstStyle/>
+          <a:p>
+            <a:r>
+              <a:rPr lang="zh-CN" altLang="en-US" dirty="0"/>
+              <a:t>原 </a:t>
+            </a:r>
+            <a:r>
+              <a:rPr lang="en-US" altLang="zh-CN" dirty="0" err="1"/>
+              <a:t>text.split</a:t>
+            </a:r>
+            <a:r>
+              <a:rPr lang="en-US" altLang="zh-CN" dirty="0"/>
+              <a:t>() </a:t>
+            </a:r>
+            <a:r>
+              <a:rPr lang="zh-CN" altLang="en-US" dirty="0"/>
+              <a:t>把整句中文算作 </a:t>
+            </a:r>
+            <a:r>
+              <a:rPr lang="en-US" altLang="zh-CN" dirty="0"/>
+              <a:t>1 </a:t>
+            </a:r>
+            <a:r>
+              <a:rPr lang="zh-CN" altLang="en-US" dirty="0"/>
+              <a:t>个词</a:t>
+            </a:r>
+            <a:endParaRPr lang="en-US" altLang="zh-CN" dirty="0"/>
+          </a:p>
+          <a:p>
+            <a:endParaRPr lang="zh-CN" altLang="en-US" dirty="0"/>
+          </a:p>
+          <a:p>
+            <a:r>
+              <a:rPr lang="zh-CN" altLang="en-US" dirty="0"/>
+              <a:t>新增 </a:t>
+            </a:r>
+            <a:r>
+              <a:rPr lang="en-US" altLang="zh-CN" dirty="0"/>
+              <a:t>_</a:t>
+            </a:r>
+            <a:r>
+              <a:rPr lang="en-US" altLang="zh-CN" dirty="0" err="1"/>
+              <a:t>estimate_word_count</a:t>
+            </a:r>
+            <a:r>
+              <a:rPr lang="en-US" altLang="zh-CN" dirty="0"/>
+              <a:t>:</a:t>
+            </a:r>
+            <a:r>
+              <a:rPr lang="zh-CN" altLang="en-US" dirty="0"/>
+              <a:t>正则 </a:t>
+            </a:r>
+            <a:r>
+              <a:rPr lang="en-US" altLang="zh-CN" dirty="0"/>
+              <a:t>[</a:t>
+            </a:r>
+            <a:r>
+              <a:rPr lang="zh-CN" altLang="en-US" dirty="0"/>
+              <a:t>一</a:t>
+            </a:r>
+            <a:r>
+              <a:rPr lang="en-US" altLang="zh-CN" dirty="0"/>
+              <a:t>-鿿]|[A-Za-z0-9_]+</a:t>
+            </a:r>
+          </a:p>
+          <a:p>
+            <a:endParaRPr lang="en-US" altLang="zh-CN" dirty="0"/>
+          </a:p>
+          <a:p>
+            <a:r>
+              <a:rPr lang="zh-CN" altLang="en-US" dirty="0"/>
+              <a:t>每个汉字</a:t>
+            </a:r>
+            <a:r>
+              <a:rPr lang="en-US" altLang="zh-CN" dirty="0"/>
+              <a:t>=1</a:t>
+            </a:r>
+            <a:r>
+              <a:rPr lang="zh-CN" altLang="en-US" dirty="0"/>
+              <a:t>单元</a:t>
+            </a:r>
+            <a:r>
+              <a:rPr lang="en-US" altLang="zh-CN" dirty="0"/>
+              <a:t>,</a:t>
+            </a:r>
+            <a:r>
+              <a:rPr lang="zh-CN" altLang="en-US" dirty="0"/>
+              <a:t>准确控制上下文 </a:t>
+            </a:r>
+            <a:r>
+              <a:rPr lang="en-US" altLang="zh-CN" dirty="0"/>
+              <a:t>token </a:t>
+            </a:r>
+            <a:r>
+              <a:rPr lang="zh-CN" altLang="en-US" dirty="0"/>
+              <a:t>预算</a:t>
+            </a:r>
+            <a:endParaRPr lang="zh-CN" altLang="zh-CN" dirty="0"/>
+          </a:p>
+        </p:txBody>
+      </p:sp>
+    </p:spTree>
+    <p:extLst>
+      <p:ext uri="{BB962C8B-B14F-4D97-AF65-F5344CB8AC3E}">
+        <p14:creationId xmlns:p14="http://schemas.microsoft.com/office/powerpoint/2010/main" val="1505607212"/>
+      </p:ext>
+    </p:extLst>
+  </p:cSld>
+  <p:clrMapOvr>
+    <a:masterClrMapping/>
+  </p:clrMapOvr>
+</p:sld>
+</file>
+
+<file path=ppt/slides/slide18.xml><?xml version="1.0" encoding="utf-8"?>
+<p:sld xmlns:a="http://schemas.openxmlformats.org/drawingml/2006/main" xmlns:r="http://schemas.openxmlformats.org/officeDocument/2006/relationships" xmlns:p="http://schemas.openxmlformats.org/presentationml/2006/main">
+  <p:cSld>
     <p:spTree>
       <p:nvGrpSpPr>
         <p:cNvPr id="1" name=""/>

--- a/report/myrag总结.pptx
+++ b/report/myrag总结.pptx
@@ -5,27 +5,27 @@
     <p:sldMasterId id="2147483648" r:id="rId1"/>
   </p:sldMasterIdLst>
   <p:notesMasterIdLst>
-    <p:notesMasterId r:id="rId20"/>
+    <p:notesMasterId r:id="rId4"/>
   </p:notesMasterIdLst>
   <p:sldIdLst>
-    <p:sldId id="256" r:id="rId2"/>
-    <p:sldId id="273" r:id="rId3"/>
-    <p:sldId id="258" r:id="rId4"/>
-    <p:sldId id="260" r:id="rId5"/>
-    <p:sldId id="274" r:id="rId6"/>
-    <p:sldId id="276" r:id="rId7"/>
-    <p:sldId id="277" r:id="rId8"/>
-    <p:sldId id="262" r:id="rId9"/>
-    <p:sldId id="263" r:id="rId10"/>
-    <p:sldId id="270" r:id="rId11"/>
-    <p:sldId id="259" r:id="rId12"/>
-    <p:sldId id="271" r:id="rId13"/>
-    <p:sldId id="264" r:id="rId14"/>
-    <p:sldId id="272" r:id="rId15"/>
-    <p:sldId id="261" r:id="rId16"/>
-    <p:sldId id="278" r:id="rId17"/>
-    <p:sldId id="279" r:id="rId18"/>
-    <p:sldId id="268" r:id="rId19"/>
+    <p:sldId id="256" r:id="rId3"/>
+    <p:sldId id="273" r:id="rId5"/>
+    <p:sldId id="258" r:id="rId6"/>
+    <p:sldId id="260" r:id="rId7"/>
+    <p:sldId id="274" r:id="rId8"/>
+    <p:sldId id="276" r:id="rId9"/>
+    <p:sldId id="277" r:id="rId10"/>
+    <p:sldId id="262" r:id="rId11"/>
+    <p:sldId id="263" r:id="rId12"/>
+    <p:sldId id="270" r:id="rId13"/>
+    <p:sldId id="259" r:id="rId14"/>
+    <p:sldId id="271" r:id="rId15"/>
+    <p:sldId id="264" r:id="rId16"/>
+    <p:sldId id="272" r:id="rId17"/>
+    <p:sldId id="261" r:id="rId18"/>
+    <p:sldId id="278" r:id="rId19"/>
+    <p:sldId id="279" r:id="rId20"/>
+    <p:sldId id="268" r:id="rId21"/>
   </p:sldIdLst>
   <p:sldSz cx="12192000" cy="6858000"/>
   <p:notesSz cx="6858000" cy="9144000"/>
@@ -124,11 +124,6 @@
       </a:defRPr>
     </a:lvl9pPr>
   </p:defaultTextStyle>
-  <p:extLst>
-    <p:ext uri="{EFAFB233-063F-42B5-8137-9DF3F51BA10A}">
-      <p15:sldGuideLst xmlns:p15="http://schemas.microsoft.com/office/powerpoint/2012/main"/>
-    </p:ext>
-  </p:extLst>
 </p:presentation>
 </file>
 
@@ -172,9 +167,7 @@
         <p:txBody>
           <a:bodyPr/>
           <a:lstStyle/>
-          <a:p>
-            <a:endParaRPr/>
-          </a:p>
+          <a:p/>
         </p:txBody>
       </p:sp>
       <p:sp>
@@ -195,9 +188,7 @@
         <p:txBody>
           <a:bodyPr/>
           <a:lstStyle/>
-          <a:p>
-            <a:endParaRPr/>
-          </a:p>
+          <a:p/>
         </p:txBody>
       </p:sp>
       <p:sp>
@@ -218,9 +209,7 @@
         <p:txBody>
           <a:bodyPr/>
           <a:lstStyle/>
-          <a:p>
-            <a:endParaRPr/>
-          </a:p>
+          <a:p/>
         </p:txBody>
       </p:sp>
       <p:sp>
@@ -241,9 +230,7 @@
         <p:txBody>
           <a:bodyPr/>
           <a:lstStyle/>
-          <a:p>
-            <a:endParaRPr/>
-          </a:p>
+          <a:p/>
         </p:txBody>
       </p:sp>
       <p:sp>
@@ -264,9 +251,7 @@
         <p:txBody>
           <a:bodyPr/>
           <a:lstStyle/>
-          <a:p>
-            <a:endParaRPr/>
-          </a:p>
+          <a:p/>
         </p:txBody>
       </p:sp>
       <p:sp>
@@ -287,9 +272,7 @@
         <p:txBody>
           <a:bodyPr/>
           <a:lstStyle/>
-          <a:p>
-            <a:endParaRPr/>
-          </a:p>
+          <a:p/>
         </p:txBody>
       </p:sp>
     </p:spTree>
@@ -346,9 +329,7 @@
         <p:txBody>
           <a:bodyPr/>
           <a:lstStyle/>
-          <a:p>
-            <a:endParaRPr/>
-          </a:p>
+          <a:p/>
         </p:txBody>
       </p:sp>
       <p:sp>
@@ -365,9 +346,7 @@
         <p:txBody>
           <a:bodyPr/>
           <a:lstStyle/>
-          <a:p>
-            <a:endParaRPr/>
-          </a:p>
+          <a:p/>
         </p:txBody>
       </p:sp>
     </p:spTree>
@@ -421,9 +400,7 @@
         <p:txBody>
           <a:bodyPr/>
           <a:lstStyle/>
-          <a:p>
-            <a:endParaRPr/>
-          </a:p>
+          <a:p/>
         </p:txBody>
       </p:sp>
       <p:sp>
@@ -455,7 +432,6 @@
               <a:buSzTx/>
               <a:buFontTx/>
               <a:buNone/>
-              <a:tabLst/>
               <a:defRPr/>
             </a:pPr>
             <a:endParaRPr kumimoji="0" sz="1800" b="0" i="0" u="none" strike="noStrike" kern="1200" cap="none" spc="0" normalizeH="0" baseline="0" noProof="0">
@@ -468,19 +444,14 @@
               <a:effectLst/>
               <a:uLnTx/>
               <a:uFillTx/>
-              <a:latin typeface="Arial"/>
-              <a:ea typeface="STZhongsong"/>
+              <a:latin typeface="Arial" panose="020B0604020202020204"/>
+              <a:ea typeface="华文中宋" panose="02010600040101010101" charset="-122"/>
               <a:cs typeface="+mn-cs"/>
             </a:endParaRPr>
           </a:p>
         </p:txBody>
       </p:sp>
     </p:spTree>
-    <p:extLst>
-      <p:ext uri="{BB962C8B-B14F-4D97-AF65-F5344CB8AC3E}">
-        <p14:creationId xmlns:p14="http://schemas.microsoft.com/office/powerpoint/2010/main" val="1321021020"/>
-      </p:ext>
-    </p:extLst>
   </p:cSld>
   <p:clrMapOvr>
     <a:masterClrMapping/>
@@ -531,9 +502,7 @@
         <p:txBody>
           <a:bodyPr/>
           <a:lstStyle/>
-          <a:p>
-            <a:endParaRPr/>
-          </a:p>
+          <a:p/>
         </p:txBody>
       </p:sp>
       <p:sp>
@@ -550,9 +519,7 @@
         <p:txBody>
           <a:bodyPr/>
           <a:lstStyle/>
-          <a:p>
-            <a:endParaRPr/>
-          </a:p>
+          <a:p/>
         </p:txBody>
       </p:sp>
     </p:spTree>
@@ -606,9 +573,7 @@
         <p:txBody>
           <a:bodyPr/>
           <a:lstStyle/>
-          <a:p>
-            <a:endParaRPr/>
-          </a:p>
+          <a:p/>
         </p:txBody>
       </p:sp>
       <p:sp>
@@ -640,7 +605,6 @@
               <a:buSzTx/>
               <a:buFontTx/>
               <a:buNone/>
-              <a:tabLst/>
               <a:defRPr/>
             </a:pPr>
             <a:endParaRPr kumimoji="0" sz="1800" b="0" i="0" u="none" strike="noStrike" kern="1200" cap="none" spc="0" normalizeH="0" baseline="0" noProof="0">
@@ -653,19 +617,14 @@
               <a:effectLst/>
               <a:uLnTx/>
               <a:uFillTx/>
-              <a:latin typeface="Arial"/>
-              <a:ea typeface="STZhongsong"/>
+              <a:latin typeface="Arial" panose="020B0604020202020204"/>
+              <a:ea typeface="华文中宋" panose="02010600040101010101" charset="-122"/>
               <a:cs typeface="+mn-cs"/>
             </a:endParaRPr>
           </a:p>
         </p:txBody>
       </p:sp>
     </p:spTree>
-    <p:extLst>
-      <p:ext uri="{BB962C8B-B14F-4D97-AF65-F5344CB8AC3E}">
-        <p14:creationId xmlns:p14="http://schemas.microsoft.com/office/powerpoint/2010/main" val="207738448"/>
-      </p:ext>
-    </p:extLst>
   </p:cSld>
   <p:clrMapOvr>
     <a:masterClrMapping/>
@@ -716,9 +675,7 @@
         <p:txBody>
           <a:bodyPr/>
           <a:lstStyle/>
-          <a:p>
-            <a:endParaRPr/>
-          </a:p>
+          <a:p/>
         </p:txBody>
       </p:sp>
       <p:sp>
@@ -735,9 +692,7 @@
         <p:txBody>
           <a:bodyPr/>
           <a:lstStyle/>
-          <a:p>
-            <a:endParaRPr/>
-          </a:p>
+          <a:p/>
         </p:txBody>
       </p:sp>
     </p:spTree>
@@ -791,9 +746,7 @@
         <p:txBody>
           <a:bodyPr/>
           <a:lstStyle/>
-          <a:p>
-            <a:endParaRPr/>
-          </a:p>
+          <a:p/>
         </p:txBody>
       </p:sp>
       <p:sp>
@@ -825,7 +778,6 @@
               <a:buSzTx/>
               <a:buFontTx/>
               <a:buNone/>
-              <a:tabLst/>
               <a:defRPr/>
             </a:pPr>
             <a:endParaRPr kumimoji="0" sz="1800" b="0" i="0" u="none" strike="noStrike" kern="1200" cap="none" spc="0" normalizeH="0" baseline="0" noProof="0">
@@ -838,19 +790,14 @@
               <a:effectLst/>
               <a:uLnTx/>
               <a:uFillTx/>
-              <a:latin typeface="Arial"/>
-              <a:ea typeface="STZhongsong"/>
+              <a:latin typeface="Arial" panose="020B0604020202020204"/>
+              <a:ea typeface="华文中宋" panose="02010600040101010101" charset="-122"/>
               <a:cs typeface="+mn-cs"/>
             </a:endParaRPr>
           </a:p>
         </p:txBody>
       </p:sp>
     </p:spTree>
-    <p:extLst>
-      <p:ext uri="{BB962C8B-B14F-4D97-AF65-F5344CB8AC3E}">
-        <p14:creationId xmlns:p14="http://schemas.microsoft.com/office/powerpoint/2010/main" val="567967028"/>
-      </p:ext>
-    </p:extLst>
   </p:cSld>
   <p:clrMapOvr>
     <a:masterClrMapping/>
@@ -901,9 +848,7 @@
         <p:txBody>
           <a:bodyPr/>
           <a:lstStyle/>
-          <a:p>
-            <a:endParaRPr/>
-          </a:p>
+          <a:p/>
         </p:txBody>
       </p:sp>
       <p:sp>
@@ -920,9 +865,7 @@
         <p:txBody>
           <a:bodyPr/>
           <a:lstStyle/>
-          <a:p>
-            <a:endParaRPr/>
-          </a:p>
+          <a:p/>
         </p:txBody>
       </p:sp>
     </p:spTree>
@@ -976,9 +919,7 @@
         <p:txBody>
           <a:bodyPr/>
           <a:lstStyle/>
-          <a:p>
-            <a:endParaRPr/>
-          </a:p>
+          <a:p/>
         </p:txBody>
       </p:sp>
       <p:sp>
@@ -1010,7 +951,6 @@
               <a:buSzTx/>
               <a:buFontTx/>
               <a:buNone/>
-              <a:tabLst/>
               <a:defRPr/>
             </a:pPr>
             <a:endParaRPr kumimoji="0" sz="1800" b="0" i="0" u="none" strike="noStrike" kern="1200" cap="none" spc="0" normalizeH="0" baseline="0" noProof="0">
@@ -1023,19 +963,14 @@
               <a:effectLst/>
               <a:uLnTx/>
               <a:uFillTx/>
-              <a:latin typeface="Arial"/>
-              <a:ea typeface="STZhongsong"/>
+              <a:latin typeface="Arial" panose="020B0604020202020204"/>
+              <a:ea typeface="华文中宋" panose="02010600040101010101" charset="-122"/>
               <a:cs typeface="+mn-cs"/>
             </a:endParaRPr>
           </a:p>
         </p:txBody>
       </p:sp>
     </p:spTree>
-    <p:extLst>
-      <p:ext uri="{BB962C8B-B14F-4D97-AF65-F5344CB8AC3E}">
-        <p14:creationId xmlns:p14="http://schemas.microsoft.com/office/powerpoint/2010/main" val="1972127434"/>
-      </p:ext>
-    </p:extLst>
   </p:cSld>
   <p:clrMapOvr>
     <a:masterClrMapping/>
@@ -1086,9 +1021,7 @@
         <p:txBody>
           <a:bodyPr/>
           <a:lstStyle/>
-          <a:p>
-            <a:endParaRPr/>
-          </a:p>
+          <a:p/>
         </p:txBody>
       </p:sp>
       <p:sp>
@@ -1105,17 +1038,10 @@
         <p:txBody>
           <a:bodyPr/>
           <a:lstStyle/>
-          <a:p>
-            <a:endParaRPr/>
-          </a:p>
+          <a:p/>
         </p:txBody>
       </p:sp>
     </p:spTree>
-    <p:extLst>
-      <p:ext uri="{BB962C8B-B14F-4D97-AF65-F5344CB8AC3E}">
-        <p14:creationId xmlns:p14="http://schemas.microsoft.com/office/powerpoint/2010/main" val="1158624808"/>
-      </p:ext>
-    </p:extLst>
   </p:cSld>
   <p:clrMapOvr>
     <a:masterClrMapping/>
@@ -1166,9 +1092,7 @@
         <p:txBody>
           <a:bodyPr/>
           <a:lstStyle/>
-          <a:p>
-            <a:endParaRPr/>
-          </a:p>
+          <a:p/>
         </p:txBody>
       </p:sp>
       <p:sp>
@@ -1185,9 +1109,7 @@
         <p:txBody>
           <a:bodyPr/>
           <a:lstStyle/>
-          <a:p>
-            <a:endParaRPr/>
-          </a:p>
+          <a:p/>
         </p:txBody>
       </p:sp>
     </p:spTree>
@@ -1241,9 +1163,7 @@
         <p:txBody>
           <a:bodyPr/>
           <a:lstStyle/>
-          <a:p>
-            <a:endParaRPr/>
-          </a:p>
+          <a:p/>
         </p:txBody>
       </p:sp>
       <p:sp>
@@ -1275,7 +1195,6 @@
               <a:buSzTx/>
               <a:buFontTx/>
               <a:buNone/>
-              <a:tabLst/>
               <a:defRPr/>
             </a:pPr>
             <a:endParaRPr kumimoji="0" sz="1800" b="0" i="0" u="none" strike="noStrike" kern="1200" cap="none" spc="0" normalizeH="0" baseline="0" noProof="0">
@@ -1288,19 +1207,14 @@
               <a:effectLst/>
               <a:uLnTx/>
               <a:uFillTx/>
-              <a:latin typeface="Arial"/>
-              <a:ea typeface="STZhongsong"/>
+              <a:latin typeface="Arial" panose="020B0604020202020204"/>
+              <a:ea typeface="华文中宋" panose="02010600040101010101" charset="-122"/>
               <a:cs typeface="+mn-cs"/>
             </a:endParaRPr>
           </a:p>
         </p:txBody>
       </p:sp>
     </p:spTree>
-    <p:extLst>
-      <p:ext uri="{BB962C8B-B14F-4D97-AF65-F5344CB8AC3E}">
-        <p14:creationId xmlns:p14="http://schemas.microsoft.com/office/powerpoint/2010/main" val="3990083614"/>
-      </p:ext>
-    </p:extLst>
   </p:cSld>
   <p:clrMapOvr>
     <a:masterClrMapping/>
@@ -1351,9 +1265,7 @@
         <p:txBody>
           <a:bodyPr/>
           <a:lstStyle/>
-          <a:p>
-            <a:endParaRPr/>
-          </a:p>
+          <a:p/>
         </p:txBody>
       </p:sp>
       <p:sp>
@@ -1370,9 +1282,7 @@
         <p:txBody>
           <a:bodyPr/>
           <a:lstStyle/>
-          <a:p>
-            <a:endParaRPr/>
-          </a:p>
+          <a:p/>
         </p:txBody>
       </p:sp>
     </p:spTree>
@@ -1426,9 +1336,7 @@
         <p:txBody>
           <a:bodyPr/>
           <a:lstStyle/>
-          <a:p>
-            <a:endParaRPr/>
-          </a:p>
+          <a:p/>
         </p:txBody>
       </p:sp>
       <p:sp>
@@ -1445,9 +1353,7 @@
         <p:txBody>
           <a:bodyPr/>
           <a:lstStyle/>
-          <a:p>
-            <a:endParaRPr/>
-          </a:p>
+          <a:p/>
         </p:txBody>
       </p:sp>
     </p:spTree>
@@ -1463,13 +1369,7 @@
   <p:cSld>
     <p:spTree>
       <p:nvGrpSpPr>
-        <p:cNvPr id="1" name="">
-          <a:extLst>
-            <a:ext uri="{FF2B5EF4-FFF2-40B4-BE49-F238E27FC236}">
-              <a16:creationId xmlns:a16="http://schemas.microsoft.com/office/drawing/2014/main" id="{0C917EDB-D4CB-2243-53CF-A0C5A275C993}"/>
-            </a:ext>
-          </a:extLst>
-        </p:cNvPr>
+        <p:cNvPr id="1" name=""/>
         <p:cNvGrpSpPr/>
         <p:nvPr/>
       </p:nvGrpSpPr>
@@ -1483,13 +1383,7 @@
       </p:grpSpPr>
       <p:sp>
         <p:nvSpPr>
-          <p:cNvPr id="2" name="Slide Image Placeholder 1">
-            <a:extLst>
-              <a:ext uri="{FF2B5EF4-FFF2-40B4-BE49-F238E27FC236}">
-                <a16:creationId xmlns:a16="http://schemas.microsoft.com/office/drawing/2014/main" id="{8BCF1735-152C-F705-8774-2BC6DA60827E}"/>
-              </a:ext>
-            </a:extLst>
-          </p:cNvPr>
+          <p:cNvPr id="2" name="Slide Image Placeholder 1"/>
           <p:cNvSpPr>
             <a:spLocks noGrp="1" noRot="1" noChangeAspect="1"/>
           </p:cNvSpPr>
@@ -1501,13 +1395,7 @@
       </p:sp>
       <p:sp>
         <p:nvSpPr>
-          <p:cNvPr id="3" name="Notes Placeholder 2">
-            <a:extLst>
-              <a:ext uri="{FF2B5EF4-FFF2-40B4-BE49-F238E27FC236}">
-                <a16:creationId xmlns:a16="http://schemas.microsoft.com/office/drawing/2014/main" id="{17799527-331A-AAD1-3D3A-FD789856D613}"/>
-              </a:ext>
-            </a:extLst>
-          </p:cNvPr>
+          <p:cNvPr id="3" name="Notes Placeholder 2"/>
           <p:cNvSpPr>
             <a:spLocks noGrp="1"/>
           </p:cNvSpPr>
@@ -1519,20 +1407,12 @@
         <p:txBody>
           <a:bodyPr/>
           <a:lstStyle/>
-          <a:p>
-            <a:endParaRPr/>
-          </a:p>
-        </p:txBody>
-      </p:sp>
-      <p:sp>
-        <p:nvSpPr>
-          <p:cNvPr id="4" name="Slide Number Placeholder 3">
-            <a:extLst>
-              <a:ext uri="{FF2B5EF4-FFF2-40B4-BE49-F238E27FC236}">
-                <a16:creationId xmlns:a16="http://schemas.microsoft.com/office/drawing/2014/main" id="{67180789-788A-04A3-FD44-79AB00AE0FD5}"/>
-              </a:ext>
-            </a:extLst>
-          </p:cNvPr>
+          <a:p/>
+        </p:txBody>
+      </p:sp>
+      <p:sp>
+        <p:nvSpPr>
+          <p:cNvPr id="4" name="Slide Number Placeholder 3"/>
           <p:cNvSpPr>
             <a:spLocks noGrp="1"/>
           </p:cNvSpPr>
@@ -1544,17 +1424,10 @@
         <p:txBody>
           <a:bodyPr/>
           <a:lstStyle/>
-          <a:p>
-            <a:endParaRPr/>
-          </a:p>
+          <a:p/>
         </p:txBody>
       </p:sp>
     </p:spTree>
-    <p:extLst>
-      <p:ext uri="{BB962C8B-B14F-4D97-AF65-F5344CB8AC3E}">
-        <p14:creationId xmlns:p14="http://schemas.microsoft.com/office/powerpoint/2010/main" val="1826526091"/>
-      </p:ext>
-    </p:extLst>
   </p:cSld>
   <p:clrMapOvr>
     <a:masterClrMapping/>
@@ -1567,13 +1440,7 @@
   <p:cSld>
     <p:spTree>
       <p:nvGrpSpPr>
-        <p:cNvPr id="1" name="">
-          <a:extLst>
-            <a:ext uri="{FF2B5EF4-FFF2-40B4-BE49-F238E27FC236}">
-              <a16:creationId xmlns:a16="http://schemas.microsoft.com/office/drawing/2014/main" id="{3F4A63F2-5107-130F-4955-6775C4046F07}"/>
-            </a:ext>
-          </a:extLst>
-        </p:cNvPr>
+        <p:cNvPr id="1" name=""/>
         <p:cNvGrpSpPr/>
         <p:nvPr/>
       </p:nvGrpSpPr>
@@ -1587,13 +1454,7 @@
       </p:grpSpPr>
       <p:sp>
         <p:nvSpPr>
-          <p:cNvPr id="2" name="Slide Image Placeholder 1">
-            <a:extLst>
-              <a:ext uri="{FF2B5EF4-FFF2-40B4-BE49-F238E27FC236}">
-                <a16:creationId xmlns:a16="http://schemas.microsoft.com/office/drawing/2014/main" id="{5143D1C4-4AF1-C94B-B6AD-9C9E7D4ECC07}"/>
-              </a:ext>
-            </a:extLst>
-          </p:cNvPr>
+          <p:cNvPr id="2" name="Slide Image Placeholder 1"/>
           <p:cNvSpPr>
             <a:spLocks noGrp="1" noRot="1" noChangeAspect="1"/>
           </p:cNvSpPr>
@@ -1605,13 +1466,7 @@
       </p:sp>
       <p:sp>
         <p:nvSpPr>
-          <p:cNvPr id="3" name="Notes Placeholder 2">
-            <a:extLst>
-              <a:ext uri="{FF2B5EF4-FFF2-40B4-BE49-F238E27FC236}">
-                <a16:creationId xmlns:a16="http://schemas.microsoft.com/office/drawing/2014/main" id="{A048AA87-4150-9FF1-65B5-394E33EB143F}"/>
-              </a:ext>
-            </a:extLst>
-          </p:cNvPr>
+          <p:cNvPr id="3" name="Notes Placeholder 2"/>
           <p:cNvSpPr>
             <a:spLocks noGrp="1"/>
           </p:cNvSpPr>
@@ -1623,20 +1478,12 @@
         <p:txBody>
           <a:bodyPr/>
           <a:lstStyle/>
-          <a:p>
-            <a:endParaRPr/>
-          </a:p>
-        </p:txBody>
-      </p:sp>
-      <p:sp>
-        <p:nvSpPr>
-          <p:cNvPr id="4" name="Slide Number Placeholder 3">
-            <a:extLst>
-              <a:ext uri="{FF2B5EF4-FFF2-40B4-BE49-F238E27FC236}">
-                <a16:creationId xmlns:a16="http://schemas.microsoft.com/office/drawing/2014/main" id="{31F033AE-A701-A09C-94C6-9DFA8B933B92}"/>
-              </a:ext>
-            </a:extLst>
-          </p:cNvPr>
+          <a:p/>
+        </p:txBody>
+      </p:sp>
+      <p:sp>
+        <p:nvSpPr>
+          <p:cNvPr id="4" name="Slide Number Placeholder 3"/>
           <p:cNvSpPr>
             <a:spLocks noGrp="1"/>
           </p:cNvSpPr>
@@ -1648,17 +1495,10 @@
         <p:txBody>
           <a:bodyPr/>
           <a:lstStyle/>
-          <a:p>
-            <a:endParaRPr/>
-          </a:p>
+          <a:p/>
         </p:txBody>
       </p:sp>
     </p:spTree>
-    <p:extLst>
-      <p:ext uri="{BB962C8B-B14F-4D97-AF65-F5344CB8AC3E}">
-        <p14:creationId xmlns:p14="http://schemas.microsoft.com/office/powerpoint/2010/main" val="1381465874"/>
-      </p:ext>
-    </p:extLst>
   </p:cSld>
   <p:clrMapOvr>
     <a:masterClrMapping/>
@@ -1671,13 +1511,7 @@
   <p:cSld>
     <p:spTree>
       <p:nvGrpSpPr>
-        <p:cNvPr id="1" name="">
-          <a:extLst>
-            <a:ext uri="{FF2B5EF4-FFF2-40B4-BE49-F238E27FC236}">
-              <a16:creationId xmlns:a16="http://schemas.microsoft.com/office/drawing/2014/main" id="{5FE928E6-7D44-3906-7CED-972C17F6F0D2}"/>
-            </a:ext>
-          </a:extLst>
-        </p:cNvPr>
+        <p:cNvPr id="1" name=""/>
         <p:cNvGrpSpPr/>
         <p:nvPr/>
       </p:nvGrpSpPr>
@@ -1691,13 +1525,7 @@
       </p:grpSpPr>
       <p:sp>
         <p:nvSpPr>
-          <p:cNvPr id="2" name="Slide Image Placeholder 1">
-            <a:extLst>
-              <a:ext uri="{FF2B5EF4-FFF2-40B4-BE49-F238E27FC236}">
-                <a16:creationId xmlns:a16="http://schemas.microsoft.com/office/drawing/2014/main" id="{1E2AFAA0-1F63-6A85-60EE-8AF1B237C4AD}"/>
-              </a:ext>
-            </a:extLst>
-          </p:cNvPr>
+          <p:cNvPr id="2" name="Slide Image Placeholder 1"/>
           <p:cNvSpPr>
             <a:spLocks noGrp="1" noRot="1" noChangeAspect="1"/>
           </p:cNvSpPr>
@@ -1709,13 +1537,7 @@
       </p:sp>
       <p:sp>
         <p:nvSpPr>
-          <p:cNvPr id="3" name="Notes Placeholder 2">
-            <a:extLst>
-              <a:ext uri="{FF2B5EF4-FFF2-40B4-BE49-F238E27FC236}">
-                <a16:creationId xmlns:a16="http://schemas.microsoft.com/office/drawing/2014/main" id="{868D5434-5297-C859-0033-D40401EF879E}"/>
-              </a:ext>
-            </a:extLst>
-          </p:cNvPr>
+          <p:cNvPr id="3" name="Notes Placeholder 2"/>
           <p:cNvSpPr>
             <a:spLocks noGrp="1"/>
           </p:cNvSpPr>
@@ -1727,20 +1549,12 @@
         <p:txBody>
           <a:bodyPr/>
           <a:lstStyle/>
-          <a:p>
-            <a:endParaRPr/>
-          </a:p>
-        </p:txBody>
-      </p:sp>
-      <p:sp>
-        <p:nvSpPr>
-          <p:cNvPr id="4" name="Slide Number Placeholder 3">
-            <a:extLst>
-              <a:ext uri="{FF2B5EF4-FFF2-40B4-BE49-F238E27FC236}">
-                <a16:creationId xmlns:a16="http://schemas.microsoft.com/office/drawing/2014/main" id="{B1E5CC0B-DB9D-910B-F658-5674DA72E949}"/>
-              </a:ext>
-            </a:extLst>
-          </p:cNvPr>
+          <a:p/>
+        </p:txBody>
+      </p:sp>
+      <p:sp>
+        <p:nvSpPr>
+          <p:cNvPr id="4" name="Slide Number Placeholder 3"/>
           <p:cNvSpPr>
             <a:spLocks noGrp="1"/>
           </p:cNvSpPr>
@@ -1752,17 +1566,10 @@
         <p:txBody>
           <a:bodyPr/>
           <a:lstStyle/>
-          <a:p>
-            <a:endParaRPr/>
-          </a:p>
+          <a:p/>
         </p:txBody>
       </p:sp>
     </p:spTree>
-    <p:extLst>
-      <p:ext uri="{BB962C8B-B14F-4D97-AF65-F5344CB8AC3E}">
-        <p14:creationId xmlns:p14="http://schemas.microsoft.com/office/powerpoint/2010/main" val="1536964420"/>
-      </p:ext>
-    </p:extLst>
   </p:cSld>
   <p:clrMapOvr>
     <a:masterClrMapping/>
@@ -1813,9 +1620,7 @@
         <p:txBody>
           <a:bodyPr/>
           <a:lstStyle/>
-          <a:p>
-            <a:endParaRPr/>
-          </a:p>
+          <a:p/>
         </p:txBody>
       </p:sp>
       <p:sp>
@@ -1832,9 +1637,7 @@
         <p:txBody>
           <a:bodyPr/>
           <a:lstStyle/>
-          <a:p>
-            <a:endParaRPr/>
-          </a:p>
+          <a:p/>
         </p:txBody>
       </p:sp>
     </p:spTree>
@@ -1888,9 +1691,7 @@
         <p:txBody>
           <a:bodyPr/>
           <a:lstStyle/>
-          <a:p>
-            <a:endParaRPr/>
-          </a:p>
+          <a:p/>
         </p:txBody>
       </p:sp>
       <p:sp>
@@ -1907,9 +1708,7 @@
         <p:txBody>
           <a:bodyPr/>
           <a:lstStyle/>
-          <a:p>
-            <a:endParaRPr/>
-          </a:p>
+          <a:p/>
         </p:txBody>
       </p:sp>
     </p:spTree>
@@ -1939,13 +1738,7 @@
       </p:grpSpPr>
       <p:sp>
         <p:nvSpPr>
-          <p:cNvPr id="2" name="标题 1">
-            <a:extLst>
-              <a:ext uri="{FF2B5EF4-FFF2-40B4-BE49-F238E27FC236}">
-                <a16:creationId xmlns:a16="http://schemas.microsoft.com/office/drawing/2014/main" id="{AA72F6E9-A7DB-4EE5-BABD-C7E4FC05266F}"/>
-              </a:ext>
-            </a:extLst>
-          </p:cNvPr>
+          <p:cNvPr id="2" name="标题 1"/>
           <p:cNvSpPr>
             <a:spLocks noGrp="1"/>
           </p:cNvSpPr>
@@ -1976,18 +1769,12 @@
       </p:sp>
       <p:sp>
         <p:nvSpPr>
-          <p:cNvPr id="3" name="副标题 2">
-            <a:extLst>
-              <a:ext uri="{FF2B5EF4-FFF2-40B4-BE49-F238E27FC236}">
-                <a16:creationId xmlns:a16="http://schemas.microsoft.com/office/drawing/2014/main" id="{AC7CD555-0E7D-46E3-A92B-ED861A2C05EC}"/>
-              </a:ext>
-            </a:extLst>
-          </p:cNvPr>
-          <p:cNvSpPr>
-            <a:spLocks noGrp="1"/>
-          </p:cNvSpPr>
-          <p:nvPr>
-            <p:ph type="subTitle" idx="1"/>
+          <p:cNvPr id="3" name="副标题 2"/>
+          <p:cNvSpPr>
+            <a:spLocks noGrp="1"/>
+          </p:cNvSpPr>
+          <p:nvPr>
+            <p:ph type="subTitle" idx="1" hasCustomPrompt="1"/>
           </p:nvPr>
         </p:nvSpPr>
         <p:spPr>
@@ -2045,13 +1832,7 @@
       </p:sp>
       <p:sp>
         <p:nvSpPr>
-          <p:cNvPr id="4" name="日期占位符 3">
-            <a:extLst>
-              <a:ext uri="{FF2B5EF4-FFF2-40B4-BE49-F238E27FC236}">
-                <a16:creationId xmlns:a16="http://schemas.microsoft.com/office/drawing/2014/main" id="{FF574459-61E1-4D49-AC46-970CF986C1FB}"/>
-              </a:ext>
-            </a:extLst>
-          </p:cNvPr>
+          <p:cNvPr id="4" name="日期占位符 3"/>
           <p:cNvSpPr>
             <a:spLocks noGrp="1"/>
           </p:cNvSpPr>
@@ -2065,7 +1846,7 @@
           <a:lstStyle/>
           <a:p>
             <a:fld id="{A653A8F1-9EDF-49EF-A14D-E495AD864F8A}" type="datetimeFigureOut">
-              <a:t>2026/6/16</a:t>
+              <a:rPr/>
             </a:fld>
             <a:endParaRPr/>
           </a:p>
@@ -2073,13 +1854,7 @@
       </p:sp>
       <p:sp>
         <p:nvSpPr>
-          <p:cNvPr id="5" name="页脚占位符 4">
-            <a:extLst>
-              <a:ext uri="{FF2B5EF4-FFF2-40B4-BE49-F238E27FC236}">
-                <a16:creationId xmlns:a16="http://schemas.microsoft.com/office/drawing/2014/main" id="{34FC7371-B810-4A27-98BE-F850FC6012EF}"/>
-              </a:ext>
-            </a:extLst>
-          </p:cNvPr>
+          <p:cNvPr id="5" name="页脚占位符 4"/>
           <p:cNvSpPr>
             <a:spLocks noGrp="1"/>
           </p:cNvSpPr>
@@ -2091,20 +1866,12 @@
         <p:txBody>
           <a:bodyPr/>
           <a:lstStyle/>
-          <a:p>
-            <a:endParaRPr/>
-          </a:p>
-        </p:txBody>
-      </p:sp>
-      <p:sp>
-        <p:nvSpPr>
-          <p:cNvPr id="6" name="灯片编号占位符 5">
-            <a:extLst>
-              <a:ext uri="{FF2B5EF4-FFF2-40B4-BE49-F238E27FC236}">
-                <a16:creationId xmlns:a16="http://schemas.microsoft.com/office/drawing/2014/main" id="{7D9F63B2-4215-4D56-9E34-DDA0D38A72A5}"/>
-              </a:ext>
-            </a:extLst>
-          </p:cNvPr>
+          <a:p/>
+        </p:txBody>
+      </p:sp>
+      <p:sp>
+        <p:nvSpPr>
+          <p:cNvPr id="6" name="灯片编号占位符 5"/>
           <p:cNvSpPr>
             <a:spLocks noGrp="1"/>
           </p:cNvSpPr>
@@ -2118,7 +1885,7 @@
           <a:lstStyle/>
           <a:p>
             <a:fld id="{43A13857-8FE2-426A-A37B-64DF65062EF2}" type="slidenum">
-              <a:t>‹#›</a:t>
+              <a:rPr/>
             </a:fld>
             <a:endParaRPr/>
           </a:p>
@@ -2151,13 +1918,7 @@
       </p:grpSpPr>
       <p:sp>
         <p:nvSpPr>
-          <p:cNvPr id="2" name="标题 1">
-            <a:extLst>
-              <a:ext uri="{FF2B5EF4-FFF2-40B4-BE49-F238E27FC236}">
-                <a16:creationId xmlns:a16="http://schemas.microsoft.com/office/drawing/2014/main" id="{40830027-6BA9-4579-8EDD-089953EF2617}"/>
-              </a:ext>
-            </a:extLst>
-          </p:cNvPr>
+          <p:cNvPr id="2" name="标题 1"/>
           <p:cNvSpPr>
             <a:spLocks noGrp="1"/>
           </p:cNvSpPr>
@@ -2178,18 +1939,12 @@
       </p:sp>
       <p:sp>
         <p:nvSpPr>
-          <p:cNvPr id="3" name="竖排文字占位符 2">
-            <a:extLst>
-              <a:ext uri="{FF2B5EF4-FFF2-40B4-BE49-F238E27FC236}">
-                <a16:creationId xmlns:a16="http://schemas.microsoft.com/office/drawing/2014/main" id="{F61ACF89-9A2E-450D-8BFB-C9CB9E1C22FA}"/>
-              </a:ext>
-            </a:extLst>
-          </p:cNvPr>
-          <p:cNvSpPr>
-            <a:spLocks noGrp="1"/>
-          </p:cNvSpPr>
-          <p:nvPr>
-            <p:ph type="body" idx="1"/>
+          <p:cNvPr id="3" name="竖排文字占位符 2"/>
+          <p:cNvSpPr>
+            <a:spLocks noGrp="1"/>
+          </p:cNvSpPr>
+          <p:nvPr>
+            <p:ph type="body" idx="1" hasCustomPrompt="1"/>
           </p:nvPr>
         </p:nvSpPr>
         <p:spPr/>
@@ -2240,13 +1995,7 @@
       </p:sp>
       <p:sp>
         <p:nvSpPr>
-          <p:cNvPr id="4" name="日期占位符 3">
-            <a:extLst>
-              <a:ext uri="{FF2B5EF4-FFF2-40B4-BE49-F238E27FC236}">
-                <a16:creationId xmlns:a16="http://schemas.microsoft.com/office/drawing/2014/main" id="{0979072A-6014-4B4E-A18D-0372B1C51826}"/>
-              </a:ext>
-            </a:extLst>
-          </p:cNvPr>
+          <p:cNvPr id="4" name="日期占位符 3"/>
           <p:cNvSpPr>
             <a:spLocks noGrp="1"/>
           </p:cNvSpPr>
@@ -2260,7 +2009,7 @@
           <a:lstStyle/>
           <a:p>
             <a:fld id="{A653A8F1-9EDF-49EF-A14D-E495AD864F8A}" type="datetimeFigureOut">
-              <a:t>2026/6/16</a:t>
+              <a:rPr/>
             </a:fld>
             <a:endParaRPr/>
           </a:p>
@@ -2268,13 +2017,7 @@
       </p:sp>
       <p:sp>
         <p:nvSpPr>
-          <p:cNvPr id="5" name="页脚占位符 4">
-            <a:extLst>
-              <a:ext uri="{FF2B5EF4-FFF2-40B4-BE49-F238E27FC236}">
-                <a16:creationId xmlns:a16="http://schemas.microsoft.com/office/drawing/2014/main" id="{B7FDF371-B7AE-4241-BF00-12CAD6919B6C}"/>
-              </a:ext>
-            </a:extLst>
-          </p:cNvPr>
+          <p:cNvPr id="5" name="页脚占位符 4"/>
           <p:cNvSpPr>
             <a:spLocks noGrp="1"/>
           </p:cNvSpPr>
@@ -2286,20 +2029,12 @@
         <p:txBody>
           <a:bodyPr/>
           <a:lstStyle/>
-          <a:p>
-            <a:endParaRPr/>
-          </a:p>
-        </p:txBody>
-      </p:sp>
-      <p:sp>
-        <p:nvSpPr>
-          <p:cNvPr id="6" name="灯片编号占位符 5">
-            <a:extLst>
-              <a:ext uri="{FF2B5EF4-FFF2-40B4-BE49-F238E27FC236}">
-                <a16:creationId xmlns:a16="http://schemas.microsoft.com/office/drawing/2014/main" id="{95D76FD6-5D96-4706-B932-8EE5F104ECB1}"/>
-              </a:ext>
-            </a:extLst>
-          </p:cNvPr>
+          <a:p/>
+        </p:txBody>
+      </p:sp>
+      <p:sp>
+        <p:nvSpPr>
+          <p:cNvPr id="6" name="灯片编号占位符 5"/>
           <p:cNvSpPr>
             <a:spLocks noGrp="1"/>
           </p:cNvSpPr>
@@ -2313,7 +2048,7 @@
           <a:lstStyle/>
           <a:p>
             <a:fld id="{43A13857-8FE2-426A-A37B-64DF65062EF2}" type="slidenum">
-              <a:t>‹#›</a:t>
+              <a:rPr/>
             </a:fld>
             <a:endParaRPr/>
           </a:p>
@@ -2346,13 +2081,7 @@
       </p:grpSpPr>
       <p:sp>
         <p:nvSpPr>
-          <p:cNvPr id="2" name="竖排标题 1">
-            <a:extLst>
-              <a:ext uri="{FF2B5EF4-FFF2-40B4-BE49-F238E27FC236}">
-                <a16:creationId xmlns:a16="http://schemas.microsoft.com/office/drawing/2014/main" id="{12F09CD8-5BBF-4E8A-9BF8-28D43A1CF253}"/>
-              </a:ext>
-            </a:extLst>
-          </p:cNvPr>
+          <p:cNvPr id="2" name="竖排标题 1"/>
           <p:cNvSpPr>
             <a:spLocks noGrp="1"/>
           </p:cNvSpPr>
@@ -2378,18 +2107,12 @@
       </p:sp>
       <p:sp>
         <p:nvSpPr>
-          <p:cNvPr id="3" name="竖排文字占位符 2">
-            <a:extLst>
-              <a:ext uri="{FF2B5EF4-FFF2-40B4-BE49-F238E27FC236}">
-                <a16:creationId xmlns:a16="http://schemas.microsoft.com/office/drawing/2014/main" id="{3555FEEC-FD82-4242-8E24-AE155E715A55}"/>
-              </a:ext>
-            </a:extLst>
-          </p:cNvPr>
-          <p:cNvSpPr>
-            <a:spLocks noGrp="1"/>
-          </p:cNvSpPr>
-          <p:nvPr>
-            <p:ph type="body" idx="1"/>
+          <p:cNvPr id="3" name="竖排文字占位符 2"/>
+          <p:cNvSpPr>
+            <a:spLocks noGrp="1"/>
+          </p:cNvSpPr>
+          <p:nvPr>
+            <p:ph type="body" idx="1" hasCustomPrompt="1"/>
           </p:nvPr>
         </p:nvSpPr>
         <p:spPr>
@@ -2445,13 +2168,7 @@
       </p:sp>
       <p:sp>
         <p:nvSpPr>
-          <p:cNvPr id="4" name="日期占位符 3">
-            <a:extLst>
-              <a:ext uri="{FF2B5EF4-FFF2-40B4-BE49-F238E27FC236}">
-                <a16:creationId xmlns:a16="http://schemas.microsoft.com/office/drawing/2014/main" id="{DC7CC20B-95BA-468A-99C5-C46FB84761D1}"/>
-              </a:ext>
-            </a:extLst>
-          </p:cNvPr>
+          <p:cNvPr id="4" name="日期占位符 3"/>
           <p:cNvSpPr>
             <a:spLocks noGrp="1"/>
           </p:cNvSpPr>
@@ -2465,7 +2182,7 @@
           <a:lstStyle/>
           <a:p>
             <a:fld id="{A653A8F1-9EDF-49EF-A14D-E495AD864F8A}" type="datetimeFigureOut">
-              <a:t>2026/6/16</a:t>
+              <a:rPr/>
             </a:fld>
             <a:endParaRPr/>
           </a:p>
@@ -2473,13 +2190,7 @@
       </p:sp>
       <p:sp>
         <p:nvSpPr>
-          <p:cNvPr id="5" name="页脚占位符 4">
-            <a:extLst>
-              <a:ext uri="{FF2B5EF4-FFF2-40B4-BE49-F238E27FC236}">
-                <a16:creationId xmlns:a16="http://schemas.microsoft.com/office/drawing/2014/main" id="{EDDF5F36-97DD-451C-B825-5DDC6F6AB61F}"/>
-              </a:ext>
-            </a:extLst>
-          </p:cNvPr>
+          <p:cNvPr id="5" name="页脚占位符 4"/>
           <p:cNvSpPr>
             <a:spLocks noGrp="1"/>
           </p:cNvSpPr>
@@ -2491,20 +2202,12 @@
         <p:txBody>
           <a:bodyPr/>
           <a:lstStyle/>
-          <a:p>
-            <a:endParaRPr/>
-          </a:p>
-        </p:txBody>
-      </p:sp>
-      <p:sp>
-        <p:nvSpPr>
-          <p:cNvPr id="6" name="灯片编号占位符 5">
-            <a:extLst>
-              <a:ext uri="{FF2B5EF4-FFF2-40B4-BE49-F238E27FC236}">
-                <a16:creationId xmlns:a16="http://schemas.microsoft.com/office/drawing/2014/main" id="{63007A96-BE60-43F1-8235-C37C0D91E5B7}"/>
-              </a:ext>
-            </a:extLst>
-          </p:cNvPr>
+          <a:p/>
+        </p:txBody>
+      </p:sp>
+      <p:sp>
+        <p:nvSpPr>
+          <p:cNvPr id="6" name="灯片编号占位符 5"/>
           <p:cNvSpPr>
             <a:spLocks noGrp="1"/>
           </p:cNvSpPr>
@@ -2518,7 +2221,7 @@
           <a:lstStyle/>
           <a:p>
             <a:fld id="{43A13857-8FE2-426A-A37B-64DF65062EF2}" type="slidenum">
-              <a:t>‹#›</a:t>
+              <a:rPr/>
             </a:fld>
             <a:endParaRPr/>
           </a:p>
@@ -2551,13 +2254,7 @@
       </p:grpSpPr>
       <p:sp>
         <p:nvSpPr>
-          <p:cNvPr id="2" name="标题 1">
-            <a:extLst>
-              <a:ext uri="{FF2B5EF4-FFF2-40B4-BE49-F238E27FC236}">
-                <a16:creationId xmlns:a16="http://schemas.microsoft.com/office/drawing/2014/main" id="{09FD4038-7C43-439E-9BD7-248A93D25E40}"/>
-              </a:ext>
-            </a:extLst>
-          </p:cNvPr>
+          <p:cNvPr id="2" name="标题 1"/>
           <p:cNvSpPr>
             <a:spLocks noGrp="1"/>
           </p:cNvSpPr>
@@ -2578,18 +2275,12 @@
       </p:sp>
       <p:sp>
         <p:nvSpPr>
-          <p:cNvPr id="3" name="内容占位符 2">
-            <a:extLst>
-              <a:ext uri="{FF2B5EF4-FFF2-40B4-BE49-F238E27FC236}">
-                <a16:creationId xmlns:a16="http://schemas.microsoft.com/office/drawing/2014/main" id="{8580561D-23F9-45ED-9106-108A882EEB9F}"/>
-              </a:ext>
-            </a:extLst>
-          </p:cNvPr>
-          <p:cNvSpPr>
-            <a:spLocks noGrp="1"/>
-          </p:cNvSpPr>
-          <p:nvPr>
-            <p:ph idx="1"/>
+          <p:cNvPr id="3" name="内容占位符 2"/>
+          <p:cNvSpPr>
+            <a:spLocks noGrp="1"/>
+          </p:cNvSpPr>
+          <p:nvPr>
+            <p:ph idx="1" hasCustomPrompt="1"/>
           </p:nvPr>
         </p:nvSpPr>
         <p:spPr/>
@@ -2640,13 +2331,7 @@
       </p:sp>
       <p:sp>
         <p:nvSpPr>
-          <p:cNvPr id="4" name="日期占位符 3">
-            <a:extLst>
-              <a:ext uri="{FF2B5EF4-FFF2-40B4-BE49-F238E27FC236}">
-                <a16:creationId xmlns:a16="http://schemas.microsoft.com/office/drawing/2014/main" id="{A8BB6EB5-840B-4BFD-9D08-BB6EC56200BD}"/>
-              </a:ext>
-            </a:extLst>
-          </p:cNvPr>
+          <p:cNvPr id="4" name="日期占位符 3"/>
           <p:cNvSpPr>
             <a:spLocks noGrp="1"/>
           </p:cNvSpPr>
@@ -2660,7 +2345,7 @@
           <a:lstStyle/>
           <a:p>
             <a:fld id="{A653A8F1-9EDF-49EF-A14D-E495AD864F8A}" type="datetimeFigureOut">
-              <a:t>2026/6/16</a:t>
+              <a:rPr/>
             </a:fld>
             <a:endParaRPr/>
           </a:p>
@@ -2668,13 +2353,7 @@
       </p:sp>
       <p:sp>
         <p:nvSpPr>
-          <p:cNvPr id="5" name="页脚占位符 4">
-            <a:extLst>
-              <a:ext uri="{FF2B5EF4-FFF2-40B4-BE49-F238E27FC236}">
-                <a16:creationId xmlns:a16="http://schemas.microsoft.com/office/drawing/2014/main" id="{38D1123A-754E-496D-8CE0-FD9B6A709950}"/>
-              </a:ext>
-            </a:extLst>
-          </p:cNvPr>
+          <p:cNvPr id="5" name="页脚占位符 4"/>
           <p:cNvSpPr>
             <a:spLocks noGrp="1"/>
           </p:cNvSpPr>
@@ -2686,20 +2365,12 @@
         <p:txBody>
           <a:bodyPr/>
           <a:lstStyle/>
-          <a:p>
-            <a:endParaRPr/>
-          </a:p>
-        </p:txBody>
-      </p:sp>
-      <p:sp>
-        <p:nvSpPr>
-          <p:cNvPr id="6" name="灯片编号占位符 5">
-            <a:extLst>
-              <a:ext uri="{FF2B5EF4-FFF2-40B4-BE49-F238E27FC236}">
-                <a16:creationId xmlns:a16="http://schemas.microsoft.com/office/drawing/2014/main" id="{D4F39AEC-6527-4E30-86C4-9AA752E0CB26}"/>
-              </a:ext>
-            </a:extLst>
-          </p:cNvPr>
+          <a:p/>
+        </p:txBody>
+      </p:sp>
+      <p:sp>
+        <p:nvSpPr>
+          <p:cNvPr id="6" name="灯片编号占位符 5"/>
           <p:cNvSpPr>
             <a:spLocks noGrp="1"/>
           </p:cNvSpPr>
@@ -2713,7 +2384,7 @@
           <a:lstStyle/>
           <a:p>
             <a:fld id="{43A13857-8FE2-426A-A37B-64DF65062EF2}" type="slidenum">
-              <a:t>‹#›</a:t>
+              <a:rPr/>
             </a:fld>
             <a:endParaRPr/>
           </a:p>
@@ -2746,13 +2417,7 @@
       </p:grpSpPr>
       <p:sp>
         <p:nvSpPr>
-          <p:cNvPr id="2" name="标题 1">
-            <a:extLst>
-              <a:ext uri="{FF2B5EF4-FFF2-40B4-BE49-F238E27FC236}">
-                <a16:creationId xmlns:a16="http://schemas.microsoft.com/office/drawing/2014/main" id="{00C9BF6A-5393-4D5D-8AEE-1B81D083E461}"/>
-              </a:ext>
-            </a:extLst>
-          </p:cNvPr>
+          <p:cNvPr id="2" name="标题 1"/>
           <p:cNvSpPr>
             <a:spLocks noGrp="1"/>
           </p:cNvSpPr>
@@ -2783,18 +2448,12 @@
       </p:sp>
       <p:sp>
         <p:nvSpPr>
-          <p:cNvPr id="3" name="文本占位符 2">
-            <a:extLst>
-              <a:ext uri="{FF2B5EF4-FFF2-40B4-BE49-F238E27FC236}">
-                <a16:creationId xmlns:a16="http://schemas.microsoft.com/office/drawing/2014/main" id="{C3E6E325-8421-4FE8-AF29-E302A1DBB9F8}"/>
-              </a:ext>
-            </a:extLst>
-          </p:cNvPr>
-          <p:cNvSpPr>
-            <a:spLocks noGrp="1"/>
-          </p:cNvSpPr>
-          <p:nvPr>
-            <p:ph type="body" idx="1"/>
+          <p:cNvPr id="3" name="文本占位符 2"/>
+          <p:cNvSpPr>
+            <a:spLocks noGrp="1"/>
+          </p:cNvSpPr>
+          <p:nvPr>
+            <p:ph type="body" idx="1" hasCustomPrompt="1"/>
           </p:nvPr>
         </p:nvSpPr>
         <p:spPr>
@@ -2909,13 +2568,7 @@
       </p:sp>
       <p:sp>
         <p:nvSpPr>
-          <p:cNvPr id="4" name="日期占位符 3">
-            <a:extLst>
-              <a:ext uri="{FF2B5EF4-FFF2-40B4-BE49-F238E27FC236}">
-                <a16:creationId xmlns:a16="http://schemas.microsoft.com/office/drawing/2014/main" id="{63816A9D-26EF-40AC-B308-2D7A27577789}"/>
-              </a:ext>
-            </a:extLst>
-          </p:cNvPr>
+          <p:cNvPr id="4" name="日期占位符 3"/>
           <p:cNvSpPr>
             <a:spLocks noGrp="1"/>
           </p:cNvSpPr>
@@ -2929,7 +2582,7 @@
           <a:lstStyle/>
           <a:p>
             <a:fld id="{A653A8F1-9EDF-49EF-A14D-E495AD864F8A}" type="datetimeFigureOut">
-              <a:t>2026/6/16</a:t>
+              <a:rPr/>
             </a:fld>
             <a:endParaRPr/>
           </a:p>
@@ -2937,13 +2590,7 @@
       </p:sp>
       <p:sp>
         <p:nvSpPr>
-          <p:cNvPr id="5" name="页脚占位符 4">
-            <a:extLst>
-              <a:ext uri="{FF2B5EF4-FFF2-40B4-BE49-F238E27FC236}">
-                <a16:creationId xmlns:a16="http://schemas.microsoft.com/office/drawing/2014/main" id="{58BB73DC-B2C0-4909-8318-3659735A8855}"/>
-              </a:ext>
-            </a:extLst>
-          </p:cNvPr>
+          <p:cNvPr id="5" name="页脚占位符 4"/>
           <p:cNvSpPr>
             <a:spLocks noGrp="1"/>
           </p:cNvSpPr>
@@ -2955,20 +2602,12 @@
         <p:txBody>
           <a:bodyPr/>
           <a:lstStyle/>
-          <a:p>
-            <a:endParaRPr/>
-          </a:p>
-        </p:txBody>
-      </p:sp>
-      <p:sp>
-        <p:nvSpPr>
-          <p:cNvPr id="6" name="灯片编号占位符 5">
-            <a:extLst>
-              <a:ext uri="{FF2B5EF4-FFF2-40B4-BE49-F238E27FC236}">
-                <a16:creationId xmlns:a16="http://schemas.microsoft.com/office/drawing/2014/main" id="{6ACF43A9-C7FC-4B98-BBF3-AE947E3BD882}"/>
-              </a:ext>
-            </a:extLst>
-          </p:cNvPr>
+          <a:p/>
+        </p:txBody>
+      </p:sp>
+      <p:sp>
+        <p:nvSpPr>
+          <p:cNvPr id="6" name="灯片编号占位符 5"/>
           <p:cNvSpPr>
             <a:spLocks noGrp="1"/>
           </p:cNvSpPr>
@@ -2982,7 +2621,7 @@
           <a:lstStyle/>
           <a:p>
             <a:fld id="{43A13857-8FE2-426A-A37B-64DF65062EF2}" type="slidenum">
-              <a:t>‹#›</a:t>
+              <a:rPr/>
             </a:fld>
             <a:endParaRPr/>
           </a:p>
@@ -3015,13 +2654,7 @@
       </p:grpSpPr>
       <p:sp>
         <p:nvSpPr>
-          <p:cNvPr id="2" name="标题 1">
-            <a:extLst>
-              <a:ext uri="{FF2B5EF4-FFF2-40B4-BE49-F238E27FC236}">
-                <a16:creationId xmlns:a16="http://schemas.microsoft.com/office/drawing/2014/main" id="{46D80635-DB14-48F9-9272-CE69DF4BCD46}"/>
-              </a:ext>
-            </a:extLst>
-          </p:cNvPr>
+          <p:cNvPr id="2" name="标题 1"/>
           <p:cNvSpPr>
             <a:spLocks noGrp="1"/>
           </p:cNvSpPr>
@@ -3042,18 +2675,12 @@
       </p:sp>
       <p:sp>
         <p:nvSpPr>
-          <p:cNvPr id="3" name="内容占位符 2">
-            <a:extLst>
-              <a:ext uri="{FF2B5EF4-FFF2-40B4-BE49-F238E27FC236}">
-                <a16:creationId xmlns:a16="http://schemas.microsoft.com/office/drawing/2014/main" id="{B07C7ABE-BA6F-45B7-9B69-996A42252FBC}"/>
-              </a:ext>
-            </a:extLst>
-          </p:cNvPr>
-          <p:cNvSpPr>
-            <a:spLocks noGrp="1"/>
-          </p:cNvSpPr>
-          <p:nvPr>
-            <p:ph idx="1"/>
+          <p:cNvPr id="3" name="内容占位符 2"/>
+          <p:cNvSpPr>
+            <a:spLocks noGrp="1"/>
+          </p:cNvSpPr>
+          <p:nvPr>
+            <p:ph idx="1" hasCustomPrompt="1"/>
           </p:nvPr>
         </p:nvSpPr>
         <p:spPr>
@@ -3109,18 +2736,12 @@
       </p:sp>
       <p:sp>
         <p:nvSpPr>
-          <p:cNvPr id="4" name="内容占位符 3">
-            <a:extLst>
-              <a:ext uri="{FF2B5EF4-FFF2-40B4-BE49-F238E27FC236}">
-                <a16:creationId xmlns:a16="http://schemas.microsoft.com/office/drawing/2014/main" id="{385D180F-2FC4-4937-8120-1E810EEF044B}"/>
-              </a:ext>
-            </a:extLst>
-          </p:cNvPr>
-          <p:cNvSpPr>
-            <a:spLocks noGrp="1"/>
-          </p:cNvSpPr>
-          <p:nvPr>
-            <p:ph idx="2"/>
+          <p:cNvPr id="4" name="内容占位符 3"/>
+          <p:cNvSpPr>
+            <a:spLocks noGrp="1"/>
+          </p:cNvSpPr>
+          <p:nvPr>
+            <p:ph idx="2" hasCustomPrompt="1"/>
           </p:nvPr>
         </p:nvSpPr>
         <p:spPr>
@@ -3176,13 +2797,7 @@
       </p:sp>
       <p:sp>
         <p:nvSpPr>
-          <p:cNvPr id="5" name="日期占位符 4">
-            <a:extLst>
-              <a:ext uri="{FF2B5EF4-FFF2-40B4-BE49-F238E27FC236}">
-                <a16:creationId xmlns:a16="http://schemas.microsoft.com/office/drawing/2014/main" id="{2ED37408-0507-4932-92BE-35D30B50AA13}"/>
-              </a:ext>
-            </a:extLst>
-          </p:cNvPr>
+          <p:cNvPr id="5" name="日期占位符 4"/>
           <p:cNvSpPr>
             <a:spLocks noGrp="1"/>
           </p:cNvSpPr>
@@ -3196,7 +2811,7 @@
           <a:lstStyle/>
           <a:p>
             <a:fld id="{A653A8F1-9EDF-49EF-A14D-E495AD864F8A}" type="datetimeFigureOut">
-              <a:t>2026/6/16</a:t>
+              <a:rPr/>
             </a:fld>
             <a:endParaRPr/>
           </a:p>
@@ -3204,13 +2819,7 @@
       </p:sp>
       <p:sp>
         <p:nvSpPr>
-          <p:cNvPr id="6" name="页脚占位符 5">
-            <a:extLst>
-              <a:ext uri="{FF2B5EF4-FFF2-40B4-BE49-F238E27FC236}">
-                <a16:creationId xmlns:a16="http://schemas.microsoft.com/office/drawing/2014/main" id="{B9F0B637-EFF2-46E7-A07C-60F2990559C7}"/>
-              </a:ext>
-            </a:extLst>
-          </p:cNvPr>
+          <p:cNvPr id="6" name="页脚占位符 5"/>
           <p:cNvSpPr>
             <a:spLocks noGrp="1"/>
           </p:cNvSpPr>
@@ -3222,20 +2831,12 @@
         <p:txBody>
           <a:bodyPr/>
           <a:lstStyle/>
-          <a:p>
-            <a:endParaRPr/>
-          </a:p>
-        </p:txBody>
-      </p:sp>
-      <p:sp>
-        <p:nvSpPr>
-          <p:cNvPr id="7" name="灯片编号占位符 6">
-            <a:extLst>
-              <a:ext uri="{FF2B5EF4-FFF2-40B4-BE49-F238E27FC236}">
-                <a16:creationId xmlns:a16="http://schemas.microsoft.com/office/drawing/2014/main" id="{83623D48-9D66-4919-847B-1A5AEB513487}"/>
-              </a:ext>
-            </a:extLst>
-          </p:cNvPr>
+          <a:p/>
+        </p:txBody>
+      </p:sp>
+      <p:sp>
+        <p:nvSpPr>
+          <p:cNvPr id="7" name="灯片编号占位符 6"/>
           <p:cNvSpPr>
             <a:spLocks noGrp="1"/>
           </p:cNvSpPr>
@@ -3249,7 +2850,7 @@
           <a:lstStyle/>
           <a:p>
             <a:fld id="{43A13857-8FE2-426A-A37B-64DF65062EF2}" type="slidenum">
-              <a:t>‹#›</a:t>
+              <a:rPr/>
             </a:fld>
             <a:endParaRPr/>
           </a:p>
@@ -3282,13 +2883,7 @@
       </p:grpSpPr>
       <p:sp>
         <p:nvSpPr>
-          <p:cNvPr id="2" name="标题 1">
-            <a:extLst>
-              <a:ext uri="{FF2B5EF4-FFF2-40B4-BE49-F238E27FC236}">
-                <a16:creationId xmlns:a16="http://schemas.microsoft.com/office/drawing/2014/main" id="{D31CFE67-D30D-4B22-889C-55C816B46156}"/>
-              </a:ext>
-            </a:extLst>
-          </p:cNvPr>
+          <p:cNvPr id="2" name="标题 1"/>
           <p:cNvSpPr>
             <a:spLocks noGrp="1"/>
           </p:cNvSpPr>
@@ -3314,18 +2909,12 @@
       </p:sp>
       <p:sp>
         <p:nvSpPr>
-          <p:cNvPr id="3" name="文本占位符 2">
-            <a:extLst>
-              <a:ext uri="{FF2B5EF4-FFF2-40B4-BE49-F238E27FC236}">
-                <a16:creationId xmlns:a16="http://schemas.microsoft.com/office/drawing/2014/main" id="{E48C4D59-EF31-4FBE-BC9A-9A5EBA0C0B32}"/>
-              </a:ext>
-            </a:extLst>
-          </p:cNvPr>
-          <p:cNvSpPr>
-            <a:spLocks noGrp="1"/>
-          </p:cNvSpPr>
-          <p:nvPr>
-            <p:ph type="body" idx="1"/>
+          <p:cNvPr id="3" name="文本占位符 2"/>
+          <p:cNvSpPr>
+            <a:spLocks noGrp="1"/>
+          </p:cNvSpPr>
+          <p:nvPr>
+            <p:ph type="body" idx="1" hasCustomPrompt="1"/>
           </p:nvPr>
         </p:nvSpPr>
         <p:spPr>
@@ -3386,18 +2975,12 @@
       </p:sp>
       <p:sp>
         <p:nvSpPr>
-          <p:cNvPr id="4" name="内容占位符 3">
-            <a:extLst>
-              <a:ext uri="{FF2B5EF4-FFF2-40B4-BE49-F238E27FC236}">
-                <a16:creationId xmlns:a16="http://schemas.microsoft.com/office/drawing/2014/main" id="{E4EA7E20-2BEF-4705-B668-41BA3AFD3BA7}"/>
-              </a:ext>
-            </a:extLst>
-          </p:cNvPr>
-          <p:cNvSpPr>
-            <a:spLocks noGrp="1"/>
-          </p:cNvSpPr>
-          <p:nvPr>
-            <p:ph idx="2"/>
+          <p:cNvPr id="4" name="内容占位符 3"/>
+          <p:cNvSpPr>
+            <a:spLocks noGrp="1"/>
+          </p:cNvSpPr>
+          <p:nvPr>
+            <p:ph idx="2" hasCustomPrompt="1"/>
           </p:nvPr>
         </p:nvSpPr>
         <p:spPr>
@@ -3453,18 +3036,12 @@
       </p:sp>
       <p:sp>
         <p:nvSpPr>
-          <p:cNvPr id="5" name="文本占位符 4">
-            <a:extLst>
-              <a:ext uri="{FF2B5EF4-FFF2-40B4-BE49-F238E27FC236}">
-                <a16:creationId xmlns:a16="http://schemas.microsoft.com/office/drawing/2014/main" id="{517528E1-74F4-47FF-AFB0-0FFA9CDEB98D}"/>
-              </a:ext>
-            </a:extLst>
-          </p:cNvPr>
-          <p:cNvSpPr>
-            <a:spLocks noGrp="1"/>
-          </p:cNvSpPr>
-          <p:nvPr>
-            <p:ph type="body" idx="3"/>
+          <p:cNvPr id="5" name="文本占位符 4"/>
+          <p:cNvSpPr>
+            <a:spLocks noGrp="1"/>
+          </p:cNvSpPr>
+          <p:nvPr>
+            <p:ph type="body" idx="3" hasCustomPrompt="1"/>
           </p:nvPr>
         </p:nvSpPr>
         <p:spPr>
@@ -3525,18 +3102,12 @@
       </p:sp>
       <p:sp>
         <p:nvSpPr>
-          <p:cNvPr id="6" name="内容占位符 5">
-            <a:extLst>
-              <a:ext uri="{FF2B5EF4-FFF2-40B4-BE49-F238E27FC236}">
-                <a16:creationId xmlns:a16="http://schemas.microsoft.com/office/drawing/2014/main" id="{1DEC6AD9-641D-4C8D-A3A9-8035C6C53F32}"/>
-              </a:ext>
-            </a:extLst>
-          </p:cNvPr>
-          <p:cNvSpPr>
-            <a:spLocks noGrp="1"/>
-          </p:cNvSpPr>
-          <p:nvPr>
-            <p:ph idx="4"/>
+          <p:cNvPr id="6" name="内容占位符 5"/>
+          <p:cNvSpPr>
+            <a:spLocks noGrp="1"/>
+          </p:cNvSpPr>
+          <p:nvPr>
+            <p:ph idx="4" hasCustomPrompt="1"/>
           </p:nvPr>
         </p:nvSpPr>
         <p:spPr>
@@ -3592,13 +3163,7 @@
       </p:sp>
       <p:sp>
         <p:nvSpPr>
-          <p:cNvPr id="7" name="日期占位符 6">
-            <a:extLst>
-              <a:ext uri="{FF2B5EF4-FFF2-40B4-BE49-F238E27FC236}">
-                <a16:creationId xmlns:a16="http://schemas.microsoft.com/office/drawing/2014/main" id="{C884D206-1519-40EE-83EF-96FCCF73CA65}"/>
-              </a:ext>
-            </a:extLst>
-          </p:cNvPr>
+          <p:cNvPr id="7" name="日期占位符 6"/>
           <p:cNvSpPr>
             <a:spLocks noGrp="1"/>
           </p:cNvSpPr>
@@ -3612,7 +3177,7 @@
           <a:lstStyle/>
           <a:p>
             <a:fld id="{A653A8F1-9EDF-49EF-A14D-E495AD864F8A}" type="datetimeFigureOut">
-              <a:t>2026/6/16</a:t>
+              <a:rPr/>
             </a:fld>
             <a:endParaRPr/>
           </a:p>
@@ -3620,13 +3185,7 @@
       </p:sp>
       <p:sp>
         <p:nvSpPr>
-          <p:cNvPr id="8" name="页脚占位符 7">
-            <a:extLst>
-              <a:ext uri="{FF2B5EF4-FFF2-40B4-BE49-F238E27FC236}">
-                <a16:creationId xmlns:a16="http://schemas.microsoft.com/office/drawing/2014/main" id="{639ADFE1-CDE2-4D74-8221-13526DF8EE30}"/>
-              </a:ext>
-            </a:extLst>
-          </p:cNvPr>
+          <p:cNvPr id="8" name="页脚占位符 7"/>
           <p:cNvSpPr>
             <a:spLocks noGrp="1"/>
           </p:cNvSpPr>
@@ -3638,20 +3197,12 @@
         <p:txBody>
           <a:bodyPr/>
           <a:lstStyle/>
-          <a:p>
-            <a:endParaRPr/>
-          </a:p>
-        </p:txBody>
-      </p:sp>
-      <p:sp>
-        <p:nvSpPr>
-          <p:cNvPr id="9" name="灯片编号占位符 8">
-            <a:extLst>
-              <a:ext uri="{FF2B5EF4-FFF2-40B4-BE49-F238E27FC236}">
-                <a16:creationId xmlns:a16="http://schemas.microsoft.com/office/drawing/2014/main" id="{C7341B9C-7226-489F-A04C-0A343671B094}"/>
-              </a:ext>
-            </a:extLst>
-          </p:cNvPr>
+          <a:p/>
+        </p:txBody>
+      </p:sp>
+      <p:sp>
+        <p:nvSpPr>
+          <p:cNvPr id="9" name="灯片编号占位符 8"/>
           <p:cNvSpPr>
             <a:spLocks noGrp="1"/>
           </p:cNvSpPr>
@@ -3665,7 +3216,7 @@
           <a:lstStyle/>
           <a:p>
             <a:fld id="{43A13857-8FE2-426A-A37B-64DF65062EF2}" type="slidenum">
-              <a:t>‹#›</a:t>
+              <a:rPr/>
             </a:fld>
             <a:endParaRPr/>
           </a:p>
@@ -3698,13 +3249,7 @@
       </p:grpSpPr>
       <p:sp>
         <p:nvSpPr>
-          <p:cNvPr id="2" name="标题 1">
-            <a:extLst>
-              <a:ext uri="{FF2B5EF4-FFF2-40B4-BE49-F238E27FC236}">
-                <a16:creationId xmlns:a16="http://schemas.microsoft.com/office/drawing/2014/main" id="{59EB7912-49CA-483F-9076-E0D2F23E26F5}"/>
-              </a:ext>
-            </a:extLst>
-          </p:cNvPr>
+          <p:cNvPr id="2" name="标题 1"/>
           <p:cNvSpPr>
             <a:spLocks noGrp="1"/>
           </p:cNvSpPr>
@@ -3725,13 +3270,7 @@
       </p:sp>
       <p:sp>
         <p:nvSpPr>
-          <p:cNvPr id="3" name="日期占位符 2">
-            <a:extLst>
-              <a:ext uri="{FF2B5EF4-FFF2-40B4-BE49-F238E27FC236}">
-                <a16:creationId xmlns:a16="http://schemas.microsoft.com/office/drawing/2014/main" id="{42595294-2A25-490E-AB14-A95C1633F57A}"/>
-              </a:ext>
-            </a:extLst>
-          </p:cNvPr>
+          <p:cNvPr id="3" name="日期占位符 2"/>
           <p:cNvSpPr>
             <a:spLocks noGrp="1"/>
           </p:cNvSpPr>
@@ -3745,7 +3284,7 @@
           <a:lstStyle/>
           <a:p>
             <a:fld id="{A653A8F1-9EDF-49EF-A14D-E495AD864F8A}" type="datetimeFigureOut">
-              <a:t>2026/6/16</a:t>
+              <a:rPr/>
             </a:fld>
             <a:endParaRPr/>
           </a:p>
@@ -3753,13 +3292,7 @@
       </p:sp>
       <p:sp>
         <p:nvSpPr>
-          <p:cNvPr id="4" name="页脚占位符 3">
-            <a:extLst>
-              <a:ext uri="{FF2B5EF4-FFF2-40B4-BE49-F238E27FC236}">
-                <a16:creationId xmlns:a16="http://schemas.microsoft.com/office/drawing/2014/main" id="{6E12734D-7EAD-4F31-B03F-D200B6C39A61}"/>
-              </a:ext>
-            </a:extLst>
-          </p:cNvPr>
+          <p:cNvPr id="4" name="页脚占位符 3"/>
           <p:cNvSpPr>
             <a:spLocks noGrp="1"/>
           </p:cNvSpPr>
@@ -3771,20 +3304,12 @@
         <p:txBody>
           <a:bodyPr/>
           <a:lstStyle/>
-          <a:p>
-            <a:endParaRPr/>
-          </a:p>
-        </p:txBody>
-      </p:sp>
-      <p:sp>
-        <p:nvSpPr>
-          <p:cNvPr id="5" name="灯片编号占位符 4">
-            <a:extLst>
-              <a:ext uri="{FF2B5EF4-FFF2-40B4-BE49-F238E27FC236}">
-                <a16:creationId xmlns:a16="http://schemas.microsoft.com/office/drawing/2014/main" id="{FF73709D-D57A-41FB-A534-0FABF34C0A23}"/>
-              </a:ext>
-            </a:extLst>
-          </p:cNvPr>
+          <a:p/>
+        </p:txBody>
+      </p:sp>
+      <p:sp>
+        <p:nvSpPr>
+          <p:cNvPr id="5" name="灯片编号占位符 4"/>
           <p:cNvSpPr>
             <a:spLocks noGrp="1"/>
           </p:cNvSpPr>
@@ -3798,7 +3323,7 @@
           <a:lstStyle/>
           <a:p>
             <a:fld id="{43A13857-8FE2-426A-A37B-64DF65062EF2}" type="slidenum">
-              <a:t>‹#›</a:t>
+              <a:rPr/>
             </a:fld>
             <a:endParaRPr/>
           </a:p>
@@ -3831,13 +3356,7 @@
       </p:grpSpPr>
       <p:sp>
         <p:nvSpPr>
-          <p:cNvPr id="2" name="日期占位符 1">
-            <a:extLst>
-              <a:ext uri="{FF2B5EF4-FFF2-40B4-BE49-F238E27FC236}">
-                <a16:creationId xmlns:a16="http://schemas.microsoft.com/office/drawing/2014/main" id="{0B5A0B8B-32A0-4BD3-9321-DF4BD5F3F604}"/>
-              </a:ext>
-            </a:extLst>
-          </p:cNvPr>
+          <p:cNvPr id="2" name="日期占位符 1"/>
           <p:cNvSpPr>
             <a:spLocks noGrp="1"/>
           </p:cNvSpPr>
@@ -3851,7 +3370,7 @@
           <a:lstStyle/>
           <a:p>
             <a:fld id="{A653A8F1-9EDF-49EF-A14D-E495AD864F8A}" type="datetimeFigureOut">
-              <a:t>2026/6/16</a:t>
+              <a:rPr/>
             </a:fld>
             <a:endParaRPr/>
           </a:p>
@@ -3859,13 +3378,7 @@
       </p:sp>
       <p:sp>
         <p:nvSpPr>
-          <p:cNvPr id="3" name="页脚占位符 2">
-            <a:extLst>
-              <a:ext uri="{FF2B5EF4-FFF2-40B4-BE49-F238E27FC236}">
-                <a16:creationId xmlns:a16="http://schemas.microsoft.com/office/drawing/2014/main" id="{313455FE-1521-43F5-9A46-B1AEDBCC0ACA}"/>
-              </a:ext>
-            </a:extLst>
-          </p:cNvPr>
+          <p:cNvPr id="3" name="页脚占位符 2"/>
           <p:cNvSpPr>
             <a:spLocks noGrp="1"/>
           </p:cNvSpPr>
@@ -3877,20 +3390,12 @@
         <p:txBody>
           <a:bodyPr/>
           <a:lstStyle/>
-          <a:p>
-            <a:endParaRPr/>
-          </a:p>
-        </p:txBody>
-      </p:sp>
-      <p:sp>
-        <p:nvSpPr>
-          <p:cNvPr id="4" name="灯片编号占位符 3">
-            <a:extLst>
-              <a:ext uri="{FF2B5EF4-FFF2-40B4-BE49-F238E27FC236}">
-                <a16:creationId xmlns:a16="http://schemas.microsoft.com/office/drawing/2014/main" id="{14D8DFAB-D0F3-4614-AD41-3038E3A12838}"/>
-              </a:ext>
-            </a:extLst>
-          </p:cNvPr>
+          <a:p/>
+        </p:txBody>
+      </p:sp>
+      <p:sp>
+        <p:nvSpPr>
+          <p:cNvPr id="4" name="灯片编号占位符 3"/>
           <p:cNvSpPr>
             <a:spLocks noGrp="1"/>
           </p:cNvSpPr>
@@ -3904,7 +3409,7 @@
           <a:lstStyle/>
           <a:p>
             <a:fld id="{43A13857-8FE2-426A-A37B-64DF65062EF2}" type="slidenum">
-              <a:t>‹#›</a:t>
+              <a:rPr/>
             </a:fld>
             <a:endParaRPr/>
           </a:p>
@@ -3937,13 +3442,7 @@
       </p:grpSpPr>
       <p:sp>
         <p:nvSpPr>
-          <p:cNvPr id="2" name="标题 1">
-            <a:extLst>
-              <a:ext uri="{FF2B5EF4-FFF2-40B4-BE49-F238E27FC236}">
-                <a16:creationId xmlns:a16="http://schemas.microsoft.com/office/drawing/2014/main" id="{A1463CC7-5A86-4D8F-BF0F-CF3DB480D143}"/>
-              </a:ext>
-            </a:extLst>
-          </p:cNvPr>
+          <p:cNvPr id="2" name="标题 1"/>
           <p:cNvSpPr>
             <a:spLocks noGrp="1"/>
           </p:cNvSpPr>
@@ -3974,18 +3473,12 @@
       </p:sp>
       <p:sp>
         <p:nvSpPr>
-          <p:cNvPr id="3" name="内容占位符 2">
-            <a:extLst>
-              <a:ext uri="{FF2B5EF4-FFF2-40B4-BE49-F238E27FC236}">
-                <a16:creationId xmlns:a16="http://schemas.microsoft.com/office/drawing/2014/main" id="{AB6D0E11-DA2E-4B3F-BD08-E5C7E284A445}"/>
-              </a:ext>
-            </a:extLst>
-          </p:cNvPr>
-          <p:cNvSpPr>
-            <a:spLocks noGrp="1"/>
-          </p:cNvSpPr>
-          <p:nvPr>
-            <p:ph idx="1"/>
+          <p:cNvPr id="3" name="内容占位符 2"/>
+          <p:cNvSpPr>
+            <a:spLocks noGrp="1"/>
+          </p:cNvSpPr>
+          <p:nvPr>
+            <p:ph idx="1" hasCustomPrompt="1"/>
           </p:nvPr>
         </p:nvSpPr>
         <p:spPr>
@@ -4078,18 +3571,12 @@
       </p:sp>
       <p:sp>
         <p:nvSpPr>
-          <p:cNvPr id="4" name="文本占位符 3">
-            <a:extLst>
-              <a:ext uri="{FF2B5EF4-FFF2-40B4-BE49-F238E27FC236}">
-                <a16:creationId xmlns:a16="http://schemas.microsoft.com/office/drawing/2014/main" id="{1636FB98-781E-49FA-B0A7-F8EEFF1D1805}"/>
-              </a:ext>
-            </a:extLst>
-          </p:cNvPr>
-          <p:cNvSpPr>
-            <a:spLocks noGrp="1"/>
-          </p:cNvSpPr>
-          <p:nvPr>
-            <p:ph type="body" idx="2"/>
+          <p:cNvPr id="4" name="文本占位符 3"/>
+          <p:cNvSpPr>
+            <a:spLocks noGrp="1"/>
+          </p:cNvSpPr>
+          <p:nvPr>
+            <p:ph type="body" idx="2" hasCustomPrompt="1"/>
           </p:nvPr>
         </p:nvSpPr>
         <p:spPr>
@@ -4150,13 +3637,7 @@
       </p:sp>
       <p:sp>
         <p:nvSpPr>
-          <p:cNvPr id="5" name="日期占位符 4">
-            <a:extLst>
-              <a:ext uri="{FF2B5EF4-FFF2-40B4-BE49-F238E27FC236}">
-                <a16:creationId xmlns:a16="http://schemas.microsoft.com/office/drawing/2014/main" id="{2369D888-3303-4386-8D33-ECD52F3AA74C}"/>
-              </a:ext>
-            </a:extLst>
-          </p:cNvPr>
+          <p:cNvPr id="5" name="日期占位符 4"/>
           <p:cNvSpPr>
             <a:spLocks noGrp="1"/>
           </p:cNvSpPr>
@@ -4170,7 +3651,7 @@
           <a:lstStyle/>
           <a:p>
             <a:fld id="{A653A8F1-9EDF-49EF-A14D-E495AD864F8A}" type="datetimeFigureOut">
-              <a:t>2026/6/16</a:t>
+              <a:rPr/>
             </a:fld>
             <a:endParaRPr/>
           </a:p>
@@ -4178,13 +3659,7 @@
       </p:sp>
       <p:sp>
         <p:nvSpPr>
-          <p:cNvPr id="6" name="页脚占位符 5">
-            <a:extLst>
-              <a:ext uri="{FF2B5EF4-FFF2-40B4-BE49-F238E27FC236}">
-                <a16:creationId xmlns:a16="http://schemas.microsoft.com/office/drawing/2014/main" id="{A6D7732A-D768-4DA1-8E7D-D5193634346A}"/>
-              </a:ext>
-            </a:extLst>
-          </p:cNvPr>
+          <p:cNvPr id="6" name="页脚占位符 5"/>
           <p:cNvSpPr>
             <a:spLocks noGrp="1"/>
           </p:cNvSpPr>
@@ -4196,20 +3671,12 @@
         <p:txBody>
           <a:bodyPr/>
           <a:lstStyle/>
-          <a:p>
-            <a:endParaRPr/>
-          </a:p>
-        </p:txBody>
-      </p:sp>
-      <p:sp>
-        <p:nvSpPr>
-          <p:cNvPr id="7" name="灯片编号占位符 6">
-            <a:extLst>
-              <a:ext uri="{FF2B5EF4-FFF2-40B4-BE49-F238E27FC236}">
-                <a16:creationId xmlns:a16="http://schemas.microsoft.com/office/drawing/2014/main" id="{CC07DCDD-B55B-4694-95B1-D1C5B1EE0402}"/>
-              </a:ext>
-            </a:extLst>
-          </p:cNvPr>
+          <a:p/>
+        </p:txBody>
+      </p:sp>
+      <p:sp>
+        <p:nvSpPr>
+          <p:cNvPr id="7" name="灯片编号占位符 6"/>
           <p:cNvSpPr>
             <a:spLocks noGrp="1"/>
           </p:cNvSpPr>
@@ -4223,7 +3690,7 @@
           <a:lstStyle/>
           <a:p>
             <a:fld id="{43A13857-8FE2-426A-A37B-64DF65062EF2}" type="slidenum">
-              <a:t>‹#›</a:t>
+              <a:rPr/>
             </a:fld>
             <a:endParaRPr/>
           </a:p>
@@ -4256,13 +3723,7 @@
       </p:grpSpPr>
       <p:sp>
         <p:nvSpPr>
-          <p:cNvPr id="2" name="标题 1">
-            <a:extLst>
-              <a:ext uri="{FF2B5EF4-FFF2-40B4-BE49-F238E27FC236}">
-                <a16:creationId xmlns:a16="http://schemas.microsoft.com/office/drawing/2014/main" id="{F9C333A5-B233-4BE5-A80D-E5BABEA42336}"/>
-              </a:ext>
-            </a:extLst>
-          </p:cNvPr>
+          <p:cNvPr id="2" name="标题 1"/>
           <p:cNvSpPr>
             <a:spLocks noGrp="1"/>
           </p:cNvSpPr>
@@ -4293,13 +3754,7 @@
       </p:sp>
       <p:sp>
         <p:nvSpPr>
-          <p:cNvPr id="3" name="图片占位符 2">
-            <a:extLst>
-              <a:ext uri="{FF2B5EF4-FFF2-40B4-BE49-F238E27FC236}">
-                <a16:creationId xmlns:a16="http://schemas.microsoft.com/office/drawing/2014/main" id="{E690864D-645E-4F31-A4AF-C0E25FE29EB5}"/>
-              </a:ext>
-            </a:extLst>
-          </p:cNvPr>
+          <p:cNvPr id="3" name="图片占位符 2"/>
           <p:cNvSpPr>
             <a:spLocks noGrp="1"/>
           </p:cNvSpPr>
@@ -4353,25 +3808,17 @@
               <a:defRPr sz="2000"/>
             </a:lvl9pPr>
           </a:lstStyle>
-          <a:p>
-            <a:endParaRPr/>
-          </a:p>
-        </p:txBody>
-      </p:sp>
-      <p:sp>
-        <p:nvSpPr>
-          <p:cNvPr id="4" name="文本占位符 3">
-            <a:extLst>
-              <a:ext uri="{FF2B5EF4-FFF2-40B4-BE49-F238E27FC236}">
-                <a16:creationId xmlns:a16="http://schemas.microsoft.com/office/drawing/2014/main" id="{E7107EF1-54F5-42F7-A644-5A50AA46D316}"/>
-              </a:ext>
-            </a:extLst>
-          </p:cNvPr>
-          <p:cNvSpPr>
-            <a:spLocks noGrp="1"/>
-          </p:cNvSpPr>
-          <p:nvPr>
-            <p:ph type="body" idx="2"/>
+          <a:p/>
+        </p:txBody>
+      </p:sp>
+      <p:sp>
+        <p:nvSpPr>
+          <p:cNvPr id="4" name="文本占位符 3"/>
+          <p:cNvSpPr>
+            <a:spLocks noGrp="1"/>
+          </p:cNvSpPr>
+          <p:nvPr>
+            <p:ph type="body" idx="2" hasCustomPrompt="1"/>
           </p:nvPr>
         </p:nvSpPr>
         <p:spPr>
@@ -4432,13 +3879,7 @@
       </p:sp>
       <p:sp>
         <p:nvSpPr>
-          <p:cNvPr id="5" name="日期占位符 4">
-            <a:extLst>
-              <a:ext uri="{FF2B5EF4-FFF2-40B4-BE49-F238E27FC236}">
-                <a16:creationId xmlns:a16="http://schemas.microsoft.com/office/drawing/2014/main" id="{7CB5786B-734D-4F2D-8500-8303049D9D55}"/>
-              </a:ext>
-            </a:extLst>
-          </p:cNvPr>
+          <p:cNvPr id="5" name="日期占位符 4"/>
           <p:cNvSpPr>
             <a:spLocks noGrp="1"/>
           </p:cNvSpPr>
@@ -4452,7 +3893,7 @@
           <a:lstStyle/>
           <a:p>
             <a:fld id="{A653A8F1-9EDF-49EF-A14D-E495AD864F8A}" type="datetimeFigureOut">
-              <a:t>2026/6/16</a:t>
+              <a:rPr/>
             </a:fld>
             <a:endParaRPr/>
           </a:p>
@@ -4460,13 +3901,7 @@
       </p:sp>
       <p:sp>
         <p:nvSpPr>
-          <p:cNvPr id="6" name="页脚占位符 5">
-            <a:extLst>
-              <a:ext uri="{FF2B5EF4-FFF2-40B4-BE49-F238E27FC236}">
-                <a16:creationId xmlns:a16="http://schemas.microsoft.com/office/drawing/2014/main" id="{5F4F483E-5FEC-4176-8928-650AFEA37906}"/>
-              </a:ext>
-            </a:extLst>
-          </p:cNvPr>
+          <p:cNvPr id="6" name="页脚占位符 5"/>
           <p:cNvSpPr>
             <a:spLocks noGrp="1"/>
           </p:cNvSpPr>
@@ -4478,20 +3913,12 @@
         <p:txBody>
           <a:bodyPr/>
           <a:lstStyle/>
-          <a:p>
-            <a:endParaRPr/>
-          </a:p>
-        </p:txBody>
-      </p:sp>
-      <p:sp>
-        <p:nvSpPr>
-          <p:cNvPr id="7" name="灯片编号占位符 6">
-            <a:extLst>
-              <a:ext uri="{FF2B5EF4-FFF2-40B4-BE49-F238E27FC236}">
-                <a16:creationId xmlns:a16="http://schemas.microsoft.com/office/drawing/2014/main" id="{C8850916-12F4-40B6-9054-339E1445A3C3}"/>
-              </a:ext>
-            </a:extLst>
-          </p:cNvPr>
+          <a:p/>
+        </p:txBody>
+      </p:sp>
+      <p:sp>
+        <p:nvSpPr>
+          <p:cNvPr id="7" name="灯片编号占位符 6"/>
           <p:cNvSpPr>
             <a:spLocks noGrp="1"/>
           </p:cNvSpPr>
@@ -4505,7 +3932,7 @@
           <a:lstStyle/>
           <a:p>
             <a:fld id="{43A13857-8FE2-426A-A37B-64DF65062EF2}" type="slidenum">
-              <a:t>‹#›</a:t>
+              <a:rPr/>
             </a:fld>
             <a:endParaRPr/>
           </a:p>
@@ -4543,13 +3970,7 @@
       </p:grpSpPr>
       <p:sp>
         <p:nvSpPr>
-          <p:cNvPr id="2" name="标题占位符 1">
-            <a:extLst>
-              <a:ext uri="{FF2B5EF4-FFF2-40B4-BE49-F238E27FC236}">
-                <a16:creationId xmlns:a16="http://schemas.microsoft.com/office/drawing/2014/main" id="{0E41609F-3331-439D-B0F8-1F25E8EB908C}"/>
-              </a:ext>
-            </a:extLst>
-          </p:cNvPr>
+          <p:cNvPr id="2" name="标题占位符 1"/>
           <p:cNvSpPr>
             <a:spLocks noGrp="1"/>
           </p:cNvSpPr>
@@ -4580,13 +4001,7 @@
       </p:sp>
       <p:sp>
         <p:nvSpPr>
-          <p:cNvPr id="3" name="文本占位符 2">
-            <a:extLst>
-              <a:ext uri="{FF2B5EF4-FFF2-40B4-BE49-F238E27FC236}">
-                <a16:creationId xmlns:a16="http://schemas.microsoft.com/office/drawing/2014/main" id="{AFE24023-1CA4-4BDC-8DC5-1C11F41C7754}"/>
-              </a:ext>
-            </a:extLst>
-          </p:cNvPr>
+          <p:cNvPr id="3" name="文本占位符 2"/>
           <p:cNvSpPr>
             <a:spLocks noGrp="1"/>
           </p:cNvSpPr>
@@ -4652,13 +4067,7 @@
       </p:sp>
       <p:sp>
         <p:nvSpPr>
-          <p:cNvPr id="4" name="日期占位符 3">
-            <a:extLst>
-              <a:ext uri="{FF2B5EF4-FFF2-40B4-BE49-F238E27FC236}">
-                <a16:creationId xmlns:a16="http://schemas.microsoft.com/office/drawing/2014/main" id="{2FCE8571-A74E-415B-8900-450A14D4097D}"/>
-              </a:ext>
-            </a:extLst>
-          </p:cNvPr>
+          <p:cNvPr id="4" name="日期占位符 3"/>
           <p:cNvSpPr>
             <a:spLocks noGrp="1"/>
           </p:cNvSpPr>
@@ -4691,7 +4100,7 @@
           </a:lstStyle>
           <a:p>
             <a:fld id="{A653A8F1-9EDF-49EF-A14D-E495AD864F8A}" type="datetimeFigureOut">
-              <a:t>2026/6/16</a:t>
+              <a:rPr/>
             </a:fld>
             <a:endParaRPr/>
           </a:p>
@@ -4699,13 +4108,7 @@
       </p:sp>
       <p:sp>
         <p:nvSpPr>
-          <p:cNvPr id="5" name="页脚占位符 4">
-            <a:extLst>
-              <a:ext uri="{FF2B5EF4-FFF2-40B4-BE49-F238E27FC236}">
-                <a16:creationId xmlns:a16="http://schemas.microsoft.com/office/drawing/2014/main" id="{A018B585-8404-477C-9FB7-0443696D314F}"/>
-              </a:ext>
-            </a:extLst>
-          </p:cNvPr>
+          <p:cNvPr id="5" name="页脚占位符 4"/>
           <p:cNvSpPr>
             <a:spLocks noGrp="1"/>
           </p:cNvSpPr>
@@ -4736,20 +4139,12 @@
               </a:defRPr>
             </a:lvl1pPr>
           </a:lstStyle>
-          <a:p>
-            <a:endParaRPr/>
-          </a:p>
-        </p:txBody>
-      </p:sp>
-      <p:sp>
-        <p:nvSpPr>
-          <p:cNvPr id="6" name="灯片编号占位符 5">
-            <a:extLst>
-              <a:ext uri="{FF2B5EF4-FFF2-40B4-BE49-F238E27FC236}">
-                <a16:creationId xmlns:a16="http://schemas.microsoft.com/office/drawing/2014/main" id="{A6870DD4-577D-45D7-925C-1776615E4D1F}"/>
-              </a:ext>
-            </a:extLst>
-          </p:cNvPr>
+          <a:p/>
+        </p:txBody>
+      </p:sp>
+      <p:sp>
+        <p:nvSpPr>
+          <p:cNvPr id="6" name="灯片编号占位符 5"/>
           <p:cNvSpPr>
             <a:spLocks noGrp="1"/>
           </p:cNvSpPr>
@@ -4782,7 +4177,7 @@
           </a:lstStyle>
           <a:p>
             <a:fld id="{43A13857-8FE2-426A-A37B-64DF65062EF2}" type="slidenum">
-              <a:t>‹#›</a:t>
+              <a:rPr/>
             </a:fld>
             <a:endParaRPr/>
           </a:p>
@@ -5111,13 +4506,7 @@
       </p:grpSpPr>
       <p:sp>
         <p:nvSpPr>
-          <p:cNvPr id="5" name="矩形 4">
-            <a:extLst>
-              <a:ext uri="{FF2B5EF4-FFF2-40B4-BE49-F238E27FC236}">
-                <a16:creationId xmlns:a16="http://schemas.microsoft.com/office/drawing/2014/main" id="{540D35B1-31AE-46E4-AD38-CE2127573BCF}"/>
-              </a:ext>
-            </a:extLst>
-          </p:cNvPr>
+          <p:cNvPr id="5" name="矩形 4"/>
           <p:cNvSpPr>
             <a:spLocks noGrp="1"/>
           </p:cNvSpPr>
@@ -5161,19 +4550,12 @@
             <a:pPr algn="ctr">
               <a:buNone/>
             </a:pPr>
-            <a:endParaRPr/>
-          </a:p>
-        </p:txBody>
-      </p:sp>
-      <p:sp>
-        <p:nvSpPr>
-          <p:cNvPr id="6" name="文本框 5">
-            <a:extLst>
-              <a:ext uri="{FF2B5EF4-FFF2-40B4-BE49-F238E27FC236}">
-                <a16:creationId xmlns:a16="http://schemas.microsoft.com/office/drawing/2014/main" id="{01009F98-A134-45A8-957A-C46581E6DDEA}"/>
-              </a:ext>
-            </a:extLst>
-          </p:cNvPr>
+          </a:p>
+        </p:txBody>
+      </p:sp>
+      <p:sp>
+        <p:nvSpPr>
+          <p:cNvPr id="6" name="文本框 5"/>
           <p:cNvSpPr>
             <a:spLocks noGrp="1"/>
           </p:cNvSpPr>
@@ -5220,18 +4602,20 @@
               </a:rPr>
               <a:t>总结</a:t>
             </a:r>
-          </a:p>
-        </p:txBody>
-      </p:sp>
-      <p:sp>
-        <p:nvSpPr>
-          <p:cNvPr id="7" name="文本框 6">
-            <a:extLst>
-              <a:ext uri="{FF2B5EF4-FFF2-40B4-BE49-F238E27FC236}">
-                <a16:creationId xmlns:a16="http://schemas.microsoft.com/office/drawing/2014/main" id="{485B0D77-90F1-4E5A-ACB5-8D0FFD5681A8}"/>
-              </a:ext>
-            </a:extLst>
-          </p:cNvPr>
+            <a:endParaRPr lang="zh-CN" altLang="en-US" sz="4400" dirty="0">
+              <a:solidFill>
+                <a:schemeClr val="bg1"/>
+              </a:solidFill>
+              <a:latin typeface="字魂17号-萌趣果冻体"/>
+              <a:ea typeface="字魂17号-萌趣果冻体"/>
+              <a:cs typeface="字魂17号-萌趣果冻体"/>
+            </a:endParaRPr>
+          </a:p>
+        </p:txBody>
+      </p:sp>
+      <p:sp>
+        <p:nvSpPr>
+          <p:cNvPr id="7" name="文本框 6"/>
           <p:cNvSpPr>
             <a:spLocks noGrp="1"/>
           </p:cNvSpPr>
@@ -5274,13 +4658,7 @@
       </p:sp>
       <p:sp>
         <p:nvSpPr>
-          <p:cNvPr id="10" name="椭圆 9">
-            <a:extLst>
-              <a:ext uri="{FF2B5EF4-FFF2-40B4-BE49-F238E27FC236}">
-                <a16:creationId xmlns:a16="http://schemas.microsoft.com/office/drawing/2014/main" id="{FC386E4F-7907-4FDD-B3B9-E3127F053484}"/>
-              </a:ext>
-            </a:extLst>
-          </p:cNvPr>
+          <p:cNvPr id="10" name="椭圆 9"/>
           <p:cNvSpPr>
             <a:spLocks noGrp="1"/>
           </p:cNvSpPr>
@@ -5324,19 +4702,12 @@
             <a:pPr algn="ctr">
               <a:buNone/>
             </a:pPr>
-            <a:endParaRPr/>
-          </a:p>
-        </p:txBody>
-      </p:sp>
-      <p:sp>
-        <p:nvSpPr>
-          <p:cNvPr id="13" name="等腰三角形 12">
-            <a:extLst>
-              <a:ext uri="{FF2B5EF4-FFF2-40B4-BE49-F238E27FC236}">
-                <a16:creationId xmlns:a16="http://schemas.microsoft.com/office/drawing/2014/main" id="{ADBB85B5-2B68-44EC-837A-7CF86BE98265}"/>
-              </a:ext>
-            </a:extLst>
-          </p:cNvPr>
+          </a:p>
+        </p:txBody>
+      </p:sp>
+      <p:sp>
+        <p:nvSpPr>
+          <p:cNvPr id="13" name="等腰三角形 12"/>
           <p:cNvSpPr>
             <a:spLocks noGrp="1"/>
           </p:cNvSpPr>
@@ -5380,19 +4751,12 @@
             <a:pPr algn="ctr">
               <a:buNone/>
             </a:pPr>
-            <a:endParaRPr/>
-          </a:p>
-        </p:txBody>
-      </p:sp>
-      <p:sp>
-        <p:nvSpPr>
-          <p:cNvPr id="16" name="椭圆 15">
-            <a:extLst>
-              <a:ext uri="{FF2B5EF4-FFF2-40B4-BE49-F238E27FC236}">
-                <a16:creationId xmlns:a16="http://schemas.microsoft.com/office/drawing/2014/main" id="{F817E4FC-2B81-474B-A08F-73CA0FE7F988}"/>
-              </a:ext>
-            </a:extLst>
-          </p:cNvPr>
+          </a:p>
+        </p:txBody>
+      </p:sp>
+      <p:sp>
+        <p:nvSpPr>
+          <p:cNvPr id="16" name="椭圆 15"/>
           <p:cNvSpPr>
             <a:spLocks noGrp="1"/>
           </p:cNvSpPr>
@@ -5436,19 +4800,12 @@
             <a:pPr algn="ctr">
               <a:buNone/>
             </a:pPr>
-            <a:endParaRPr/>
-          </a:p>
-        </p:txBody>
-      </p:sp>
-      <p:sp>
-        <p:nvSpPr>
-          <p:cNvPr id="17" name="等腰三角形 16">
-            <a:extLst>
-              <a:ext uri="{FF2B5EF4-FFF2-40B4-BE49-F238E27FC236}">
-                <a16:creationId xmlns:a16="http://schemas.microsoft.com/office/drawing/2014/main" id="{EB26C5CC-5887-4191-BC00-B4BBD85A9AFC}"/>
-              </a:ext>
-            </a:extLst>
-          </p:cNvPr>
+          </a:p>
+        </p:txBody>
+      </p:sp>
+      <p:sp>
+        <p:nvSpPr>
+          <p:cNvPr id="17" name="等腰三角形 16"/>
           <p:cNvSpPr>
             <a:spLocks noGrp="1"/>
           </p:cNvSpPr>
@@ -5492,19 +4849,12 @@
             <a:pPr algn="ctr">
               <a:buNone/>
             </a:pPr>
-            <a:endParaRPr/>
-          </a:p>
-        </p:txBody>
-      </p:sp>
-      <p:sp>
-        <p:nvSpPr>
-          <p:cNvPr id="19" name="椭圆 18">
-            <a:extLst>
-              <a:ext uri="{FF2B5EF4-FFF2-40B4-BE49-F238E27FC236}">
-                <a16:creationId xmlns:a16="http://schemas.microsoft.com/office/drawing/2014/main" id="{258F5FFE-7C49-46D3-A163-2EDEEDA471FE}"/>
-              </a:ext>
-            </a:extLst>
-          </p:cNvPr>
+          </a:p>
+        </p:txBody>
+      </p:sp>
+      <p:sp>
+        <p:nvSpPr>
+          <p:cNvPr id="19" name="椭圆 18"/>
           <p:cNvSpPr>
             <a:spLocks noGrp="1"/>
           </p:cNvSpPr>
@@ -5550,7 +4900,6 @@
             <a:pPr algn="ctr">
               <a:buNone/>
             </a:pPr>
-            <a:endParaRPr/>
           </a:p>
         </p:txBody>
       </p:sp>
@@ -5563,7 +4912,7 @@
           <p:nvPr/>
         </p:nvPicPr>
         <p:blipFill>
-          <a:blip r:embed="rId3"/>
+          <a:blip r:embed="rId1"/>
           <a:stretch>
             <a:fillRect/>
           </a:stretch>
@@ -5580,13 +4929,7 @@
       </p:pic>
       <p:sp>
         <p:nvSpPr>
-          <p:cNvPr id="4" name="文本框 3">
-            <a:extLst>
-              <a:ext uri="{FF2B5EF4-FFF2-40B4-BE49-F238E27FC236}">
-                <a16:creationId xmlns:a16="http://schemas.microsoft.com/office/drawing/2014/main" id="{F88C68E8-475C-4113-BA48-2830529E4DF3}"/>
-              </a:ext>
-            </a:extLst>
-          </p:cNvPr>
+          <p:cNvPr id="4" name="文本框 3"/>
           <p:cNvSpPr txBox="1"/>
           <p:nvPr/>
         </p:nvSpPr>
@@ -5614,15 +4957,15 @@
               </a:rPr>
               <a:t>小组成员：李嘉轩 刘义群 王秀崧 汤语涵 谢羿衡 唐熙雷 邢泽雷</a:t>
             </a:r>
+            <a:endParaRPr lang="zh-CN" altLang="en-US" dirty="0">
+              <a:solidFill>
+                <a:schemeClr val="bg1"/>
+              </a:solidFill>
+            </a:endParaRPr>
           </a:p>
         </p:txBody>
       </p:sp>
     </p:spTree>
-    <p:extLst>
-      <p:ext uri="{BB962C8B-B14F-4D97-AF65-F5344CB8AC3E}">
-        <p14:creationId xmlns:p14="http://schemas.microsoft.com/office/powerpoint/2010/main" val="1515971607"/>
-      </p:ext>
-    </p:extLst>
   </p:cSld>
   <p:clrMapOvr>
     <a:masterClrMapping/>
@@ -5657,13 +5000,7 @@
       </p:grpSpPr>
       <p:sp>
         <p:nvSpPr>
-          <p:cNvPr id="11" name="文本框 10">
-            <a:extLst>
-              <a:ext uri="{FF2B5EF4-FFF2-40B4-BE49-F238E27FC236}">
-                <a16:creationId xmlns:a16="http://schemas.microsoft.com/office/drawing/2014/main" id="{642171A4-C23A-4145-BED1-2E8834D0E5B1}"/>
-              </a:ext>
-            </a:extLst>
-          </p:cNvPr>
+          <p:cNvPr id="11" name="文本框 10"/>
           <p:cNvSpPr>
             <a:spLocks noGrp="1"/>
           </p:cNvSpPr>
@@ -5699,7 +5036,6 @@
               <a:buSzTx/>
               <a:buFontTx/>
               <a:buNone/>
-              <a:tabLst/>
               <a:defRPr/>
             </a:pPr>
             <a:r>
@@ -5713,8 +5049,8 @@
                 <a:effectLst/>
                 <a:uLnTx/>
                 <a:uFillTx/>
-                <a:latin typeface="Arial"/>
-                <a:ea typeface="STZhongsong"/>
+                <a:latin typeface="Arial" panose="020B0604020202020204"/>
+                <a:ea typeface="华文中宋" panose="02010600040101010101" charset="-122"/>
                 <a:cs typeface="+mn-cs"/>
               </a:rPr>
               <a:t>0</a:t>
@@ -5724,8 +5060,8 @@
                 <a:solidFill>
                   <a:srgbClr val="F5F4F9"/>
                 </a:solidFill>
-                <a:latin typeface="Arial"/>
-                <a:ea typeface="STZhongsong"/>
+                <a:latin typeface="Arial" panose="020B0604020202020204"/>
+                <a:ea typeface="华文中宋" panose="02010600040101010101" charset="-122"/>
               </a:rPr>
               <a:t>4</a:t>
             </a:r>
@@ -5739,8 +5075,8 @@
               <a:effectLst/>
               <a:uLnTx/>
               <a:uFillTx/>
-              <a:latin typeface="Arial"/>
-              <a:ea typeface="STZhongsong"/>
+              <a:latin typeface="Arial" panose="020B0604020202020204"/>
+              <a:ea typeface="华文中宋" panose="02010600040101010101" charset="-122"/>
               <a:cs typeface="+mn-cs"/>
             </a:endParaRPr>
           </a:p>
@@ -5748,13 +5084,7 @@
       </p:sp>
       <p:sp>
         <p:nvSpPr>
-          <p:cNvPr id="13" name="矩形 12">
-            <a:extLst>
-              <a:ext uri="{FF2B5EF4-FFF2-40B4-BE49-F238E27FC236}">
-                <a16:creationId xmlns:a16="http://schemas.microsoft.com/office/drawing/2014/main" id="{638E2919-D9D9-4496-93DC-FD75812F9CF1}"/>
-              </a:ext>
-            </a:extLst>
-          </p:cNvPr>
+          <p:cNvPr id="13" name="矩形 12"/>
           <p:cNvSpPr>
             <a:spLocks noGrp="1"/>
           </p:cNvSpPr>
@@ -5789,7 +5119,6 @@
               <a:buSzTx/>
               <a:buFontTx/>
               <a:buNone/>
-              <a:tabLst/>
               <a:defRPr/>
             </a:pPr>
             <a:r>
@@ -5803,8 +5132,8 @@
                 <a:effectLst/>
                 <a:uLnTx/>
                 <a:uFillTx/>
-                <a:latin typeface="Arial"/>
-                <a:ea typeface="STZhongsong"/>
+                <a:latin typeface="Arial" panose="020B0604020202020204"/>
+                <a:ea typeface="华文中宋" panose="02010600040101010101" charset="-122"/>
                 <a:cs typeface="+mn-cs"/>
               </a:rPr>
               <a:t>李嘉轩</a:t>
@@ -5819,19 +5148,14 @@
               <a:effectLst/>
               <a:uLnTx/>
               <a:uFillTx/>
-              <a:latin typeface="Arial"/>
-              <a:ea typeface="STZhongsong"/>
+              <a:latin typeface="Arial" panose="020B0604020202020204"/>
+              <a:ea typeface="华文中宋" panose="02010600040101010101" charset="-122"/>
               <a:cs typeface="+mn-cs"/>
             </a:endParaRPr>
           </a:p>
         </p:txBody>
       </p:sp>
     </p:spTree>
-    <p:extLst>
-      <p:ext uri="{BB962C8B-B14F-4D97-AF65-F5344CB8AC3E}">
-        <p14:creationId xmlns:p14="http://schemas.microsoft.com/office/powerpoint/2010/main" val="2232598541"/>
-      </p:ext>
-    </p:extLst>
   </p:cSld>
   <p:clrMapOvr>
     <a:masterClrMapping/>
@@ -5858,13 +5182,7 @@
       </p:grpSpPr>
       <p:sp>
         <p:nvSpPr>
-          <p:cNvPr id="13" name="矩形 12">
-            <a:extLst>
-              <a:ext uri="{FF2B5EF4-FFF2-40B4-BE49-F238E27FC236}">
-                <a16:creationId xmlns:a16="http://schemas.microsoft.com/office/drawing/2014/main" id="{0AE95B23-90A2-47EB-9DB0-EF921EB2D2A6}"/>
-              </a:ext>
-            </a:extLst>
-          </p:cNvPr>
+          <p:cNvPr id="13" name="矩形 12"/>
           <p:cNvSpPr>
             <a:spLocks noGrp="1"/>
           </p:cNvSpPr>
@@ -5891,13 +5209,7 @@
       </p:sp>
       <p:sp>
         <p:nvSpPr>
-          <p:cNvPr id="2" name="矩形 1">
-            <a:extLst>
-              <a:ext uri="{FF2B5EF4-FFF2-40B4-BE49-F238E27FC236}">
-                <a16:creationId xmlns:a16="http://schemas.microsoft.com/office/drawing/2014/main" id="{6C42F653-EC31-48A4-A29A-2DDE93A0D539}"/>
-              </a:ext>
-            </a:extLst>
-          </p:cNvPr>
+          <p:cNvPr id="2" name="矩形 1"/>
           <p:cNvSpPr>
             <a:spLocks noGrp="1"/>
           </p:cNvSpPr>
@@ -5954,13 +5266,7 @@
       </p:sp>
       <p:sp>
         <p:nvSpPr>
-          <p:cNvPr id="4" name="矩形 3">
-            <a:extLst>
-              <a:ext uri="{FF2B5EF4-FFF2-40B4-BE49-F238E27FC236}">
-                <a16:creationId xmlns:a16="http://schemas.microsoft.com/office/drawing/2014/main" id="{7BD7F060-279B-476B-ADD0-60F9D22D690F}"/>
-              </a:ext>
-            </a:extLst>
-          </p:cNvPr>
+          <p:cNvPr id="4" name="矩形 3"/>
           <p:cNvSpPr>
             <a:spLocks noGrp="1"/>
           </p:cNvSpPr>
@@ -5987,13 +5293,7 @@
       </p:sp>
       <p:sp>
         <p:nvSpPr>
-          <p:cNvPr id="5" name="矩形 4">
-            <a:extLst>
-              <a:ext uri="{FF2B5EF4-FFF2-40B4-BE49-F238E27FC236}">
-                <a16:creationId xmlns:a16="http://schemas.microsoft.com/office/drawing/2014/main" id="{B5B9DCD3-3DCB-492D-A18F-7F83A194A750}"/>
-              </a:ext>
-            </a:extLst>
-          </p:cNvPr>
+          <p:cNvPr id="5" name="矩形 4"/>
           <p:cNvSpPr>
             <a:spLocks noGrp="1"/>
           </p:cNvSpPr>
@@ -6050,13 +5350,7 @@
       </p:sp>
       <p:sp>
         <p:nvSpPr>
-          <p:cNvPr id="6" name="矩形 5">
-            <a:extLst>
-              <a:ext uri="{FF2B5EF4-FFF2-40B4-BE49-F238E27FC236}">
-                <a16:creationId xmlns:a16="http://schemas.microsoft.com/office/drawing/2014/main" id="{47E76C44-57B2-4BCD-969D-2F43D77383C3}"/>
-              </a:ext>
-            </a:extLst>
-          </p:cNvPr>
+          <p:cNvPr id="6" name="矩形 5"/>
           <p:cNvSpPr>
             <a:spLocks noGrp="1"/>
           </p:cNvSpPr>
@@ -6230,6 +5524,12 @@
               </a:rPr>
               <a:t>、列信息</a:t>
             </a:r>
+            <a:endParaRPr lang="zh-CN" altLang="en-US" sz="2000" dirty="0">
+              <a:solidFill>
+                <a:srgbClr val="1F2D22"/>
+              </a:solidFill>
+              <a:latin typeface="ui-monospace"/>
+            </a:endParaRPr>
           </a:p>
           <a:p>
             <a:pPr>
@@ -6266,6 +5566,12 @@
               </a:rPr>
               <a:t>类别</a:t>
             </a:r>
+            <a:endParaRPr lang="zh-CN" altLang="en-US" sz="2000" dirty="0">
+              <a:solidFill>
+                <a:srgbClr val="1F2D22"/>
+              </a:solidFill>
+              <a:latin typeface="ui-monospace"/>
+            </a:endParaRPr>
           </a:p>
           <a:p>
             <a:pPr algn="l">
@@ -6285,13 +5591,7 @@
       </p:sp>
       <p:sp>
         <p:nvSpPr>
-          <p:cNvPr id="7" name="矩形 6">
-            <a:extLst>
-              <a:ext uri="{FF2B5EF4-FFF2-40B4-BE49-F238E27FC236}">
-                <a16:creationId xmlns:a16="http://schemas.microsoft.com/office/drawing/2014/main" id="{34797A82-E8A1-4FD5-A480-1468A75DCB41}"/>
-              </a:ext>
-            </a:extLst>
-          </p:cNvPr>
+          <p:cNvPr id="7" name="矩形 6"/>
           <p:cNvSpPr>
             <a:spLocks noGrp="1"/>
           </p:cNvSpPr>
@@ -6318,13 +5618,7 @@
       </p:sp>
       <p:sp>
         <p:nvSpPr>
-          <p:cNvPr id="8" name="矩形 7">
-            <a:extLst>
-              <a:ext uri="{FF2B5EF4-FFF2-40B4-BE49-F238E27FC236}">
-                <a16:creationId xmlns:a16="http://schemas.microsoft.com/office/drawing/2014/main" id="{CAF760D5-7BD6-4703-9C53-D0A2A5E3F7A2}"/>
-              </a:ext>
-            </a:extLst>
-          </p:cNvPr>
+          <p:cNvPr id="8" name="矩形 7"/>
           <p:cNvSpPr>
             <a:spLocks noGrp="1"/>
           </p:cNvSpPr>
@@ -6381,13 +5675,7 @@
       </p:sp>
       <p:sp>
         <p:nvSpPr>
-          <p:cNvPr id="9" name="矩形 8">
-            <a:extLst>
-              <a:ext uri="{FF2B5EF4-FFF2-40B4-BE49-F238E27FC236}">
-                <a16:creationId xmlns:a16="http://schemas.microsoft.com/office/drawing/2014/main" id="{78ECD07B-701D-4861-812E-B364FA3E3C92}"/>
-              </a:ext>
-            </a:extLst>
-          </p:cNvPr>
+          <p:cNvPr id="9" name="矩形 8"/>
           <p:cNvSpPr>
             <a:spLocks noGrp="1"/>
           </p:cNvSpPr>
@@ -6444,6 +5732,12 @@
               </a:rPr>
               <a:t>chunk</a:t>
             </a:r>
+            <a:endParaRPr lang="en-US" altLang="zh-CN" sz="2000" dirty="0">
+              <a:solidFill>
+                <a:srgbClr val="1F2D22"/>
+              </a:solidFill>
+              <a:latin typeface="ui-monospace"/>
+            </a:endParaRPr>
           </a:p>
           <a:p>
             <a:pPr algn="l"/>
@@ -6528,15 +5822,16 @@
               </a:rPr>
               <a:t>做递归切分</a:t>
             </a:r>
+            <a:endParaRPr lang="zh-CN" altLang="en-US" sz="2000" dirty="0">
+              <a:solidFill>
+                <a:srgbClr val="1F2D22"/>
+              </a:solidFill>
+              <a:latin typeface="ui-monospace"/>
+            </a:endParaRPr>
           </a:p>
         </p:txBody>
       </p:sp>
     </p:spTree>
-    <p:extLst>
-      <p:ext uri="{BB962C8B-B14F-4D97-AF65-F5344CB8AC3E}">
-        <p14:creationId xmlns:p14="http://schemas.microsoft.com/office/powerpoint/2010/main" val="1941770515"/>
-      </p:ext>
-    </p:extLst>
   </p:cSld>
   <p:clrMapOvr>
     <a:masterClrMapping/>
@@ -6571,13 +5866,7 @@
       </p:grpSpPr>
       <p:sp>
         <p:nvSpPr>
-          <p:cNvPr id="11" name="文本框 10">
-            <a:extLst>
-              <a:ext uri="{FF2B5EF4-FFF2-40B4-BE49-F238E27FC236}">
-                <a16:creationId xmlns:a16="http://schemas.microsoft.com/office/drawing/2014/main" id="{642171A4-C23A-4145-BED1-2E8834D0E5B1}"/>
-              </a:ext>
-            </a:extLst>
-          </p:cNvPr>
+          <p:cNvPr id="11" name="文本框 10"/>
           <p:cNvSpPr>
             <a:spLocks noGrp="1"/>
           </p:cNvSpPr>
@@ -6613,7 +5902,6 @@
               <a:buSzTx/>
               <a:buFontTx/>
               <a:buNone/>
-              <a:tabLst/>
               <a:defRPr/>
             </a:pPr>
             <a:r>
@@ -6627,8 +5915,8 @@
                 <a:effectLst/>
                 <a:uLnTx/>
                 <a:uFillTx/>
-                <a:latin typeface="Arial"/>
-                <a:ea typeface="STZhongsong"/>
+                <a:latin typeface="Arial" panose="020B0604020202020204"/>
+                <a:ea typeface="华文中宋" panose="02010600040101010101" charset="-122"/>
                 <a:cs typeface="+mn-cs"/>
               </a:rPr>
               <a:t>0</a:t>
@@ -6644,8 +5932,8 @@
                 <a:effectLst/>
                 <a:uLnTx/>
                 <a:uFillTx/>
-                <a:latin typeface="Arial"/>
-                <a:ea typeface="STZhongsong"/>
+                <a:latin typeface="Arial" panose="020B0604020202020204"/>
+                <a:ea typeface="华文中宋" panose="02010600040101010101" charset="-122"/>
                 <a:cs typeface="+mn-cs"/>
               </a:rPr>
               <a:t>5</a:t>
@@ -6660,8 +5948,8 @@
               <a:effectLst/>
               <a:uLnTx/>
               <a:uFillTx/>
-              <a:latin typeface="Arial"/>
-              <a:ea typeface="STZhongsong"/>
+              <a:latin typeface="Arial" panose="020B0604020202020204"/>
+              <a:ea typeface="华文中宋" panose="02010600040101010101" charset="-122"/>
               <a:cs typeface="+mn-cs"/>
             </a:endParaRPr>
           </a:p>
@@ -6669,13 +5957,7 @@
       </p:sp>
       <p:sp>
         <p:nvSpPr>
-          <p:cNvPr id="13" name="矩形 12">
-            <a:extLst>
-              <a:ext uri="{FF2B5EF4-FFF2-40B4-BE49-F238E27FC236}">
-                <a16:creationId xmlns:a16="http://schemas.microsoft.com/office/drawing/2014/main" id="{638E2919-D9D9-4496-93DC-FD75812F9CF1}"/>
-              </a:ext>
-            </a:extLst>
-          </p:cNvPr>
+          <p:cNvPr id="13" name="矩形 12"/>
           <p:cNvSpPr>
             <a:spLocks noGrp="1"/>
           </p:cNvSpPr>
@@ -6710,7 +5992,6 @@
               <a:buSzTx/>
               <a:buFontTx/>
               <a:buNone/>
-              <a:tabLst/>
               <a:defRPr/>
             </a:pPr>
             <a:r>
@@ -6718,8 +5999,8 @@
                 <a:solidFill>
                   <a:prstClr val="white"/>
                 </a:solidFill>
-                <a:latin typeface="Arial"/>
-                <a:ea typeface="STZhongsong"/>
+                <a:latin typeface="Arial" panose="020B0604020202020204"/>
+                <a:ea typeface="华文中宋" panose="02010600040101010101" charset="-122"/>
               </a:rPr>
               <a:t>唐熙雷</a:t>
             </a:r>
@@ -6733,19 +6014,14 @@
               <a:effectLst/>
               <a:uLnTx/>
               <a:uFillTx/>
-              <a:latin typeface="Arial"/>
-              <a:ea typeface="STZhongsong"/>
+              <a:latin typeface="Arial" panose="020B0604020202020204"/>
+              <a:ea typeface="华文中宋" panose="02010600040101010101" charset="-122"/>
               <a:cs typeface="+mn-cs"/>
             </a:endParaRPr>
           </a:p>
         </p:txBody>
       </p:sp>
     </p:spTree>
-    <p:extLst>
-      <p:ext uri="{BB962C8B-B14F-4D97-AF65-F5344CB8AC3E}">
-        <p14:creationId xmlns:p14="http://schemas.microsoft.com/office/powerpoint/2010/main" val="969448289"/>
-      </p:ext>
-    </p:extLst>
   </p:cSld>
   <p:clrMapOvr>
     <a:masterClrMapping/>
@@ -6780,13 +6056,7 @@
       </p:grpSpPr>
       <p:sp>
         <p:nvSpPr>
-          <p:cNvPr id="13" name="矩形 12">
-            <a:extLst>
-              <a:ext uri="{FF2B5EF4-FFF2-40B4-BE49-F238E27FC236}">
-                <a16:creationId xmlns:a16="http://schemas.microsoft.com/office/drawing/2014/main" id="{49C5998F-8D86-4862-8469-086DC510390B}"/>
-              </a:ext>
-            </a:extLst>
-          </p:cNvPr>
+          <p:cNvPr id="13" name="矩形 12"/>
           <p:cNvSpPr>
             <a:spLocks noGrp="1"/>
           </p:cNvSpPr>
@@ -6813,13 +6083,7 @@
       </p:sp>
       <p:sp>
         <p:nvSpPr>
-          <p:cNvPr id="2" name="矩形 1">
-            <a:extLst>
-              <a:ext uri="{FF2B5EF4-FFF2-40B4-BE49-F238E27FC236}">
-                <a16:creationId xmlns:a16="http://schemas.microsoft.com/office/drawing/2014/main" id="{7014062F-B6B3-42D0-923B-A7424561BC77}"/>
-              </a:ext>
-            </a:extLst>
-          </p:cNvPr>
+          <p:cNvPr id="2" name="矩形 1"/>
           <p:cNvSpPr>
             <a:spLocks noGrp="1"/>
           </p:cNvSpPr>
@@ -6876,22 +6140,20 @@
       </p:sp>
       <p:sp>
         <p:nvSpPr>
-          <p:cNvPr id="4" name="矩形 3">
-            <a:extLst>
-              <a:ext uri="{FF2B5EF4-FFF2-40B4-BE49-F238E27FC236}">
-                <a16:creationId xmlns:a16="http://schemas.microsoft.com/office/drawing/2014/main" id="{C6221659-10CA-473D-B608-E2633E14E235}"/>
-              </a:ext>
-            </a:extLst>
-          </p:cNvPr>
-          <p:cNvSpPr>
-            <a:spLocks noGrp="1"/>
-          </p:cNvSpPr>
-          <p:nvPr/>
+          <p:cNvPr id="4" name="矩形 3"/>
+          <p:cNvSpPr>
+            <a:spLocks noGrp="1"/>
+          </p:cNvSpPr>
+          <p:nvPr>
+            <p:custDataLst>
+              <p:tags r:id="rId1"/>
+            </p:custDataLst>
+          </p:nvPr>
         </p:nvSpPr>
         <p:spPr>
           <a:xfrm>
             <a:off x="857250" y="1619250"/>
-            <a:ext cx="4762500" cy="1619250"/>
+            <a:ext cx="4762500" cy="2842895"/>
           </a:xfrm>
           <a:prstGeom prst="rect">
             <a:avLst/>
@@ -6909,17 +6171,15 @@
       </p:sp>
       <p:sp>
         <p:nvSpPr>
-          <p:cNvPr id="5" name="矩形 4">
-            <a:extLst>
-              <a:ext uri="{FF2B5EF4-FFF2-40B4-BE49-F238E27FC236}">
-                <a16:creationId xmlns:a16="http://schemas.microsoft.com/office/drawing/2014/main" id="{BE326CC3-10C1-4780-ADEA-D2C23EB4593B}"/>
-              </a:ext>
-            </a:extLst>
-          </p:cNvPr>
-          <p:cNvSpPr>
-            <a:spLocks noGrp="1"/>
-          </p:cNvSpPr>
-          <p:nvPr/>
+          <p:cNvPr id="5" name="矩形 4"/>
+          <p:cNvSpPr>
+            <a:spLocks noGrp="1"/>
+          </p:cNvSpPr>
+          <p:nvPr>
+            <p:custDataLst>
+              <p:tags r:id="rId2"/>
+            </p:custDataLst>
+          </p:nvPr>
         </p:nvSpPr>
         <p:spPr>
           <a:xfrm>
@@ -6962,27 +6222,38 @@
               </a:rPr>
               <a:t>Faiss</a:t>
             </a:r>
-          </a:p>
-        </p:txBody>
-      </p:sp>
-      <p:sp>
-        <p:nvSpPr>
-          <p:cNvPr id="6" name="矩形 5">
-            <a:extLst>
-              <a:ext uri="{FF2B5EF4-FFF2-40B4-BE49-F238E27FC236}">
-                <a16:creationId xmlns:a16="http://schemas.microsoft.com/office/drawing/2014/main" id="{30F903FA-7735-436D-AA14-6FDE08DB3204}"/>
-              </a:ext>
-            </a:extLst>
-          </p:cNvPr>
-          <p:cNvSpPr>
-            <a:spLocks noGrp="1"/>
-          </p:cNvSpPr>
-          <p:nvPr/>
+            <a:r>
+              <a:rPr lang="zh-CN" altLang="en-US" sz="1650" b="1">
+                <a:solidFill>
+                  <a:srgbClr val="2D4A33"/>
+                </a:solidFill>
+              </a:rPr>
+              <a:t>本地底座与多索引</a:t>
+            </a:r>
+            <a:endParaRPr lang="zh-CN" altLang="en-US" sz="1650" b="1">
+              <a:solidFill>
+                <a:srgbClr val="2D4A33"/>
+              </a:solidFill>
+            </a:endParaRPr>
+          </a:p>
+        </p:txBody>
+      </p:sp>
+      <p:sp>
+        <p:nvSpPr>
+          <p:cNvPr id="6" name="矩形 5"/>
+          <p:cNvSpPr>
+            <a:spLocks noGrp="1"/>
+          </p:cNvSpPr>
+          <p:nvPr>
+            <p:custDataLst>
+              <p:tags r:id="rId3"/>
+            </p:custDataLst>
+          </p:nvPr>
         </p:nvSpPr>
         <p:spPr>
           <a:xfrm>
             <a:off x="1085850" y="2228850"/>
-            <a:ext cx="4305300" cy="857250"/>
+            <a:ext cx="4305300" cy="1988820"/>
           </a:xfrm>
           <a:prstGeom prst="rect">
             <a:avLst/>
@@ -7013,34 +6284,243 @@
               </a:defRPr>
             </a:pPr>
             <a:r>
-              <a:rPr sz="1350" b="0">
-                <a:solidFill>
-                  <a:srgbClr val="1F2D22"/>
-                </a:solidFill>
-              </a:rPr>
-              <a:t>替换 / 增强向量检索底座</a:t>
-            </a:r>
-          </a:p>
-        </p:txBody>
-      </p:sp>
-      <p:sp>
-        <p:nvSpPr>
-          <p:cNvPr id="7" name="矩形 6">
-            <a:extLst>
-              <a:ext uri="{FF2B5EF4-FFF2-40B4-BE49-F238E27FC236}">
-                <a16:creationId xmlns:a16="http://schemas.microsoft.com/office/drawing/2014/main" id="{5C63DCCE-58D8-46C2-8CD3-78F707B6307B}"/>
-              </a:ext>
-            </a:extLst>
-          </p:cNvPr>
-          <p:cNvSpPr>
-            <a:spLocks noGrp="1"/>
-          </p:cNvSpPr>
-          <p:nvPr/>
+              <a:rPr lang="zh-CN" altLang="en-US" sz="1350" b="0">
+                <a:solidFill>
+                  <a:srgbClr val="1F2D22"/>
+                </a:solidFill>
+              </a:rPr>
+              <a:t>双检索底座适配：后端 </a:t>
+            </a:r>
+            <a:r>
+              <a:rPr lang="en-US" altLang="zh-CN" sz="1350" b="0">
+                <a:solidFill>
+                  <a:srgbClr val="1F2D22"/>
+                </a:solidFill>
+              </a:rPr>
+              <a:t>SearchService </a:t>
+            </a:r>
+            <a:r>
+              <a:rPr lang="zh-CN" altLang="en-US" sz="1350" b="0">
+                <a:solidFill>
+                  <a:srgbClr val="1F2D22"/>
+                </a:solidFill>
+              </a:rPr>
+              <a:t>逻辑抽象，支持 </a:t>
+            </a:r>
+            <a:r>
+              <a:rPr lang="en-US" altLang="zh-CN" sz="1350" b="0">
+                <a:solidFill>
+                  <a:srgbClr val="1F2D22"/>
+                </a:solidFill>
+              </a:rPr>
+              <a:t>Chroma </a:t>
+            </a:r>
+            <a:r>
+              <a:rPr lang="zh-CN" altLang="en-US" sz="1350" b="0">
+                <a:solidFill>
+                  <a:srgbClr val="1F2D22"/>
+                </a:solidFill>
+              </a:rPr>
+              <a:t>与 </a:t>
+            </a:r>
+            <a:r>
+              <a:rPr lang="en-US" altLang="zh-CN" sz="1350" b="0">
+                <a:solidFill>
+                  <a:srgbClr val="1F2D22"/>
+                </a:solidFill>
+              </a:rPr>
+              <a:t>FAISS </a:t>
+            </a:r>
+            <a:r>
+              <a:rPr lang="zh-CN" altLang="en-US" sz="1350" b="0">
+                <a:solidFill>
+                  <a:srgbClr val="1F2D22"/>
+                </a:solidFill>
+              </a:rPr>
+              <a:t>数据库运行时自由切换。</a:t>
+            </a:r>
+            <a:endParaRPr lang="zh-CN" altLang="en-US" sz="1350" b="0">
+              <a:solidFill>
+                <a:srgbClr val="1F2D22"/>
+              </a:solidFill>
+            </a:endParaRPr>
+          </a:p>
+          <a:p>
+            <a:pPr algn="l">
+              <a:defRPr sz="1350" b="0">
+                <a:solidFill>
+                  <a:srgbClr val="1F2D22"/>
+                </a:solidFill>
+              </a:defRPr>
+            </a:pPr>
+            <a:endParaRPr lang="zh-CN" altLang="en-US" sz="1350" b="0">
+              <a:solidFill>
+                <a:srgbClr val="1F2D22"/>
+              </a:solidFill>
+            </a:endParaRPr>
+          </a:p>
+          <a:p>
+            <a:pPr algn="l">
+              <a:defRPr sz="1350" b="0">
+                <a:solidFill>
+                  <a:srgbClr val="1F2D22"/>
+                </a:solidFill>
+              </a:defRPr>
+            </a:pPr>
+            <a:r>
+              <a:rPr lang="zh-CN" altLang="en-US" sz="1350" b="0">
+                <a:solidFill>
+                  <a:srgbClr val="1F2D22"/>
+                </a:solidFill>
+              </a:rPr>
+              <a:t>三种经典索引构建：新增 </a:t>
+            </a:r>
+            <a:r>
+              <a:rPr lang="en-US" altLang="zh-CN" sz="1350" b="0">
+                <a:solidFill>
+                  <a:srgbClr val="1F2D22"/>
+                </a:solidFill>
+              </a:rPr>
+              <a:t>FLAT（</a:t>
+            </a:r>
+            <a:r>
+              <a:rPr lang="zh-CN" altLang="en-US" sz="1350" b="0">
+                <a:solidFill>
+                  <a:srgbClr val="1F2D22"/>
+                </a:solidFill>
+              </a:rPr>
+              <a:t>精确）、</a:t>
+            </a:r>
+            <a:r>
+              <a:rPr lang="en-US" altLang="zh-CN" sz="1350" b="0">
+                <a:solidFill>
+                  <a:srgbClr val="1F2D22"/>
+                </a:solidFill>
+              </a:rPr>
+              <a:t>IVF_FLAT（</a:t>
+            </a:r>
+            <a:r>
+              <a:rPr lang="zh-CN" altLang="en-US" sz="1350" b="0">
+                <a:solidFill>
+                  <a:srgbClr val="1F2D22"/>
+                </a:solidFill>
+              </a:rPr>
+              <a:t>倒排）、</a:t>
+            </a:r>
+            <a:r>
+              <a:rPr lang="en-US" altLang="zh-CN" sz="1350" b="0">
+                <a:solidFill>
+                  <a:srgbClr val="1F2D22"/>
+                </a:solidFill>
+              </a:rPr>
+              <a:t>HNSW（</a:t>
+            </a:r>
+            <a:r>
+              <a:rPr lang="zh-CN" altLang="en-US" sz="1350" b="0">
+                <a:solidFill>
+                  <a:srgbClr val="1F2D22"/>
+                </a:solidFill>
+              </a:rPr>
+              <a:t>图）三种不同索引模式。</a:t>
+            </a:r>
+            <a:endParaRPr lang="zh-CN" altLang="en-US" sz="1350" b="0">
+              <a:solidFill>
+                <a:srgbClr val="1F2D22"/>
+              </a:solidFill>
+            </a:endParaRPr>
+          </a:p>
+          <a:p>
+            <a:pPr algn="l">
+              <a:defRPr sz="1350" b="0">
+                <a:solidFill>
+                  <a:srgbClr val="1F2D22"/>
+                </a:solidFill>
+              </a:defRPr>
+            </a:pPr>
+            <a:endParaRPr lang="zh-CN" altLang="en-US" sz="1350" b="0">
+              <a:solidFill>
+                <a:srgbClr val="1F2D22"/>
+              </a:solidFill>
+            </a:endParaRPr>
+          </a:p>
+          <a:p>
+            <a:pPr algn="l">
+              <a:defRPr sz="1350" b="0">
+                <a:solidFill>
+                  <a:srgbClr val="1F2D22"/>
+                </a:solidFill>
+              </a:defRPr>
+            </a:pPr>
+            <a:r>
+              <a:rPr lang="en-US" altLang="zh-CN" sz="1350" b="0">
+                <a:solidFill>
+                  <a:srgbClr val="1F2D22"/>
+                </a:solidFill>
+              </a:rPr>
+              <a:t>IVF</a:t>
+            </a:r>
+            <a:r>
+              <a:rPr lang="zh-CN" altLang="en-US" sz="1350" b="0">
+                <a:solidFill>
+                  <a:srgbClr val="1F2D22"/>
+                </a:solidFill>
+              </a:rPr>
+              <a:t>训练流程补全：增加 </a:t>
+            </a:r>
+            <a:r>
+              <a:rPr lang="en-US" altLang="zh-CN" sz="1350" b="0">
+                <a:solidFill>
+                  <a:srgbClr val="1F2D22"/>
+                </a:solidFill>
+              </a:rPr>
+              <a:t>index.train(xb) </a:t>
+            </a:r>
+            <a:r>
+              <a:rPr lang="zh-CN" altLang="en-US" sz="1350" b="0">
+                <a:solidFill>
+                  <a:srgbClr val="1F2D22"/>
+                </a:solidFill>
+              </a:rPr>
+              <a:t>聚类中心训练阶段，解决近似检索空间划分与精度校准。</a:t>
+            </a:r>
+            <a:endParaRPr lang="zh-CN" altLang="en-US" sz="1350" b="0">
+              <a:solidFill>
+                <a:srgbClr val="1F2D22"/>
+              </a:solidFill>
+            </a:endParaRPr>
+          </a:p>
+          <a:p>
+            <a:pPr algn="l">
+              <a:defRPr sz="1350" b="0">
+                <a:solidFill>
+                  <a:srgbClr val="1F2D22"/>
+                </a:solidFill>
+              </a:defRPr>
+            </a:pPr>
+            <a:endParaRPr lang="zh-CN" altLang="en-US" sz="1350" b="0">
+              <a:solidFill>
+                <a:srgbClr val="1F2D22"/>
+              </a:solidFill>
+            </a:endParaRPr>
+          </a:p>
+        </p:txBody>
+      </p:sp>
+      <p:sp>
+        <p:nvSpPr>
+          <p:cNvPr id="7" name="矩形 6"/>
+          <p:cNvSpPr>
+            <a:spLocks noGrp="1"/>
+          </p:cNvSpPr>
+          <p:nvPr>
+            <p:custDataLst>
+              <p:tags r:id="rId4"/>
+            </p:custDataLst>
+          </p:nvPr>
         </p:nvSpPr>
         <p:spPr>
           <a:xfrm>
             <a:off x="6572250" y="1619250"/>
-            <a:ext cx="4762500" cy="1619250"/>
+            <a:ext cx="4762500" cy="2842895"/>
           </a:xfrm>
           <a:prstGeom prst="rect">
             <a:avLst/>
@@ -7058,17 +6538,15 @@
       </p:sp>
       <p:sp>
         <p:nvSpPr>
-          <p:cNvPr id="8" name="矩形 7">
-            <a:extLst>
-              <a:ext uri="{FF2B5EF4-FFF2-40B4-BE49-F238E27FC236}">
-                <a16:creationId xmlns:a16="http://schemas.microsoft.com/office/drawing/2014/main" id="{BE864F01-824A-4742-BCDE-992C14CE649A}"/>
-              </a:ext>
-            </a:extLst>
-          </p:cNvPr>
-          <p:cNvSpPr>
-            <a:spLocks noGrp="1"/>
-          </p:cNvSpPr>
-          <p:nvPr/>
+          <p:cNvPr id="8" name="矩形 7"/>
+          <p:cNvSpPr>
+            <a:spLocks noGrp="1"/>
+          </p:cNvSpPr>
+          <p:nvPr>
+            <p:custDataLst>
+              <p:tags r:id="rId5"/>
+            </p:custDataLst>
+          </p:nvPr>
         </p:nvSpPr>
         <p:spPr>
           <a:xfrm>
@@ -7104,34 +6582,37 @@
               </a:defRPr>
             </a:pPr>
             <a:r>
-              <a:rPr sz="1650" b="1">
+              <a:rPr lang="zh-CN" altLang="en-US" sz="1650" b="1">
                 <a:solidFill>
                   <a:srgbClr val="2D4A33"/>
                 </a:solidFill>
               </a:rPr>
-              <a:t>多检索</a:t>
-            </a:r>
-          </a:p>
-        </p:txBody>
-      </p:sp>
-      <p:sp>
-        <p:nvSpPr>
-          <p:cNvPr id="9" name="矩形 8">
-            <a:extLst>
-              <a:ext uri="{FF2B5EF4-FFF2-40B4-BE49-F238E27FC236}">
-                <a16:creationId xmlns:a16="http://schemas.microsoft.com/office/drawing/2014/main" id="{02E654C1-4FDB-491C-8E0F-675E749870C4}"/>
-              </a:ext>
-            </a:extLst>
-          </p:cNvPr>
-          <p:cNvSpPr>
-            <a:spLocks noGrp="1"/>
-          </p:cNvSpPr>
-          <p:nvPr/>
+              <a:t>检索度量标准化对齐</a:t>
+            </a:r>
+            <a:endParaRPr lang="zh-CN" altLang="en-US" sz="1650" b="1">
+              <a:solidFill>
+                <a:srgbClr val="2D4A33"/>
+              </a:solidFill>
+            </a:endParaRPr>
+          </a:p>
+        </p:txBody>
+      </p:sp>
+      <p:sp>
+        <p:nvSpPr>
+          <p:cNvPr id="9" name="矩形 8"/>
+          <p:cNvSpPr>
+            <a:spLocks noGrp="1"/>
+          </p:cNvSpPr>
+          <p:nvPr>
+            <p:custDataLst>
+              <p:tags r:id="rId6"/>
+            </p:custDataLst>
+          </p:nvPr>
         </p:nvSpPr>
         <p:spPr>
           <a:xfrm>
             <a:off x="6800850" y="2228850"/>
-            <a:ext cx="4305300" cy="857250"/>
+            <a:ext cx="4305300" cy="1988820"/>
           </a:xfrm>
           <a:prstGeom prst="rect">
             <a:avLst/>
@@ -7162,25 +6643,248 @@
               </a:defRPr>
             </a:pPr>
             <a:r>
-              <a:rPr sz="1350" b="0">
-                <a:solidFill>
-                  <a:srgbClr val="1F2D22"/>
-                </a:solidFill>
-              </a:rPr>
-              <a:t>支持多种召回方式并行比较</a:t>
-            </a:r>
-          </a:p>
-        </p:txBody>
-      </p:sp>
-      <p:sp>
-        <p:nvSpPr>
-          <p:cNvPr id="10" name="矩形 9">
-            <a:extLst>
-              <a:ext uri="{FF2B5EF4-FFF2-40B4-BE49-F238E27FC236}">
-                <a16:creationId xmlns:a16="http://schemas.microsoft.com/office/drawing/2014/main" id="{36D0BD11-F236-4FBA-8154-83D3D2A1D76A}"/>
-              </a:ext>
-            </a:extLst>
-          </p:cNvPr>
+              <a:rPr lang="zh-CN" altLang="en-US" sz="1350" b="0">
+                <a:solidFill>
+                  <a:srgbClr val="1F2D22"/>
+                </a:solidFill>
+              </a:rPr>
+              <a:t>原有</a:t>
+            </a:r>
+            <a:r>
+              <a:rPr lang="zh-CN" altLang="en-US" sz="1350" b="0">
+                <a:solidFill>
+                  <a:srgbClr val="1F2D22"/>
+                </a:solidFill>
+              </a:rPr>
+              <a:t>问题：</a:t>
+            </a:r>
+            <a:r>
+              <a:rPr lang="en-US" altLang="zh-CN" sz="1350" b="0">
+                <a:solidFill>
+                  <a:srgbClr val="1F2D22"/>
+                </a:solidFill>
+              </a:rPr>
+              <a:t>Chroma </a:t>
+            </a:r>
+            <a:r>
+              <a:rPr lang="zh-CN" altLang="en-US" sz="1350" b="0">
+                <a:solidFill>
+                  <a:srgbClr val="1F2D22"/>
+                </a:solidFill>
+              </a:rPr>
+              <a:t>计算余弦距离，</a:t>
+            </a:r>
+            <a:r>
+              <a:rPr lang="en-US" altLang="zh-CN" sz="1350" b="0">
+                <a:solidFill>
+                  <a:srgbClr val="1F2D22"/>
+                </a:solidFill>
+              </a:rPr>
+              <a:t>FAISS </a:t>
+            </a:r>
+            <a:r>
+              <a:rPr lang="zh-CN" altLang="en-US" sz="1350" b="0">
+                <a:solidFill>
+                  <a:srgbClr val="1F2D22"/>
+                </a:solidFill>
+              </a:rPr>
+              <a:t>默认计算 </a:t>
+            </a:r>
+            <a:r>
+              <a:rPr lang="en-US" altLang="zh-CN" sz="1350" b="0">
+                <a:solidFill>
+                  <a:srgbClr val="1F2D22"/>
+                </a:solidFill>
+              </a:rPr>
+              <a:t>L2 </a:t>
+            </a:r>
+            <a:r>
+              <a:rPr lang="zh-CN" altLang="en-US" sz="1350" b="0">
+                <a:solidFill>
+                  <a:srgbClr val="1F2D22"/>
+                </a:solidFill>
+              </a:rPr>
+              <a:t>距离，导致前端检索阈值（</a:t>
+            </a:r>
+            <a:r>
+              <a:rPr lang="en-US" altLang="zh-CN" sz="1350" b="0">
+                <a:solidFill>
+                  <a:srgbClr val="1F2D22"/>
+                </a:solidFill>
+              </a:rPr>
+              <a:t>threshold）</a:t>
+            </a:r>
+            <a:r>
+              <a:rPr lang="zh-CN" altLang="en-US" sz="1350" b="0">
+                <a:solidFill>
+                  <a:srgbClr val="1F2D22"/>
+                </a:solidFill>
+              </a:rPr>
+              <a:t>过滤失效。</a:t>
+            </a:r>
+            <a:endParaRPr lang="zh-CN" altLang="en-US" sz="1350" b="0">
+              <a:solidFill>
+                <a:srgbClr val="1F2D22"/>
+              </a:solidFill>
+            </a:endParaRPr>
+          </a:p>
+          <a:p>
+            <a:pPr algn="l">
+              <a:defRPr sz="1350" b="0">
+                <a:solidFill>
+                  <a:srgbClr val="1F2D22"/>
+                </a:solidFill>
+              </a:defRPr>
+            </a:pPr>
+            <a:endParaRPr lang="zh-CN" altLang="en-US" sz="1350" b="0">
+              <a:solidFill>
+                <a:srgbClr val="1F2D22"/>
+              </a:solidFill>
+            </a:endParaRPr>
+          </a:p>
+          <a:p>
+            <a:pPr algn="l">
+              <a:defRPr sz="1350" b="0">
+                <a:solidFill>
+                  <a:srgbClr val="1F2D22"/>
+                </a:solidFill>
+              </a:defRPr>
+            </a:pPr>
+            <a:r>
+              <a:rPr lang="zh-CN" altLang="en-US" sz="1350" b="0">
+                <a:solidFill>
+                  <a:srgbClr val="1F2D22"/>
+                </a:solidFill>
+              </a:rPr>
+              <a:t>距离转换公式：基于 </a:t>
+            </a:r>
+            <a:r>
+              <a:rPr lang="en-US" altLang="zh-CN" sz="1350" b="0">
+                <a:solidFill>
+                  <a:srgbClr val="1F2D22"/>
+                </a:solidFill>
+              </a:rPr>
+              <a:t>BGE </a:t>
+            </a:r>
+            <a:r>
+              <a:rPr lang="zh-CN" altLang="en-US" sz="1350" b="0">
+                <a:solidFill>
+                  <a:srgbClr val="1F2D22"/>
+                </a:solidFill>
+              </a:rPr>
+              <a:t>向量 </a:t>
+            </a:r>
+            <a:r>
+              <a:rPr lang="en-US" altLang="zh-CN" sz="1350" b="0">
+                <a:solidFill>
+                  <a:srgbClr val="1F2D22"/>
+                </a:solidFill>
+              </a:rPr>
+              <a:t>L2 </a:t>
+            </a:r>
+            <a:r>
+              <a:rPr lang="zh-CN" altLang="en-US" sz="1350" b="0">
+                <a:solidFill>
+                  <a:srgbClr val="1F2D22"/>
+                </a:solidFill>
+              </a:rPr>
+              <a:t>归一化特征，利用公式 </a:t>
+            </a:r>
+            <a:r>
+              <a:rPr lang="en-US" altLang="zh-CN" sz="1350" b="0">
+                <a:solidFill>
+                  <a:srgbClr val="1F2D22"/>
+                </a:solidFill>
+              </a:rPr>
+              <a:t>Score = 1.0 - d_L2 / 2.0 </a:t>
+            </a:r>
+            <a:r>
+              <a:rPr lang="zh-CN" altLang="en-US" sz="1350" b="0">
+                <a:solidFill>
+                  <a:srgbClr val="1F2D22"/>
+                </a:solidFill>
+              </a:rPr>
+              <a:t>重新映射。</a:t>
+            </a:r>
+            <a:endParaRPr lang="zh-CN" altLang="en-US" sz="1350" b="0">
+              <a:solidFill>
+                <a:srgbClr val="1F2D22"/>
+              </a:solidFill>
+            </a:endParaRPr>
+          </a:p>
+          <a:p>
+            <a:pPr algn="l">
+              <a:defRPr sz="1350" b="0">
+                <a:solidFill>
+                  <a:srgbClr val="1F2D22"/>
+                </a:solidFill>
+              </a:defRPr>
+            </a:pPr>
+            <a:endParaRPr lang="zh-CN" altLang="en-US" sz="1350" b="0">
+              <a:solidFill>
+                <a:srgbClr val="1F2D22"/>
+              </a:solidFill>
+            </a:endParaRPr>
+          </a:p>
+          <a:p>
+            <a:pPr algn="l">
+              <a:defRPr sz="1350" b="0">
+                <a:solidFill>
+                  <a:srgbClr val="1F2D22"/>
+                </a:solidFill>
+              </a:defRPr>
+            </a:pPr>
+            <a:r>
+              <a:rPr lang="zh-CN" altLang="en-US" sz="1350" b="0">
+                <a:solidFill>
+                  <a:srgbClr val="1F2D22"/>
+                </a:solidFill>
+              </a:rPr>
+              <a:t>统一余弦得分：各底层统一输出 </a:t>
+            </a:r>
+            <a:r>
+              <a:rPr lang="en-US" altLang="zh-CN" sz="1350" b="0">
+                <a:solidFill>
+                  <a:srgbClr val="1F2D22"/>
+                </a:solidFill>
+              </a:rPr>
+              <a:t>0∼1</a:t>
+            </a:r>
+            <a:r>
+              <a:rPr lang="zh-CN" altLang="en-US" sz="1350" b="0">
+                <a:solidFill>
+                  <a:srgbClr val="1F2D22"/>
+                </a:solidFill>
+              </a:rPr>
+              <a:t>的相似度，前端 </a:t>
+            </a:r>
+            <a:r>
+              <a:rPr lang="en-US" altLang="zh-CN" sz="1350" b="0">
+                <a:solidFill>
+                  <a:srgbClr val="1F2D22"/>
+                </a:solidFill>
+              </a:rPr>
+              <a:t>Similarity Threshold </a:t>
+            </a:r>
+            <a:r>
+              <a:rPr lang="zh-CN" altLang="en-US" sz="1350" b="0">
+                <a:solidFill>
+                  <a:srgbClr val="1F2D22"/>
+                </a:solidFill>
+              </a:rPr>
+              <a:t>滑动条在双底座下均精准生效。</a:t>
+            </a:r>
+            <a:endParaRPr lang="zh-CN" altLang="en-US" sz="1350" b="0">
+              <a:solidFill>
+                <a:srgbClr val="1F2D22"/>
+              </a:solidFill>
+            </a:endParaRPr>
+          </a:p>
+        </p:txBody>
+      </p:sp>
+      <p:sp>
+        <p:nvSpPr>
+          <p:cNvPr id="10" name="矩形 9"/>
           <p:cNvSpPr>
             <a:spLocks noGrp="1"/>
           </p:cNvSpPr>
@@ -7188,8 +6892,8 @@
         </p:nvSpPr>
         <p:spPr>
           <a:xfrm>
-            <a:off x="2000250" y="3714750"/>
-            <a:ext cx="8191500" cy="1428750"/>
+            <a:off x="857250" y="4794885"/>
+            <a:ext cx="10477500" cy="1644015"/>
           </a:xfrm>
           <a:prstGeom prst="rect">
             <a:avLst/>
@@ -7207,13 +6911,7 @@
       </p:sp>
       <p:sp>
         <p:nvSpPr>
-          <p:cNvPr id="11" name="矩形 10">
-            <a:extLst>
-              <a:ext uri="{FF2B5EF4-FFF2-40B4-BE49-F238E27FC236}">
-                <a16:creationId xmlns:a16="http://schemas.microsoft.com/office/drawing/2014/main" id="{7E12BFA7-42DC-4404-8442-3A427F38924F}"/>
-              </a:ext>
-            </a:extLst>
-          </p:cNvPr>
+          <p:cNvPr id="11" name="矩形 10"/>
           <p:cNvSpPr>
             <a:spLocks noGrp="1"/>
           </p:cNvSpPr>
@@ -7221,8 +6919,8 @@
         </p:nvSpPr>
         <p:spPr>
           <a:xfrm>
-            <a:off x="2228850" y="3886200"/>
-            <a:ext cx="7734300" cy="323850"/>
+            <a:off x="1178560" y="4968240"/>
+            <a:ext cx="9926955" cy="323850"/>
           </a:xfrm>
           <a:prstGeom prst="rect">
             <a:avLst/>
@@ -7253,25 +6951,24 @@
               </a:defRPr>
             </a:pPr>
             <a:r>
-              <a:rPr sz="1650" b="1">
+              <a:rPr lang="zh-CN" altLang="en-US" sz="1650" b="1">
                 <a:solidFill>
                   <a:srgbClr val="2D4A33"/>
                 </a:solidFill>
               </a:rPr>
-              <a:t>结果</a:t>
-            </a:r>
-          </a:p>
-        </p:txBody>
-      </p:sp>
-      <p:sp>
-        <p:nvSpPr>
-          <p:cNvPr id="12" name="矩形 11">
-            <a:extLst>
-              <a:ext uri="{FF2B5EF4-FFF2-40B4-BE49-F238E27FC236}">
-                <a16:creationId xmlns:a16="http://schemas.microsoft.com/office/drawing/2014/main" id="{8D583150-E769-40CD-B44A-9B1246362845}"/>
-              </a:ext>
-            </a:extLst>
-          </p:cNvPr>
+              <a:t>本地集合管理与元数据兼容</a:t>
+            </a:r>
+            <a:endParaRPr lang="zh-CN" altLang="en-US" sz="1650" b="1">
+              <a:solidFill>
+                <a:srgbClr val="2D4A33"/>
+              </a:solidFill>
+            </a:endParaRPr>
+          </a:p>
+        </p:txBody>
+      </p:sp>
+      <p:sp>
+        <p:nvSpPr>
+          <p:cNvPr id="12" name="矩形 11"/>
           <p:cNvSpPr>
             <a:spLocks noGrp="1"/>
           </p:cNvSpPr>
@@ -7279,8 +6976,8 @@
         </p:nvSpPr>
         <p:spPr>
           <a:xfrm>
-            <a:off x="2228850" y="4324350"/>
-            <a:ext cx="7734300" cy="666750"/>
+            <a:off x="1178560" y="5380990"/>
+            <a:ext cx="9926955" cy="925830"/>
           </a:xfrm>
           <a:prstGeom prst="rect">
             <a:avLst/>
@@ -7311,22 +7008,170 @@
               </a:defRPr>
             </a:pPr>
             <a:r>
-              <a:rPr sz="1350" b="0">
-                <a:solidFill>
-                  <a:srgbClr val="1F2D22"/>
-                </a:solidFill>
-              </a:rPr>
-              <a:t>索引与召回更灵活，检索能力明显增强。</a:t>
-            </a:r>
+              <a:rPr lang="zh-CN" altLang="en-US" sz="1350" b="0">
+                <a:solidFill>
+                  <a:srgbClr val="1F2D22"/>
+                </a:solidFill>
+              </a:rPr>
+              <a:t>无状态集合拟态：本地动态扫描 .</a:t>
+            </a:r>
+            <a:r>
+              <a:rPr lang="en-US" altLang="zh-CN" sz="1350" b="0">
+                <a:solidFill>
+                  <a:srgbClr val="1F2D22"/>
+                </a:solidFill>
+              </a:rPr>
+              <a:t>index </a:t>
+            </a:r>
+            <a:r>
+              <a:rPr lang="zh-CN" altLang="en-US" sz="1350" b="0">
+                <a:solidFill>
+                  <a:srgbClr val="1F2D22"/>
+                </a:solidFill>
+              </a:rPr>
+              <a:t>文件并解析 _</a:t>
+            </a:r>
+            <a:r>
+              <a:rPr lang="en-US" altLang="zh-CN" sz="1350" b="0">
+                <a:solidFill>
+                  <a:srgbClr val="1F2D22"/>
+                </a:solidFill>
+              </a:rPr>
+              <a:t>metadata.json，</a:t>
+            </a:r>
+            <a:r>
+              <a:rPr lang="zh-CN" altLang="en-US" sz="1350" b="0">
+                <a:solidFill>
+                  <a:srgbClr val="1F2D22"/>
+                </a:solidFill>
+              </a:rPr>
+              <a:t>为 </a:t>
+            </a:r>
+            <a:r>
+              <a:rPr lang="en-US" altLang="zh-CN" sz="1350" b="0">
+                <a:solidFill>
+                  <a:srgbClr val="1F2D22"/>
+                </a:solidFill>
+              </a:rPr>
+              <a:t>FAISS </a:t>
+            </a:r>
+            <a:r>
+              <a:rPr lang="zh-CN" altLang="en-US" sz="1350" b="0">
+                <a:solidFill>
+                  <a:srgbClr val="1F2D22"/>
+                </a:solidFill>
+              </a:rPr>
+              <a:t>模拟出集合列表加载与文档块计数（</a:t>
+            </a:r>
+            <a:r>
+              <a:rPr lang="en-US" altLang="zh-CN" sz="1350" b="0">
+                <a:solidFill>
+                  <a:srgbClr val="1F2D22"/>
+                </a:solidFill>
+              </a:rPr>
+              <a:t>count）。</a:t>
+            </a:r>
+            <a:endParaRPr lang="en-US" altLang="zh-CN" sz="1350" b="0">
+              <a:solidFill>
+                <a:srgbClr val="1F2D22"/>
+              </a:solidFill>
+            </a:endParaRPr>
+          </a:p>
+          <a:p>
+            <a:pPr algn="l">
+              <a:defRPr sz="1350" b="0">
+                <a:solidFill>
+                  <a:srgbClr val="1F2D22"/>
+                </a:solidFill>
+              </a:defRPr>
+            </a:pPr>
+            <a:r>
+              <a:rPr lang="zh-CN" altLang="en-US" sz="1350" b="0">
+                <a:solidFill>
+                  <a:srgbClr val="1F2D22"/>
+                </a:solidFill>
+              </a:rPr>
+              <a:t>结构化检索输出：标准化返回 </a:t>
+            </a:r>
+            <a:r>
+              <a:rPr lang="en-US" altLang="zh-CN" sz="1350" b="0">
+                <a:solidFill>
+                  <a:srgbClr val="1F2D22"/>
+                </a:solidFill>
+              </a:rPr>
+              <a:t>text、score </a:t>
+            </a:r>
+            <a:r>
+              <a:rPr lang="zh-CN" altLang="en-US" sz="1350" b="0">
+                <a:solidFill>
+                  <a:srgbClr val="1F2D22"/>
+                </a:solidFill>
+              </a:rPr>
+              <a:t>与包含 </a:t>
+            </a:r>
+            <a:r>
+              <a:rPr lang="en-US" altLang="zh-CN" sz="1350" b="0">
+                <a:solidFill>
+                  <a:srgbClr val="1F2D22"/>
+                </a:solidFill>
+              </a:rPr>
+              <a:t>page、document_name、chunk_id </a:t>
+            </a:r>
+            <a:r>
+              <a:rPr lang="zh-CN" altLang="en-US" sz="1350" b="0">
+                <a:solidFill>
+                  <a:srgbClr val="1F2D22"/>
+                </a:solidFill>
+              </a:rPr>
+              <a:t>的元数据。</a:t>
+            </a:r>
+            <a:endParaRPr lang="zh-CN" altLang="en-US" sz="1350" b="0">
+              <a:solidFill>
+                <a:srgbClr val="1F2D22"/>
+              </a:solidFill>
+            </a:endParaRPr>
+          </a:p>
+          <a:p>
+            <a:pPr algn="l">
+              <a:defRPr sz="1350" b="0">
+                <a:solidFill>
+                  <a:srgbClr val="1F2D22"/>
+                </a:solidFill>
+              </a:defRPr>
+            </a:pPr>
+            <a:r>
+              <a:rPr lang="zh-CN" altLang="en-US" sz="1350" b="0">
+                <a:solidFill>
+                  <a:srgbClr val="1F2D22"/>
+                </a:solidFill>
+              </a:rPr>
+              <a:t>检索到生成闭环：检索结果直接兼容大模型生成层，提供精准的参考源溯源（</a:t>
+            </a:r>
+            <a:r>
+              <a:rPr lang="en-US" altLang="zh-CN" sz="1350" b="0">
+                <a:solidFill>
+                  <a:srgbClr val="1F2D22"/>
+                </a:solidFill>
+              </a:rPr>
+              <a:t>Citation）</a:t>
+            </a:r>
+            <a:r>
+              <a:rPr lang="zh-CN" altLang="en-US" sz="1350" b="0">
+                <a:solidFill>
+                  <a:srgbClr val="1F2D22"/>
+                </a:solidFill>
+              </a:rPr>
+              <a:t>数据通路。</a:t>
+            </a:r>
+            <a:endParaRPr lang="zh-CN" altLang="en-US" sz="1350" b="0">
+              <a:solidFill>
+                <a:srgbClr val="1F2D22"/>
+              </a:solidFill>
+            </a:endParaRPr>
           </a:p>
         </p:txBody>
       </p:sp>
     </p:spTree>
-    <p:extLst>
-      <p:ext uri="{BB962C8B-B14F-4D97-AF65-F5344CB8AC3E}">
-        <p14:creationId xmlns:p14="http://schemas.microsoft.com/office/powerpoint/2010/main" val="3301625095"/>
-      </p:ext>
-    </p:extLst>
   </p:cSld>
   <p:clrMapOvr>
     <a:masterClrMapping/>
@@ -7361,13 +7206,7 @@
       </p:grpSpPr>
       <p:sp>
         <p:nvSpPr>
-          <p:cNvPr id="11" name="文本框 10">
-            <a:extLst>
-              <a:ext uri="{FF2B5EF4-FFF2-40B4-BE49-F238E27FC236}">
-                <a16:creationId xmlns:a16="http://schemas.microsoft.com/office/drawing/2014/main" id="{642171A4-C23A-4145-BED1-2E8834D0E5B1}"/>
-              </a:ext>
-            </a:extLst>
-          </p:cNvPr>
+          <p:cNvPr id="11" name="文本框 10"/>
           <p:cNvSpPr>
             <a:spLocks noGrp="1"/>
           </p:cNvSpPr>
@@ -7403,7 +7242,6 @@
               <a:buSzTx/>
               <a:buFontTx/>
               <a:buNone/>
-              <a:tabLst/>
               <a:defRPr/>
             </a:pPr>
             <a:r>
@@ -7417,8 +7255,8 @@
                 <a:effectLst/>
                 <a:uLnTx/>
                 <a:uFillTx/>
-                <a:latin typeface="Arial"/>
-                <a:ea typeface="STZhongsong"/>
+                <a:latin typeface="Arial" panose="020B0604020202020204"/>
+                <a:ea typeface="华文中宋" panose="02010600040101010101" charset="-122"/>
                 <a:cs typeface="+mn-cs"/>
               </a:rPr>
               <a:t>0</a:t>
@@ -7434,8 +7272,8 @@
                 <a:effectLst/>
                 <a:uLnTx/>
                 <a:uFillTx/>
-                <a:latin typeface="Arial"/>
-                <a:ea typeface="STZhongsong"/>
+                <a:latin typeface="Arial" panose="020B0604020202020204"/>
+                <a:ea typeface="华文中宋" panose="02010600040101010101" charset="-122"/>
                 <a:cs typeface="+mn-cs"/>
               </a:rPr>
               <a:t>6</a:t>
@@ -7450,8 +7288,8 @@
               <a:effectLst/>
               <a:uLnTx/>
               <a:uFillTx/>
-              <a:latin typeface="Arial"/>
-              <a:ea typeface="STZhongsong"/>
+              <a:latin typeface="Arial" panose="020B0604020202020204"/>
+              <a:ea typeface="华文中宋" panose="02010600040101010101" charset="-122"/>
               <a:cs typeface="+mn-cs"/>
             </a:endParaRPr>
           </a:p>
@@ -7459,13 +7297,7 @@
       </p:sp>
       <p:sp>
         <p:nvSpPr>
-          <p:cNvPr id="13" name="矩形 12">
-            <a:extLst>
-              <a:ext uri="{FF2B5EF4-FFF2-40B4-BE49-F238E27FC236}">
-                <a16:creationId xmlns:a16="http://schemas.microsoft.com/office/drawing/2014/main" id="{638E2919-D9D9-4496-93DC-FD75812F9CF1}"/>
-              </a:ext>
-            </a:extLst>
-          </p:cNvPr>
+          <p:cNvPr id="13" name="矩形 12"/>
           <p:cNvSpPr>
             <a:spLocks noGrp="1"/>
           </p:cNvSpPr>
@@ -7509,19 +7341,14 @@
               <a:effectLst/>
               <a:uLnTx/>
               <a:uFillTx/>
-              <a:latin typeface="Arial"/>
-              <a:ea typeface="STZhongsong"/>
+              <a:latin typeface="Arial" panose="020B0604020202020204"/>
+              <a:ea typeface="华文中宋" panose="02010600040101010101" charset="-122"/>
               <a:cs typeface="+mn-cs"/>
             </a:endParaRPr>
           </a:p>
         </p:txBody>
       </p:sp>
     </p:spTree>
-    <p:extLst>
-      <p:ext uri="{BB962C8B-B14F-4D97-AF65-F5344CB8AC3E}">
-        <p14:creationId xmlns:p14="http://schemas.microsoft.com/office/powerpoint/2010/main" val="2604580078"/>
-      </p:ext>
-    </p:extLst>
   </p:cSld>
   <p:clrMapOvr>
     <a:masterClrMapping/>
@@ -7548,13 +7375,7 @@
       </p:grpSpPr>
       <p:sp>
         <p:nvSpPr>
-          <p:cNvPr id="13" name="矩形 12">
-            <a:extLst>
-              <a:ext uri="{FF2B5EF4-FFF2-40B4-BE49-F238E27FC236}">
-                <a16:creationId xmlns:a16="http://schemas.microsoft.com/office/drawing/2014/main" id="{CB19A068-375C-44CD-B486-A2E0564D9945}"/>
-              </a:ext>
-            </a:extLst>
-          </p:cNvPr>
+          <p:cNvPr id="13" name="矩形 12"/>
           <p:cNvSpPr>
             <a:spLocks noGrp="1"/>
           </p:cNvSpPr>
@@ -7581,13 +7402,7 @@
       </p:sp>
       <p:sp>
         <p:nvSpPr>
-          <p:cNvPr id="2" name="矩形 1">
-            <a:extLst>
-              <a:ext uri="{FF2B5EF4-FFF2-40B4-BE49-F238E27FC236}">
-                <a16:creationId xmlns:a16="http://schemas.microsoft.com/office/drawing/2014/main" id="{78EDCF9F-E0B5-4603-A825-182C7732172E}"/>
-              </a:ext>
-            </a:extLst>
-          </p:cNvPr>
+          <p:cNvPr id="2" name="矩形 1"/>
           <p:cNvSpPr>
             <a:spLocks noGrp="1"/>
           </p:cNvSpPr>
@@ -7639,13 +7454,7 @@
       </p:sp>
       <p:sp>
         <p:nvSpPr>
-          <p:cNvPr id="4" name="矩形 3">
-            <a:extLst>
-              <a:ext uri="{FF2B5EF4-FFF2-40B4-BE49-F238E27FC236}">
-                <a16:creationId xmlns:a16="http://schemas.microsoft.com/office/drawing/2014/main" id="{0CCF3AAA-E565-49A5-9E5D-12AB5BEA2BCC}"/>
-              </a:ext>
-            </a:extLst>
-          </p:cNvPr>
+          <p:cNvPr id="4" name="矩形 3"/>
           <p:cNvSpPr>
             <a:spLocks noGrp="1"/>
           </p:cNvSpPr>
@@ -7679,13 +7488,7 @@
       </p:sp>
       <p:sp>
         <p:nvSpPr>
-          <p:cNvPr id="5" name="矩形 4">
-            <a:extLst>
-              <a:ext uri="{FF2B5EF4-FFF2-40B4-BE49-F238E27FC236}">
-                <a16:creationId xmlns:a16="http://schemas.microsoft.com/office/drawing/2014/main" id="{ECC68CB8-D28B-4FBA-BFEE-BA369B649486}"/>
-              </a:ext>
-            </a:extLst>
-          </p:cNvPr>
+          <p:cNvPr id="5" name="矩形 4"/>
           <p:cNvSpPr>
             <a:spLocks noGrp="1"/>
           </p:cNvSpPr>
@@ -7742,13 +7545,7 @@
       </p:sp>
       <p:sp>
         <p:nvSpPr>
-          <p:cNvPr id="6" name="矩形 5">
-            <a:extLst>
-              <a:ext uri="{FF2B5EF4-FFF2-40B4-BE49-F238E27FC236}">
-                <a16:creationId xmlns:a16="http://schemas.microsoft.com/office/drawing/2014/main" id="{80F4B1FB-DFE4-43C7-98D1-891507107452}"/>
-              </a:ext>
-            </a:extLst>
-          </p:cNvPr>
+          <p:cNvPr id="6" name="矩形 5"/>
           <p:cNvSpPr>
             <a:spLocks noGrp="1"/>
           </p:cNvSpPr>
@@ -7784,18 +7581,13 @@
               <a:rPr lang="zh-CN" altLang="zh-CN" dirty="0"/>
               <a:t>系统不再只使用用户原始 query 进行一次检索，而是在检索前调用大模型生成多个不同角度的查询变体。随后系统对每个 query 分别生成 embedding 并查询 Chroma，最后将所有结果去重、排序、截取最终 Top K。</a:t>
             </a:r>
-          </a:p>
-        </p:txBody>
-      </p:sp>
-      <p:sp>
-        <p:nvSpPr>
-          <p:cNvPr id="7" name="矩形 6">
-            <a:extLst>
-              <a:ext uri="{FF2B5EF4-FFF2-40B4-BE49-F238E27FC236}">
-                <a16:creationId xmlns:a16="http://schemas.microsoft.com/office/drawing/2014/main" id="{02F5307D-47AA-4496-B027-2EBC00B0661D}"/>
-              </a:ext>
-            </a:extLst>
-          </p:cNvPr>
+            <a:endParaRPr lang="zh-CN" altLang="zh-CN" dirty="0"/>
+          </a:p>
+        </p:txBody>
+      </p:sp>
+      <p:sp>
+        <p:nvSpPr>
+          <p:cNvPr id="7" name="矩形 6"/>
           <p:cNvSpPr>
             <a:spLocks noGrp="1"/>
           </p:cNvSpPr>
@@ -7822,13 +7614,7 @@
       </p:sp>
       <p:sp>
         <p:nvSpPr>
-          <p:cNvPr id="8" name="矩形 7">
-            <a:extLst>
-              <a:ext uri="{FF2B5EF4-FFF2-40B4-BE49-F238E27FC236}">
-                <a16:creationId xmlns:a16="http://schemas.microsoft.com/office/drawing/2014/main" id="{E8ED42BD-464C-42DE-BDFA-1C3FED5B7ACA}"/>
-              </a:ext>
-            </a:extLst>
-          </p:cNvPr>
+          <p:cNvPr id="8" name="矩形 7"/>
           <p:cNvSpPr>
             <a:spLocks noGrp="1"/>
           </p:cNvSpPr>
@@ -7885,13 +7671,7 @@
       </p:sp>
       <p:sp>
         <p:nvSpPr>
-          <p:cNvPr id="9" name="矩形 8">
-            <a:extLst>
-              <a:ext uri="{FF2B5EF4-FFF2-40B4-BE49-F238E27FC236}">
-                <a16:creationId xmlns:a16="http://schemas.microsoft.com/office/drawing/2014/main" id="{0396FB42-E968-4370-8713-7F8120653B23}"/>
-              </a:ext>
-            </a:extLst>
-          </p:cNvPr>
+          <p:cNvPr id="9" name="矩形 8"/>
           <p:cNvSpPr>
             <a:spLocks noGrp="1"/>
           </p:cNvSpPr>
@@ -7927,6 +7707,7 @@
               <a:rPr lang="zh-CN" altLang="zh-CN" dirty="0"/>
               <a:t>生成服务现在不会在初稿生成后立即返回，而是先进入审查阶段。系统会把以下三类信息交给大模型：</a:t>
             </a:r>
+            <a:endParaRPr lang="zh-CN" altLang="zh-CN" dirty="0"/>
           </a:p>
           <a:p>
             <a:br>
@@ -7939,18 +7720,21 @@
               <a:rPr lang="zh-CN" altLang="zh-CN" dirty="0"/>
               <a:t>1. 用户原始问题。</a:t>
             </a:r>
+            <a:endParaRPr lang="zh-CN" altLang="zh-CN" dirty="0"/>
           </a:p>
           <a:p>
             <a:r>
               <a:rPr lang="zh-CN" altLang="zh-CN" dirty="0"/>
               <a:t>2. 检索结果拼接出的上下文。</a:t>
             </a:r>
+            <a:endParaRPr lang="zh-CN" altLang="zh-CN" dirty="0"/>
           </a:p>
           <a:p>
             <a:r>
               <a:rPr lang="zh-CN" altLang="zh-CN" dirty="0"/>
               <a:t>3. 刚生成的回答草案。</a:t>
             </a:r>
+            <a:endParaRPr lang="zh-CN" altLang="zh-CN" dirty="0"/>
           </a:p>
           <a:p>
             <a:br>
@@ -7963,18 +7747,13 @@
               <a:rPr lang="zh-CN" altLang="zh-CN" dirty="0"/>
               <a:t>审查模型需要判断回答草案是否严格基于上下文，是否存在幻觉，是否遗漏了问题关键点。</a:t>
             </a:r>
-          </a:p>
-        </p:txBody>
-      </p:sp>
-      <p:sp>
-        <p:nvSpPr>
-          <p:cNvPr id="10" name="矩形 9">
-            <a:extLst>
-              <a:ext uri="{FF2B5EF4-FFF2-40B4-BE49-F238E27FC236}">
-                <a16:creationId xmlns:a16="http://schemas.microsoft.com/office/drawing/2014/main" id="{E5C669DF-CAC4-4D06-92B2-8A85E452067E}"/>
-              </a:ext>
-            </a:extLst>
-          </p:cNvPr>
+            <a:endParaRPr lang="zh-CN" altLang="zh-CN" dirty="0"/>
+          </a:p>
+        </p:txBody>
+      </p:sp>
+      <p:sp>
+        <p:nvSpPr>
+          <p:cNvPr id="10" name="矩形 9"/>
           <p:cNvSpPr>
             <a:spLocks noGrp="1"/>
           </p:cNvSpPr>
@@ -8001,13 +7780,7 @@
       </p:sp>
       <p:sp>
         <p:nvSpPr>
-          <p:cNvPr id="11" name="矩形 10">
-            <a:extLst>
-              <a:ext uri="{FF2B5EF4-FFF2-40B4-BE49-F238E27FC236}">
-                <a16:creationId xmlns:a16="http://schemas.microsoft.com/office/drawing/2014/main" id="{AA327DB0-DBD6-42E5-85A2-3C88543BC4E9}"/>
-              </a:ext>
-            </a:extLst>
-          </p:cNvPr>
+          <p:cNvPr id="11" name="矩形 10"/>
           <p:cNvSpPr>
             <a:spLocks noGrp="1"/>
           </p:cNvSpPr>
@@ -8064,13 +7837,7 @@
       </p:sp>
       <p:sp>
         <p:nvSpPr>
-          <p:cNvPr id="12" name="矩形 11">
-            <a:extLst>
-              <a:ext uri="{FF2B5EF4-FFF2-40B4-BE49-F238E27FC236}">
-                <a16:creationId xmlns:a16="http://schemas.microsoft.com/office/drawing/2014/main" id="{E7E24D30-F662-4C81-B43C-F0978EE590E4}"/>
-              </a:ext>
-            </a:extLst>
-          </p:cNvPr>
+          <p:cNvPr id="12" name="矩形 11"/>
           <p:cNvSpPr>
             <a:spLocks noGrp="1"/>
           </p:cNvSpPr>
@@ -8113,18 +7880,14 @@
               <a:rPr lang="zh-CN" altLang="zh-CN" dirty="0"/>
               <a:t>自我纠错机制可以在最终返回前进行一次事实审查，降低模型脱离上下文自由发挥的概率，提高回答与文档内容的一致性。</a:t>
             </a:r>
-          </a:p>
-          <a:p>
             <a:endParaRPr lang="zh-CN" altLang="zh-CN" dirty="0"/>
           </a:p>
+          <a:p>
+            <a:endParaRPr lang="zh-CN" altLang="zh-CN" dirty="0"/>
+          </a:p>
         </p:txBody>
       </p:sp>
     </p:spTree>
-    <p:extLst>
-      <p:ext uri="{BB962C8B-B14F-4D97-AF65-F5344CB8AC3E}">
-        <p14:creationId xmlns:p14="http://schemas.microsoft.com/office/powerpoint/2010/main" val="1962087935"/>
-      </p:ext>
-    </p:extLst>
   </p:cSld>
   <p:clrMapOvr>
     <a:masterClrMapping/>
@@ -8159,13 +7922,7 @@
       </p:grpSpPr>
       <p:sp>
         <p:nvSpPr>
-          <p:cNvPr id="11" name="文本框 10">
-            <a:extLst>
-              <a:ext uri="{FF2B5EF4-FFF2-40B4-BE49-F238E27FC236}">
-                <a16:creationId xmlns:a16="http://schemas.microsoft.com/office/drawing/2014/main" id="{642171A4-C23A-4145-BED1-2E8834D0E5B1}"/>
-              </a:ext>
-            </a:extLst>
-          </p:cNvPr>
+          <p:cNvPr id="11" name="文本框 10"/>
           <p:cNvSpPr>
             <a:spLocks noGrp="1"/>
           </p:cNvSpPr>
@@ -8201,7 +7958,6 @@
               <a:buSzTx/>
               <a:buFontTx/>
               <a:buNone/>
-              <a:tabLst/>
               <a:defRPr/>
             </a:pPr>
             <a:r>
@@ -8215,8 +7971,8 @@
                 <a:effectLst/>
                 <a:uLnTx/>
                 <a:uFillTx/>
-                <a:latin typeface="Arial"/>
-                <a:ea typeface="STZhongsong"/>
+                <a:latin typeface="Arial" panose="020B0604020202020204"/>
+                <a:ea typeface="华文中宋" panose="02010600040101010101" charset="-122"/>
                 <a:cs typeface="+mn-cs"/>
               </a:rPr>
               <a:t>0</a:t>
@@ -8226,8 +7982,8 @@
                 <a:solidFill>
                   <a:srgbClr val="F5F4F9"/>
                 </a:solidFill>
-                <a:latin typeface="Arial"/>
-                <a:ea typeface="STZhongsong"/>
+                <a:latin typeface="Arial" panose="020B0604020202020204"/>
+                <a:ea typeface="华文中宋" panose="02010600040101010101" charset="-122"/>
               </a:rPr>
               <a:t>7</a:t>
             </a:r>
@@ -8241,8 +7997,8 @@
               <a:effectLst/>
               <a:uLnTx/>
               <a:uFillTx/>
-              <a:latin typeface="Arial"/>
-              <a:ea typeface="STZhongsong"/>
+              <a:latin typeface="Arial" panose="020B0604020202020204"/>
+              <a:ea typeface="华文中宋" panose="02010600040101010101" charset="-122"/>
               <a:cs typeface="+mn-cs"/>
             </a:endParaRPr>
           </a:p>
@@ -8250,13 +8006,7 @@
       </p:sp>
       <p:sp>
         <p:nvSpPr>
-          <p:cNvPr id="13" name="矩形 12">
-            <a:extLst>
-              <a:ext uri="{FF2B5EF4-FFF2-40B4-BE49-F238E27FC236}">
-                <a16:creationId xmlns:a16="http://schemas.microsoft.com/office/drawing/2014/main" id="{638E2919-D9D9-4496-93DC-FD75812F9CF1}"/>
-              </a:ext>
-            </a:extLst>
-          </p:cNvPr>
+          <p:cNvPr id="13" name="矩形 12"/>
           <p:cNvSpPr>
             <a:spLocks noGrp="1"/>
           </p:cNvSpPr>
@@ -8300,19 +8050,14 @@
               <a:effectLst/>
               <a:uLnTx/>
               <a:uFillTx/>
-              <a:latin typeface="Arial"/>
-              <a:ea typeface="STZhongsong"/>
+              <a:latin typeface="Arial" panose="020B0604020202020204"/>
+              <a:ea typeface="华文中宋" panose="02010600040101010101" charset="-122"/>
               <a:cs typeface="+mn-cs"/>
             </a:endParaRPr>
           </a:p>
         </p:txBody>
       </p:sp>
     </p:spTree>
-    <p:extLst>
-      <p:ext uri="{BB962C8B-B14F-4D97-AF65-F5344CB8AC3E}">
-        <p14:creationId xmlns:p14="http://schemas.microsoft.com/office/powerpoint/2010/main" val="3439686848"/>
-      </p:ext>
-    </p:extLst>
   </p:cSld>
   <p:clrMapOvr>
     <a:masterClrMapping/>
@@ -8339,13 +8084,7 @@
       </p:grpSpPr>
       <p:sp>
         <p:nvSpPr>
-          <p:cNvPr id="13" name="矩形 12">
-            <a:extLst>
-              <a:ext uri="{FF2B5EF4-FFF2-40B4-BE49-F238E27FC236}">
-                <a16:creationId xmlns:a16="http://schemas.microsoft.com/office/drawing/2014/main" id="{CB19A068-375C-44CD-B486-A2E0564D9945}"/>
-              </a:ext>
-            </a:extLst>
-          </p:cNvPr>
+          <p:cNvPr id="13" name="矩形 12"/>
           <p:cNvSpPr>
             <a:spLocks noGrp="1"/>
           </p:cNvSpPr>
@@ -8372,13 +8111,7 @@
       </p:sp>
       <p:sp>
         <p:nvSpPr>
-          <p:cNvPr id="2" name="矩形 1">
-            <a:extLst>
-              <a:ext uri="{FF2B5EF4-FFF2-40B4-BE49-F238E27FC236}">
-                <a16:creationId xmlns:a16="http://schemas.microsoft.com/office/drawing/2014/main" id="{78EDCF9F-E0B5-4603-A825-182C7732172E}"/>
-              </a:ext>
-            </a:extLst>
-          </p:cNvPr>
+          <p:cNvPr id="2" name="矩形 1"/>
           <p:cNvSpPr>
             <a:spLocks noGrp="1"/>
           </p:cNvSpPr>
@@ -8430,13 +8163,7 @@
       </p:sp>
       <p:sp>
         <p:nvSpPr>
-          <p:cNvPr id="4" name="矩形 3">
-            <a:extLst>
-              <a:ext uri="{FF2B5EF4-FFF2-40B4-BE49-F238E27FC236}">
-                <a16:creationId xmlns:a16="http://schemas.microsoft.com/office/drawing/2014/main" id="{0CCF3AAA-E565-49A5-9E5D-12AB5BEA2BCC}"/>
-              </a:ext>
-            </a:extLst>
-          </p:cNvPr>
+          <p:cNvPr id="4" name="矩形 3"/>
           <p:cNvSpPr>
             <a:spLocks noGrp="1"/>
           </p:cNvSpPr>
@@ -8470,13 +8197,7 @@
       </p:sp>
       <p:sp>
         <p:nvSpPr>
-          <p:cNvPr id="5" name="矩形 4">
-            <a:extLst>
-              <a:ext uri="{FF2B5EF4-FFF2-40B4-BE49-F238E27FC236}">
-                <a16:creationId xmlns:a16="http://schemas.microsoft.com/office/drawing/2014/main" id="{ECC68CB8-D28B-4FBA-BFEE-BA369B649486}"/>
-              </a:ext>
-            </a:extLst>
-          </p:cNvPr>
+          <p:cNvPr id="5" name="矩形 4"/>
           <p:cNvSpPr>
             <a:spLocks noGrp="1"/>
           </p:cNvSpPr>
@@ -8533,13 +8254,7 @@
       </p:sp>
       <p:sp>
         <p:nvSpPr>
-          <p:cNvPr id="6" name="矩形 5">
-            <a:extLst>
-              <a:ext uri="{FF2B5EF4-FFF2-40B4-BE49-F238E27FC236}">
-                <a16:creationId xmlns:a16="http://schemas.microsoft.com/office/drawing/2014/main" id="{80F4B1FB-DFE4-43C7-98D1-891507107452}"/>
-              </a:ext>
-            </a:extLst>
-          </p:cNvPr>
+          <p:cNvPr id="6" name="矩形 5"/>
           <p:cNvSpPr>
             <a:spLocks noGrp="1"/>
           </p:cNvSpPr>
@@ -8587,6 +8302,7 @@
               <a:rPr lang="en-US" altLang="zh-CN" dirty="0"/>
               <a:t>+ .!?</a:t>
             </a:r>
+            <a:endParaRPr lang="en-US" altLang="zh-CN" dirty="0"/>
           </a:p>
           <a:p>
             <a:endParaRPr lang="en-US" altLang="zh-CN" dirty="0"/>
@@ -8652,13 +8368,7 @@
       </p:sp>
       <p:sp>
         <p:nvSpPr>
-          <p:cNvPr id="7" name="矩形 6">
-            <a:extLst>
-              <a:ext uri="{FF2B5EF4-FFF2-40B4-BE49-F238E27FC236}">
-                <a16:creationId xmlns:a16="http://schemas.microsoft.com/office/drawing/2014/main" id="{02F5307D-47AA-4496-B027-2EBC00B0661D}"/>
-              </a:ext>
-            </a:extLst>
-          </p:cNvPr>
+          <p:cNvPr id="7" name="矩形 6"/>
           <p:cNvSpPr>
             <a:spLocks noGrp="1"/>
           </p:cNvSpPr>
@@ -8685,13 +8395,7 @@
       </p:sp>
       <p:sp>
         <p:nvSpPr>
-          <p:cNvPr id="8" name="矩形 7">
-            <a:extLst>
-              <a:ext uri="{FF2B5EF4-FFF2-40B4-BE49-F238E27FC236}">
-                <a16:creationId xmlns:a16="http://schemas.microsoft.com/office/drawing/2014/main" id="{E8ED42BD-464C-42DE-BDFA-1C3FED5B7ACA}"/>
-              </a:ext>
-            </a:extLst>
-          </p:cNvPr>
+          <p:cNvPr id="8" name="矩形 7"/>
           <p:cNvSpPr>
             <a:spLocks noGrp="1"/>
           </p:cNvSpPr>
@@ -8738,6 +8442,11 @@
               </a:rPr>
               <a:t>Windows FAISS </a:t>
             </a:r>
+            <a:endParaRPr lang="en-US" sz="3200" b="1" dirty="0">
+              <a:solidFill>
+                <a:srgbClr val="2D4A33"/>
+              </a:solidFill>
+            </a:endParaRPr>
           </a:p>
           <a:p>
             <a:pPr>
@@ -8765,13 +8474,7 @@
       </p:sp>
       <p:sp>
         <p:nvSpPr>
-          <p:cNvPr id="9" name="矩形 8">
-            <a:extLst>
-              <a:ext uri="{FF2B5EF4-FFF2-40B4-BE49-F238E27FC236}">
-                <a16:creationId xmlns:a16="http://schemas.microsoft.com/office/drawing/2014/main" id="{0396FB42-E968-4370-8713-7F8120653B23}"/>
-              </a:ext>
-            </a:extLst>
-          </p:cNvPr>
+          <p:cNvPr id="9" name="矩形 8"/>
           <p:cNvSpPr>
             <a:spLocks noGrp="1"/>
           </p:cNvSpPr>
@@ -8881,13 +8584,7 @@
       </p:sp>
       <p:sp>
         <p:nvSpPr>
-          <p:cNvPr id="10" name="矩形 9">
-            <a:extLst>
-              <a:ext uri="{FF2B5EF4-FFF2-40B4-BE49-F238E27FC236}">
-                <a16:creationId xmlns:a16="http://schemas.microsoft.com/office/drawing/2014/main" id="{E5C669DF-CAC4-4D06-92B2-8A85E452067E}"/>
-              </a:ext>
-            </a:extLst>
-          </p:cNvPr>
+          <p:cNvPr id="10" name="矩形 9"/>
           <p:cNvSpPr>
             <a:spLocks noGrp="1"/>
           </p:cNvSpPr>
@@ -8914,13 +8611,7 @@
       </p:sp>
       <p:sp>
         <p:nvSpPr>
-          <p:cNvPr id="11" name="矩形 10">
-            <a:extLst>
-              <a:ext uri="{FF2B5EF4-FFF2-40B4-BE49-F238E27FC236}">
-                <a16:creationId xmlns:a16="http://schemas.microsoft.com/office/drawing/2014/main" id="{AA327DB0-DBD6-42E5-85A2-3C88543BC4E9}"/>
-              </a:ext>
-            </a:extLst>
-          </p:cNvPr>
+          <p:cNvPr id="11" name="矩形 10"/>
           <p:cNvSpPr>
             <a:spLocks noGrp="1"/>
           </p:cNvSpPr>
@@ -8977,13 +8668,7 @@
       </p:sp>
       <p:sp>
         <p:nvSpPr>
-          <p:cNvPr id="12" name="矩形 11">
-            <a:extLst>
-              <a:ext uri="{FF2B5EF4-FFF2-40B4-BE49-F238E27FC236}">
-                <a16:creationId xmlns:a16="http://schemas.microsoft.com/office/drawing/2014/main" id="{E7E24D30-F662-4C81-B43C-F0978EE590E4}"/>
-              </a:ext>
-            </a:extLst>
-          </p:cNvPr>
+          <p:cNvPr id="12" name="矩形 11"/>
           <p:cNvSpPr>
             <a:spLocks noGrp="1"/>
           </p:cNvSpPr>
@@ -9077,6 +8762,7 @@
               <a:rPr lang="en-US" altLang="zh-CN" dirty="0"/>
               <a:t>-鿿]|[A-Za-z0-9_]+</a:t>
             </a:r>
+            <a:endParaRPr lang="en-US" altLang="zh-CN" dirty="0"/>
           </a:p>
           <a:p>
             <a:endParaRPr lang="en-US" altLang="zh-CN" dirty="0"/>
@@ -9115,11 +8801,6 @@
         </p:txBody>
       </p:sp>
     </p:spTree>
-    <p:extLst>
-      <p:ext uri="{BB962C8B-B14F-4D97-AF65-F5344CB8AC3E}">
-        <p14:creationId xmlns:p14="http://schemas.microsoft.com/office/powerpoint/2010/main" val="1505607212"/>
-      </p:ext>
-    </p:extLst>
   </p:cSld>
   <p:clrMapOvr>
     <a:masterClrMapping/>
@@ -9146,13 +8827,7 @@
       </p:grpSpPr>
       <p:sp>
         <p:nvSpPr>
-          <p:cNvPr id="5" name="矩形 4">
-            <a:extLst>
-              <a:ext uri="{FF2B5EF4-FFF2-40B4-BE49-F238E27FC236}">
-                <a16:creationId xmlns:a16="http://schemas.microsoft.com/office/drawing/2014/main" id="{8D1C4FE0-3CAF-4428-91B5-F4637A0F2702}"/>
-              </a:ext>
-            </a:extLst>
-          </p:cNvPr>
+          <p:cNvPr id="5" name="矩形 4"/>
           <p:cNvSpPr>
             <a:spLocks noGrp="1"/>
           </p:cNvSpPr>
@@ -9196,19 +8871,12 @@
             <a:pPr algn="ctr">
               <a:buNone/>
             </a:pPr>
-            <a:endParaRPr/>
-          </a:p>
-        </p:txBody>
-      </p:sp>
-      <p:sp>
-        <p:nvSpPr>
-          <p:cNvPr id="6" name="文本框 5">
-            <a:extLst>
-              <a:ext uri="{FF2B5EF4-FFF2-40B4-BE49-F238E27FC236}">
-                <a16:creationId xmlns:a16="http://schemas.microsoft.com/office/drawing/2014/main" id="{162FA069-8E92-4FF7-8119-1BBFAAE75D08}"/>
-              </a:ext>
-            </a:extLst>
-          </p:cNvPr>
+          </a:p>
+        </p:txBody>
+      </p:sp>
+      <p:sp>
+        <p:nvSpPr>
+          <p:cNvPr id="6" name="文本框 5"/>
           <p:cNvSpPr>
             <a:spLocks noGrp="1"/>
           </p:cNvSpPr>
@@ -9268,13 +8936,7 @@
       </p:sp>
       <p:sp>
         <p:nvSpPr>
-          <p:cNvPr id="7" name="文本框 6">
-            <a:extLst>
-              <a:ext uri="{FF2B5EF4-FFF2-40B4-BE49-F238E27FC236}">
-                <a16:creationId xmlns:a16="http://schemas.microsoft.com/office/drawing/2014/main" id="{6583A319-A2E7-4817-AEA9-F2FED40256A2}"/>
-              </a:ext>
-            </a:extLst>
-          </p:cNvPr>
+          <p:cNvPr id="7" name="文本框 6"/>
           <p:cNvSpPr>
             <a:spLocks noGrp="1"/>
           </p:cNvSpPr>
@@ -9317,13 +8979,7 @@
       </p:sp>
       <p:sp>
         <p:nvSpPr>
-          <p:cNvPr id="10" name="椭圆 9">
-            <a:extLst>
-              <a:ext uri="{FF2B5EF4-FFF2-40B4-BE49-F238E27FC236}">
-                <a16:creationId xmlns:a16="http://schemas.microsoft.com/office/drawing/2014/main" id="{7F76FFC3-0B4B-4F04-B150-F2537BA4A393}"/>
-              </a:ext>
-            </a:extLst>
-          </p:cNvPr>
+          <p:cNvPr id="10" name="椭圆 9"/>
           <p:cNvSpPr>
             <a:spLocks noGrp="1"/>
           </p:cNvSpPr>
@@ -9367,19 +9023,12 @@
             <a:pPr algn="ctr">
               <a:buNone/>
             </a:pPr>
-            <a:endParaRPr/>
-          </a:p>
-        </p:txBody>
-      </p:sp>
-      <p:sp>
-        <p:nvSpPr>
-          <p:cNvPr id="13" name="等腰三角形 12">
-            <a:extLst>
-              <a:ext uri="{FF2B5EF4-FFF2-40B4-BE49-F238E27FC236}">
-                <a16:creationId xmlns:a16="http://schemas.microsoft.com/office/drawing/2014/main" id="{A258E667-FBBE-4E4A-A6ED-C1501840503E}"/>
-              </a:ext>
-            </a:extLst>
-          </p:cNvPr>
+          </a:p>
+        </p:txBody>
+      </p:sp>
+      <p:sp>
+        <p:nvSpPr>
+          <p:cNvPr id="13" name="等腰三角形 12"/>
           <p:cNvSpPr>
             <a:spLocks noGrp="1"/>
           </p:cNvSpPr>
@@ -9423,19 +9072,12 @@
             <a:pPr algn="ctr">
               <a:buNone/>
             </a:pPr>
-            <a:endParaRPr/>
-          </a:p>
-        </p:txBody>
-      </p:sp>
-      <p:sp>
-        <p:nvSpPr>
-          <p:cNvPr id="16" name="椭圆 15">
-            <a:extLst>
-              <a:ext uri="{FF2B5EF4-FFF2-40B4-BE49-F238E27FC236}">
-                <a16:creationId xmlns:a16="http://schemas.microsoft.com/office/drawing/2014/main" id="{924DBAFA-088D-405C-BC4D-58F76E8EC34B}"/>
-              </a:ext>
-            </a:extLst>
-          </p:cNvPr>
+          </a:p>
+        </p:txBody>
+      </p:sp>
+      <p:sp>
+        <p:nvSpPr>
+          <p:cNvPr id="16" name="椭圆 15"/>
           <p:cNvSpPr>
             <a:spLocks noGrp="1"/>
           </p:cNvSpPr>
@@ -9479,19 +9121,12 @@
             <a:pPr algn="ctr">
               <a:buNone/>
             </a:pPr>
-            <a:endParaRPr/>
-          </a:p>
-        </p:txBody>
-      </p:sp>
-      <p:sp>
-        <p:nvSpPr>
-          <p:cNvPr id="17" name="等腰三角形 16">
-            <a:extLst>
-              <a:ext uri="{FF2B5EF4-FFF2-40B4-BE49-F238E27FC236}">
-                <a16:creationId xmlns:a16="http://schemas.microsoft.com/office/drawing/2014/main" id="{026B5618-3673-422F-B68F-69144154F724}"/>
-              </a:ext>
-            </a:extLst>
-          </p:cNvPr>
+          </a:p>
+        </p:txBody>
+      </p:sp>
+      <p:sp>
+        <p:nvSpPr>
+          <p:cNvPr id="17" name="等腰三角形 16"/>
           <p:cNvSpPr>
             <a:spLocks noGrp="1"/>
           </p:cNvSpPr>
@@ -9535,19 +9170,12 @@
             <a:pPr algn="ctr">
               <a:buNone/>
             </a:pPr>
-            <a:endParaRPr/>
-          </a:p>
-        </p:txBody>
-      </p:sp>
-      <p:sp>
-        <p:nvSpPr>
-          <p:cNvPr id="19" name="椭圆 18">
-            <a:extLst>
-              <a:ext uri="{FF2B5EF4-FFF2-40B4-BE49-F238E27FC236}">
-                <a16:creationId xmlns:a16="http://schemas.microsoft.com/office/drawing/2014/main" id="{5FDAC167-36A5-4CF7-BA84-E9C7B4803AF1}"/>
-              </a:ext>
-            </a:extLst>
-          </p:cNvPr>
+          </a:p>
+        </p:txBody>
+      </p:sp>
+      <p:sp>
+        <p:nvSpPr>
+          <p:cNvPr id="19" name="椭圆 18"/>
           <p:cNvSpPr>
             <a:spLocks noGrp="1"/>
           </p:cNvSpPr>
@@ -9593,7 +9221,6 @@
             <a:pPr algn="ctr">
               <a:buNone/>
             </a:pPr>
-            <a:endParaRPr/>
           </a:p>
         </p:txBody>
       </p:sp>
@@ -9606,7 +9233,7 @@
           <p:nvPr/>
         </p:nvPicPr>
         <p:blipFill>
-          <a:blip r:embed="rId3"/>
+          <a:blip r:embed="rId1"/>
           <a:stretch>
             <a:fillRect/>
           </a:stretch>
@@ -9622,11 +9249,6 @@
         </p:spPr>
       </p:pic>
     </p:spTree>
-    <p:extLst>
-      <p:ext uri="{BB962C8B-B14F-4D97-AF65-F5344CB8AC3E}">
-        <p14:creationId xmlns:p14="http://schemas.microsoft.com/office/powerpoint/2010/main" val="796609823"/>
-      </p:ext>
-    </p:extLst>
   </p:cSld>
   <p:clrMapOvr>
     <a:masterClrMapping/>
@@ -9661,13 +9283,7 @@
       </p:grpSpPr>
       <p:sp>
         <p:nvSpPr>
-          <p:cNvPr id="5" name="文本框 4">
-            <a:extLst>
-              <a:ext uri="{FF2B5EF4-FFF2-40B4-BE49-F238E27FC236}">
-                <a16:creationId xmlns:a16="http://schemas.microsoft.com/office/drawing/2014/main" id="{0F6846B8-6A34-4BAA-9BC6-D1B3C2CA9216}"/>
-              </a:ext>
-            </a:extLst>
-          </p:cNvPr>
+          <p:cNvPr id="5" name="文本框 4"/>
           <p:cNvSpPr>
             <a:spLocks noGrp="1"/>
           </p:cNvSpPr>
@@ -9703,7 +9319,6 @@
               <a:buSzTx/>
               <a:buFontTx/>
               <a:buNone/>
-              <a:tabLst/>
               <a:defRPr/>
             </a:pPr>
             <a:r>
@@ -9717,24 +9332,32 @@
                 <a:effectLst/>
                 <a:uLnTx/>
                 <a:uFillTx/>
-                <a:latin typeface="Arial"/>
-                <a:ea typeface="STZhongsong"/>
+                <a:latin typeface="Arial" panose="020B0604020202020204"/>
+                <a:ea typeface="华文中宋" panose="02010600040101010101" charset="-122"/>
                 <a:cs typeface="+mn-cs"/>
               </a:rPr>
               <a:t>01</a:t>
             </a:r>
-          </a:p>
-        </p:txBody>
-      </p:sp>
-      <p:sp>
-        <p:nvSpPr>
-          <p:cNvPr id="6" name="矩形 5">
-            <a:extLst>
-              <a:ext uri="{FF2B5EF4-FFF2-40B4-BE49-F238E27FC236}">
-                <a16:creationId xmlns:a16="http://schemas.microsoft.com/office/drawing/2014/main" id="{2E436048-77E1-49E0-B359-2A0FF4966252}"/>
-              </a:ext>
-            </a:extLst>
-          </p:cNvPr>
+            <a:endParaRPr kumimoji="0" sz="13800" b="0" i="0" u="none" strike="noStrike" kern="1200" cap="none" spc="0" normalizeH="0" baseline="0" noProof="0" dirty="0">
+              <a:ln>
+                <a:noFill/>
+              </a:ln>
+              <a:solidFill>
+                <a:srgbClr val="F5F4F9"/>
+              </a:solidFill>
+              <a:effectLst/>
+              <a:uLnTx/>
+              <a:uFillTx/>
+              <a:latin typeface="Arial" panose="020B0604020202020204"/>
+              <a:ea typeface="华文中宋" panose="02010600040101010101" charset="-122"/>
+              <a:cs typeface="+mn-cs"/>
+            </a:endParaRPr>
+          </a:p>
+        </p:txBody>
+      </p:sp>
+      <p:sp>
+        <p:nvSpPr>
+          <p:cNvPr id="6" name="矩形 5"/>
           <p:cNvSpPr>
             <a:spLocks noGrp="1"/>
           </p:cNvSpPr>
@@ -9769,7 +9392,6 @@
               <a:buSzTx/>
               <a:buFontTx/>
               <a:buNone/>
-              <a:tabLst/>
               <a:defRPr/>
             </a:pPr>
             <a:r>
@@ -9783,8 +9405,8 @@
                 <a:effectLst/>
                 <a:uLnTx/>
                 <a:uFillTx/>
-                <a:latin typeface="Arial"/>
-                <a:ea typeface="STZhongsong"/>
+                <a:latin typeface="Arial" panose="020B0604020202020204"/>
+                <a:ea typeface="华文中宋" panose="02010600040101010101" charset="-122"/>
                 <a:cs typeface="+mn-cs"/>
               </a:rPr>
               <a:t>组内评分</a:t>
@@ -9799,19 +9421,14 @@
               <a:effectLst/>
               <a:uLnTx/>
               <a:uFillTx/>
-              <a:latin typeface="Arial"/>
-              <a:ea typeface="STZhongsong"/>
+              <a:latin typeface="Arial" panose="020B0604020202020204"/>
+              <a:ea typeface="华文中宋" panose="02010600040101010101" charset="-122"/>
               <a:cs typeface="+mn-cs"/>
             </a:endParaRPr>
           </a:p>
         </p:txBody>
       </p:sp>
     </p:spTree>
-    <p:extLst>
-      <p:ext uri="{BB962C8B-B14F-4D97-AF65-F5344CB8AC3E}">
-        <p14:creationId xmlns:p14="http://schemas.microsoft.com/office/powerpoint/2010/main" val="3254142151"/>
-      </p:ext>
-    </p:extLst>
   </p:cSld>
   <p:clrMapOvr>
     <a:masterClrMapping/>
@@ -9846,13 +9463,7 @@
       </p:grpSpPr>
       <p:sp>
         <p:nvSpPr>
-          <p:cNvPr id="5" name="文本框 4">
-            <a:extLst>
-              <a:ext uri="{FF2B5EF4-FFF2-40B4-BE49-F238E27FC236}">
-                <a16:creationId xmlns:a16="http://schemas.microsoft.com/office/drawing/2014/main" id="{0F6846B8-6A34-4BAA-9BC6-D1B3C2CA9216}"/>
-              </a:ext>
-            </a:extLst>
-          </p:cNvPr>
+          <p:cNvPr id="5" name="文本框 4"/>
           <p:cNvSpPr>
             <a:spLocks noGrp="1"/>
           </p:cNvSpPr>
@@ -9903,13 +9514,7 @@
       </p:sp>
       <p:sp>
         <p:nvSpPr>
-          <p:cNvPr id="6" name="矩形 5">
-            <a:extLst>
-              <a:ext uri="{FF2B5EF4-FFF2-40B4-BE49-F238E27FC236}">
-                <a16:creationId xmlns:a16="http://schemas.microsoft.com/office/drawing/2014/main" id="{2E436048-77E1-49E0-B359-2A0FF4966252}"/>
-              </a:ext>
-            </a:extLst>
-          </p:cNvPr>
+          <p:cNvPr id="6" name="矩形 5"/>
           <p:cNvSpPr>
             <a:spLocks noGrp="1"/>
           </p:cNvSpPr>
@@ -9950,11 +9555,6 @@
         </p:txBody>
       </p:sp>
     </p:spTree>
-    <p:extLst>
-      <p:ext uri="{BB962C8B-B14F-4D97-AF65-F5344CB8AC3E}">
-        <p14:creationId xmlns:p14="http://schemas.microsoft.com/office/powerpoint/2010/main" val="219137894"/>
-      </p:ext>
-    </p:extLst>
   </p:cSld>
   <p:clrMapOvr>
     <a:masterClrMapping/>
@@ -10300,6 +9900,11 @@
               </a:rPr>
               <a:t>API</a:t>
             </a:r>
+            <a:endParaRPr lang="en-US" altLang="zh-CN" sz="1350" dirty="0">
+              <a:solidFill>
+                <a:srgbClr val="1F2D22"/>
+              </a:solidFill>
+            </a:endParaRPr>
           </a:p>
           <a:p>
             <a:pPr algn="l">
@@ -10401,6 +10006,11 @@
               </a:rPr>
               <a:t>结果</a:t>
             </a:r>
+            <a:endParaRPr sz="1650" b="1">
+              <a:solidFill>
+                <a:srgbClr val="2D4A33"/>
+              </a:solidFill>
+            </a:endParaRPr>
           </a:p>
         </p:txBody>
       </p:sp>
@@ -10510,13 +10120,7 @@
   <p:cSld>
     <p:spTree>
       <p:nvGrpSpPr>
-        <p:cNvPr id="1" name="">
-          <a:extLst>
-            <a:ext uri="{FF2B5EF4-FFF2-40B4-BE49-F238E27FC236}">
-              <a16:creationId xmlns:a16="http://schemas.microsoft.com/office/drawing/2014/main" id="{D8A84291-61E8-C166-69F2-55BED54446C9}"/>
-            </a:ext>
-          </a:extLst>
-        </p:cNvPr>
+        <p:cNvPr id="1" name=""/>
         <p:cNvGrpSpPr/>
         <p:nvPr/>
       </p:nvGrpSpPr>
@@ -10530,13 +10134,7 @@
       </p:grpSpPr>
       <p:sp>
         <p:nvSpPr>
-          <p:cNvPr id="13" name="矩形 12">
-            <a:extLst>
-              <a:ext uri="{FF2B5EF4-FFF2-40B4-BE49-F238E27FC236}">
-                <a16:creationId xmlns:a16="http://schemas.microsoft.com/office/drawing/2014/main" id="{3179BFBF-CB10-1515-9976-F4881809D019}"/>
-              </a:ext>
-            </a:extLst>
-          </p:cNvPr>
+          <p:cNvPr id="13" name="矩形 12"/>
           <p:cNvSpPr>
             <a:spLocks noGrp="1"/>
           </p:cNvSpPr>
@@ -10563,13 +10161,7 @@
       </p:sp>
       <p:sp>
         <p:nvSpPr>
-          <p:cNvPr id="2" name="矩形 1">
-            <a:extLst>
-              <a:ext uri="{FF2B5EF4-FFF2-40B4-BE49-F238E27FC236}">
-                <a16:creationId xmlns:a16="http://schemas.microsoft.com/office/drawing/2014/main" id="{C15BD8E1-4A07-86F8-A24B-DD8AA200120B}"/>
-              </a:ext>
-            </a:extLst>
-          </p:cNvPr>
+          <p:cNvPr id="2" name="矩形 1"/>
           <p:cNvSpPr>
             <a:spLocks noGrp="1"/>
           </p:cNvSpPr>
@@ -10626,20 +10218,14 @@
       </p:sp>
       <p:pic>
         <p:nvPicPr>
-          <p:cNvPr id="7" name="图片 6">
-            <a:extLst>
-              <a:ext uri="{FF2B5EF4-FFF2-40B4-BE49-F238E27FC236}">
-                <a16:creationId xmlns:a16="http://schemas.microsoft.com/office/drawing/2014/main" id="{D8572E09-49AE-C729-E7F9-134B225BFBE4}"/>
-              </a:ext>
-            </a:extLst>
-          </p:cNvPr>
+          <p:cNvPr id="7" name="图片 6"/>
           <p:cNvPicPr>
             <a:picLocks noChangeAspect="1"/>
           </p:cNvPicPr>
           <p:nvPr/>
         </p:nvPicPr>
         <p:blipFill>
-          <a:blip r:embed="rId3"/>
+          <a:blip r:embed="rId1"/>
           <a:stretch>
             <a:fillRect/>
           </a:stretch>
@@ -10655,11 +10241,6 @@
         </p:spPr>
       </p:pic>
     </p:spTree>
-    <p:extLst>
-      <p:ext uri="{BB962C8B-B14F-4D97-AF65-F5344CB8AC3E}">
-        <p14:creationId xmlns:p14="http://schemas.microsoft.com/office/powerpoint/2010/main" val="1740664248"/>
-      </p:ext>
-    </p:extLst>
   </p:cSld>
   <p:clrMapOvr>
     <a:masterClrMapping/>
@@ -10672,13 +10253,7 @@
   <p:cSld>
     <p:spTree>
       <p:nvGrpSpPr>
-        <p:cNvPr id="1" name="">
-          <a:extLst>
-            <a:ext uri="{FF2B5EF4-FFF2-40B4-BE49-F238E27FC236}">
-              <a16:creationId xmlns:a16="http://schemas.microsoft.com/office/drawing/2014/main" id="{1704B2DA-E618-2815-E839-C9B5B095ED5F}"/>
-            </a:ext>
-          </a:extLst>
-        </p:cNvPr>
+        <p:cNvPr id="1" name=""/>
         <p:cNvGrpSpPr/>
         <p:nvPr/>
       </p:nvGrpSpPr>
@@ -10692,13 +10267,7 @@
       </p:grpSpPr>
       <p:sp>
         <p:nvSpPr>
-          <p:cNvPr id="13" name="矩形 12">
-            <a:extLst>
-              <a:ext uri="{FF2B5EF4-FFF2-40B4-BE49-F238E27FC236}">
-                <a16:creationId xmlns:a16="http://schemas.microsoft.com/office/drawing/2014/main" id="{E6E9BBE4-51BA-CCE7-EB4F-177E7A10C672}"/>
-              </a:ext>
-            </a:extLst>
-          </p:cNvPr>
+          <p:cNvPr id="13" name="矩形 12"/>
           <p:cNvSpPr>
             <a:spLocks noGrp="1"/>
           </p:cNvSpPr>
@@ -10725,13 +10294,7 @@
       </p:sp>
       <p:sp>
         <p:nvSpPr>
-          <p:cNvPr id="2" name="矩形 1">
-            <a:extLst>
-              <a:ext uri="{FF2B5EF4-FFF2-40B4-BE49-F238E27FC236}">
-                <a16:creationId xmlns:a16="http://schemas.microsoft.com/office/drawing/2014/main" id="{05F6FC7A-C110-D682-D687-CA93D2D5128F}"/>
-              </a:ext>
-            </a:extLst>
-          </p:cNvPr>
+          <p:cNvPr id="2" name="矩形 1"/>
           <p:cNvSpPr>
             <a:spLocks noGrp="1"/>
           </p:cNvSpPr>
@@ -10788,20 +10351,14 @@
       </p:sp>
       <p:pic>
         <p:nvPicPr>
-          <p:cNvPr id="4" name="图片 3">
-            <a:extLst>
-              <a:ext uri="{FF2B5EF4-FFF2-40B4-BE49-F238E27FC236}">
-                <a16:creationId xmlns:a16="http://schemas.microsoft.com/office/drawing/2014/main" id="{EE3AC917-7EA2-BE82-F887-25B14163A995}"/>
-              </a:ext>
-            </a:extLst>
-          </p:cNvPr>
+          <p:cNvPr id="4" name="图片 3"/>
           <p:cNvPicPr>
             <a:picLocks noChangeAspect="1"/>
           </p:cNvPicPr>
           <p:nvPr/>
         </p:nvPicPr>
         <p:blipFill>
-          <a:blip r:embed="rId3"/>
+          <a:blip r:embed="rId1"/>
           <a:stretch>
             <a:fillRect/>
           </a:stretch>
@@ -10817,11 +10374,6 @@
         </p:spPr>
       </p:pic>
     </p:spTree>
-    <p:extLst>
-      <p:ext uri="{BB962C8B-B14F-4D97-AF65-F5344CB8AC3E}">
-        <p14:creationId xmlns:p14="http://schemas.microsoft.com/office/powerpoint/2010/main" val="1908367782"/>
-      </p:ext>
-    </p:extLst>
   </p:cSld>
   <p:clrMapOvr>
     <a:masterClrMapping/>
@@ -10834,13 +10386,7 @@
   <p:cSld>
     <p:spTree>
       <p:nvGrpSpPr>
-        <p:cNvPr id="1" name="">
-          <a:extLst>
-            <a:ext uri="{FF2B5EF4-FFF2-40B4-BE49-F238E27FC236}">
-              <a16:creationId xmlns:a16="http://schemas.microsoft.com/office/drawing/2014/main" id="{B20DDB41-2C70-E31A-AD40-785BA3B9D98A}"/>
-            </a:ext>
-          </a:extLst>
-        </p:cNvPr>
+        <p:cNvPr id="1" name=""/>
         <p:cNvGrpSpPr/>
         <p:nvPr/>
       </p:nvGrpSpPr>
@@ -10854,13 +10400,7 @@
       </p:grpSpPr>
       <p:sp>
         <p:nvSpPr>
-          <p:cNvPr id="13" name="矩形 12">
-            <a:extLst>
-              <a:ext uri="{FF2B5EF4-FFF2-40B4-BE49-F238E27FC236}">
-                <a16:creationId xmlns:a16="http://schemas.microsoft.com/office/drawing/2014/main" id="{97D67701-D833-E84C-260A-E4253B545D62}"/>
-              </a:ext>
-            </a:extLst>
-          </p:cNvPr>
+          <p:cNvPr id="13" name="矩形 12"/>
           <p:cNvSpPr>
             <a:spLocks noGrp="1"/>
           </p:cNvSpPr>
@@ -10887,13 +10427,7 @@
       </p:sp>
       <p:sp>
         <p:nvSpPr>
-          <p:cNvPr id="2" name="矩形 1">
-            <a:extLst>
-              <a:ext uri="{FF2B5EF4-FFF2-40B4-BE49-F238E27FC236}">
-                <a16:creationId xmlns:a16="http://schemas.microsoft.com/office/drawing/2014/main" id="{DC5312F8-9F62-B5C1-5D8F-50AB97A0633D}"/>
-              </a:ext>
-            </a:extLst>
-          </p:cNvPr>
+          <p:cNvPr id="2" name="矩形 1"/>
           <p:cNvSpPr>
             <a:spLocks noGrp="1"/>
           </p:cNvSpPr>
@@ -10950,20 +10484,14 @@
       </p:sp>
       <p:pic>
         <p:nvPicPr>
-          <p:cNvPr id="7" name="图片 6">
-            <a:extLst>
-              <a:ext uri="{FF2B5EF4-FFF2-40B4-BE49-F238E27FC236}">
-                <a16:creationId xmlns:a16="http://schemas.microsoft.com/office/drawing/2014/main" id="{BABF733A-23C1-BBFD-1BC0-14678D180FB2}"/>
-              </a:ext>
-            </a:extLst>
-          </p:cNvPr>
+          <p:cNvPr id="7" name="图片 6"/>
           <p:cNvPicPr>
             <a:picLocks noChangeAspect="1"/>
           </p:cNvPicPr>
           <p:nvPr/>
         </p:nvPicPr>
         <p:blipFill>
-          <a:blip r:embed="rId3"/>
+          <a:blip r:embed="rId1"/>
           <a:stretch>
             <a:fillRect/>
           </a:stretch>
@@ -10979,11 +10507,6 @@
         </p:spPr>
       </p:pic>
     </p:spTree>
-    <p:extLst>
-      <p:ext uri="{BB962C8B-B14F-4D97-AF65-F5344CB8AC3E}">
-        <p14:creationId xmlns:p14="http://schemas.microsoft.com/office/powerpoint/2010/main" val="2461346215"/>
-      </p:ext>
-    </p:extLst>
   </p:cSld>
   <p:clrMapOvr>
     <a:masterClrMapping/>
@@ -11018,13 +10541,7 @@
       </p:grpSpPr>
       <p:sp>
         <p:nvSpPr>
-          <p:cNvPr id="11" name="文本框 10">
-            <a:extLst>
-              <a:ext uri="{FF2B5EF4-FFF2-40B4-BE49-F238E27FC236}">
-                <a16:creationId xmlns:a16="http://schemas.microsoft.com/office/drawing/2014/main" id="{642171A4-C23A-4145-BED1-2E8834D0E5B1}"/>
-              </a:ext>
-            </a:extLst>
-          </p:cNvPr>
+          <p:cNvPr id="11" name="文本框 10"/>
           <p:cNvSpPr>
             <a:spLocks noGrp="1"/>
           </p:cNvSpPr>
@@ -11075,13 +10592,7 @@
       </p:sp>
       <p:sp>
         <p:nvSpPr>
-          <p:cNvPr id="13" name="矩形 12">
-            <a:extLst>
-              <a:ext uri="{FF2B5EF4-FFF2-40B4-BE49-F238E27FC236}">
-                <a16:creationId xmlns:a16="http://schemas.microsoft.com/office/drawing/2014/main" id="{638E2919-D9D9-4496-93DC-FD75812F9CF1}"/>
-              </a:ext>
-            </a:extLst>
-          </p:cNvPr>
+          <p:cNvPr id="13" name="矩形 12"/>
           <p:cNvSpPr>
             <a:spLocks noGrp="1"/>
           </p:cNvSpPr>
@@ -11122,11 +10633,6 @@
         </p:txBody>
       </p:sp>
     </p:spTree>
-    <p:extLst>
-      <p:ext uri="{BB962C8B-B14F-4D97-AF65-F5344CB8AC3E}">
-        <p14:creationId xmlns:p14="http://schemas.microsoft.com/office/powerpoint/2010/main" val="17073351"/>
-      </p:ext>
-    </p:extLst>
   </p:cSld>
   <p:clrMapOvr>
     <a:masterClrMapping/>
@@ -11311,6 +10817,11 @@
               </a:rPr>
               <a:t>页面</a:t>
             </a:r>
+            <a:endParaRPr sz="1650" b="1">
+              <a:solidFill>
+                <a:srgbClr val="2D4A33"/>
+              </a:solidFill>
+            </a:endParaRPr>
           </a:p>
         </p:txBody>
       </p:sp>
@@ -11371,6 +10882,11 @@
               </a:rPr>
               <a:t>Dashboard</a:t>
             </a:r>
+            <a:endParaRPr lang="en-US" altLang="zh-CN" sz="1350" b="0">
+              <a:solidFill>
+                <a:srgbClr val="1F2D22"/>
+              </a:solidFill>
+            </a:endParaRPr>
           </a:p>
           <a:p>
             <a:pPr algn="l">
@@ -11468,6 +10984,11 @@
               </a:rPr>
               <a:t>检索记录）</a:t>
             </a:r>
+            <a:endParaRPr lang="zh-CN" altLang="en-US" sz="1350" b="0">
+              <a:solidFill>
+                <a:srgbClr val="1F2D22"/>
+              </a:solidFill>
+            </a:endParaRPr>
           </a:p>
           <a:p>
             <a:pPr algn="l">
@@ -11485,6 +11006,11 @@
               </a:rPr>
               <a:t>下方：文档列表区，含搜索筛选、单条删除、批量删除功能</a:t>
             </a:r>
+            <a:endParaRPr lang="zh-CN" altLang="en-US" sz="1350" b="0">
+              <a:solidFill>
+                <a:srgbClr val="1F2D22"/>
+              </a:solidFill>
+            </a:endParaRPr>
           </a:p>
           <a:p>
             <a:pPr algn="l">
@@ -11586,6 +11112,11 @@
               </a:rPr>
               <a:t>流程</a:t>
             </a:r>
+            <a:endParaRPr sz="1650" b="1">
+              <a:solidFill>
+                <a:srgbClr val="2D4A33"/>
+              </a:solidFill>
+            </a:endParaRPr>
           </a:p>
         </p:txBody>
       </p:sp>
@@ -11748,6 +11279,11 @@
               </a:rPr>
               <a:t>切换下方文档列表视图</a:t>
             </a:r>
+            <a:endParaRPr lang="zh-CN" altLang="en-US" sz="1350" b="0">
+              <a:solidFill>
+                <a:srgbClr val="1F2D22"/>
+              </a:solidFill>
+            </a:endParaRPr>
           </a:p>
           <a:p>
             <a:pPr algn="l">
@@ -11797,6 +11333,11 @@
               </a:rPr>
               <a:t>前端实时过滤列表</a:t>
             </a:r>
+            <a:endParaRPr lang="zh-CN" altLang="en-US" sz="1350" b="0">
+              <a:solidFill>
+                <a:srgbClr val="1F2D22"/>
+              </a:solidFill>
+            </a:endParaRPr>
           </a:p>
           <a:p>
             <a:pPr algn="l">
@@ -11878,6 +11419,11 @@
               </a:rPr>
               <a:t>刷新数据</a:t>
             </a:r>
+            <a:endParaRPr lang="zh-CN" altLang="en-US" sz="1350" b="0">
+              <a:solidFill>
+                <a:srgbClr val="1F2D22"/>
+              </a:solidFill>
+            </a:endParaRPr>
           </a:p>
         </p:txBody>
       </p:sp>
@@ -11957,6 +11503,11 @@
               </a:rPr>
               <a:t>结果</a:t>
             </a:r>
+            <a:endParaRPr sz="1650" b="1">
+              <a:solidFill>
+                <a:srgbClr val="2D4A33"/>
+              </a:solidFill>
+            </a:endParaRPr>
           </a:p>
         </p:txBody>
       </p:sp>
@@ -12025,6 +11576,11 @@
               </a:rPr>
               <a:t>流水线各阶段数据状态</a:t>
             </a:r>
+            <a:endParaRPr lang="zh-CN" altLang="en-US" sz="1350" b="0">
+              <a:solidFill>
+                <a:srgbClr val="1F2D22"/>
+              </a:solidFill>
+            </a:endParaRPr>
           </a:p>
           <a:p>
             <a:pPr algn="l">
@@ -12058,6 +11614,11 @@
               </a:rPr>
               <a:t>批量删除管理</a:t>
             </a:r>
+            <a:endParaRPr lang="zh-CN" altLang="en-US" sz="1350" b="0">
+              <a:solidFill>
+                <a:srgbClr val="1F2D22"/>
+              </a:solidFill>
+            </a:endParaRPr>
           </a:p>
           <a:p>
             <a:pPr algn="l">
@@ -12091,6 +11652,11 @@
               </a:rPr>
               <a:t>实现，零额外依赖，加载快速</a:t>
             </a:r>
+            <a:endParaRPr lang="zh-CN" altLang="en-US" sz="1350" b="0">
+              <a:solidFill>
+                <a:srgbClr val="1F2D22"/>
+              </a:solidFill>
+            </a:endParaRPr>
           </a:p>
           <a:p>
             <a:pPr algn="l">
@@ -12114,6 +11680,42 @@
     <a:masterClrMapping/>
   </p:clrMapOvr>
 </p:sld>
+</file>
+
+<file path=ppt/tags/tag1.xml><?xml version="1.0" encoding="utf-8"?>
+<p:tagLst xmlns:p="http://schemas.openxmlformats.org/presentationml/2006/main">
+  <p:tag name="KSO_WM_DIAGRAM_VIRTUALLY_FRAME" val="{&quot;height&quot;:284.25,&quot;left&quot;:67.5,&quot;top&quot;:78.35,&quot;width&quot;:825}"/>
+</p:tagLst>
+</file>
+
+<file path=ppt/tags/tag2.xml><?xml version="1.0" encoding="utf-8"?>
+<p:tagLst xmlns:p="http://schemas.openxmlformats.org/presentationml/2006/main">
+  <p:tag name="KSO_WM_DIAGRAM_VIRTUALLY_FRAME" val="{&quot;height&quot;:284.25,&quot;left&quot;:67.5,&quot;top&quot;:78.35,&quot;width&quot;:825}"/>
+</p:tagLst>
+</file>
+
+<file path=ppt/tags/tag3.xml><?xml version="1.0" encoding="utf-8"?>
+<p:tagLst xmlns:p="http://schemas.openxmlformats.org/presentationml/2006/main">
+  <p:tag name="KSO_WM_DIAGRAM_VIRTUALLY_FRAME" val="{&quot;height&quot;:284.25,&quot;left&quot;:67.5,&quot;top&quot;:78.35,&quot;width&quot;:825}"/>
+</p:tagLst>
+</file>
+
+<file path=ppt/tags/tag4.xml><?xml version="1.0" encoding="utf-8"?>
+<p:tagLst xmlns:p="http://schemas.openxmlformats.org/presentationml/2006/main">
+  <p:tag name="KSO_WM_DIAGRAM_VIRTUALLY_FRAME" val="{&quot;height&quot;:284.25,&quot;left&quot;:67.5,&quot;top&quot;:78.35,&quot;width&quot;:825}"/>
+</p:tagLst>
+</file>
+
+<file path=ppt/tags/tag5.xml><?xml version="1.0" encoding="utf-8"?>
+<p:tagLst xmlns:p="http://schemas.openxmlformats.org/presentationml/2006/main">
+  <p:tag name="KSO_WM_DIAGRAM_VIRTUALLY_FRAME" val="{&quot;height&quot;:284.25,&quot;left&quot;:67.5,&quot;top&quot;:78.35,&quot;width&quot;:825}"/>
+</p:tagLst>
+</file>
+
+<file path=ppt/tags/tag6.xml><?xml version="1.0" encoding="utf-8"?>
+<p:tagLst xmlns:p="http://schemas.openxmlformats.org/presentationml/2006/main">
+  <p:tag name="KSO_WM_DIAGRAM_VIRTUALLY_FRAME" val="{&quot;height&quot;:284.25,&quot;left&quot;:67.5,&quot;top&quot;:78.35,&quot;width&quot;:825}"/>
+</p:tagLst>
 </file>
 
 <file path=ppt/theme/theme1.xml><?xml version="1.0" encoding="utf-8"?>
@@ -12258,8 +11860,11 @@
       </a:bgFillStyleLst>
     </a:fmtScheme>
   </a:themeElements>
-  <a:objectDefaults/>
-  <a:extraClrSchemeLst/>
+  <a:extLst>
+    <a:ext uri="{05A4C25C-085E-4340-85A3-A5531E510DB2}">
+      <thm15:themeFamily xmlns:thm15="http://schemas.microsoft.com/office/thememl/2012/main" name="Office Theme" id="{62F939B6-93AF-4DB8-9C6B-D6C7DFDC589F}" vid="{4A3C46E8-61CC-4603-A589-7422A47A8E4A}"/>
+    </a:ext>
+  </a:extLst>
 </a:theme>
 </file>
 
@@ -12405,7 +12010,10 @@
       </a:bgFillStyleLst>
     </a:fmtScheme>
   </a:themeElements>
-  <a:objectDefaults/>
-  <a:extraClrSchemeLst/>
+  <a:extLst>
+    <a:ext uri="{05A4C25C-085E-4340-85A3-A5531E510DB2}">
+      <thm15:themeFamily xmlns:thm15="http://schemas.microsoft.com/office/thememl/2012/main" name="Office Theme" id="{62F939B6-93AF-4DB8-9C6B-D6C7DFDC589F}" vid="{4A3C46E8-61CC-4603-A589-7422A47A8E4A}"/>
+    </a:ext>
+  </a:extLst>
 </a:theme>
 </file>
--- a/report/myrag总结.pptx
+++ b/report/myrag总结.pptx
@@ -5,27 +5,28 @@
     <p:sldMasterId id="2147483648" r:id="rId1"/>
   </p:sldMasterIdLst>
   <p:notesMasterIdLst>
-    <p:notesMasterId r:id="rId4"/>
+    <p:notesMasterId r:id="rId21"/>
   </p:notesMasterIdLst>
   <p:sldIdLst>
-    <p:sldId id="256" r:id="rId3"/>
-    <p:sldId id="273" r:id="rId5"/>
-    <p:sldId id="258" r:id="rId6"/>
-    <p:sldId id="260" r:id="rId7"/>
-    <p:sldId id="274" r:id="rId8"/>
-    <p:sldId id="276" r:id="rId9"/>
-    <p:sldId id="277" r:id="rId10"/>
-    <p:sldId id="262" r:id="rId11"/>
-    <p:sldId id="263" r:id="rId12"/>
-    <p:sldId id="270" r:id="rId13"/>
-    <p:sldId id="259" r:id="rId14"/>
-    <p:sldId id="271" r:id="rId15"/>
-    <p:sldId id="264" r:id="rId16"/>
-    <p:sldId id="272" r:id="rId17"/>
-    <p:sldId id="261" r:id="rId18"/>
-    <p:sldId id="278" r:id="rId19"/>
-    <p:sldId id="279" r:id="rId20"/>
-    <p:sldId id="268" r:id="rId21"/>
+    <p:sldId id="256" r:id="rId2"/>
+    <p:sldId id="273" r:id="rId3"/>
+    <p:sldId id="280" r:id="rId4"/>
+    <p:sldId id="258" r:id="rId5"/>
+    <p:sldId id="260" r:id="rId6"/>
+    <p:sldId id="274" r:id="rId7"/>
+    <p:sldId id="276" r:id="rId8"/>
+    <p:sldId id="277" r:id="rId9"/>
+    <p:sldId id="262" r:id="rId10"/>
+    <p:sldId id="263" r:id="rId11"/>
+    <p:sldId id="270" r:id="rId12"/>
+    <p:sldId id="259" r:id="rId13"/>
+    <p:sldId id="271" r:id="rId14"/>
+    <p:sldId id="264" r:id="rId15"/>
+    <p:sldId id="272" r:id="rId16"/>
+    <p:sldId id="261" r:id="rId17"/>
+    <p:sldId id="278" r:id="rId18"/>
+    <p:sldId id="279" r:id="rId19"/>
+    <p:sldId id="268" r:id="rId20"/>
   </p:sldIdLst>
   <p:sldSz cx="12192000" cy="6858000"/>
   <p:notesSz cx="6858000" cy="9144000"/>
@@ -124,6 +125,11 @@
       </a:defRPr>
     </a:lvl9pPr>
   </p:defaultTextStyle>
+  <p:extLst>
+    <p:ext uri="{EFAFB233-063F-42B5-8137-9DF3F51BA10A}">
+      <p15:sldGuideLst xmlns:p15="http://schemas.microsoft.com/office/powerpoint/2012/main"/>
+    </p:ext>
+  </p:extLst>
 </p:presentation>
 </file>
 
@@ -167,7 +173,9 @@
         <p:txBody>
           <a:bodyPr/>
           <a:lstStyle/>
-          <a:p/>
+          <a:p>
+            <a:endParaRPr/>
+          </a:p>
         </p:txBody>
       </p:sp>
       <p:sp>
@@ -188,7 +196,9 @@
         <p:txBody>
           <a:bodyPr/>
           <a:lstStyle/>
-          <a:p/>
+          <a:p>
+            <a:endParaRPr/>
+          </a:p>
         </p:txBody>
       </p:sp>
       <p:sp>
@@ -209,7 +219,9 @@
         <p:txBody>
           <a:bodyPr/>
           <a:lstStyle/>
-          <a:p/>
+          <a:p>
+            <a:endParaRPr/>
+          </a:p>
         </p:txBody>
       </p:sp>
       <p:sp>
@@ -230,7 +242,9 @@
         <p:txBody>
           <a:bodyPr/>
           <a:lstStyle/>
-          <a:p/>
+          <a:p>
+            <a:endParaRPr/>
+          </a:p>
         </p:txBody>
       </p:sp>
       <p:sp>
@@ -251,7 +265,9 @@
         <p:txBody>
           <a:bodyPr/>
           <a:lstStyle/>
-          <a:p/>
+          <a:p>
+            <a:endParaRPr/>
+          </a:p>
         </p:txBody>
       </p:sp>
       <p:sp>
@@ -272,7 +288,9 @@
         <p:txBody>
           <a:bodyPr/>
           <a:lstStyle/>
-          <a:p/>
+          <a:p>
+            <a:endParaRPr/>
+          </a:p>
         </p:txBody>
       </p:sp>
     </p:spTree>
@@ -329,7 +347,9 @@
         <p:txBody>
           <a:bodyPr/>
           <a:lstStyle/>
-          <a:p/>
+          <a:p>
+            <a:endParaRPr/>
+          </a:p>
         </p:txBody>
       </p:sp>
       <p:sp>
@@ -346,7 +366,9 @@
         <p:txBody>
           <a:bodyPr/>
           <a:lstStyle/>
-          <a:p/>
+          <a:p>
+            <a:endParaRPr/>
+          </a:p>
         </p:txBody>
       </p:sp>
     </p:spTree>
@@ -400,7 +422,9 @@
         <p:txBody>
           <a:bodyPr/>
           <a:lstStyle/>
-          <a:p/>
+          <a:p>
+            <a:endParaRPr/>
+          </a:p>
         </p:txBody>
       </p:sp>
       <p:sp>
@@ -418,36 +442,7 @@
           <a:bodyPr/>
           <a:lstStyle/>
           <a:p>
-            <a:pPr marL="0" marR="0" lvl="0" indent="0" algn="l" defTabSz="914400" eaLnBrk="1" fontAlgn="auto" latinLnBrk="0" hangingPunct="1">
-              <a:lnSpc>
-                <a:spcPct val="100000"/>
-              </a:lnSpc>
-              <a:spcBef>
-                <a:spcPts val="0"/>
-              </a:spcBef>
-              <a:spcAft>
-                <a:spcPts val="0"/>
-              </a:spcAft>
-              <a:buClrTx/>
-              <a:buSzTx/>
-              <a:buFontTx/>
-              <a:buNone/>
-              <a:defRPr/>
-            </a:pPr>
-            <a:endParaRPr kumimoji="0" sz="1800" b="0" i="0" u="none" strike="noStrike" kern="1200" cap="none" spc="0" normalizeH="0" baseline="0" noProof="0">
-              <a:ln>
-                <a:noFill/>
-              </a:ln>
-              <a:solidFill>
-                <a:prstClr val="black"/>
-              </a:solidFill>
-              <a:effectLst/>
-              <a:uLnTx/>
-              <a:uFillTx/>
-              <a:latin typeface="Arial" panose="020B0604020202020204"/>
-              <a:ea typeface="华文中宋" panose="02010600040101010101" charset="-122"/>
-              <a:cs typeface="+mn-cs"/>
-            </a:endParaRPr>
+            <a:endParaRPr/>
           </a:p>
         </p:txBody>
       </p:sp>
@@ -502,7 +497,9 @@
         <p:txBody>
           <a:bodyPr/>
           <a:lstStyle/>
-          <a:p/>
+          <a:p>
+            <a:endParaRPr/>
+          </a:p>
         </p:txBody>
       </p:sp>
       <p:sp>
@@ -519,7 +516,38 @@
         <p:txBody>
           <a:bodyPr/>
           <a:lstStyle/>
-          <a:p/>
+          <a:p>
+            <a:pPr marL="0" marR="0" lvl="0" indent="0" algn="l" defTabSz="914400" eaLnBrk="1" fontAlgn="auto" latinLnBrk="0" hangingPunct="1">
+              <a:lnSpc>
+                <a:spcPct val="100000"/>
+              </a:lnSpc>
+              <a:spcBef>
+                <a:spcPts val="0"/>
+              </a:spcBef>
+              <a:spcAft>
+                <a:spcPts val="0"/>
+              </a:spcAft>
+              <a:buClrTx/>
+              <a:buSzTx/>
+              <a:buFontTx/>
+              <a:buNone/>
+              <a:defRPr/>
+            </a:pPr>
+            <a:endParaRPr kumimoji="0" sz="1800" b="0" i="0" u="none" strike="noStrike" kern="1200" cap="none" spc="0" normalizeH="0" baseline="0" noProof="0">
+              <a:ln>
+                <a:noFill/>
+              </a:ln>
+              <a:solidFill>
+                <a:prstClr val="black"/>
+              </a:solidFill>
+              <a:effectLst/>
+              <a:uLnTx/>
+              <a:uFillTx/>
+              <a:latin typeface="Arial" panose="020B0604020202020204"/>
+              <a:ea typeface="华文中宋" panose="02010600040101010101" charset="-122"/>
+              <a:cs typeface="+mn-cs"/>
+            </a:endParaRPr>
+          </a:p>
         </p:txBody>
       </p:sp>
     </p:spTree>
@@ -573,7 +601,9 @@
         <p:txBody>
           <a:bodyPr/>
           <a:lstStyle/>
-          <a:p/>
+          <a:p>
+            <a:endParaRPr/>
+          </a:p>
         </p:txBody>
       </p:sp>
       <p:sp>
@@ -591,36 +621,7 @@
           <a:bodyPr/>
           <a:lstStyle/>
           <a:p>
-            <a:pPr marL="0" marR="0" lvl="0" indent="0" algn="l" defTabSz="914400" eaLnBrk="1" fontAlgn="auto" latinLnBrk="0" hangingPunct="1">
-              <a:lnSpc>
-                <a:spcPct val="100000"/>
-              </a:lnSpc>
-              <a:spcBef>
-                <a:spcPts val="0"/>
-              </a:spcBef>
-              <a:spcAft>
-                <a:spcPts val="0"/>
-              </a:spcAft>
-              <a:buClrTx/>
-              <a:buSzTx/>
-              <a:buFontTx/>
-              <a:buNone/>
-              <a:defRPr/>
-            </a:pPr>
-            <a:endParaRPr kumimoji="0" sz="1800" b="0" i="0" u="none" strike="noStrike" kern="1200" cap="none" spc="0" normalizeH="0" baseline="0" noProof="0">
-              <a:ln>
-                <a:noFill/>
-              </a:ln>
-              <a:solidFill>
-                <a:prstClr val="black"/>
-              </a:solidFill>
-              <a:effectLst/>
-              <a:uLnTx/>
-              <a:uFillTx/>
-              <a:latin typeface="Arial" panose="020B0604020202020204"/>
-              <a:ea typeface="华文中宋" panose="02010600040101010101" charset="-122"/>
-              <a:cs typeface="+mn-cs"/>
-            </a:endParaRPr>
+            <a:endParaRPr/>
           </a:p>
         </p:txBody>
       </p:sp>
@@ -675,7 +676,9 @@
         <p:txBody>
           <a:bodyPr/>
           <a:lstStyle/>
-          <a:p/>
+          <a:p>
+            <a:endParaRPr/>
+          </a:p>
         </p:txBody>
       </p:sp>
       <p:sp>
@@ -692,7 +695,38 @@
         <p:txBody>
           <a:bodyPr/>
           <a:lstStyle/>
-          <a:p/>
+          <a:p>
+            <a:pPr marL="0" marR="0" lvl="0" indent="0" algn="l" defTabSz="914400" eaLnBrk="1" fontAlgn="auto" latinLnBrk="0" hangingPunct="1">
+              <a:lnSpc>
+                <a:spcPct val="100000"/>
+              </a:lnSpc>
+              <a:spcBef>
+                <a:spcPts val="0"/>
+              </a:spcBef>
+              <a:spcAft>
+                <a:spcPts val="0"/>
+              </a:spcAft>
+              <a:buClrTx/>
+              <a:buSzTx/>
+              <a:buFontTx/>
+              <a:buNone/>
+              <a:defRPr/>
+            </a:pPr>
+            <a:endParaRPr kumimoji="0" sz="1800" b="0" i="0" u="none" strike="noStrike" kern="1200" cap="none" spc="0" normalizeH="0" baseline="0" noProof="0">
+              <a:ln>
+                <a:noFill/>
+              </a:ln>
+              <a:solidFill>
+                <a:prstClr val="black"/>
+              </a:solidFill>
+              <a:effectLst/>
+              <a:uLnTx/>
+              <a:uFillTx/>
+              <a:latin typeface="Arial" panose="020B0604020202020204"/>
+              <a:ea typeface="华文中宋" panose="02010600040101010101" charset="-122"/>
+              <a:cs typeface="+mn-cs"/>
+            </a:endParaRPr>
+          </a:p>
         </p:txBody>
       </p:sp>
     </p:spTree>
@@ -746,7 +780,9 @@
         <p:txBody>
           <a:bodyPr/>
           <a:lstStyle/>
-          <a:p/>
+          <a:p>
+            <a:endParaRPr/>
+          </a:p>
         </p:txBody>
       </p:sp>
       <p:sp>
@@ -764,36 +800,7 @@
           <a:bodyPr/>
           <a:lstStyle/>
           <a:p>
-            <a:pPr marL="0" marR="0" lvl="0" indent="0" algn="l" defTabSz="914400" eaLnBrk="1" fontAlgn="auto" latinLnBrk="0" hangingPunct="1">
-              <a:lnSpc>
-                <a:spcPct val="100000"/>
-              </a:lnSpc>
-              <a:spcBef>
-                <a:spcPts val="0"/>
-              </a:spcBef>
-              <a:spcAft>
-                <a:spcPts val="0"/>
-              </a:spcAft>
-              <a:buClrTx/>
-              <a:buSzTx/>
-              <a:buFontTx/>
-              <a:buNone/>
-              <a:defRPr/>
-            </a:pPr>
-            <a:endParaRPr kumimoji="0" sz="1800" b="0" i="0" u="none" strike="noStrike" kern="1200" cap="none" spc="0" normalizeH="0" baseline="0" noProof="0">
-              <a:ln>
-                <a:noFill/>
-              </a:ln>
-              <a:solidFill>
-                <a:prstClr val="black"/>
-              </a:solidFill>
-              <a:effectLst/>
-              <a:uLnTx/>
-              <a:uFillTx/>
-              <a:latin typeface="Arial" panose="020B0604020202020204"/>
-              <a:ea typeface="华文中宋" panose="02010600040101010101" charset="-122"/>
-              <a:cs typeface="+mn-cs"/>
-            </a:endParaRPr>
+            <a:endParaRPr/>
           </a:p>
         </p:txBody>
       </p:sp>
@@ -848,7 +855,9 @@
         <p:txBody>
           <a:bodyPr/>
           <a:lstStyle/>
-          <a:p/>
+          <a:p>
+            <a:endParaRPr/>
+          </a:p>
         </p:txBody>
       </p:sp>
       <p:sp>
@@ -865,7 +874,38 @@
         <p:txBody>
           <a:bodyPr/>
           <a:lstStyle/>
-          <a:p/>
+          <a:p>
+            <a:pPr marL="0" marR="0" lvl="0" indent="0" algn="l" defTabSz="914400" eaLnBrk="1" fontAlgn="auto" latinLnBrk="0" hangingPunct="1">
+              <a:lnSpc>
+                <a:spcPct val="100000"/>
+              </a:lnSpc>
+              <a:spcBef>
+                <a:spcPts val="0"/>
+              </a:spcBef>
+              <a:spcAft>
+                <a:spcPts val="0"/>
+              </a:spcAft>
+              <a:buClrTx/>
+              <a:buSzTx/>
+              <a:buFontTx/>
+              <a:buNone/>
+              <a:defRPr/>
+            </a:pPr>
+            <a:endParaRPr kumimoji="0" sz="1800" b="0" i="0" u="none" strike="noStrike" kern="1200" cap="none" spc="0" normalizeH="0" baseline="0" noProof="0">
+              <a:ln>
+                <a:noFill/>
+              </a:ln>
+              <a:solidFill>
+                <a:prstClr val="black"/>
+              </a:solidFill>
+              <a:effectLst/>
+              <a:uLnTx/>
+              <a:uFillTx/>
+              <a:latin typeface="Arial" panose="020B0604020202020204"/>
+              <a:ea typeface="华文中宋" panose="02010600040101010101" charset="-122"/>
+              <a:cs typeface="+mn-cs"/>
+            </a:endParaRPr>
+          </a:p>
         </p:txBody>
       </p:sp>
     </p:spTree>
@@ -919,7 +959,9 @@
         <p:txBody>
           <a:bodyPr/>
           <a:lstStyle/>
-          <a:p/>
+          <a:p>
+            <a:endParaRPr/>
+          </a:p>
         </p:txBody>
       </p:sp>
       <p:sp>
@@ -937,36 +979,7 @@
           <a:bodyPr/>
           <a:lstStyle/>
           <a:p>
-            <a:pPr marL="0" marR="0" lvl="0" indent="0" algn="l" defTabSz="914400" eaLnBrk="1" fontAlgn="auto" latinLnBrk="0" hangingPunct="1">
-              <a:lnSpc>
-                <a:spcPct val="100000"/>
-              </a:lnSpc>
-              <a:spcBef>
-                <a:spcPts val="0"/>
-              </a:spcBef>
-              <a:spcAft>
-                <a:spcPts val="0"/>
-              </a:spcAft>
-              <a:buClrTx/>
-              <a:buSzTx/>
-              <a:buFontTx/>
-              <a:buNone/>
-              <a:defRPr/>
-            </a:pPr>
-            <a:endParaRPr kumimoji="0" sz="1800" b="0" i="0" u="none" strike="noStrike" kern="1200" cap="none" spc="0" normalizeH="0" baseline="0" noProof="0">
-              <a:ln>
-                <a:noFill/>
-              </a:ln>
-              <a:solidFill>
-                <a:prstClr val="black"/>
-              </a:solidFill>
-              <a:effectLst/>
-              <a:uLnTx/>
-              <a:uFillTx/>
-              <a:latin typeface="Arial" panose="020B0604020202020204"/>
-              <a:ea typeface="华文中宋" panose="02010600040101010101" charset="-122"/>
-              <a:cs typeface="+mn-cs"/>
-            </a:endParaRPr>
+            <a:endParaRPr/>
           </a:p>
         </p:txBody>
       </p:sp>
@@ -1021,7 +1034,9 @@
         <p:txBody>
           <a:bodyPr/>
           <a:lstStyle/>
-          <a:p/>
+          <a:p>
+            <a:endParaRPr/>
+          </a:p>
         </p:txBody>
       </p:sp>
       <p:sp>
@@ -1038,7 +1053,38 @@
         <p:txBody>
           <a:bodyPr/>
           <a:lstStyle/>
-          <a:p/>
+          <a:p>
+            <a:pPr marL="0" marR="0" lvl="0" indent="0" algn="l" defTabSz="914400" eaLnBrk="1" fontAlgn="auto" latinLnBrk="0" hangingPunct="1">
+              <a:lnSpc>
+                <a:spcPct val="100000"/>
+              </a:lnSpc>
+              <a:spcBef>
+                <a:spcPts val="0"/>
+              </a:spcBef>
+              <a:spcAft>
+                <a:spcPts val="0"/>
+              </a:spcAft>
+              <a:buClrTx/>
+              <a:buSzTx/>
+              <a:buFontTx/>
+              <a:buNone/>
+              <a:defRPr/>
+            </a:pPr>
+            <a:endParaRPr kumimoji="0" sz="1800" b="0" i="0" u="none" strike="noStrike" kern="1200" cap="none" spc="0" normalizeH="0" baseline="0" noProof="0">
+              <a:ln>
+                <a:noFill/>
+              </a:ln>
+              <a:solidFill>
+                <a:prstClr val="black"/>
+              </a:solidFill>
+              <a:effectLst/>
+              <a:uLnTx/>
+              <a:uFillTx/>
+              <a:latin typeface="Arial" panose="020B0604020202020204"/>
+              <a:ea typeface="华文中宋" panose="02010600040101010101" charset="-122"/>
+              <a:cs typeface="+mn-cs"/>
+            </a:endParaRPr>
+          </a:p>
         </p:txBody>
       </p:sp>
     </p:spTree>
@@ -1092,7 +1138,9 @@
         <p:txBody>
           <a:bodyPr/>
           <a:lstStyle/>
-          <a:p/>
+          <a:p>
+            <a:endParaRPr/>
+          </a:p>
         </p:txBody>
       </p:sp>
       <p:sp>
@@ -1109,7 +1157,84 @@
         <p:txBody>
           <a:bodyPr/>
           <a:lstStyle/>
-          <a:p/>
+          <a:p>
+            <a:endParaRPr/>
+          </a:p>
+        </p:txBody>
+      </p:sp>
+    </p:spTree>
+  </p:cSld>
+  <p:clrMapOvr>
+    <a:masterClrMapping/>
+  </p:clrMapOvr>
+</p:notes>
+</file>
+
+<file path=ppt/notesSlides/notesSlide19.xml><?xml version="1.0" encoding="utf-8"?>
+<p:notes xmlns:a="http://schemas.openxmlformats.org/drawingml/2006/main" xmlns:r="http://schemas.openxmlformats.org/officeDocument/2006/relationships" xmlns:p="http://schemas.openxmlformats.org/presentationml/2006/main">
+  <p:cSld>
+    <p:spTree>
+      <p:nvGrpSpPr>
+        <p:cNvPr id="1" name=""/>
+        <p:cNvGrpSpPr/>
+        <p:nvPr/>
+      </p:nvGrpSpPr>
+      <p:grpSpPr>
+        <a:xfrm>
+          <a:off x="0" y="0"/>
+          <a:ext cx="0" cy="0"/>
+          <a:chOff x="0" y="0"/>
+          <a:chExt cx="0" cy="0"/>
+        </a:xfrm>
+      </p:grpSpPr>
+      <p:sp>
+        <p:nvSpPr>
+          <p:cNvPr id="2" name="Slide Image Placeholder 1"/>
+          <p:cNvSpPr>
+            <a:spLocks noGrp="1" noRot="1" noChangeAspect="1"/>
+          </p:cNvSpPr>
+          <p:nvPr>
+            <p:ph type="sldImg"/>
+          </p:nvPr>
+        </p:nvSpPr>
+        <p:spPr/>
+      </p:sp>
+      <p:sp>
+        <p:nvSpPr>
+          <p:cNvPr id="3" name="Notes Placeholder 2"/>
+          <p:cNvSpPr>
+            <a:spLocks noGrp="1"/>
+          </p:cNvSpPr>
+          <p:nvPr>
+            <p:ph type="body" idx="1"/>
+          </p:nvPr>
+        </p:nvSpPr>
+        <p:spPr/>
+        <p:txBody>
+          <a:bodyPr/>
+          <a:lstStyle/>
+          <a:p>
+            <a:endParaRPr/>
+          </a:p>
+        </p:txBody>
+      </p:sp>
+      <p:sp>
+        <p:nvSpPr>
+          <p:cNvPr id="4" name="Slide Number Placeholder 3"/>
+          <p:cNvSpPr>
+            <a:spLocks noGrp="1"/>
+          </p:cNvSpPr>
+          <p:nvPr>
+            <p:ph type="sldNum" idx="5"/>
+          </p:nvPr>
+        </p:nvSpPr>
+        <p:spPr/>
+        <p:txBody>
+          <a:bodyPr/>
+          <a:lstStyle/>
+          <a:p>
+            <a:endParaRPr/>
+          </a:p>
         </p:txBody>
       </p:sp>
     </p:spTree>
@@ -1163,7 +1288,9 @@
         <p:txBody>
           <a:bodyPr/>
           <a:lstStyle/>
-          <a:p/>
+          <a:p>
+            <a:endParaRPr/>
+          </a:p>
         </p:txBody>
       </p:sp>
       <p:sp>
@@ -1265,7 +1392,9 @@
         <p:txBody>
           <a:bodyPr/>
           <a:lstStyle/>
-          <a:p/>
+          <a:p>
+            <a:endParaRPr/>
+          </a:p>
         </p:txBody>
       </p:sp>
       <p:sp>
@@ -1282,10 +1411,17 @@
         <p:txBody>
           <a:bodyPr/>
           <a:lstStyle/>
-          <a:p/>
+          <a:p>
+            <a:endParaRPr/>
+          </a:p>
         </p:txBody>
       </p:sp>
     </p:spTree>
+    <p:extLst>
+      <p:ext uri="{BB962C8B-B14F-4D97-AF65-F5344CB8AC3E}">
+        <p14:creationId xmlns:p14="http://schemas.microsoft.com/office/powerpoint/2010/main" val="1375943346"/>
+      </p:ext>
+    </p:extLst>
   </p:cSld>
   <p:clrMapOvr>
     <a:masterClrMapping/>
@@ -1336,7 +1472,9 @@
         <p:txBody>
           <a:bodyPr/>
           <a:lstStyle/>
-          <a:p/>
+          <a:p>
+            <a:endParaRPr/>
+          </a:p>
         </p:txBody>
       </p:sp>
       <p:sp>
@@ -1353,7 +1491,9 @@
         <p:txBody>
           <a:bodyPr/>
           <a:lstStyle/>
-          <a:p/>
+          <a:p>
+            <a:endParaRPr/>
+          </a:p>
         </p:txBody>
       </p:sp>
     </p:spTree>
@@ -1407,7 +1547,9 @@
         <p:txBody>
           <a:bodyPr/>
           <a:lstStyle/>
-          <a:p/>
+          <a:p>
+            <a:endParaRPr/>
+          </a:p>
         </p:txBody>
       </p:sp>
       <p:sp>
@@ -1424,7 +1566,9 @@
         <p:txBody>
           <a:bodyPr/>
           <a:lstStyle/>
-          <a:p/>
+          <a:p>
+            <a:endParaRPr/>
+          </a:p>
         </p:txBody>
       </p:sp>
     </p:spTree>
@@ -1478,7 +1622,9 @@
         <p:txBody>
           <a:bodyPr/>
           <a:lstStyle/>
-          <a:p/>
+          <a:p>
+            <a:endParaRPr/>
+          </a:p>
         </p:txBody>
       </p:sp>
       <p:sp>
@@ -1495,7 +1641,9 @@
         <p:txBody>
           <a:bodyPr/>
           <a:lstStyle/>
-          <a:p/>
+          <a:p>
+            <a:endParaRPr/>
+          </a:p>
         </p:txBody>
       </p:sp>
     </p:spTree>
@@ -1549,7 +1697,9 @@
         <p:txBody>
           <a:bodyPr/>
           <a:lstStyle/>
-          <a:p/>
+          <a:p>
+            <a:endParaRPr/>
+          </a:p>
         </p:txBody>
       </p:sp>
       <p:sp>
@@ -1566,7 +1716,9 @@
         <p:txBody>
           <a:bodyPr/>
           <a:lstStyle/>
-          <a:p/>
+          <a:p>
+            <a:endParaRPr/>
+          </a:p>
         </p:txBody>
       </p:sp>
     </p:spTree>
@@ -1620,7 +1772,9 @@
         <p:txBody>
           <a:bodyPr/>
           <a:lstStyle/>
-          <a:p/>
+          <a:p>
+            <a:endParaRPr/>
+          </a:p>
         </p:txBody>
       </p:sp>
       <p:sp>
@@ -1637,7 +1791,9 @@
         <p:txBody>
           <a:bodyPr/>
           <a:lstStyle/>
-          <a:p/>
+          <a:p>
+            <a:endParaRPr/>
+          </a:p>
         </p:txBody>
       </p:sp>
     </p:spTree>
@@ -1691,7 +1847,9 @@
         <p:txBody>
           <a:bodyPr/>
           <a:lstStyle/>
-          <a:p/>
+          <a:p>
+            <a:endParaRPr/>
+          </a:p>
         </p:txBody>
       </p:sp>
       <p:sp>
@@ -1708,7 +1866,9 @@
         <p:txBody>
           <a:bodyPr/>
           <a:lstStyle/>
-          <a:p/>
+          <a:p>
+            <a:endParaRPr/>
+          </a:p>
         </p:txBody>
       </p:sp>
     </p:spTree>
@@ -1846,7 +2006,8 @@
           <a:lstStyle/>
           <a:p>
             <a:fld id="{A653A8F1-9EDF-49EF-A14D-E495AD864F8A}" type="datetimeFigureOut">
-              <a:rPr/>
+              <a:rPr lang="zh-CN" altLang="en-US"/>
+              <a:t>2026/6/17</a:t>
             </a:fld>
             <a:endParaRPr/>
           </a:p>
@@ -1866,7 +2027,9 @@
         <p:txBody>
           <a:bodyPr/>
           <a:lstStyle/>
-          <a:p/>
+          <a:p>
+            <a:endParaRPr/>
+          </a:p>
         </p:txBody>
       </p:sp>
       <p:sp>
@@ -1886,6 +2049,7 @@
           <a:p>
             <a:fld id="{43A13857-8FE2-426A-A37B-64DF65062EF2}" type="slidenum">
               <a:rPr/>
+              <a:t>‹#›</a:t>
             </a:fld>
             <a:endParaRPr/>
           </a:p>
@@ -2009,7 +2173,8 @@
           <a:lstStyle/>
           <a:p>
             <a:fld id="{A653A8F1-9EDF-49EF-A14D-E495AD864F8A}" type="datetimeFigureOut">
-              <a:rPr/>
+              <a:rPr lang="zh-CN" altLang="en-US"/>
+              <a:t>2026/6/17</a:t>
             </a:fld>
             <a:endParaRPr/>
           </a:p>
@@ -2029,7 +2194,9 @@
         <p:txBody>
           <a:bodyPr/>
           <a:lstStyle/>
-          <a:p/>
+          <a:p>
+            <a:endParaRPr/>
+          </a:p>
         </p:txBody>
       </p:sp>
       <p:sp>
@@ -2049,6 +2216,7 @@
           <a:p>
             <a:fld id="{43A13857-8FE2-426A-A37B-64DF65062EF2}" type="slidenum">
               <a:rPr/>
+              <a:t>‹#›</a:t>
             </a:fld>
             <a:endParaRPr/>
           </a:p>
@@ -2182,7 +2350,8 @@
           <a:lstStyle/>
           <a:p>
             <a:fld id="{A653A8F1-9EDF-49EF-A14D-E495AD864F8A}" type="datetimeFigureOut">
-              <a:rPr/>
+              <a:rPr lang="zh-CN" altLang="en-US"/>
+              <a:t>2026/6/17</a:t>
             </a:fld>
             <a:endParaRPr/>
           </a:p>
@@ -2202,7 +2371,9 @@
         <p:txBody>
           <a:bodyPr/>
           <a:lstStyle/>
-          <a:p/>
+          <a:p>
+            <a:endParaRPr/>
+          </a:p>
         </p:txBody>
       </p:sp>
       <p:sp>
@@ -2222,6 +2393,7 @@
           <a:p>
             <a:fld id="{43A13857-8FE2-426A-A37B-64DF65062EF2}" type="slidenum">
               <a:rPr/>
+              <a:t>‹#›</a:t>
             </a:fld>
             <a:endParaRPr/>
           </a:p>
@@ -2345,7 +2517,8 @@
           <a:lstStyle/>
           <a:p>
             <a:fld id="{A653A8F1-9EDF-49EF-A14D-E495AD864F8A}" type="datetimeFigureOut">
-              <a:rPr/>
+              <a:rPr lang="zh-CN" altLang="en-US"/>
+              <a:t>2026/6/17</a:t>
             </a:fld>
             <a:endParaRPr/>
           </a:p>
@@ -2365,7 +2538,9 @@
         <p:txBody>
           <a:bodyPr/>
           <a:lstStyle/>
-          <a:p/>
+          <a:p>
+            <a:endParaRPr/>
+          </a:p>
         </p:txBody>
       </p:sp>
       <p:sp>
@@ -2385,6 +2560,7 @@
           <a:p>
             <a:fld id="{43A13857-8FE2-426A-A37B-64DF65062EF2}" type="slidenum">
               <a:rPr/>
+              <a:t>‹#›</a:t>
             </a:fld>
             <a:endParaRPr/>
           </a:p>
@@ -2582,7 +2758,8 @@
           <a:lstStyle/>
           <a:p>
             <a:fld id="{A653A8F1-9EDF-49EF-A14D-E495AD864F8A}" type="datetimeFigureOut">
-              <a:rPr/>
+              <a:rPr lang="zh-CN" altLang="en-US"/>
+              <a:t>2026/6/17</a:t>
             </a:fld>
             <a:endParaRPr/>
           </a:p>
@@ -2602,7 +2779,9 @@
         <p:txBody>
           <a:bodyPr/>
           <a:lstStyle/>
-          <a:p/>
+          <a:p>
+            <a:endParaRPr/>
+          </a:p>
         </p:txBody>
       </p:sp>
       <p:sp>
@@ -2622,6 +2801,7 @@
           <a:p>
             <a:fld id="{43A13857-8FE2-426A-A37B-64DF65062EF2}" type="slidenum">
               <a:rPr/>
+              <a:t>‹#›</a:t>
             </a:fld>
             <a:endParaRPr/>
           </a:p>
@@ -2811,7 +2991,8 @@
           <a:lstStyle/>
           <a:p>
             <a:fld id="{A653A8F1-9EDF-49EF-A14D-E495AD864F8A}" type="datetimeFigureOut">
-              <a:rPr/>
+              <a:rPr lang="zh-CN" altLang="en-US"/>
+              <a:t>2026/6/17</a:t>
             </a:fld>
             <a:endParaRPr/>
           </a:p>
@@ -2831,7 +3012,9 @@
         <p:txBody>
           <a:bodyPr/>
           <a:lstStyle/>
-          <a:p/>
+          <a:p>
+            <a:endParaRPr/>
+          </a:p>
         </p:txBody>
       </p:sp>
       <p:sp>
@@ -2851,6 +3034,7 @@
           <a:p>
             <a:fld id="{43A13857-8FE2-426A-A37B-64DF65062EF2}" type="slidenum">
               <a:rPr/>
+              <a:t>‹#›</a:t>
             </a:fld>
             <a:endParaRPr/>
           </a:p>
@@ -3177,7 +3361,8 @@
           <a:lstStyle/>
           <a:p>
             <a:fld id="{A653A8F1-9EDF-49EF-A14D-E495AD864F8A}" type="datetimeFigureOut">
-              <a:rPr/>
+              <a:rPr lang="zh-CN" altLang="en-US"/>
+              <a:t>2026/6/17</a:t>
             </a:fld>
             <a:endParaRPr/>
           </a:p>
@@ -3197,7 +3382,9 @@
         <p:txBody>
           <a:bodyPr/>
           <a:lstStyle/>
-          <a:p/>
+          <a:p>
+            <a:endParaRPr/>
+          </a:p>
         </p:txBody>
       </p:sp>
       <p:sp>
@@ -3217,6 +3404,7 @@
           <a:p>
             <a:fld id="{43A13857-8FE2-426A-A37B-64DF65062EF2}" type="slidenum">
               <a:rPr/>
+              <a:t>‹#›</a:t>
             </a:fld>
             <a:endParaRPr/>
           </a:p>
@@ -3284,7 +3472,8 @@
           <a:lstStyle/>
           <a:p>
             <a:fld id="{A653A8F1-9EDF-49EF-A14D-E495AD864F8A}" type="datetimeFigureOut">
-              <a:rPr/>
+              <a:rPr lang="zh-CN" altLang="en-US"/>
+              <a:t>2026/6/17</a:t>
             </a:fld>
             <a:endParaRPr/>
           </a:p>
@@ -3304,7 +3493,9 @@
         <p:txBody>
           <a:bodyPr/>
           <a:lstStyle/>
-          <a:p/>
+          <a:p>
+            <a:endParaRPr/>
+          </a:p>
         </p:txBody>
       </p:sp>
       <p:sp>
@@ -3324,6 +3515,7 @@
           <a:p>
             <a:fld id="{43A13857-8FE2-426A-A37B-64DF65062EF2}" type="slidenum">
               <a:rPr/>
+              <a:t>‹#›</a:t>
             </a:fld>
             <a:endParaRPr/>
           </a:p>
@@ -3370,7 +3562,8 @@
           <a:lstStyle/>
           <a:p>
             <a:fld id="{A653A8F1-9EDF-49EF-A14D-E495AD864F8A}" type="datetimeFigureOut">
-              <a:rPr/>
+              <a:rPr lang="zh-CN" altLang="en-US"/>
+              <a:t>2026/6/17</a:t>
             </a:fld>
             <a:endParaRPr/>
           </a:p>
@@ -3390,7 +3583,9 @@
         <p:txBody>
           <a:bodyPr/>
           <a:lstStyle/>
-          <a:p/>
+          <a:p>
+            <a:endParaRPr/>
+          </a:p>
         </p:txBody>
       </p:sp>
       <p:sp>
@@ -3410,6 +3605,7 @@
           <a:p>
             <a:fld id="{43A13857-8FE2-426A-A37B-64DF65062EF2}" type="slidenum">
               <a:rPr/>
+              <a:t>‹#›</a:t>
             </a:fld>
             <a:endParaRPr/>
           </a:p>
@@ -3651,7 +3847,8 @@
           <a:lstStyle/>
           <a:p>
             <a:fld id="{A653A8F1-9EDF-49EF-A14D-E495AD864F8A}" type="datetimeFigureOut">
-              <a:rPr/>
+              <a:rPr lang="zh-CN" altLang="en-US"/>
+              <a:t>2026/6/17</a:t>
             </a:fld>
             <a:endParaRPr/>
           </a:p>
@@ -3671,7 +3868,9 @@
         <p:txBody>
           <a:bodyPr/>
           <a:lstStyle/>
-          <a:p/>
+          <a:p>
+            <a:endParaRPr/>
+          </a:p>
         </p:txBody>
       </p:sp>
       <p:sp>
@@ -3691,6 +3890,7 @@
           <a:p>
             <a:fld id="{43A13857-8FE2-426A-A37B-64DF65062EF2}" type="slidenum">
               <a:rPr/>
+              <a:t>‹#›</a:t>
             </a:fld>
             <a:endParaRPr/>
           </a:p>
@@ -3808,7 +4008,9 @@
               <a:defRPr sz="2000"/>
             </a:lvl9pPr>
           </a:lstStyle>
-          <a:p/>
+          <a:p>
+            <a:endParaRPr/>
+          </a:p>
         </p:txBody>
       </p:sp>
       <p:sp>
@@ -3893,7 +4095,8 @@
           <a:lstStyle/>
           <a:p>
             <a:fld id="{A653A8F1-9EDF-49EF-A14D-E495AD864F8A}" type="datetimeFigureOut">
-              <a:rPr/>
+              <a:rPr lang="zh-CN" altLang="en-US"/>
+              <a:t>2026/6/17</a:t>
             </a:fld>
             <a:endParaRPr/>
           </a:p>
@@ -3913,7 +4116,9 @@
         <p:txBody>
           <a:bodyPr/>
           <a:lstStyle/>
-          <a:p/>
+          <a:p>
+            <a:endParaRPr/>
+          </a:p>
         </p:txBody>
       </p:sp>
       <p:sp>
@@ -3933,6 +4138,7 @@
           <a:p>
             <a:fld id="{43A13857-8FE2-426A-A37B-64DF65062EF2}" type="slidenum">
               <a:rPr/>
+              <a:t>‹#›</a:t>
             </a:fld>
             <a:endParaRPr/>
           </a:p>
@@ -4100,7 +4306,8 @@
           </a:lstStyle>
           <a:p>
             <a:fld id="{A653A8F1-9EDF-49EF-A14D-E495AD864F8A}" type="datetimeFigureOut">
-              <a:rPr/>
+              <a:rPr lang="zh-CN" altLang="en-US"/>
+              <a:t>2026/6/17</a:t>
             </a:fld>
             <a:endParaRPr/>
           </a:p>
@@ -4139,7 +4346,9 @@
               </a:defRPr>
             </a:lvl1pPr>
           </a:lstStyle>
-          <a:p/>
+          <a:p>
+            <a:endParaRPr/>
+          </a:p>
         </p:txBody>
       </p:sp>
       <p:sp>
@@ -4178,6 +4387,7 @@
           <a:p>
             <a:fld id="{43A13857-8FE2-426A-A37B-64DF65062EF2}" type="slidenum">
               <a:rPr/>
+              <a:t>‹#›</a:t>
             </a:fld>
             <a:endParaRPr/>
           </a:p>
@@ -4550,6 +4760,7 @@
             <a:pPr algn="ctr">
               <a:buNone/>
             </a:pPr>
+            <a:endParaRPr/>
           </a:p>
         </p:txBody>
       </p:sp>
@@ -4602,14 +4813,6 @@
               </a:rPr>
               <a:t>总结</a:t>
             </a:r>
-            <a:endParaRPr lang="zh-CN" altLang="en-US" sz="4400" dirty="0">
-              <a:solidFill>
-                <a:schemeClr val="bg1"/>
-              </a:solidFill>
-              <a:latin typeface="字魂17号-萌趣果冻体"/>
-              <a:ea typeface="字魂17号-萌趣果冻体"/>
-              <a:cs typeface="字魂17号-萌趣果冻体"/>
-            </a:endParaRPr>
           </a:p>
         </p:txBody>
       </p:sp>
@@ -4702,6 +4905,7 @@
             <a:pPr algn="ctr">
               <a:buNone/>
             </a:pPr>
+            <a:endParaRPr/>
           </a:p>
         </p:txBody>
       </p:sp>
@@ -4751,6 +4955,7 @@
             <a:pPr algn="ctr">
               <a:buNone/>
             </a:pPr>
+            <a:endParaRPr/>
           </a:p>
         </p:txBody>
       </p:sp>
@@ -4800,6 +5005,7 @@
             <a:pPr algn="ctr">
               <a:buNone/>
             </a:pPr>
+            <a:endParaRPr/>
           </a:p>
         </p:txBody>
       </p:sp>
@@ -4849,6 +5055,7 @@
             <a:pPr algn="ctr">
               <a:buNone/>
             </a:pPr>
+            <a:endParaRPr/>
           </a:p>
         </p:txBody>
       </p:sp>
@@ -4900,6 +5107,7 @@
             <a:pPr algn="ctr">
               <a:buNone/>
             </a:pPr>
+            <a:endParaRPr/>
           </a:p>
         </p:txBody>
       </p:sp>
@@ -4912,7 +5120,7 @@
           <p:nvPr/>
         </p:nvPicPr>
         <p:blipFill>
-          <a:blip r:embed="rId1"/>
+          <a:blip r:embed="rId3"/>
           <a:stretch>
             <a:fillRect/>
           </a:stretch>
@@ -4957,11 +5165,6 @@
               </a:rPr>
               <a:t>小组成员：李嘉轩 刘义群 王秀崧 汤语涵 谢羿衡 唐熙雷 邢泽雷</a:t>
             </a:r>
-            <a:endParaRPr lang="zh-CN" altLang="en-US" dirty="0">
-              <a:solidFill>
-                <a:schemeClr val="bg1"/>
-              </a:solidFill>
-            </a:endParaRPr>
           </a:p>
         </p:txBody>
       </p:sp>
@@ -4974,6 +5177,988 @@
 </file>
 
 <file path=ppt/slides/slide10.xml><?xml version="1.0" encoding="utf-8"?>
+<p:sld xmlns:a="http://schemas.openxmlformats.org/drawingml/2006/main" xmlns:r="http://schemas.openxmlformats.org/officeDocument/2006/relationships" xmlns:p="http://schemas.openxmlformats.org/presentationml/2006/main">
+  <p:cSld>
+    <p:spTree>
+      <p:nvGrpSpPr>
+        <p:cNvPr id="1" name=""/>
+        <p:cNvGrpSpPr/>
+        <p:nvPr/>
+      </p:nvGrpSpPr>
+      <p:grpSpPr>
+        <a:xfrm>
+          <a:off x="0" y="0"/>
+          <a:ext cx="0" cy="0"/>
+          <a:chOff x="0" y="0"/>
+          <a:chExt cx="0" cy="0"/>
+        </a:xfrm>
+      </p:grpSpPr>
+      <p:sp>
+        <p:nvSpPr>
+          <p:cNvPr id="13" name="矩形 12"/>
+          <p:cNvSpPr>
+            <a:spLocks noGrp="1"/>
+          </p:cNvSpPr>
+          <p:nvPr/>
+        </p:nvSpPr>
+        <p:spPr>
+          <a:xfrm>
+            <a:off x="0" y="0"/>
+            <a:ext cx="12192000" cy="114300"/>
+          </a:xfrm>
+          <a:prstGeom prst="rect">
+            <a:avLst/>
+          </a:prstGeom>
+          <a:solidFill>
+            <a:srgbClr val="2D4A33"/>
+          </a:solidFill>
+          <a:ln w="0">
+            <a:solidFill>
+              <a:srgbClr val="2D4A33"/>
+            </a:solidFill>
+            <a:prstDash val="solid"/>
+          </a:ln>
+        </p:spPr>
+      </p:sp>
+      <p:sp>
+        <p:nvSpPr>
+          <p:cNvPr id="2" name="矩形 1"/>
+          <p:cNvSpPr>
+            <a:spLocks noGrp="1"/>
+          </p:cNvSpPr>
+          <p:nvPr/>
+        </p:nvSpPr>
+        <p:spPr>
+          <a:xfrm>
+            <a:off x="762000" y="400050"/>
+            <a:ext cx="10668000" cy="457200"/>
+          </a:xfrm>
+          <a:prstGeom prst="rect">
+            <a:avLst/>
+          </a:prstGeom>
+          <a:solidFill>
+            <a:srgbClr val="000000">
+              <a:alpha val="0"/>
+            </a:srgbClr>
+          </a:solidFill>
+          <a:ln w="0">
+            <a:solidFill>
+              <a:srgbClr val="000000">
+                <a:alpha val="0"/>
+              </a:srgbClr>
+            </a:solidFill>
+            <a:prstDash val="solid"/>
+          </a:ln>
+        </p:spPr>
+        <p:txBody>
+          <a:bodyPr anchor="ctr"/>
+          <a:lstStyle/>
+          <a:p>
+            <a:pPr algn="ctr">
+              <a:defRPr sz="2550" b="1">
+                <a:solidFill>
+                  <a:srgbClr val="2D4A33"/>
+                </a:solidFill>
+              </a:defRPr>
+            </a:pPr>
+            <a:r>
+              <a:rPr lang="zh-CN" altLang="en-US" sz="2550" b="1" dirty="0">
+                <a:solidFill>
+                  <a:srgbClr val="2D4A33"/>
+                </a:solidFill>
+              </a:rPr>
+              <a:t>刘义群</a:t>
+            </a:r>
+            <a:endParaRPr sz="2550" b="1" dirty="0">
+              <a:solidFill>
+                <a:srgbClr val="2D4A33"/>
+              </a:solidFill>
+            </a:endParaRPr>
+          </a:p>
+        </p:txBody>
+      </p:sp>
+      <p:sp>
+        <p:nvSpPr>
+          <p:cNvPr id="4" name="矩形 3"/>
+          <p:cNvSpPr>
+            <a:spLocks noGrp="1"/>
+          </p:cNvSpPr>
+          <p:nvPr/>
+        </p:nvSpPr>
+        <p:spPr>
+          <a:xfrm>
+            <a:off x="857250" y="1619250"/>
+            <a:ext cx="4762500" cy="1809750"/>
+          </a:xfrm>
+          <a:prstGeom prst="rect">
+            <a:avLst/>
+          </a:prstGeom>
+          <a:solidFill>
+            <a:srgbClr val="FFFFFF"/>
+          </a:solidFill>
+          <a:ln w="9525">
+            <a:solidFill>
+              <a:srgbClr val="C7D0C4"/>
+            </a:solidFill>
+            <a:prstDash val="solid"/>
+          </a:ln>
+        </p:spPr>
+      </p:sp>
+      <p:sp>
+        <p:nvSpPr>
+          <p:cNvPr id="5" name="矩形 4"/>
+          <p:cNvSpPr>
+            <a:spLocks noGrp="1"/>
+          </p:cNvSpPr>
+          <p:nvPr/>
+        </p:nvSpPr>
+        <p:spPr>
+          <a:xfrm>
+            <a:off x="1157605" y="1666875"/>
+            <a:ext cx="4305300" cy="323850"/>
+          </a:xfrm>
+          <a:prstGeom prst="rect">
+            <a:avLst/>
+          </a:prstGeom>
+          <a:solidFill>
+            <a:srgbClr val="000000">
+              <a:alpha val="0"/>
+            </a:srgbClr>
+          </a:solidFill>
+          <a:ln w="0">
+            <a:solidFill>
+              <a:srgbClr val="000000">
+                <a:alpha val="0"/>
+              </a:srgbClr>
+            </a:solidFill>
+            <a:prstDash val="solid"/>
+          </a:ln>
+        </p:spPr>
+        <p:txBody>
+          <a:bodyPr anchor="ctr"/>
+          <a:lstStyle/>
+          <a:p>
+            <a:pPr algn="l">
+              <a:defRPr sz="1650" b="1">
+                <a:solidFill>
+                  <a:srgbClr val="2D4A33"/>
+                </a:solidFill>
+              </a:defRPr>
+            </a:pPr>
+            <a:r>
+              <a:rPr sz="1650" b="1">
+                <a:solidFill>
+                  <a:srgbClr val="2D4A33"/>
+                </a:solidFill>
+              </a:rPr>
+              <a:t>页面</a:t>
+            </a:r>
+          </a:p>
+        </p:txBody>
+      </p:sp>
+      <p:sp>
+        <p:nvSpPr>
+          <p:cNvPr id="6" name="矩形 5"/>
+          <p:cNvSpPr>
+            <a:spLocks noGrp="1"/>
+          </p:cNvSpPr>
+          <p:nvPr/>
+        </p:nvSpPr>
+        <p:spPr>
+          <a:xfrm>
+            <a:off x="1157605" y="2228850"/>
+            <a:ext cx="4305300" cy="857250"/>
+          </a:xfrm>
+          <a:prstGeom prst="rect">
+            <a:avLst/>
+          </a:prstGeom>
+          <a:solidFill>
+            <a:srgbClr val="000000">
+              <a:alpha val="0"/>
+            </a:srgbClr>
+          </a:solidFill>
+          <a:ln w="0">
+            <a:solidFill>
+              <a:srgbClr val="000000">
+                <a:alpha val="0"/>
+              </a:srgbClr>
+            </a:solidFill>
+            <a:prstDash val="solid"/>
+          </a:ln>
+        </p:spPr>
+        <p:txBody>
+          <a:bodyPr anchor="ctr"/>
+          <a:lstStyle/>
+          <a:p>
+            <a:pPr algn="l">
+              <a:defRPr sz="1350" b="0">
+                <a:solidFill>
+                  <a:srgbClr val="1F2D22"/>
+                </a:solidFill>
+              </a:defRPr>
+            </a:pPr>
+            <a:r>
+              <a:rPr lang="zh-CN" altLang="en-US" sz="1350" b="0">
+                <a:solidFill>
+                  <a:srgbClr val="1F2D22"/>
+                </a:solidFill>
+              </a:rPr>
+              <a:t>系统首页「数据概览」</a:t>
+            </a:r>
+            <a:r>
+              <a:rPr lang="en-US" altLang="zh-CN" sz="1350" b="0">
+                <a:solidFill>
+                  <a:srgbClr val="1F2D22"/>
+                </a:solidFill>
+              </a:rPr>
+              <a:t>Dashboard</a:t>
+            </a:r>
+          </a:p>
+          <a:p>
+            <a:pPr algn="l">
+              <a:defRPr sz="1350" b="0">
+                <a:solidFill>
+                  <a:srgbClr val="1F2D22"/>
+                </a:solidFill>
+              </a:defRPr>
+            </a:pPr>
+            <a:r>
+              <a:rPr lang="zh-CN" altLang="en-US" sz="1350" b="0">
+                <a:solidFill>
+                  <a:srgbClr val="1F2D22"/>
+                </a:solidFill>
+              </a:rPr>
+              <a:t>顶部：</a:t>
+            </a:r>
+            <a:r>
+              <a:rPr lang="en-US" altLang="zh-CN" sz="1350" b="0">
+                <a:solidFill>
+                  <a:srgbClr val="1F2D22"/>
+                </a:solidFill>
+              </a:rPr>
+              <a:t>5 </a:t>
+            </a:r>
+            <a:r>
+              <a:rPr lang="zh-CN" altLang="en-US" sz="1350" b="0">
+                <a:solidFill>
+                  <a:srgbClr val="1F2D22"/>
+                </a:solidFill>
+              </a:rPr>
+              <a:t>张统计卡片（已导入文档</a:t>
+            </a:r>
+            <a:r>
+              <a:rPr lang="en-US" altLang="zh-CN" sz="1350" b="0">
+                <a:solidFill>
+                  <a:srgbClr val="1F2D22"/>
+                </a:solidFill>
+              </a:rPr>
+              <a:t> / </a:t>
+            </a:r>
+            <a:r>
+              <a:rPr lang="zh-CN" altLang="en-US" sz="1350" b="0">
+                <a:solidFill>
+                  <a:srgbClr val="1F2D22"/>
+                </a:solidFill>
+              </a:rPr>
+              <a:t>已分块</a:t>
+            </a:r>
+            <a:r>
+              <a:rPr lang="en-US" altLang="zh-CN" sz="1350" b="0">
+                <a:solidFill>
+                  <a:srgbClr val="1F2D22"/>
+                </a:solidFill>
+              </a:rPr>
+              <a:t> / </a:t>
+            </a:r>
+            <a:r>
+              <a:rPr lang="zh-CN" altLang="en-US" sz="1350" b="0">
+                <a:solidFill>
+                  <a:srgbClr val="1F2D22"/>
+                </a:solidFill>
+              </a:rPr>
+              <a:t>已嵌入</a:t>
+            </a:r>
+            <a:r>
+              <a:rPr lang="en-US" altLang="zh-CN" sz="1350" b="0">
+                <a:solidFill>
+                  <a:srgbClr val="1F2D22"/>
+                </a:solidFill>
+              </a:rPr>
+              <a:t> / </a:t>
+            </a:r>
+            <a:r>
+              <a:rPr lang="zh-CN" altLang="en-US" sz="1350" b="0">
+                <a:solidFill>
+                  <a:srgbClr val="1F2D22"/>
+                </a:solidFill>
+              </a:rPr>
+              <a:t>向量库集合</a:t>
+            </a:r>
+            <a:r>
+              <a:rPr lang="en-US" altLang="zh-CN" sz="1350" b="0">
+                <a:solidFill>
+                  <a:srgbClr val="1F2D22"/>
+                </a:solidFill>
+              </a:rPr>
+              <a:t> / </a:t>
+            </a:r>
+            <a:r>
+              <a:rPr lang="zh-CN" altLang="en-US" sz="1350" b="0">
+                <a:solidFill>
+                  <a:srgbClr val="1F2D22"/>
+                </a:solidFill>
+              </a:rPr>
+              <a:t>检索记录）</a:t>
+            </a:r>
+          </a:p>
+          <a:p>
+            <a:pPr algn="l">
+              <a:defRPr sz="1350" b="0">
+                <a:solidFill>
+                  <a:srgbClr val="1F2D22"/>
+                </a:solidFill>
+              </a:defRPr>
+            </a:pPr>
+            <a:r>
+              <a:rPr lang="zh-CN" altLang="en-US" sz="1350" b="0">
+                <a:solidFill>
+                  <a:srgbClr val="1F2D22"/>
+                </a:solidFill>
+              </a:rPr>
+              <a:t>下方：文档列表区，含搜索筛选、单条删除、批量删除功能</a:t>
+            </a:r>
+          </a:p>
+          <a:p>
+            <a:pPr algn="l">
+              <a:defRPr sz="1350" b="0">
+                <a:solidFill>
+                  <a:srgbClr val="1F2D22"/>
+                </a:solidFill>
+              </a:defRPr>
+            </a:pPr>
+            <a:r>
+              <a:rPr lang="zh-CN" altLang="en-US" sz="1350" b="0">
+                <a:solidFill>
+                  <a:srgbClr val="1F2D22"/>
+                </a:solidFill>
+              </a:rPr>
+              <a:t>点击卡片切换视图，选中高亮，无路由跳转</a:t>
+            </a:r>
+            <a:endParaRPr sz="1350" b="0">
+              <a:solidFill>
+                <a:srgbClr val="1F2D22"/>
+              </a:solidFill>
+            </a:endParaRPr>
+          </a:p>
+        </p:txBody>
+      </p:sp>
+      <p:sp>
+        <p:nvSpPr>
+          <p:cNvPr id="7" name="矩形 6"/>
+          <p:cNvSpPr>
+            <a:spLocks noGrp="1"/>
+          </p:cNvSpPr>
+          <p:nvPr/>
+        </p:nvSpPr>
+        <p:spPr>
+          <a:xfrm>
+            <a:off x="6572250" y="1619250"/>
+            <a:ext cx="4762500" cy="1619250"/>
+          </a:xfrm>
+          <a:prstGeom prst="rect">
+            <a:avLst/>
+          </a:prstGeom>
+          <a:solidFill>
+            <a:srgbClr val="FFFFFF"/>
+          </a:solidFill>
+          <a:ln w="9525">
+            <a:solidFill>
+              <a:srgbClr val="C7D0C4"/>
+            </a:solidFill>
+            <a:prstDash val="solid"/>
+          </a:ln>
+        </p:spPr>
+      </p:sp>
+      <p:sp>
+        <p:nvSpPr>
+          <p:cNvPr id="8" name="矩形 7"/>
+          <p:cNvSpPr>
+            <a:spLocks noGrp="1"/>
+          </p:cNvSpPr>
+          <p:nvPr/>
+        </p:nvSpPr>
+        <p:spPr>
+          <a:xfrm>
+            <a:off x="6800850" y="1728470"/>
+            <a:ext cx="4305300" cy="323850"/>
+          </a:xfrm>
+          <a:prstGeom prst="rect">
+            <a:avLst/>
+          </a:prstGeom>
+          <a:solidFill>
+            <a:srgbClr val="000000">
+              <a:alpha val="0"/>
+            </a:srgbClr>
+          </a:solidFill>
+          <a:ln w="0">
+            <a:solidFill>
+              <a:srgbClr val="000000">
+                <a:alpha val="0"/>
+              </a:srgbClr>
+            </a:solidFill>
+            <a:prstDash val="solid"/>
+          </a:ln>
+        </p:spPr>
+        <p:txBody>
+          <a:bodyPr anchor="ctr"/>
+          <a:lstStyle/>
+          <a:p>
+            <a:pPr algn="l">
+              <a:defRPr sz="1650" b="1">
+                <a:solidFill>
+                  <a:srgbClr val="2D4A33"/>
+                </a:solidFill>
+              </a:defRPr>
+            </a:pPr>
+            <a:r>
+              <a:rPr sz="1650" b="1">
+                <a:solidFill>
+                  <a:srgbClr val="2D4A33"/>
+                </a:solidFill>
+              </a:rPr>
+              <a:t>流程</a:t>
+            </a:r>
+          </a:p>
+        </p:txBody>
+      </p:sp>
+      <p:sp>
+        <p:nvSpPr>
+          <p:cNvPr id="9" name="矩形 8"/>
+          <p:cNvSpPr>
+            <a:spLocks noGrp="1"/>
+          </p:cNvSpPr>
+          <p:nvPr/>
+        </p:nvSpPr>
+        <p:spPr>
+          <a:xfrm>
+            <a:off x="6758940" y="2052320"/>
+            <a:ext cx="4671060" cy="1076960"/>
+          </a:xfrm>
+          <a:prstGeom prst="rect">
+            <a:avLst/>
+          </a:prstGeom>
+          <a:solidFill>
+            <a:srgbClr val="000000">
+              <a:alpha val="0"/>
+            </a:srgbClr>
+          </a:solidFill>
+          <a:ln w="0">
+            <a:solidFill>
+              <a:srgbClr val="000000">
+                <a:alpha val="0"/>
+              </a:srgbClr>
+            </a:solidFill>
+            <a:prstDash val="solid"/>
+          </a:ln>
+        </p:spPr>
+        <p:txBody>
+          <a:bodyPr anchor="ctr"/>
+          <a:lstStyle/>
+          <a:p>
+            <a:pPr algn="l">
+              <a:defRPr sz="1350" b="0">
+                <a:solidFill>
+                  <a:srgbClr val="1F2D22"/>
+                </a:solidFill>
+              </a:defRPr>
+            </a:pPr>
+            <a:r>
+              <a:rPr lang="zh-CN" altLang="en-US" sz="1350" b="0">
+                <a:solidFill>
+                  <a:srgbClr val="1F2D22"/>
+                </a:solidFill>
+              </a:rPr>
+              <a:t>页面加载</a:t>
+            </a:r>
+            <a:r>
+              <a:rPr lang="en-US" altLang="zh-CN" sz="1350" b="0">
+                <a:solidFill>
+                  <a:srgbClr val="1F2D22"/>
+                </a:solidFill>
+              </a:rPr>
+              <a:t> </a:t>
+            </a:r>
+            <a:r>
+              <a:rPr lang="en-US" altLang="en-US" sz="1350" b="0">
+                <a:solidFill>
+                  <a:srgbClr val="1F2D22"/>
+                </a:solidFill>
+              </a:rPr>
+              <a:t>→</a:t>
+            </a:r>
+            <a:r>
+              <a:rPr lang="en-US" altLang="zh-CN" sz="1350" b="0">
+                <a:solidFill>
+                  <a:srgbClr val="1F2D22"/>
+                </a:solidFill>
+              </a:rPr>
+              <a:t> </a:t>
+            </a:r>
+            <a:r>
+              <a:rPr lang="zh-CN" altLang="en-US" sz="1350" b="0">
+                <a:solidFill>
+                  <a:srgbClr val="1F2D22"/>
+                </a:solidFill>
+              </a:rPr>
+              <a:t>并发请求</a:t>
+            </a:r>
+            <a:r>
+              <a:rPr lang="en-US" altLang="zh-CN" sz="1350" b="0">
+                <a:solidFill>
+                  <a:srgbClr val="1F2D22"/>
+                </a:solidFill>
+              </a:rPr>
+              <a:t> 5 </a:t>
+            </a:r>
+            <a:r>
+              <a:rPr lang="zh-CN" altLang="en-US" sz="1350" b="0">
+                <a:solidFill>
+                  <a:srgbClr val="1F2D22"/>
+                </a:solidFill>
+              </a:rPr>
+              <a:t>个</a:t>
+            </a:r>
+            <a:r>
+              <a:rPr lang="en-US" altLang="zh-CN" sz="1350" b="0">
+                <a:solidFill>
+                  <a:srgbClr val="1F2D22"/>
+                </a:solidFill>
+              </a:rPr>
+              <a:t>GET  API</a:t>
+            </a:r>
+            <a:endParaRPr lang="zh-CN" altLang="en-US" sz="1350" b="0">
+              <a:solidFill>
+                <a:srgbClr val="1F2D22"/>
+              </a:solidFill>
+            </a:endParaRPr>
+          </a:p>
+          <a:p>
+            <a:pPr algn="l">
+              <a:defRPr sz="1350" b="0">
+                <a:solidFill>
+                  <a:srgbClr val="1F2D22"/>
+                </a:solidFill>
+              </a:defRPr>
+            </a:pPr>
+            <a:r>
+              <a:rPr lang="zh-CN" altLang="en-US" sz="1350" b="0">
+                <a:solidFill>
+                  <a:srgbClr val="1F2D22"/>
+                </a:solidFill>
+              </a:rPr>
+              <a:t>点击统计卡片</a:t>
+            </a:r>
+            <a:r>
+              <a:rPr lang="en-US" altLang="zh-CN" sz="1350" b="0">
+                <a:solidFill>
+                  <a:srgbClr val="1F2D22"/>
+                </a:solidFill>
+              </a:rPr>
+              <a:t> </a:t>
+            </a:r>
+            <a:r>
+              <a:rPr lang="en-US" altLang="en-US" sz="1350" b="0">
+                <a:solidFill>
+                  <a:srgbClr val="1F2D22"/>
+                </a:solidFill>
+              </a:rPr>
+              <a:t>→</a:t>
+            </a:r>
+            <a:r>
+              <a:rPr lang="en-US" altLang="zh-CN" sz="1350" b="0">
+                <a:solidFill>
+                  <a:srgbClr val="1F2D22"/>
+                </a:solidFill>
+              </a:rPr>
+              <a:t> </a:t>
+            </a:r>
+            <a:r>
+              <a:rPr lang="zh-CN" altLang="en-US" sz="1350" b="0">
+                <a:solidFill>
+                  <a:srgbClr val="1F2D22"/>
+                </a:solidFill>
+              </a:rPr>
+              <a:t>切换下方文档列表视图</a:t>
+            </a:r>
+          </a:p>
+          <a:p>
+            <a:pPr algn="l">
+              <a:defRPr sz="1350" b="0">
+                <a:solidFill>
+                  <a:srgbClr val="1F2D22"/>
+                </a:solidFill>
+              </a:defRPr>
+            </a:pPr>
+            <a:r>
+              <a:rPr lang="zh-CN" altLang="en-US" sz="1350" b="0">
+                <a:solidFill>
+                  <a:srgbClr val="1F2D22"/>
+                </a:solidFill>
+              </a:rPr>
+              <a:t>输入关键词</a:t>
+            </a:r>
+            <a:r>
+              <a:rPr lang="en-US" altLang="zh-CN" sz="1350" b="0">
+                <a:solidFill>
+                  <a:srgbClr val="1F2D22"/>
+                </a:solidFill>
+              </a:rPr>
+              <a:t> </a:t>
+            </a:r>
+            <a:r>
+              <a:rPr lang="en-US" altLang="en-US" sz="1350" b="0">
+                <a:solidFill>
+                  <a:srgbClr val="1F2D22"/>
+                </a:solidFill>
+              </a:rPr>
+              <a:t>→</a:t>
+            </a:r>
+            <a:r>
+              <a:rPr lang="en-US" altLang="zh-CN" sz="1350" b="0">
+                <a:solidFill>
+                  <a:srgbClr val="1F2D22"/>
+                </a:solidFill>
+              </a:rPr>
+              <a:t> </a:t>
+            </a:r>
+            <a:r>
+              <a:rPr lang="zh-CN" altLang="en-US" sz="1350" b="0">
+                <a:solidFill>
+                  <a:srgbClr val="1F2D22"/>
+                </a:solidFill>
+              </a:rPr>
+              <a:t>前端实时过滤列表</a:t>
+            </a:r>
+          </a:p>
+          <a:p>
+            <a:pPr algn="l">
+              <a:defRPr sz="1350" b="0">
+                <a:solidFill>
+                  <a:srgbClr val="1F2D22"/>
+                </a:solidFill>
+              </a:defRPr>
+            </a:pPr>
+            <a:r>
+              <a:rPr lang="zh-CN" altLang="en-US" sz="1350" b="0">
+                <a:solidFill>
+                  <a:srgbClr val="1F2D22"/>
+                </a:solidFill>
+              </a:rPr>
+              <a:t>删除的确认弹窗</a:t>
+            </a:r>
+            <a:r>
+              <a:rPr lang="en-US" altLang="zh-CN" sz="1350" b="0">
+                <a:solidFill>
+                  <a:srgbClr val="1F2D22"/>
+                </a:solidFill>
+              </a:rPr>
+              <a:t> </a:t>
+            </a:r>
+            <a:r>
+              <a:rPr lang="en-US" altLang="en-US" sz="1350" b="0">
+                <a:solidFill>
+                  <a:srgbClr val="1F2D22"/>
+                </a:solidFill>
+              </a:rPr>
+              <a:t>→</a:t>
+            </a:r>
+            <a:r>
+              <a:rPr lang="en-US" altLang="zh-CN" sz="1350" b="0">
+                <a:solidFill>
+                  <a:srgbClr val="1F2D22"/>
+                </a:solidFill>
+              </a:rPr>
+              <a:t> </a:t>
+            </a:r>
+            <a:r>
+              <a:rPr lang="zh-CN" altLang="en-US" sz="1350" b="0">
+                <a:solidFill>
+                  <a:srgbClr val="1F2D22"/>
+                </a:solidFill>
+              </a:rPr>
+              <a:t>调用</a:t>
+            </a:r>
+            <a:r>
+              <a:rPr lang="en-US" altLang="zh-CN" sz="1350" b="0">
+                <a:solidFill>
+                  <a:srgbClr val="1F2D22"/>
+                </a:solidFill>
+              </a:rPr>
+              <a:t> DELETE API </a:t>
+            </a:r>
+            <a:r>
+              <a:rPr lang="en-US" altLang="en-US" sz="1350" b="0">
+                <a:solidFill>
+                  <a:srgbClr val="1F2D22"/>
+                </a:solidFill>
+              </a:rPr>
+              <a:t>→</a:t>
+            </a:r>
+            <a:r>
+              <a:rPr lang="en-US" altLang="zh-CN" sz="1350" b="0">
+                <a:solidFill>
+                  <a:srgbClr val="1F2D22"/>
+                </a:solidFill>
+              </a:rPr>
+              <a:t> </a:t>
+            </a:r>
+            <a:r>
+              <a:rPr lang="zh-CN" altLang="en-US" sz="1350" b="0">
+                <a:solidFill>
+                  <a:srgbClr val="1F2D22"/>
+                </a:solidFill>
+              </a:rPr>
+              <a:t>刷新数据</a:t>
+            </a:r>
+          </a:p>
+        </p:txBody>
+      </p:sp>
+      <p:sp>
+        <p:nvSpPr>
+          <p:cNvPr id="10" name="矩形 9"/>
+          <p:cNvSpPr>
+            <a:spLocks noGrp="1"/>
+          </p:cNvSpPr>
+          <p:nvPr/>
+        </p:nvSpPr>
+        <p:spPr>
+          <a:xfrm>
+            <a:off x="2000250" y="3714750"/>
+            <a:ext cx="8191500" cy="1995170"/>
+          </a:xfrm>
+          <a:prstGeom prst="rect">
+            <a:avLst/>
+          </a:prstGeom>
+          <a:solidFill>
+            <a:srgbClr val="FFFFFF"/>
+          </a:solidFill>
+          <a:ln w="9525">
+            <a:solidFill>
+              <a:srgbClr val="C7D0C4"/>
+            </a:solidFill>
+            <a:prstDash val="solid"/>
+          </a:ln>
+        </p:spPr>
+      </p:sp>
+      <p:sp>
+        <p:nvSpPr>
+          <p:cNvPr id="11" name="矩形 10"/>
+          <p:cNvSpPr>
+            <a:spLocks noGrp="1"/>
+          </p:cNvSpPr>
+          <p:nvPr/>
+        </p:nvSpPr>
+        <p:spPr>
+          <a:xfrm>
+            <a:off x="2228850" y="3886200"/>
+            <a:ext cx="7734300" cy="323850"/>
+          </a:xfrm>
+          <a:prstGeom prst="rect">
+            <a:avLst/>
+          </a:prstGeom>
+          <a:solidFill>
+            <a:srgbClr val="000000">
+              <a:alpha val="0"/>
+            </a:srgbClr>
+          </a:solidFill>
+          <a:ln w="0">
+            <a:solidFill>
+              <a:srgbClr val="000000">
+                <a:alpha val="0"/>
+              </a:srgbClr>
+            </a:solidFill>
+            <a:prstDash val="solid"/>
+          </a:ln>
+        </p:spPr>
+        <p:txBody>
+          <a:bodyPr anchor="ctr"/>
+          <a:lstStyle/>
+          <a:p>
+            <a:pPr algn="l">
+              <a:defRPr sz="1650" b="1">
+                <a:solidFill>
+                  <a:srgbClr val="2D4A33"/>
+                </a:solidFill>
+              </a:defRPr>
+            </a:pPr>
+            <a:r>
+              <a:rPr sz="1650" b="1">
+                <a:solidFill>
+                  <a:srgbClr val="2D4A33"/>
+                </a:solidFill>
+              </a:rPr>
+              <a:t>结果</a:t>
+            </a:r>
+          </a:p>
+        </p:txBody>
+      </p:sp>
+      <p:sp>
+        <p:nvSpPr>
+          <p:cNvPr id="12" name="矩形 11"/>
+          <p:cNvSpPr>
+            <a:spLocks noGrp="1"/>
+          </p:cNvSpPr>
+          <p:nvPr/>
+        </p:nvSpPr>
+        <p:spPr>
+          <a:xfrm>
+            <a:off x="2228850" y="4324350"/>
+            <a:ext cx="7734300" cy="919480"/>
+          </a:xfrm>
+          <a:prstGeom prst="rect">
+            <a:avLst/>
+          </a:prstGeom>
+          <a:solidFill>
+            <a:srgbClr val="000000">
+              <a:alpha val="0"/>
+            </a:srgbClr>
+          </a:solidFill>
+          <a:ln w="0">
+            <a:solidFill>
+              <a:srgbClr val="000000">
+                <a:alpha val="0"/>
+              </a:srgbClr>
+            </a:solidFill>
+            <a:prstDash val="solid"/>
+          </a:ln>
+        </p:spPr>
+        <p:txBody>
+          <a:bodyPr anchor="ctr"/>
+          <a:lstStyle/>
+          <a:p>
+            <a:pPr algn="l">
+              <a:defRPr sz="1350" b="0">
+                <a:solidFill>
+                  <a:srgbClr val="1F2D22"/>
+                </a:solidFill>
+              </a:defRPr>
+            </a:pPr>
+            <a:r>
+              <a:rPr lang="zh-CN" altLang="en-US" sz="1350" b="0">
+                <a:solidFill>
+                  <a:srgbClr val="1F2D22"/>
+                </a:solidFill>
+              </a:rPr>
+              <a:t>一站式查看</a:t>
+            </a:r>
+            <a:r>
+              <a:rPr lang="en-US" altLang="zh-CN" sz="1350" b="0">
+                <a:solidFill>
+                  <a:srgbClr val="1F2D22"/>
+                </a:solidFill>
+              </a:rPr>
+              <a:t> RAG </a:t>
+            </a:r>
+            <a:r>
+              <a:rPr lang="zh-CN" altLang="en-US" sz="1350" b="0">
+                <a:solidFill>
+                  <a:srgbClr val="1F2D22"/>
+                </a:solidFill>
+              </a:rPr>
+              <a:t>流水线各阶段数据状态</a:t>
+            </a:r>
+          </a:p>
+          <a:p>
+            <a:pPr algn="l">
+              <a:defRPr sz="1350" b="0">
+                <a:solidFill>
+                  <a:srgbClr val="1F2D22"/>
+                </a:solidFill>
+              </a:defRPr>
+            </a:pPr>
+            <a:r>
+              <a:rPr lang="zh-CN" altLang="en-US" sz="1350" b="0">
+                <a:solidFill>
+                  <a:srgbClr val="1F2D22"/>
+                </a:solidFill>
+              </a:rPr>
+              <a:t>支持知识库文档的搜索、单条</a:t>
+            </a:r>
+            <a:r>
+              <a:rPr lang="en-US" altLang="zh-CN" sz="1350" b="0">
+                <a:solidFill>
+                  <a:srgbClr val="1F2D22"/>
+                </a:solidFill>
+              </a:rPr>
+              <a:t>/</a:t>
+            </a:r>
+            <a:r>
+              <a:rPr lang="zh-CN" altLang="en-US" sz="1350" b="0">
+                <a:solidFill>
+                  <a:srgbClr val="1F2D22"/>
+                </a:solidFill>
+              </a:rPr>
+              <a:t>批量删除管理</a:t>
+            </a:r>
+          </a:p>
+          <a:p>
+            <a:pPr algn="l">
+              <a:defRPr sz="1350" b="0">
+                <a:solidFill>
+                  <a:srgbClr val="1F2D22"/>
+                </a:solidFill>
+              </a:defRPr>
+            </a:pPr>
+            <a:r>
+              <a:rPr lang="zh-CN" altLang="en-US" sz="1350" b="0">
+                <a:solidFill>
+                  <a:srgbClr val="1F2D22"/>
+                </a:solidFill>
+              </a:rPr>
+              <a:t>纯</a:t>
+            </a:r>
+            <a:r>
+              <a:rPr lang="en-US" altLang="zh-CN" sz="1350" b="0">
+                <a:solidFill>
+                  <a:srgbClr val="1F2D22"/>
+                </a:solidFill>
+              </a:rPr>
+              <a:t> Tailwind CSS </a:t>
+            </a:r>
+            <a:r>
+              <a:rPr lang="zh-CN" altLang="en-US" sz="1350" b="0">
+                <a:solidFill>
+                  <a:srgbClr val="1F2D22"/>
+                </a:solidFill>
+              </a:rPr>
+              <a:t>实现，零额外依赖，加载快速</a:t>
+            </a:r>
+          </a:p>
+          <a:p>
+            <a:pPr algn="l">
+              <a:defRPr sz="1350" b="0">
+                <a:solidFill>
+                  <a:srgbClr val="1F2D22"/>
+                </a:solidFill>
+              </a:defRPr>
+            </a:pPr>
+            <a:endParaRPr sz="1350" b="0">
+              <a:solidFill>
+                <a:srgbClr val="1F2D22"/>
+              </a:solidFill>
+            </a:endParaRPr>
+          </a:p>
+        </p:txBody>
+      </p:sp>
+    </p:spTree>
+  </p:cSld>
+  <p:clrMapOvr>
+    <a:masterClrMapping/>
+  </p:clrMapOvr>
+</p:sld>
+</file>
+
+<file path=ppt/slides/slide11.xml><?xml version="1.0" encoding="utf-8"?>
 <p:sld xmlns:a="http://schemas.openxmlformats.org/drawingml/2006/main" xmlns:r="http://schemas.openxmlformats.org/officeDocument/2006/relationships" xmlns:p="http://schemas.openxmlformats.org/presentationml/2006/main">
   <p:cSld>
     <p:bg>
@@ -5163,7 +6348,7 @@
 </p:sld>
 </file>
 
-<file path=ppt/slides/slide11.xml><?xml version="1.0" encoding="utf-8"?>
+<file path=ppt/slides/slide12.xml><?xml version="1.0" encoding="utf-8"?>
 <p:sld xmlns:a="http://schemas.openxmlformats.org/drawingml/2006/main" xmlns:r="http://schemas.openxmlformats.org/officeDocument/2006/relationships" xmlns:p="http://schemas.openxmlformats.org/presentationml/2006/main">
   <p:cSld>
     <p:spTree>
@@ -5524,12 +6709,6 @@
               </a:rPr>
               <a:t>、列信息</a:t>
             </a:r>
-            <a:endParaRPr lang="zh-CN" altLang="en-US" sz="2000" dirty="0">
-              <a:solidFill>
-                <a:srgbClr val="1F2D22"/>
-              </a:solidFill>
-              <a:latin typeface="ui-monospace"/>
-            </a:endParaRPr>
           </a:p>
           <a:p>
             <a:pPr>
@@ -5566,12 +6745,6 @@
               </a:rPr>
               <a:t>类别</a:t>
             </a:r>
-            <a:endParaRPr lang="zh-CN" altLang="en-US" sz="2000" dirty="0">
-              <a:solidFill>
-                <a:srgbClr val="1F2D22"/>
-              </a:solidFill>
-              <a:latin typeface="ui-monospace"/>
-            </a:endParaRPr>
           </a:p>
           <a:p>
             <a:pPr algn="l">
@@ -5732,12 +6905,6 @@
               </a:rPr>
               <a:t>chunk</a:t>
             </a:r>
-            <a:endParaRPr lang="en-US" altLang="zh-CN" sz="2000" dirty="0">
-              <a:solidFill>
-                <a:srgbClr val="1F2D22"/>
-              </a:solidFill>
-              <a:latin typeface="ui-monospace"/>
-            </a:endParaRPr>
           </a:p>
           <a:p>
             <a:pPr algn="l"/>
@@ -5822,12 +6989,6 @@
               </a:rPr>
               <a:t>做递归切分</a:t>
             </a:r>
-            <a:endParaRPr lang="zh-CN" altLang="en-US" sz="2000" dirty="0">
-              <a:solidFill>
-                <a:srgbClr val="1F2D22"/>
-              </a:solidFill>
-              <a:latin typeface="ui-monospace"/>
-            </a:endParaRPr>
           </a:p>
         </p:txBody>
       </p:sp>
@@ -5839,7 +7000,7 @@
 </p:sld>
 </file>
 
-<file path=ppt/slides/slide12.xml><?xml version="1.0" encoding="utf-8"?>
+<file path=ppt/slides/slide13.xml><?xml version="1.0" encoding="utf-8"?>
 <p:sld xmlns:a="http://schemas.openxmlformats.org/drawingml/2006/main" xmlns:r="http://schemas.openxmlformats.org/officeDocument/2006/relationships" xmlns:p="http://schemas.openxmlformats.org/presentationml/2006/main">
   <p:cSld>
     <p:bg>
@@ -6029,7 +7190,7 @@
 </p:sld>
 </file>
 
-<file path=ppt/slides/slide13.xml><?xml version="1.0" encoding="utf-8"?>
+<file path=ppt/slides/slide14.xml><?xml version="1.0" encoding="utf-8"?>
 <p:sld xmlns:a="http://schemas.openxmlformats.org/drawingml/2006/main" xmlns:r="http://schemas.openxmlformats.org/officeDocument/2006/relationships" xmlns:p="http://schemas.openxmlformats.org/presentationml/2006/main">
   <p:cSld>
     <p:bg>
@@ -6230,11 +7391,6 @@
               </a:rPr>
               <a:t>本地底座与多索引</a:t>
             </a:r>
-            <a:endParaRPr lang="zh-CN" altLang="en-US" sz="1650" b="1">
-              <a:solidFill>
-                <a:srgbClr val="2D4A33"/>
-              </a:solidFill>
-            </a:endParaRPr>
           </a:p>
         </p:txBody>
       </p:sp>
@@ -6339,6 +7495,15 @@
               </a:rPr>
               <a:t>数据库运行时自由切换。</a:t>
             </a:r>
+          </a:p>
+          <a:p>
+            <a:pPr algn="l">
+              <a:defRPr sz="1350" b="0">
+                <a:solidFill>
+                  <a:srgbClr val="1F2D22"/>
+                </a:solidFill>
+              </a:defRPr>
+            </a:pPr>
             <a:endParaRPr lang="zh-CN" altLang="en-US" sz="1350" b="0">
               <a:solidFill>
                 <a:srgbClr val="1F2D22"/>
@@ -6353,6 +7518,71 @@
                 </a:solidFill>
               </a:defRPr>
             </a:pPr>
+            <a:r>
+              <a:rPr lang="zh-CN" altLang="en-US" sz="1350" b="0">
+                <a:solidFill>
+                  <a:srgbClr val="1F2D22"/>
+                </a:solidFill>
+              </a:rPr>
+              <a:t>三种经典索引构建：新增 </a:t>
+            </a:r>
+            <a:r>
+              <a:rPr lang="en-US" altLang="zh-CN" sz="1350" b="0">
+                <a:solidFill>
+                  <a:srgbClr val="1F2D22"/>
+                </a:solidFill>
+              </a:rPr>
+              <a:t>FLAT（</a:t>
+            </a:r>
+            <a:r>
+              <a:rPr lang="zh-CN" altLang="en-US" sz="1350" b="0">
+                <a:solidFill>
+                  <a:srgbClr val="1F2D22"/>
+                </a:solidFill>
+              </a:rPr>
+              <a:t>精确）、</a:t>
+            </a:r>
+            <a:r>
+              <a:rPr lang="en-US" altLang="zh-CN" sz="1350" b="0">
+                <a:solidFill>
+                  <a:srgbClr val="1F2D22"/>
+                </a:solidFill>
+              </a:rPr>
+              <a:t>IVF_FLAT（</a:t>
+            </a:r>
+            <a:r>
+              <a:rPr lang="zh-CN" altLang="en-US" sz="1350" b="0">
+                <a:solidFill>
+                  <a:srgbClr val="1F2D22"/>
+                </a:solidFill>
+              </a:rPr>
+              <a:t>倒排）、</a:t>
+            </a:r>
+            <a:r>
+              <a:rPr lang="en-US" altLang="zh-CN" sz="1350" b="0">
+                <a:solidFill>
+                  <a:srgbClr val="1F2D22"/>
+                </a:solidFill>
+              </a:rPr>
+              <a:t>HNSW（</a:t>
+            </a:r>
+            <a:r>
+              <a:rPr lang="zh-CN" altLang="en-US" sz="1350" b="0">
+                <a:solidFill>
+                  <a:srgbClr val="1F2D22"/>
+                </a:solidFill>
+              </a:rPr>
+              <a:t>图）三种不同索引模式。</a:t>
+            </a:r>
+          </a:p>
+          <a:p>
+            <a:pPr algn="l">
+              <a:defRPr sz="1350" b="0">
+                <a:solidFill>
+                  <a:srgbClr val="1F2D22"/>
+                </a:solidFill>
+              </a:defRPr>
+            </a:pPr>
             <a:endParaRPr lang="zh-CN" altLang="en-US" sz="1350" b="0">
               <a:solidFill>
                 <a:srgbClr val="1F2D22"/>
@@ -6368,12 +7598,20 @@
               </a:defRPr>
             </a:pPr>
             <a:r>
+              <a:rPr lang="en-US" altLang="zh-CN" sz="1350" b="0">
+                <a:solidFill>
+                  <a:srgbClr val="1F2D22"/>
+                </a:solidFill>
+              </a:rPr>
+              <a:t>IVF</a:t>
+            </a:r>
+            <a:r>
               <a:rPr lang="zh-CN" altLang="en-US" sz="1350" b="0">
                 <a:solidFill>
                   <a:srgbClr val="1F2D22"/>
                 </a:solidFill>
               </a:rPr>
-              <a:t>三种经典索引构建：新增 </a:t>
+              <a:t>训练流程补全：增加 </a:t>
             </a:r>
             <a:r>
               <a:rPr lang="en-US" altLang="zh-CN" sz="1350" b="0">
@@ -6381,7 +7619,7 @@
                   <a:srgbClr val="1F2D22"/>
                 </a:solidFill>
               </a:rPr>
-              <a:t>FLAT（</a:t>
+              <a:t>index.train(xb) </a:t>
             </a:r>
             <a:r>
               <a:rPr lang="zh-CN" altLang="en-US" sz="1350" b="0">
@@ -6389,105 +7627,8 @@
                   <a:srgbClr val="1F2D22"/>
                 </a:solidFill>
               </a:rPr>
-              <a:t>精确）、</a:t>
-            </a:r>
-            <a:r>
-              <a:rPr lang="en-US" altLang="zh-CN" sz="1350" b="0">
-                <a:solidFill>
-                  <a:srgbClr val="1F2D22"/>
-                </a:solidFill>
-              </a:rPr>
-              <a:t>IVF_FLAT（</a:t>
-            </a:r>
-            <a:r>
-              <a:rPr lang="zh-CN" altLang="en-US" sz="1350" b="0">
-                <a:solidFill>
-                  <a:srgbClr val="1F2D22"/>
-                </a:solidFill>
-              </a:rPr>
-              <a:t>倒排）、</a:t>
-            </a:r>
-            <a:r>
-              <a:rPr lang="en-US" altLang="zh-CN" sz="1350" b="0">
-                <a:solidFill>
-                  <a:srgbClr val="1F2D22"/>
-                </a:solidFill>
-              </a:rPr>
-              <a:t>HNSW（</a:t>
-            </a:r>
-            <a:r>
-              <a:rPr lang="zh-CN" altLang="en-US" sz="1350" b="0">
-                <a:solidFill>
-                  <a:srgbClr val="1F2D22"/>
-                </a:solidFill>
-              </a:rPr>
-              <a:t>图）三种不同索引模式。</a:t>
-            </a:r>
-            <a:endParaRPr lang="zh-CN" altLang="en-US" sz="1350" b="0">
-              <a:solidFill>
-                <a:srgbClr val="1F2D22"/>
-              </a:solidFill>
-            </a:endParaRPr>
-          </a:p>
-          <a:p>
-            <a:pPr algn="l">
-              <a:defRPr sz="1350" b="0">
-                <a:solidFill>
-                  <a:srgbClr val="1F2D22"/>
-                </a:solidFill>
-              </a:defRPr>
-            </a:pPr>
-            <a:endParaRPr lang="zh-CN" altLang="en-US" sz="1350" b="0">
-              <a:solidFill>
-                <a:srgbClr val="1F2D22"/>
-              </a:solidFill>
-            </a:endParaRPr>
-          </a:p>
-          <a:p>
-            <a:pPr algn="l">
-              <a:defRPr sz="1350" b="0">
-                <a:solidFill>
-                  <a:srgbClr val="1F2D22"/>
-                </a:solidFill>
-              </a:defRPr>
-            </a:pPr>
-            <a:r>
-              <a:rPr lang="en-US" altLang="zh-CN" sz="1350" b="0">
-                <a:solidFill>
-                  <a:srgbClr val="1F2D22"/>
-                </a:solidFill>
-              </a:rPr>
-              <a:t>IVF</a:t>
-            </a:r>
-            <a:r>
-              <a:rPr lang="zh-CN" altLang="en-US" sz="1350" b="0">
-                <a:solidFill>
-                  <a:srgbClr val="1F2D22"/>
-                </a:solidFill>
-              </a:rPr>
-              <a:t>训练流程补全：增加 </a:t>
-            </a:r>
-            <a:r>
-              <a:rPr lang="en-US" altLang="zh-CN" sz="1350" b="0">
-                <a:solidFill>
-                  <a:srgbClr val="1F2D22"/>
-                </a:solidFill>
-              </a:rPr>
-              <a:t>index.train(xb) </a:t>
-            </a:r>
-            <a:r>
-              <a:rPr lang="zh-CN" altLang="en-US" sz="1350" b="0">
-                <a:solidFill>
-                  <a:srgbClr val="1F2D22"/>
-                </a:solidFill>
-              </a:rPr>
               <a:t>聚类中心训练阶段，解决近似检索空间划分与精度校准。</a:t>
             </a:r>
-            <a:endParaRPr lang="zh-CN" altLang="en-US" sz="1350" b="0">
-              <a:solidFill>
-                <a:srgbClr val="1F2D22"/>
-              </a:solidFill>
-            </a:endParaRPr>
           </a:p>
           <a:p>
             <a:pPr algn="l">
@@ -6589,11 +7730,6 @@
               </a:rPr>
               <a:t>检索度量标准化对齐</a:t>
             </a:r>
-            <a:endParaRPr lang="zh-CN" altLang="en-US" sz="1650" b="1">
-              <a:solidFill>
-                <a:srgbClr val="2D4A33"/>
-              </a:solidFill>
-            </a:endParaRPr>
           </a:p>
         </p:txBody>
       </p:sp>
@@ -6648,7 +7784,15 @@
                   <a:srgbClr val="1F2D22"/>
                 </a:solidFill>
               </a:rPr>
-              <a:t>原有</a:t>
+              <a:t>原有问题：</a:t>
+            </a:r>
+            <a:r>
+              <a:rPr lang="en-US" altLang="zh-CN" sz="1350" b="0">
+                <a:solidFill>
+                  <a:srgbClr val="1F2D22"/>
+                </a:solidFill>
+              </a:rPr>
+              <a:t>Chroma </a:t>
             </a:r>
             <a:r>
               <a:rPr lang="zh-CN" altLang="en-US" sz="1350" b="0">
@@ -6656,7 +7800,7 @@
                   <a:srgbClr val="1F2D22"/>
                 </a:solidFill>
               </a:rPr>
-              <a:t>问题：</a:t>
+              <a:t>计算余弦距离，</a:t>
             </a:r>
             <a:r>
               <a:rPr lang="en-US" altLang="zh-CN" sz="1350" b="0">
@@ -6664,7 +7808,7 @@
                   <a:srgbClr val="1F2D22"/>
                 </a:solidFill>
               </a:rPr>
-              <a:t>Chroma </a:t>
+              <a:t>FAISS </a:t>
             </a:r>
             <a:r>
               <a:rPr lang="zh-CN" altLang="en-US" sz="1350" b="0">
@@ -6672,7 +7816,7 @@
                   <a:srgbClr val="1F2D22"/>
                 </a:solidFill>
               </a:rPr>
-              <a:t>计算余弦距离，</a:t>
+              <a:t>默认计算 </a:t>
             </a:r>
             <a:r>
               <a:rPr lang="en-US" altLang="zh-CN" sz="1350" b="0">
@@ -6680,7 +7824,7 @@
                   <a:srgbClr val="1F2D22"/>
                 </a:solidFill>
               </a:rPr>
-              <a:t>FAISS </a:t>
+              <a:t>L2 </a:t>
             </a:r>
             <a:r>
               <a:rPr lang="zh-CN" altLang="en-US" sz="1350" b="0">
@@ -6688,7 +7832,7 @@
                   <a:srgbClr val="1F2D22"/>
                 </a:solidFill>
               </a:rPr>
-              <a:t>默认计算 </a:t>
+              <a:t>距离，导致前端检索阈值（</a:t>
             </a:r>
             <a:r>
               <a:rPr lang="en-US" altLang="zh-CN" sz="1350" b="0">
@@ -6696,7 +7840,7 @@
                   <a:srgbClr val="1F2D22"/>
                 </a:solidFill>
               </a:rPr>
-              <a:t>L2 </a:t>
+              <a:t>threshold）</a:t>
             </a:r>
             <a:r>
               <a:rPr lang="zh-CN" altLang="en-US" sz="1350" b="0">
@@ -6704,24 +7848,17 @@
                   <a:srgbClr val="1F2D22"/>
                 </a:solidFill>
               </a:rPr>
-              <a:t>距离，导致前端检索阈值（</a:t>
-            </a:r>
-            <a:r>
-              <a:rPr lang="en-US" altLang="zh-CN" sz="1350" b="0">
-                <a:solidFill>
-                  <a:srgbClr val="1F2D22"/>
-                </a:solidFill>
-              </a:rPr>
-              <a:t>threshold）</a:t>
-            </a:r>
-            <a:r>
-              <a:rPr lang="zh-CN" altLang="en-US" sz="1350" b="0">
-                <a:solidFill>
-                  <a:srgbClr val="1F2D22"/>
-                </a:solidFill>
-              </a:rPr>
               <a:t>过滤失效。</a:t>
             </a:r>
+          </a:p>
+          <a:p>
+            <a:pPr algn="l">
+              <a:defRPr sz="1350" b="0">
+                <a:solidFill>
+                  <a:srgbClr val="1F2D22"/>
+                </a:solidFill>
+              </a:defRPr>
+            </a:pPr>
             <a:endParaRPr lang="zh-CN" altLang="en-US" sz="1350" b="0">
               <a:solidFill>
                 <a:srgbClr val="1F2D22"/>
@@ -6736,6 +7873,71 @@
                 </a:solidFill>
               </a:defRPr>
             </a:pPr>
+            <a:r>
+              <a:rPr lang="zh-CN" altLang="en-US" sz="1350" b="0">
+                <a:solidFill>
+                  <a:srgbClr val="1F2D22"/>
+                </a:solidFill>
+              </a:rPr>
+              <a:t>距离转换公式：基于 </a:t>
+            </a:r>
+            <a:r>
+              <a:rPr lang="en-US" altLang="zh-CN" sz="1350" b="0">
+                <a:solidFill>
+                  <a:srgbClr val="1F2D22"/>
+                </a:solidFill>
+              </a:rPr>
+              <a:t>BGE </a:t>
+            </a:r>
+            <a:r>
+              <a:rPr lang="zh-CN" altLang="en-US" sz="1350" b="0">
+                <a:solidFill>
+                  <a:srgbClr val="1F2D22"/>
+                </a:solidFill>
+              </a:rPr>
+              <a:t>向量 </a:t>
+            </a:r>
+            <a:r>
+              <a:rPr lang="en-US" altLang="zh-CN" sz="1350" b="0">
+                <a:solidFill>
+                  <a:srgbClr val="1F2D22"/>
+                </a:solidFill>
+              </a:rPr>
+              <a:t>L2 </a:t>
+            </a:r>
+            <a:r>
+              <a:rPr lang="zh-CN" altLang="en-US" sz="1350" b="0">
+                <a:solidFill>
+                  <a:srgbClr val="1F2D22"/>
+                </a:solidFill>
+              </a:rPr>
+              <a:t>归一化特征，利用公式 </a:t>
+            </a:r>
+            <a:r>
+              <a:rPr lang="en-US" altLang="zh-CN" sz="1350" b="0">
+                <a:solidFill>
+                  <a:srgbClr val="1F2D22"/>
+                </a:solidFill>
+              </a:rPr>
+              <a:t>Score = 1.0 - d_L2 / 2.0 </a:t>
+            </a:r>
+            <a:r>
+              <a:rPr lang="zh-CN" altLang="en-US" sz="1350" b="0">
+                <a:solidFill>
+                  <a:srgbClr val="1F2D22"/>
+                </a:solidFill>
+              </a:rPr>
+              <a:t>重新映射。</a:t>
+            </a:r>
+          </a:p>
+          <a:p>
+            <a:pPr algn="l">
+              <a:defRPr sz="1350" b="0">
+                <a:solidFill>
+                  <a:srgbClr val="1F2D22"/>
+                </a:solidFill>
+              </a:defRPr>
+            </a:pPr>
             <a:endParaRPr lang="zh-CN" altLang="en-US" sz="1350" b="0">
               <a:solidFill>
                 <a:srgbClr val="1F2D22"/>
@@ -6756,7 +7958,7 @@
                   <a:srgbClr val="1F2D22"/>
                 </a:solidFill>
               </a:rPr>
-              <a:t>距离转换公式：基于 </a:t>
+              <a:t>统一余弦得分：各底层统一输出 </a:t>
             </a:r>
             <a:r>
               <a:rPr lang="en-US" altLang="zh-CN" sz="1350" b="0">
@@ -6764,7 +7966,7 @@
                   <a:srgbClr val="1F2D22"/>
                 </a:solidFill>
               </a:rPr>
-              <a:t>BGE </a:t>
+              <a:t>0∼1</a:t>
             </a:r>
             <a:r>
               <a:rPr lang="zh-CN" altLang="en-US" sz="1350" b="0">
@@ -6772,7 +7974,7 @@
                   <a:srgbClr val="1F2D22"/>
                 </a:solidFill>
               </a:rPr>
-              <a:t>向量 </a:t>
+              <a:t>的相似度，前端 </a:t>
             </a:r>
             <a:r>
               <a:rPr lang="en-US" altLang="zh-CN" sz="1350" b="0">
@@ -6780,7 +7982,7 @@
                   <a:srgbClr val="1F2D22"/>
                 </a:solidFill>
               </a:rPr>
-              <a:t>L2 </a:t>
+              <a:t>Similarity Threshold </a:t>
             </a:r>
             <a:r>
               <a:rPr lang="zh-CN" altLang="en-US" sz="1350" b="0">
@@ -6788,97 +7990,8 @@
                   <a:srgbClr val="1F2D22"/>
                 </a:solidFill>
               </a:rPr>
-              <a:t>归一化特征，利用公式 </a:t>
-            </a:r>
-            <a:r>
-              <a:rPr lang="en-US" altLang="zh-CN" sz="1350" b="0">
-                <a:solidFill>
-                  <a:srgbClr val="1F2D22"/>
-                </a:solidFill>
-              </a:rPr>
-              <a:t>Score = 1.0 - d_L2 / 2.0 </a:t>
-            </a:r>
-            <a:r>
-              <a:rPr lang="zh-CN" altLang="en-US" sz="1350" b="0">
-                <a:solidFill>
-                  <a:srgbClr val="1F2D22"/>
-                </a:solidFill>
-              </a:rPr>
-              <a:t>重新映射。</a:t>
-            </a:r>
-            <a:endParaRPr lang="zh-CN" altLang="en-US" sz="1350" b="0">
-              <a:solidFill>
-                <a:srgbClr val="1F2D22"/>
-              </a:solidFill>
-            </a:endParaRPr>
-          </a:p>
-          <a:p>
-            <a:pPr algn="l">
-              <a:defRPr sz="1350" b="0">
-                <a:solidFill>
-                  <a:srgbClr val="1F2D22"/>
-                </a:solidFill>
-              </a:defRPr>
-            </a:pPr>
-            <a:endParaRPr lang="zh-CN" altLang="en-US" sz="1350" b="0">
-              <a:solidFill>
-                <a:srgbClr val="1F2D22"/>
-              </a:solidFill>
-            </a:endParaRPr>
-          </a:p>
-          <a:p>
-            <a:pPr algn="l">
-              <a:defRPr sz="1350" b="0">
-                <a:solidFill>
-                  <a:srgbClr val="1F2D22"/>
-                </a:solidFill>
-              </a:defRPr>
-            </a:pPr>
-            <a:r>
-              <a:rPr lang="zh-CN" altLang="en-US" sz="1350" b="0">
-                <a:solidFill>
-                  <a:srgbClr val="1F2D22"/>
-                </a:solidFill>
-              </a:rPr>
-              <a:t>统一余弦得分：各底层统一输出 </a:t>
-            </a:r>
-            <a:r>
-              <a:rPr lang="en-US" altLang="zh-CN" sz="1350" b="0">
-                <a:solidFill>
-                  <a:srgbClr val="1F2D22"/>
-                </a:solidFill>
-              </a:rPr>
-              <a:t>0∼1</a:t>
-            </a:r>
-            <a:r>
-              <a:rPr lang="zh-CN" altLang="en-US" sz="1350" b="0">
-                <a:solidFill>
-                  <a:srgbClr val="1F2D22"/>
-                </a:solidFill>
-              </a:rPr>
-              <a:t>的相似度，前端 </a:t>
-            </a:r>
-            <a:r>
-              <a:rPr lang="en-US" altLang="zh-CN" sz="1350" b="0">
-                <a:solidFill>
-                  <a:srgbClr val="1F2D22"/>
-                </a:solidFill>
-              </a:rPr>
-              <a:t>Similarity Threshold </a:t>
-            </a:r>
-            <a:r>
-              <a:rPr lang="zh-CN" altLang="en-US" sz="1350" b="0">
-                <a:solidFill>
-                  <a:srgbClr val="1F2D22"/>
-                </a:solidFill>
-              </a:rPr>
               <a:t>滑动条在双底座下均精准生效。</a:t>
             </a:r>
-            <a:endParaRPr lang="zh-CN" altLang="en-US" sz="1350" b="0">
-              <a:solidFill>
-                <a:srgbClr val="1F2D22"/>
-              </a:solidFill>
-            </a:endParaRPr>
           </a:p>
         </p:txBody>
       </p:sp>
@@ -6958,11 +8071,6 @@
               </a:rPr>
               <a:t>本地集合管理与元数据兼容</a:t>
             </a:r>
-            <a:endParaRPr lang="zh-CN" altLang="en-US" sz="1650" b="1">
-              <a:solidFill>
-                <a:srgbClr val="2D4A33"/>
-              </a:solidFill>
-            </a:endParaRPr>
           </a:p>
         </p:txBody>
       </p:sp>
@@ -7071,11 +8179,6 @@
               </a:rPr>
               <a:t>count）。</a:t>
             </a:r>
-            <a:endParaRPr lang="en-US" altLang="zh-CN" sz="1350" b="0">
-              <a:solidFill>
-                <a:srgbClr val="1F2D22"/>
-              </a:solidFill>
-            </a:endParaRPr>
           </a:p>
           <a:p>
             <a:pPr algn="l">
@@ -7125,11 +8228,6 @@
               </a:rPr>
               <a:t>的元数据。</a:t>
             </a:r>
-            <a:endParaRPr lang="zh-CN" altLang="en-US" sz="1350" b="0">
-              <a:solidFill>
-                <a:srgbClr val="1F2D22"/>
-              </a:solidFill>
-            </a:endParaRPr>
           </a:p>
           <a:p>
             <a:pPr algn="l">
@@ -7163,11 +8261,6 @@
               </a:rPr>
               <a:t>数据通路。</a:t>
             </a:r>
-            <a:endParaRPr lang="zh-CN" altLang="en-US" sz="1350" b="0">
-              <a:solidFill>
-                <a:srgbClr val="1F2D22"/>
-              </a:solidFill>
-            </a:endParaRPr>
           </a:p>
         </p:txBody>
       </p:sp>
@@ -7179,7 +8272,7 @@
 </p:sld>
 </file>
 
-<file path=ppt/slides/slide14.xml><?xml version="1.0" encoding="utf-8"?>
+<file path=ppt/slides/slide15.xml><?xml version="1.0" encoding="utf-8"?>
 <p:sld xmlns:a="http://schemas.openxmlformats.org/drawingml/2006/main" xmlns:r="http://schemas.openxmlformats.org/officeDocument/2006/relationships" xmlns:p="http://schemas.openxmlformats.org/presentationml/2006/main">
   <p:cSld>
     <p:bg>
@@ -7356,7 +8449,7 @@
 </p:sld>
 </file>
 
-<file path=ppt/slides/slide15.xml><?xml version="1.0" encoding="utf-8"?>
+<file path=ppt/slides/slide16.xml><?xml version="1.0" encoding="utf-8"?>
 <p:sld xmlns:a="http://schemas.openxmlformats.org/drawingml/2006/main" xmlns:r="http://schemas.openxmlformats.org/officeDocument/2006/relationships" xmlns:p="http://schemas.openxmlformats.org/presentationml/2006/main">
   <p:cSld>
     <p:spTree>
@@ -7581,7 +8674,6 @@
               <a:rPr lang="zh-CN" altLang="zh-CN" dirty="0"/>
               <a:t>系统不再只使用用户原始 query 进行一次检索，而是在检索前调用大模型生成多个不同角度的查询变体。随后系统对每个 query 分别生成 embedding 并查询 Chroma，最后将所有结果去重、排序、截取最终 Top K。</a:t>
             </a:r>
-            <a:endParaRPr lang="zh-CN" altLang="zh-CN" dirty="0"/>
           </a:p>
         </p:txBody>
       </p:sp>
@@ -7707,7 +8799,6 @@
               <a:rPr lang="zh-CN" altLang="zh-CN" dirty="0"/>
               <a:t>生成服务现在不会在初稿生成后立即返回，而是先进入审查阶段。系统会把以下三类信息交给大模型：</a:t>
             </a:r>
-            <a:endParaRPr lang="zh-CN" altLang="zh-CN" dirty="0"/>
           </a:p>
           <a:p>
             <a:br>
@@ -7720,21 +8811,18 @@
               <a:rPr lang="zh-CN" altLang="zh-CN" dirty="0"/>
               <a:t>1. 用户原始问题。</a:t>
             </a:r>
-            <a:endParaRPr lang="zh-CN" altLang="zh-CN" dirty="0"/>
           </a:p>
           <a:p>
             <a:r>
               <a:rPr lang="zh-CN" altLang="zh-CN" dirty="0"/>
               <a:t>2. 检索结果拼接出的上下文。</a:t>
             </a:r>
-            <a:endParaRPr lang="zh-CN" altLang="zh-CN" dirty="0"/>
           </a:p>
           <a:p>
             <a:r>
               <a:rPr lang="zh-CN" altLang="zh-CN" dirty="0"/>
               <a:t>3. 刚生成的回答草案。</a:t>
             </a:r>
-            <a:endParaRPr lang="zh-CN" altLang="zh-CN" dirty="0"/>
           </a:p>
           <a:p>
             <a:br>
@@ -7747,7 +8835,6 @@
               <a:rPr lang="zh-CN" altLang="zh-CN" dirty="0"/>
               <a:t>审查模型需要判断回答草案是否严格基于上下文，是否存在幻觉，是否遗漏了问题关键点。</a:t>
             </a:r>
-            <a:endParaRPr lang="zh-CN" altLang="zh-CN" dirty="0"/>
           </a:p>
         </p:txBody>
       </p:sp>
@@ -7880,7 +8967,6 @@
               <a:rPr lang="zh-CN" altLang="zh-CN" dirty="0"/>
               <a:t>自我纠错机制可以在最终返回前进行一次事实审查，降低模型脱离上下文自由发挥的概率，提高回答与文档内容的一致性。</a:t>
             </a:r>
-            <a:endParaRPr lang="zh-CN" altLang="zh-CN" dirty="0"/>
           </a:p>
           <a:p>
             <a:endParaRPr lang="zh-CN" altLang="zh-CN" dirty="0"/>
@@ -7895,7 +8981,7 @@
 </p:sld>
 </file>
 
-<file path=ppt/slides/slide16.xml><?xml version="1.0" encoding="utf-8"?>
+<file path=ppt/slides/slide17.xml><?xml version="1.0" encoding="utf-8"?>
 <p:sld xmlns:a="http://schemas.openxmlformats.org/drawingml/2006/main" xmlns:r="http://schemas.openxmlformats.org/officeDocument/2006/relationships" xmlns:p="http://schemas.openxmlformats.org/presentationml/2006/main">
   <p:cSld>
     <p:bg>
@@ -8054,749 +9140,6 @@
               <a:ea typeface="华文中宋" panose="02010600040101010101" charset="-122"/>
               <a:cs typeface="+mn-cs"/>
             </a:endParaRPr>
-          </a:p>
-        </p:txBody>
-      </p:sp>
-    </p:spTree>
-  </p:cSld>
-  <p:clrMapOvr>
-    <a:masterClrMapping/>
-  </p:clrMapOvr>
-</p:sld>
-</file>
-
-<file path=ppt/slides/slide17.xml><?xml version="1.0" encoding="utf-8"?>
-<p:sld xmlns:a="http://schemas.openxmlformats.org/drawingml/2006/main" xmlns:r="http://schemas.openxmlformats.org/officeDocument/2006/relationships" xmlns:p="http://schemas.openxmlformats.org/presentationml/2006/main">
-  <p:cSld>
-    <p:spTree>
-      <p:nvGrpSpPr>
-        <p:cNvPr id="1" name=""/>
-        <p:cNvGrpSpPr/>
-        <p:nvPr/>
-      </p:nvGrpSpPr>
-      <p:grpSpPr>
-        <a:xfrm>
-          <a:off x="0" y="0"/>
-          <a:ext cx="0" cy="0"/>
-          <a:chOff x="0" y="0"/>
-          <a:chExt cx="0" cy="0"/>
-        </a:xfrm>
-      </p:grpSpPr>
-      <p:sp>
-        <p:nvSpPr>
-          <p:cNvPr id="13" name="矩形 12"/>
-          <p:cNvSpPr>
-            <a:spLocks noGrp="1"/>
-          </p:cNvSpPr>
-          <p:nvPr/>
-        </p:nvSpPr>
-        <p:spPr>
-          <a:xfrm>
-            <a:off x="0" y="0"/>
-            <a:ext cx="12192000" cy="114300"/>
-          </a:xfrm>
-          <a:prstGeom prst="rect">
-            <a:avLst/>
-          </a:prstGeom>
-          <a:solidFill>
-            <a:srgbClr val="2D4A33"/>
-          </a:solidFill>
-          <a:ln w="0">
-            <a:solidFill>
-              <a:srgbClr val="2D4A33"/>
-            </a:solidFill>
-            <a:prstDash val="solid"/>
-          </a:ln>
-        </p:spPr>
-      </p:sp>
-      <p:sp>
-        <p:nvSpPr>
-          <p:cNvPr id="2" name="矩形 1"/>
-          <p:cNvSpPr>
-            <a:spLocks noGrp="1"/>
-          </p:cNvSpPr>
-          <p:nvPr/>
-        </p:nvSpPr>
-        <p:spPr>
-          <a:xfrm>
-            <a:off x="762000" y="400050"/>
-            <a:ext cx="10668000" cy="457200"/>
-          </a:xfrm>
-          <a:prstGeom prst="rect">
-            <a:avLst/>
-          </a:prstGeom>
-          <a:solidFill>
-            <a:srgbClr val="000000">
-              <a:alpha val="0"/>
-            </a:srgbClr>
-          </a:solidFill>
-          <a:ln w="0">
-            <a:solidFill>
-              <a:srgbClr val="000000">
-                <a:alpha val="0"/>
-              </a:srgbClr>
-            </a:solidFill>
-            <a:prstDash val="solid"/>
-          </a:ln>
-        </p:spPr>
-        <p:txBody>
-          <a:bodyPr anchor="ctr"/>
-          <a:lstStyle/>
-          <a:p>
-            <a:pPr algn="ctr">
-              <a:defRPr sz="2550" b="1">
-                <a:solidFill>
-                  <a:srgbClr val="2D4A33"/>
-                </a:solidFill>
-              </a:defRPr>
-            </a:pPr>
-            <a:r>
-              <a:rPr lang="zh-CN" altLang="en-US" sz="2800" b="0" i="0" dirty="0">
-                <a:effectLst/>
-                <a:latin typeface="Color Emoji"/>
-              </a:rPr>
-              <a:t>谢羿衡</a:t>
-            </a:r>
-            <a:endParaRPr sz="2550" b="1" dirty="0"/>
-          </a:p>
-        </p:txBody>
-      </p:sp>
-      <p:sp>
-        <p:nvSpPr>
-          <p:cNvPr id="4" name="矩形 3"/>
-          <p:cNvSpPr>
-            <a:spLocks noGrp="1"/>
-          </p:cNvSpPr>
-          <p:nvPr/>
-        </p:nvSpPr>
-        <p:spPr>
-          <a:xfrm>
-            <a:off x="484716" y="1250155"/>
-            <a:ext cx="5763683" cy="2542911"/>
-          </a:xfrm>
-          <a:prstGeom prst="rect">
-            <a:avLst/>
-          </a:prstGeom>
-          <a:solidFill>
-            <a:srgbClr val="FFFFFF"/>
-          </a:solidFill>
-          <a:ln w="9525">
-            <a:solidFill>
-              <a:srgbClr val="C7D0C4"/>
-            </a:solidFill>
-            <a:prstDash val="solid"/>
-          </a:ln>
-        </p:spPr>
-        <p:txBody>
-          <a:bodyPr/>
-          <a:lstStyle/>
-          <a:p>
-            <a:endParaRPr lang="zh-CN" altLang="en-US" dirty="0"/>
-          </a:p>
-        </p:txBody>
-      </p:sp>
-      <p:sp>
-        <p:nvSpPr>
-          <p:cNvPr id="5" name="矩形 4"/>
-          <p:cNvSpPr>
-            <a:spLocks noGrp="1"/>
-          </p:cNvSpPr>
-          <p:nvPr/>
-        </p:nvSpPr>
-        <p:spPr>
-          <a:xfrm>
-            <a:off x="1736195" y="1450181"/>
-            <a:ext cx="4305300" cy="323850"/>
-          </a:xfrm>
-          <a:prstGeom prst="rect">
-            <a:avLst/>
-          </a:prstGeom>
-          <a:solidFill>
-            <a:srgbClr val="000000">
-              <a:alpha val="0"/>
-            </a:srgbClr>
-          </a:solidFill>
-          <a:ln w="0">
-            <a:solidFill>
-              <a:srgbClr val="000000">
-                <a:alpha val="0"/>
-              </a:srgbClr>
-            </a:solidFill>
-            <a:prstDash val="solid"/>
-          </a:ln>
-        </p:spPr>
-        <p:txBody>
-          <a:bodyPr anchor="ctr"/>
-          <a:lstStyle/>
-          <a:p>
-            <a:pPr algn="l">
-              <a:defRPr sz="1650" b="1">
-                <a:solidFill>
-                  <a:srgbClr val="2D4A33"/>
-                </a:solidFill>
-              </a:defRPr>
-            </a:pPr>
-            <a:r>
-              <a:rPr lang="zh-CN" altLang="en-US" sz="3200" b="1" dirty="0">
-                <a:solidFill>
-                  <a:srgbClr val="2D4A33"/>
-                </a:solidFill>
-              </a:rPr>
-              <a:t>中文文本切分改进</a:t>
-            </a:r>
-            <a:endParaRPr sz="3200" b="1" dirty="0">
-              <a:solidFill>
-                <a:srgbClr val="2D4A33"/>
-              </a:solidFill>
-            </a:endParaRPr>
-          </a:p>
-        </p:txBody>
-      </p:sp>
-      <p:sp>
-        <p:nvSpPr>
-          <p:cNvPr id="6" name="矩形 5"/>
-          <p:cNvSpPr>
-            <a:spLocks noGrp="1"/>
-          </p:cNvSpPr>
-          <p:nvPr/>
-        </p:nvSpPr>
-        <p:spPr>
-          <a:xfrm>
-            <a:off x="699557" y="1867430"/>
-            <a:ext cx="5334000" cy="1728787"/>
-          </a:xfrm>
-          <a:prstGeom prst="rect">
-            <a:avLst/>
-          </a:prstGeom>
-          <a:solidFill>
-            <a:srgbClr val="000000">
-              <a:alpha val="0"/>
-            </a:srgbClr>
-          </a:solidFill>
-          <a:ln w="0">
-            <a:solidFill>
-              <a:srgbClr val="000000">
-                <a:alpha val="0"/>
-              </a:srgbClr>
-            </a:solidFill>
-            <a:prstDash val="solid"/>
-          </a:ln>
-        </p:spPr>
-        <p:txBody>
-          <a:bodyPr anchor="ctr"/>
-          <a:lstStyle/>
-          <a:p>
-            <a:r>
-              <a:rPr lang="zh-CN" altLang="en-US" dirty="0"/>
-              <a:t>分隔符扩展为中英文混合</a:t>
-            </a:r>
-            <a:r>
-              <a:rPr lang="en-US" altLang="zh-CN" dirty="0"/>
-              <a:t>:</a:t>
-            </a:r>
-            <a:r>
-              <a:rPr lang="zh-CN" altLang="en-US" dirty="0"/>
-              <a:t>。！？； </a:t>
-            </a:r>
-            <a:r>
-              <a:rPr lang="en-US" altLang="zh-CN" dirty="0"/>
-              <a:t>+ .!?</a:t>
-            </a:r>
-            <a:endParaRPr lang="en-US" altLang="zh-CN" dirty="0"/>
-          </a:p>
-          <a:p>
-            <a:endParaRPr lang="en-US" altLang="zh-CN" dirty="0"/>
-          </a:p>
-          <a:p>
-            <a:r>
-              <a:rPr lang="zh-CN" altLang="en-US" dirty="0"/>
-              <a:t>句子分块用正则 </a:t>
-            </a:r>
-            <a:r>
-              <a:rPr lang="en-US" altLang="zh-CN" dirty="0"/>
-              <a:t>(?&lt;=[</a:t>
-            </a:r>
-            <a:r>
-              <a:rPr lang="zh-CN" altLang="en-US" dirty="0"/>
-              <a:t>。！？；</a:t>
-            </a:r>
-            <a:r>
-              <a:rPr lang="en-US" altLang="zh-CN" dirty="0"/>
-              <a:t>.!?])\s* </a:t>
-            </a:r>
-            <a:r>
-              <a:rPr lang="zh-CN" altLang="en-US" dirty="0"/>
-              <a:t>识别边界</a:t>
-            </a:r>
-            <a:endParaRPr lang="en-US" altLang="zh-CN" dirty="0"/>
-          </a:p>
-          <a:p>
-            <a:endParaRPr lang="zh-CN" altLang="en-US" dirty="0"/>
-          </a:p>
-          <a:p>
-            <a:r>
-              <a:rPr lang="zh-CN" altLang="en-US" dirty="0"/>
-              <a:t>超长句</a:t>
-            </a:r>
-            <a:r>
-              <a:rPr lang="en-US" altLang="zh-CN" dirty="0"/>
-              <a:t>(&gt;1000</a:t>
-            </a:r>
-            <a:r>
-              <a:rPr lang="zh-CN" altLang="en-US" dirty="0"/>
-              <a:t>字</a:t>
-            </a:r>
-            <a:r>
-              <a:rPr lang="en-US" altLang="zh-CN" dirty="0"/>
-              <a:t>)</a:t>
-            </a:r>
-            <a:r>
-              <a:rPr lang="zh-CN" altLang="en-US" dirty="0"/>
-              <a:t>自动二次切分</a:t>
-            </a:r>
-            <a:r>
-              <a:rPr lang="en-US" altLang="zh-CN" dirty="0"/>
-              <a:t>,</a:t>
-            </a:r>
-            <a:r>
-              <a:rPr lang="zh-CN" altLang="en-US" dirty="0"/>
-              <a:t>兼容中英混排</a:t>
-            </a:r>
-            <a:endParaRPr lang="zh-CN" altLang="zh-CN" dirty="0"/>
-          </a:p>
-        </p:txBody>
-      </p:sp>
-      <p:sp>
-        <p:nvSpPr>
-          <p:cNvPr id="7" name="矩形 6"/>
-          <p:cNvSpPr>
-            <a:spLocks noGrp="1"/>
-          </p:cNvSpPr>
-          <p:nvPr/>
-        </p:nvSpPr>
-        <p:spPr>
-          <a:xfrm>
-            <a:off x="6515100" y="1250154"/>
-            <a:ext cx="4762500" cy="5207795"/>
-          </a:xfrm>
-          <a:prstGeom prst="rect">
-            <a:avLst/>
-          </a:prstGeom>
-          <a:solidFill>
-            <a:srgbClr val="FFFFFF"/>
-          </a:solidFill>
-          <a:ln w="9525">
-            <a:solidFill>
-              <a:srgbClr val="C7D0C4"/>
-            </a:solidFill>
-            <a:prstDash val="solid"/>
-          </a:ln>
-        </p:spPr>
-      </p:sp>
-      <p:sp>
-        <p:nvSpPr>
-          <p:cNvPr id="8" name="矩形 7"/>
-          <p:cNvSpPr>
-            <a:spLocks noGrp="1"/>
-          </p:cNvSpPr>
-          <p:nvPr/>
-        </p:nvSpPr>
-        <p:spPr>
-          <a:xfrm>
-            <a:off x="6800850" y="1685925"/>
-            <a:ext cx="4305300" cy="323850"/>
-          </a:xfrm>
-          <a:prstGeom prst="rect">
-            <a:avLst/>
-          </a:prstGeom>
-          <a:solidFill>
-            <a:srgbClr val="000000">
-              <a:alpha val="0"/>
-            </a:srgbClr>
-          </a:solidFill>
-          <a:ln w="0">
-            <a:solidFill>
-              <a:srgbClr val="000000">
-                <a:alpha val="0"/>
-              </a:srgbClr>
-            </a:solidFill>
-            <a:prstDash val="solid"/>
-          </a:ln>
-        </p:spPr>
-        <p:txBody>
-          <a:bodyPr anchor="ctr"/>
-          <a:lstStyle/>
-          <a:p>
-            <a:pPr>
-              <a:defRPr sz="1650" b="1">
-                <a:solidFill>
-                  <a:srgbClr val="2D4A33"/>
-                </a:solidFill>
-              </a:defRPr>
-            </a:pPr>
-            <a:r>
-              <a:rPr lang="en-US" sz="3200" b="1" dirty="0">
-                <a:solidFill>
-                  <a:srgbClr val="2D4A33"/>
-                </a:solidFill>
-              </a:rPr>
-              <a:t>Windows FAISS </a:t>
-            </a:r>
-            <a:endParaRPr lang="en-US" sz="3200" b="1" dirty="0">
-              <a:solidFill>
-                <a:srgbClr val="2D4A33"/>
-              </a:solidFill>
-            </a:endParaRPr>
-          </a:p>
-          <a:p>
-            <a:pPr>
-              <a:defRPr sz="1650" b="1">
-                <a:solidFill>
-                  <a:srgbClr val="2D4A33"/>
-                </a:solidFill>
-              </a:defRPr>
-            </a:pPr>
-            <a:r>
-              <a:rPr lang="zh-CN" altLang="en-US" sz="3200" b="1" dirty="0">
-                <a:solidFill>
-                  <a:srgbClr val="2D4A33"/>
-                </a:solidFill>
-              </a:rPr>
-              <a:t>中文路径修复</a:t>
-            </a:r>
-            <a:endParaRPr sz="3200" b="1" dirty="0">
-              <a:solidFill>
-                <a:srgbClr val="2D4A33"/>
-              </a:solidFill>
-            </a:endParaRPr>
-          </a:p>
-        </p:txBody>
-      </p:sp>
-      <p:sp>
-        <p:nvSpPr>
-          <p:cNvPr id="9" name="矩形 8"/>
-          <p:cNvSpPr>
-            <a:spLocks noGrp="1"/>
-          </p:cNvSpPr>
-          <p:nvPr/>
-        </p:nvSpPr>
-        <p:spPr>
-          <a:xfrm>
-            <a:off x="6729941" y="2226733"/>
-            <a:ext cx="4539192" cy="2234141"/>
-          </a:xfrm>
-          <a:prstGeom prst="rect">
-            <a:avLst/>
-          </a:prstGeom>
-          <a:solidFill>
-            <a:srgbClr val="000000">
-              <a:alpha val="0"/>
-            </a:srgbClr>
-          </a:solidFill>
-          <a:ln w="0">
-            <a:solidFill>
-              <a:srgbClr val="000000">
-                <a:alpha val="0"/>
-              </a:srgbClr>
-            </a:solidFill>
-            <a:prstDash val="solid"/>
-          </a:ln>
-        </p:spPr>
-        <p:txBody>
-          <a:bodyPr anchor="ctr"/>
-          <a:lstStyle/>
-          <a:p>
-            <a:r>
-              <a:rPr lang="zh-CN" altLang="en-US" dirty="0"/>
-              <a:t>痛点</a:t>
-            </a:r>
-            <a:r>
-              <a:rPr lang="en-US" altLang="zh-CN" dirty="0"/>
-              <a:t>:</a:t>
-            </a:r>
-            <a:r>
-              <a:rPr lang="en-US" altLang="zh-CN" dirty="0" err="1"/>
-              <a:t>read_index</a:t>
-            </a:r>
-            <a:r>
-              <a:rPr lang="en-US" altLang="zh-CN" dirty="0"/>
-              <a:t>/</a:t>
-            </a:r>
-            <a:r>
-              <a:rPr lang="en-US" altLang="zh-CN" dirty="0" err="1"/>
-              <a:t>write_index</a:t>
-            </a:r>
-            <a:r>
-              <a:rPr lang="en-US" altLang="zh-CN" dirty="0"/>
-              <a:t> </a:t>
-            </a:r>
-            <a:r>
-              <a:rPr lang="zh-CN" altLang="en-US" dirty="0"/>
-              <a:t>遇中文路径打开失败</a:t>
-            </a:r>
-            <a:endParaRPr lang="en-US" altLang="zh-CN" dirty="0"/>
-          </a:p>
-          <a:p>
-            <a:endParaRPr lang="zh-CN" altLang="en-US" dirty="0"/>
-          </a:p>
-          <a:p>
-            <a:r>
-              <a:rPr lang="zh-CN" altLang="en-US" dirty="0"/>
-              <a:t>改用 </a:t>
-            </a:r>
-            <a:r>
-              <a:rPr lang="en-US" altLang="zh-CN" dirty="0"/>
-              <a:t>serialize/</a:t>
-            </a:r>
-            <a:r>
-              <a:rPr lang="en-US" altLang="zh-CN" dirty="0" err="1"/>
-              <a:t>deserialize_index</a:t>
-            </a:r>
-            <a:r>
-              <a:rPr lang="en-US" altLang="zh-CN" dirty="0"/>
-              <a:t> + Python </a:t>
-            </a:r>
-            <a:r>
-              <a:rPr lang="zh-CN" altLang="en-US" dirty="0"/>
-              <a:t>原生文件流</a:t>
-            </a:r>
-            <a:endParaRPr lang="en-US" altLang="zh-CN" dirty="0"/>
-          </a:p>
-          <a:p>
-            <a:endParaRPr lang="zh-CN" altLang="en-US" dirty="0"/>
-          </a:p>
-          <a:p>
-            <a:r>
-              <a:rPr lang="zh-CN" altLang="en-US" dirty="0"/>
-              <a:t>中文知识库名</a:t>
-            </a:r>
-            <a:r>
-              <a:rPr lang="en-US" altLang="zh-CN" dirty="0"/>
-              <a:t>/</a:t>
-            </a:r>
-            <a:r>
-              <a:rPr lang="zh-CN" altLang="en-US" dirty="0"/>
-              <a:t>文档名均可正常索引读写</a:t>
-            </a:r>
-            <a:endParaRPr lang="zh-CN" altLang="zh-CN" dirty="0"/>
-          </a:p>
-        </p:txBody>
-      </p:sp>
-      <p:sp>
-        <p:nvSpPr>
-          <p:cNvPr id="10" name="矩形 9"/>
-          <p:cNvSpPr>
-            <a:spLocks noGrp="1"/>
-          </p:cNvSpPr>
-          <p:nvPr/>
-        </p:nvSpPr>
-        <p:spPr>
-          <a:xfrm>
-            <a:off x="484716" y="3852863"/>
-            <a:ext cx="5763683" cy="2605087"/>
-          </a:xfrm>
-          <a:prstGeom prst="rect">
-            <a:avLst/>
-          </a:prstGeom>
-          <a:solidFill>
-            <a:srgbClr val="FFFFFF"/>
-          </a:solidFill>
-          <a:ln w="9525">
-            <a:solidFill>
-              <a:srgbClr val="C7D0C4"/>
-            </a:solidFill>
-            <a:prstDash val="solid"/>
-          </a:ln>
-        </p:spPr>
-      </p:sp>
-      <p:sp>
-        <p:nvSpPr>
-          <p:cNvPr id="11" name="矩形 10"/>
-          <p:cNvSpPr>
-            <a:spLocks noGrp="1"/>
-          </p:cNvSpPr>
-          <p:nvPr/>
-        </p:nvSpPr>
-        <p:spPr>
-          <a:xfrm>
-            <a:off x="1752600" y="3876675"/>
-            <a:ext cx="3638550" cy="323850"/>
-          </a:xfrm>
-          <a:prstGeom prst="rect">
-            <a:avLst/>
-          </a:prstGeom>
-          <a:solidFill>
-            <a:srgbClr val="000000">
-              <a:alpha val="0"/>
-            </a:srgbClr>
-          </a:solidFill>
-          <a:ln w="0">
-            <a:solidFill>
-              <a:srgbClr val="000000">
-                <a:alpha val="0"/>
-              </a:srgbClr>
-            </a:solidFill>
-            <a:prstDash val="solid"/>
-          </a:ln>
-        </p:spPr>
-        <p:txBody>
-          <a:bodyPr anchor="ctr"/>
-          <a:lstStyle/>
-          <a:p>
-            <a:pPr>
-              <a:defRPr sz="1650" b="1">
-                <a:solidFill>
-                  <a:srgbClr val="2D4A33"/>
-                </a:solidFill>
-              </a:defRPr>
-            </a:pPr>
-            <a:r>
-              <a:rPr lang="zh-CN" altLang="en-US" sz="3200" b="1" dirty="0">
-                <a:solidFill>
-                  <a:srgbClr val="2D4A33"/>
-                </a:solidFill>
-              </a:rPr>
-              <a:t>中文字数统计优化</a:t>
-            </a:r>
-            <a:endParaRPr sz="3200" b="1" dirty="0">
-              <a:solidFill>
-                <a:srgbClr val="2D4A33"/>
-              </a:solidFill>
-            </a:endParaRPr>
-          </a:p>
-        </p:txBody>
-      </p:sp>
-      <p:sp>
-        <p:nvSpPr>
-          <p:cNvPr id="12" name="矩形 11"/>
-          <p:cNvSpPr>
-            <a:spLocks noGrp="1"/>
-          </p:cNvSpPr>
-          <p:nvPr/>
-        </p:nvSpPr>
-        <p:spPr>
-          <a:xfrm>
-            <a:off x="699557" y="4292070"/>
-            <a:ext cx="6378576" cy="1666875"/>
-          </a:xfrm>
-          <a:prstGeom prst="rect">
-            <a:avLst/>
-          </a:prstGeom>
-          <a:solidFill>
-            <a:srgbClr val="000000">
-              <a:alpha val="0"/>
-            </a:srgbClr>
-          </a:solidFill>
-          <a:ln w="0">
-            <a:solidFill>
-              <a:srgbClr val="000000">
-                <a:alpha val="0"/>
-              </a:srgbClr>
-            </a:solidFill>
-            <a:prstDash val="solid"/>
-          </a:ln>
-        </p:spPr>
-        <p:txBody>
-          <a:bodyPr anchor="ctr"/>
-          <a:lstStyle/>
-          <a:p>
-            <a:r>
-              <a:rPr lang="zh-CN" altLang="en-US" dirty="0"/>
-              <a:t>原 </a:t>
-            </a:r>
-            <a:r>
-              <a:rPr lang="en-US" altLang="zh-CN" dirty="0" err="1"/>
-              <a:t>text.split</a:t>
-            </a:r>
-            <a:r>
-              <a:rPr lang="en-US" altLang="zh-CN" dirty="0"/>
-              <a:t>() </a:t>
-            </a:r>
-            <a:r>
-              <a:rPr lang="zh-CN" altLang="en-US" dirty="0"/>
-              <a:t>把整句中文算作 </a:t>
-            </a:r>
-            <a:r>
-              <a:rPr lang="en-US" altLang="zh-CN" dirty="0"/>
-              <a:t>1 </a:t>
-            </a:r>
-            <a:r>
-              <a:rPr lang="zh-CN" altLang="en-US" dirty="0"/>
-              <a:t>个词</a:t>
-            </a:r>
-            <a:endParaRPr lang="en-US" altLang="zh-CN" dirty="0"/>
-          </a:p>
-          <a:p>
-            <a:endParaRPr lang="zh-CN" altLang="en-US" dirty="0"/>
-          </a:p>
-          <a:p>
-            <a:r>
-              <a:rPr lang="zh-CN" altLang="en-US" dirty="0"/>
-              <a:t>新增 </a:t>
-            </a:r>
-            <a:r>
-              <a:rPr lang="en-US" altLang="zh-CN" dirty="0"/>
-              <a:t>_</a:t>
-            </a:r>
-            <a:r>
-              <a:rPr lang="en-US" altLang="zh-CN" dirty="0" err="1"/>
-              <a:t>estimate_word_count</a:t>
-            </a:r>
-            <a:r>
-              <a:rPr lang="en-US" altLang="zh-CN" dirty="0"/>
-              <a:t>:</a:t>
-            </a:r>
-            <a:r>
-              <a:rPr lang="zh-CN" altLang="en-US" dirty="0"/>
-              <a:t>正则 </a:t>
-            </a:r>
-            <a:r>
-              <a:rPr lang="en-US" altLang="zh-CN" dirty="0"/>
-              <a:t>[</a:t>
-            </a:r>
-            <a:r>
-              <a:rPr lang="zh-CN" altLang="en-US" dirty="0"/>
-              <a:t>一</a:t>
-            </a:r>
-            <a:r>
-              <a:rPr lang="en-US" altLang="zh-CN" dirty="0"/>
-              <a:t>-鿿]|[A-Za-z0-9_]+</a:t>
-            </a:r>
-            <a:endParaRPr lang="en-US" altLang="zh-CN" dirty="0"/>
-          </a:p>
-          <a:p>
-            <a:endParaRPr lang="en-US" altLang="zh-CN" dirty="0"/>
-          </a:p>
-          <a:p>
-            <a:r>
-              <a:rPr lang="zh-CN" altLang="en-US" dirty="0"/>
-              <a:t>每个汉字</a:t>
-            </a:r>
-            <a:r>
-              <a:rPr lang="en-US" altLang="zh-CN" dirty="0"/>
-              <a:t>=1</a:t>
-            </a:r>
-            <a:r>
-              <a:rPr lang="zh-CN" altLang="en-US" dirty="0"/>
-              <a:t>单元</a:t>
-            </a:r>
-            <a:r>
-              <a:rPr lang="en-US" altLang="zh-CN" dirty="0"/>
-              <a:t>,</a:t>
-            </a:r>
-            <a:r>
-              <a:rPr lang="zh-CN" altLang="en-US" dirty="0"/>
-              <a:t>准确控制上下文 </a:t>
-            </a:r>
-            <a:r>
-              <a:rPr lang="en-US" altLang="zh-CN" dirty="0"/>
-              <a:t>token </a:t>
-            </a:r>
-            <a:r>
-              <a:rPr lang="zh-CN" altLang="en-US" dirty="0"/>
-              <a:t>预算</a:t>
-            </a:r>
-            <a:endParaRPr lang="zh-CN" altLang="zh-CN" dirty="0"/>
           </a:p>
         </p:txBody>
       </p:sp>
@@ -8827,6 +9170,742 @@
       </p:grpSpPr>
       <p:sp>
         <p:nvSpPr>
+          <p:cNvPr id="13" name="矩形 12"/>
+          <p:cNvSpPr>
+            <a:spLocks noGrp="1"/>
+          </p:cNvSpPr>
+          <p:nvPr/>
+        </p:nvSpPr>
+        <p:spPr>
+          <a:xfrm>
+            <a:off x="0" y="0"/>
+            <a:ext cx="12192000" cy="114300"/>
+          </a:xfrm>
+          <a:prstGeom prst="rect">
+            <a:avLst/>
+          </a:prstGeom>
+          <a:solidFill>
+            <a:srgbClr val="2D4A33"/>
+          </a:solidFill>
+          <a:ln w="0">
+            <a:solidFill>
+              <a:srgbClr val="2D4A33"/>
+            </a:solidFill>
+            <a:prstDash val="solid"/>
+          </a:ln>
+        </p:spPr>
+      </p:sp>
+      <p:sp>
+        <p:nvSpPr>
+          <p:cNvPr id="2" name="矩形 1"/>
+          <p:cNvSpPr>
+            <a:spLocks noGrp="1"/>
+          </p:cNvSpPr>
+          <p:nvPr/>
+        </p:nvSpPr>
+        <p:spPr>
+          <a:xfrm>
+            <a:off x="762000" y="400050"/>
+            <a:ext cx="10668000" cy="457200"/>
+          </a:xfrm>
+          <a:prstGeom prst="rect">
+            <a:avLst/>
+          </a:prstGeom>
+          <a:solidFill>
+            <a:srgbClr val="000000">
+              <a:alpha val="0"/>
+            </a:srgbClr>
+          </a:solidFill>
+          <a:ln w="0">
+            <a:solidFill>
+              <a:srgbClr val="000000">
+                <a:alpha val="0"/>
+              </a:srgbClr>
+            </a:solidFill>
+            <a:prstDash val="solid"/>
+          </a:ln>
+        </p:spPr>
+        <p:txBody>
+          <a:bodyPr anchor="ctr"/>
+          <a:lstStyle/>
+          <a:p>
+            <a:pPr algn="ctr">
+              <a:defRPr sz="2550" b="1">
+                <a:solidFill>
+                  <a:srgbClr val="2D4A33"/>
+                </a:solidFill>
+              </a:defRPr>
+            </a:pPr>
+            <a:r>
+              <a:rPr lang="zh-CN" altLang="en-US" sz="2800" b="0" i="0" dirty="0">
+                <a:effectLst/>
+                <a:latin typeface="Color Emoji"/>
+              </a:rPr>
+              <a:t>谢羿衡</a:t>
+            </a:r>
+            <a:endParaRPr sz="2550" b="1" dirty="0"/>
+          </a:p>
+        </p:txBody>
+      </p:sp>
+      <p:sp>
+        <p:nvSpPr>
+          <p:cNvPr id="4" name="矩形 3"/>
+          <p:cNvSpPr>
+            <a:spLocks noGrp="1"/>
+          </p:cNvSpPr>
+          <p:nvPr/>
+        </p:nvSpPr>
+        <p:spPr>
+          <a:xfrm>
+            <a:off x="484716" y="1250155"/>
+            <a:ext cx="5763683" cy="2542911"/>
+          </a:xfrm>
+          <a:prstGeom prst="rect">
+            <a:avLst/>
+          </a:prstGeom>
+          <a:solidFill>
+            <a:srgbClr val="FFFFFF"/>
+          </a:solidFill>
+          <a:ln w="9525">
+            <a:solidFill>
+              <a:srgbClr val="C7D0C4"/>
+            </a:solidFill>
+            <a:prstDash val="solid"/>
+          </a:ln>
+        </p:spPr>
+        <p:txBody>
+          <a:bodyPr/>
+          <a:lstStyle/>
+          <a:p>
+            <a:endParaRPr lang="zh-CN" altLang="en-US" dirty="0"/>
+          </a:p>
+        </p:txBody>
+      </p:sp>
+      <p:sp>
+        <p:nvSpPr>
+          <p:cNvPr id="5" name="矩形 4"/>
+          <p:cNvSpPr>
+            <a:spLocks noGrp="1"/>
+          </p:cNvSpPr>
+          <p:nvPr/>
+        </p:nvSpPr>
+        <p:spPr>
+          <a:xfrm>
+            <a:off x="1736195" y="1450181"/>
+            <a:ext cx="4305300" cy="323850"/>
+          </a:xfrm>
+          <a:prstGeom prst="rect">
+            <a:avLst/>
+          </a:prstGeom>
+          <a:solidFill>
+            <a:srgbClr val="000000">
+              <a:alpha val="0"/>
+            </a:srgbClr>
+          </a:solidFill>
+          <a:ln w="0">
+            <a:solidFill>
+              <a:srgbClr val="000000">
+                <a:alpha val="0"/>
+              </a:srgbClr>
+            </a:solidFill>
+            <a:prstDash val="solid"/>
+          </a:ln>
+        </p:spPr>
+        <p:txBody>
+          <a:bodyPr anchor="ctr"/>
+          <a:lstStyle/>
+          <a:p>
+            <a:pPr algn="l">
+              <a:defRPr sz="1650" b="1">
+                <a:solidFill>
+                  <a:srgbClr val="2D4A33"/>
+                </a:solidFill>
+              </a:defRPr>
+            </a:pPr>
+            <a:r>
+              <a:rPr lang="zh-CN" altLang="en-US" sz="3200" b="1" dirty="0">
+                <a:solidFill>
+                  <a:srgbClr val="2D4A33"/>
+                </a:solidFill>
+              </a:rPr>
+              <a:t>中文文本切分改进</a:t>
+            </a:r>
+            <a:endParaRPr sz="3200" b="1" dirty="0">
+              <a:solidFill>
+                <a:srgbClr val="2D4A33"/>
+              </a:solidFill>
+            </a:endParaRPr>
+          </a:p>
+        </p:txBody>
+      </p:sp>
+      <p:sp>
+        <p:nvSpPr>
+          <p:cNvPr id="6" name="矩形 5"/>
+          <p:cNvSpPr>
+            <a:spLocks noGrp="1"/>
+          </p:cNvSpPr>
+          <p:nvPr/>
+        </p:nvSpPr>
+        <p:spPr>
+          <a:xfrm>
+            <a:off x="699557" y="1867430"/>
+            <a:ext cx="5334000" cy="1728787"/>
+          </a:xfrm>
+          <a:prstGeom prst="rect">
+            <a:avLst/>
+          </a:prstGeom>
+          <a:solidFill>
+            <a:srgbClr val="000000">
+              <a:alpha val="0"/>
+            </a:srgbClr>
+          </a:solidFill>
+          <a:ln w="0">
+            <a:solidFill>
+              <a:srgbClr val="000000">
+                <a:alpha val="0"/>
+              </a:srgbClr>
+            </a:solidFill>
+            <a:prstDash val="solid"/>
+          </a:ln>
+        </p:spPr>
+        <p:txBody>
+          <a:bodyPr anchor="ctr"/>
+          <a:lstStyle/>
+          <a:p>
+            <a:r>
+              <a:rPr lang="zh-CN" altLang="en-US" dirty="0"/>
+              <a:t>分隔符扩展为中英文混合</a:t>
+            </a:r>
+            <a:r>
+              <a:rPr lang="en-US" altLang="zh-CN" dirty="0"/>
+              <a:t>:</a:t>
+            </a:r>
+            <a:r>
+              <a:rPr lang="zh-CN" altLang="en-US" dirty="0"/>
+              <a:t>。！？； </a:t>
+            </a:r>
+            <a:r>
+              <a:rPr lang="en-US" altLang="zh-CN" dirty="0"/>
+              <a:t>+ .!?</a:t>
+            </a:r>
+          </a:p>
+          <a:p>
+            <a:endParaRPr lang="en-US" altLang="zh-CN" dirty="0"/>
+          </a:p>
+          <a:p>
+            <a:r>
+              <a:rPr lang="zh-CN" altLang="en-US" dirty="0"/>
+              <a:t>句子分块用正则 </a:t>
+            </a:r>
+            <a:r>
+              <a:rPr lang="en-US" altLang="zh-CN" dirty="0"/>
+              <a:t>(?&lt;=[</a:t>
+            </a:r>
+            <a:r>
+              <a:rPr lang="zh-CN" altLang="en-US" dirty="0"/>
+              <a:t>。！？；</a:t>
+            </a:r>
+            <a:r>
+              <a:rPr lang="en-US" altLang="zh-CN" dirty="0"/>
+              <a:t>.!?])\s* </a:t>
+            </a:r>
+            <a:r>
+              <a:rPr lang="zh-CN" altLang="en-US" dirty="0"/>
+              <a:t>识别边界</a:t>
+            </a:r>
+            <a:endParaRPr lang="en-US" altLang="zh-CN" dirty="0"/>
+          </a:p>
+          <a:p>
+            <a:endParaRPr lang="zh-CN" altLang="en-US" dirty="0"/>
+          </a:p>
+          <a:p>
+            <a:r>
+              <a:rPr lang="zh-CN" altLang="en-US" dirty="0"/>
+              <a:t>超长句</a:t>
+            </a:r>
+            <a:r>
+              <a:rPr lang="en-US" altLang="zh-CN" dirty="0"/>
+              <a:t>(&gt;1000</a:t>
+            </a:r>
+            <a:r>
+              <a:rPr lang="zh-CN" altLang="en-US" dirty="0"/>
+              <a:t>字</a:t>
+            </a:r>
+            <a:r>
+              <a:rPr lang="en-US" altLang="zh-CN" dirty="0"/>
+              <a:t>)</a:t>
+            </a:r>
+            <a:r>
+              <a:rPr lang="zh-CN" altLang="en-US" dirty="0"/>
+              <a:t>自动二次切分</a:t>
+            </a:r>
+            <a:r>
+              <a:rPr lang="en-US" altLang="zh-CN" dirty="0"/>
+              <a:t>,</a:t>
+            </a:r>
+            <a:r>
+              <a:rPr lang="zh-CN" altLang="en-US" dirty="0"/>
+              <a:t>兼容中英混排</a:t>
+            </a:r>
+            <a:endParaRPr lang="zh-CN" altLang="zh-CN" dirty="0"/>
+          </a:p>
+        </p:txBody>
+      </p:sp>
+      <p:sp>
+        <p:nvSpPr>
+          <p:cNvPr id="7" name="矩形 6"/>
+          <p:cNvSpPr>
+            <a:spLocks noGrp="1"/>
+          </p:cNvSpPr>
+          <p:nvPr/>
+        </p:nvSpPr>
+        <p:spPr>
+          <a:xfrm>
+            <a:off x="6515100" y="1250154"/>
+            <a:ext cx="4762500" cy="5207795"/>
+          </a:xfrm>
+          <a:prstGeom prst="rect">
+            <a:avLst/>
+          </a:prstGeom>
+          <a:solidFill>
+            <a:srgbClr val="FFFFFF"/>
+          </a:solidFill>
+          <a:ln w="9525">
+            <a:solidFill>
+              <a:srgbClr val="C7D0C4"/>
+            </a:solidFill>
+            <a:prstDash val="solid"/>
+          </a:ln>
+        </p:spPr>
+      </p:sp>
+      <p:sp>
+        <p:nvSpPr>
+          <p:cNvPr id="8" name="矩形 7"/>
+          <p:cNvSpPr>
+            <a:spLocks noGrp="1"/>
+          </p:cNvSpPr>
+          <p:nvPr/>
+        </p:nvSpPr>
+        <p:spPr>
+          <a:xfrm>
+            <a:off x="6800850" y="1685925"/>
+            <a:ext cx="4305300" cy="323850"/>
+          </a:xfrm>
+          <a:prstGeom prst="rect">
+            <a:avLst/>
+          </a:prstGeom>
+          <a:solidFill>
+            <a:srgbClr val="000000">
+              <a:alpha val="0"/>
+            </a:srgbClr>
+          </a:solidFill>
+          <a:ln w="0">
+            <a:solidFill>
+              <a:srgbClr val="000000">
+                <a:alpha val="0"/>
+              </a:srgbClr>
+            </a:solidFill>
+            <a:prstDash val="solid"/>
+          </a:ln>
+        </p:spPr>
+        <p:txBody>
+          <a:bodyPr anchor="ctr"/>
+          <a:lstStyle/>
+          <a:p>
+            <a:pPr>
+              <a:defRPr sz="1650" b="1">
+                <a:solidFill>
+                  <a:srgbClr val="2D4A33"/>
+                </a:solidFill>
+              </a:defRPr>
+            </a:pPr>
+            <a:r>
+              <a:rPr lang="en-US" sz="3200" b="1" dirty="0">
+                <a:solidFill>
+                  <a:srgbClr val="2D4A33"/>
+                </a:solidFill>
+              </a:rPr>
+              <a:t>Windows FAISS </a:t>
+            </a:r>
+          </a:p>
+          <a:p>
+            <a:pPr>
+              <a:defRPr sz="1650" b="1">
+                <a:solidFill>
+                  <a:srgbClr val="2D4A33"/>
+                </a:solidFill>
+              </a:defRPr>
+            </a:pPr>
+            <a:r>
+              <a:rPr lang="zh-CN" altLang="en-US" sz="3200" b="1" dirty="0">
+                <a:solidFill>
+                  <a:srgbClr val="2D4A33"/>
+                </a:solidFill>
+              </a:rPr>
+              <a:t>中文路径修复</a:t>
+            </a:r>
+            <a:endParaRPr sz="3200" b="1" dirty="0">
+              <a:solidFill>
+                <a:srgbClr val="2D4A33"/>
+              </a:solidFill>
+            </a:endParaRPr>
+          </a:p>
+        </p:txBody>
+      </p:sp>
+      <p:sp>
+        <p:nvSpPr>
+          <p:cNvPr id="9" name="矩形 8"/>
+          <p:cNvSpPr>
+            <a:spLocks noGrp="1"/>
+          </p:cNvSpPr>
+          <p:nvPr/>
+        </p:nvSpPr>
+        <p:spPr>
+          <a:xfrm>
+            <a:off x="6729941" y="2226733"/>
+            <a:ext cx="4539192" cy="2234141"/>
+          </a:xfrm>
+          <a:prstGeom prst="rect">
+            <a:avLst/>
+          </a:prstGeom>
+          <a:solidFill>
+            <a:srgbClr val="000000">
+              <a:alpha val="0"/>
+            </a:srgbClr>
+          </a:solidFill>
+          <a:ln w="0">
+            <a:solidFill>
+              <a:srgbClr val="000000">
+                <a:alpha val="0"/>
+              </a:srgbClr>
+            </a:solidFill>
+            <a:prstDash val="solid"/>
+          </a:ln>
+        </p:spPr>
+        <p:txBody>
+          <a:bodyPr anchor="ctr"/>
+          <a:lstStyle/>
+          <a:p>
+            <a:r>
+              <a:rPr lang="zh-CN" altLang="en-US" dirty="0"/>
+              <a:t>痛点</a:t>
+            </a:r>
+            <a:r>
+              <a:rPr lang="en-US" altLang="zh-CN" dirty="0"/>
+              <a:t>:</a:t>
+            </a:r>
+            <a:r>
+              <a:rPr lang="en-US" altLang="zh-CN" dirty="0" err="1"/>
+              <a:t>read_index</a:t>
+            </a:r>
+            <a:r>
+              <a:rPr lang="en-US" altLang="zh-CN" dirty="0"/>
+              <a:t>/</a:t>
+            </a:r>
+            <a:r>
+              <a:rPr lang="en-US" altLang="zh-CN" dirty="0" err="1"/>
+              <a:t>write_index</a:t>
+            </a:r>
+            <a:r>
+              <a:rPr lang="en-US" altLang="zh-CN" dirty="0"/>
+              <a:t> </a:t>
+            </a:r>
+            <a:r>
+              <a:rPr lang="zh-CN" altLang="en-US" dirty="0"/>
+              <a:t>遇中文路径打开失败</a:t>
+            </a:r>
+            <a:endParaRPr lang="en-US" altLang="zh-CN" dirty="0"/>
+          </a:p>
+          <a:p>
+            <a:endParaRPr lang="zh-CN" altLang="en-US" dirty="0"/>
+          </a:p>
+          <a:p>
+            <a:r>
+              <a:rPr lang="zh-CN" altLang="en-US" dirty="0"/>
+              <a:t>改用 </a:t>
+            </a:r>
+            <a:r>
+              <a:rPr lang="en-US" altLang="zh-CN" dirty="0"/>
+              <a:t>serialize/</a:t>
+            </a:r>
+            <a:r>
+              <a:rPr lang="en-US" altLang="zh-CN" dirty="0" err="1"/>
+              <a:t>deserialize_index</a:t>
+            </a:r>
+            <a:r>
+              <a:rPr lang="en-US" altLang="zh-CN" dirty="0"/>
+              <a:t> + Python </a:t>
+            </a:r>
+            <a:r>
+              <a:rPr lang="zh-CN" altLang="en-US" dirty="0"/>
+              <a:t>原生文件流</a:t>
+            </a:r>
+            <a:endParaRPr lang="en-US" altLang="zh-CN" dirty="0"/>
+          </a:p>
+          <a:p>
+            <a:endParaRPr lang="zh-CN" altLang="en-US" dirty="0"/>
+          </a:p>
+          <a:p>
+            <a:r>
+              <a:rPr lang="zh-CN" altLang="en-US" dirty="0"/>
+              <a:t>中文知识库名</a:t>
+            </a:r>
+            <a:r>
+              <a:rPr lang="en-US" altLang="zh-CN" dirty="0"/>
+              <a:t>/</a:t>
+            </a:r>
+            <a:r>
+              <a:rPr lang="zh-CN" altLang="en-US" dirty="0"/>
+              <a:t>文档名均可正常索引读写</a:t>
+            </a:r>
+            <a:endParaRPr lang="zh-CN" altLang="zh-CN" dirty="0"/>
+          </a:p>
+        </p:txBody>
+      </p:sp>
+      <p:sp>
+        <p:nvSpPr>
+          <p:cNvPr id="10" name="矩形 9"/>
+          <p:cNvSpPr>
+            <a:spLocks noGrp="1"/>
+          </p:cNvSpPr>
+          <p:nvPr/>
+        </p:nvSpPr>
+        <p:spPr>
+          <a:xfrm>
+            <a:off x="484716" y="3852863"/>
+            <a:ext cx="5763683" cy="2605087"/>
+          </a:xfrm>
+          <a:prstGeom prst="rect">
+            <a:avLst/>
+          </a:prstGeom>
+          <a:solidFill>
+            <a:srgbClr val="FFFFFF"/>
+          </a:solidFill>
+          <a:ln w="9525">
+            <a:solidFill>
+              <a:srgbClr val="C7D0C4"/>
+            </a:solidFill>
+            <a:prstDash val="solid"/>
+          </a:ln>
+        </p:spPr>
+      </p:sp>
+      <p:sp>
+        <p:nvSpPr>
+          <p:cNvPr id="11" name="矩形 10"/>
+          <p:cNvSpPr>
+            <a:spLocks noGrp="1"/>
+          </p:cNvSpPr>
+          <p:nvPr/>
+        </p:nvSpPr>
+        <p:spPr>
+          <a:xfrm>
+            <a:off x="1752600" y="3876675"/>
+            <a:ext cx="3638550" cy="323850"/>
+          </a:xfrm>
+          <a:prstGeom prst="rect">
+            <a:avLst/>
+          </a:prstGeom>
+          <a:solidFill>
+            <a:srgbClr val="000000">
+              <a:alpha val="0"/>
+            </a:srgbClr>
+          </a:solidFill>
+          <a:ln w="0">
+            <a:solidFill>
+              <a:srgbClr val="000000">
+                <a:alpha val="0"/>
+              </a:srgbClr>
+            </a:solidFill>
+            <a:prstDash val="solid"/>
+          </a:ln>
+        </p:spPr>
+        <p:txBody>
+          <a:bodyPr anchor="ctr"/>
+          <a:lstStyle/>
+          <a:p>
+            <a:pPr>
+              <a:defRPr sz="1650" b="1">
+                <a:solidFill>
+                  <a:srgbClr val="2D4A33"/>
+                </a:solidFill>
+              </a:defRPr>
+            </a:pPr>
+            <a:r>
+              <a:rPr lang="zh-CN" altLang="en-US" sz="3200" b="1" dirty="0">
+                <a:solidFill>
+                  <a:srgbClr val="2D4A33"/>
+                </a:solidFill>
+              </a:rPr>
+              <a:t>中文字数统计优化</a:t>
+            </a:r>
+            <a:endParaRPr sz="3200" b="1" dirty="0">
+              <a:solidFill>
+                <a:srgbClr val="2D4A33"/>
+              </a:solidFill>
+            </a:endParaRPr>
+          </a:p>
+        </p:txBody>
+      </p:sp>
+      <p:sp>
+        <p:nvSpPr>
+          <p:cNvPr id="12" name="矩形 11"/>
+          <p:cNvSpPr>
+            <a:spLocks noGrp="1"/>
+          </p:cNvSpPr>
+          <p:nvPr/>
+        </p:nvSpPr>
+        <p:spPr>
+          <a:xfrm>
+            <a:off x="699557" y="4292070"/>
+            <a:ext cx="6378576" cy="1666875"/>
+          </a:xfrm>
+          <a:prstGeom prst="rect">
+            <a:avLst/>
+          </a:prstGeom>
+          <a:solidFill>
+            <a:srgbClr val="000000">
+              <a:alpha val="0"/>
+            </a:srgbClr>
+          </a:solidFill>
+          <a:ln w="0">
+            <a:solidFill>
+              <a:srgbClr val="000000">
+                <a:alpha val="0"/>
+              </a:srgbClr>
+            </a:solidFill>
+            <a:prstDash val="solid"/>
+          </a:ln>
+        </p:spPr>
+        <p:txBody>
+          <a:bodyPr anchor="ctr"/>
+          <a:lstStyle/>
+          <a:p>
+            <a:r>
+              <a:rPr lang="zh-CN" altLang="en-US" dirty="0"/>
+              <a:t>原 </a:t>
+            </a:r>
+            <a:r>
+              <a:rPr lang="en-US" altLang="zh-CN" dirty="0" err="1"/>
+              <a:t>text.split</a:t>
+            </a:r>
+            <a:r>
+              <a:rPr lang="en-US" altLang="zh-CN" dirty="0"/>
+              <a:t>() </a:t>
+            </a:r>
+            <a:r>
+              <a:rPr lang="zh-CN" altLang="en-US" dirty="0"/>
+              <a:t>把整句中文算作 </a:t>
+            </a:r>
+            <a:r>
+              <a:rPr lang="en-US" altLang="zh-CN" dirty="0"/>
+              <a:t>1 </a:t>
+            </a:r>
+            <a:r>
+              <a:rPr lang="zh-CN" altLang="en-US" dirty="0"/>
+              <a:t>个词</a:t>
+            </a:r>
+            <a:endParaRPr lang="en-US" altLang="zh-CN" dirty="0"/>
+          </a:p>
+          <a:p>
+            <a:endParaRPr lang="zh-CN" altLang="en-US" dirty="0"/>
+          </a:p>
+          <a:p>
+            <a:r>
+              <a:rPr lang="zh-CN" altLang="en-US" dirty="0"/>
+              <a:t>新增 </a:t>
+            </a:r>
+            <a:r>
+              <a:rPr lang="en-US" altLang="zh-CN" dirty="0"/>
+              <a:t>_</a:t>
+            </a:r>
+            <a:r>
+              <a:rPr lang="en-US" altLang="zh-CN" dirty="0" err="1"/>
+              <a:t>estimate_word_count</a:t>
+            </a:r>
+            <a:r>
+              <a:rPr lang="en-US" altLang="zh-CN" dirty="0"/>
+              <a:t>:</a:t>
+            </a:r>
+            <a:r>
+              <a:rPr lang="zh-CN" altLang="en-US" dirty="0"/>
+              <a:t>正则 </a:t>
+            </a:r>
+            <a:r>
+              <a:rPr lang="en-US" altLang="zh-CN" dirty="0"/>
+              <a:t>[</a:t>
+            </a:r>
+            <a:r>
+              <a:rPr lang="zh-CN" altLang="en-US" dirty="0"/>
+              <a:t>一</a:t>
+            </a:r>
+            <a:r>
+              <a:rPr lang="en-US" altLang="zh-CN" dirty="0"/>
+              <a:t>-鿿]|[A-Za-z0-9_]+</a:t>
+            </a:r>
+          </a:p>
+          <a:p>
+            <a:endParaRPr lang="en-US" altLang="zh-CN" dirty="0"/>
+          </a:p>
+          <a:p>
+            <a:r>
+              <a:rPr lang="zh-CN" altLang="en-US" dirty="0"/>
+              <a:t>每个汉字</a:t>
+            </a:r>
+            <a:r>
+              <a:rPr lang="en-US" altLang="zh-CN" dirty="0"/>
+              <a:t>=1</a:t>
+            </a:r>
+            <a:r>
+              <a:rPr lang="zh-CN" altLang="en-US" dirty="0"/>
+              <a:t>单元</a:t>
+            </a:r>
+            <a:r>
+              <a:rPr lang="en-US" altLang="zh-CN" dirty="0"/>
+              <a:t>,</a:t>
+            </a:r>
+            <a:r>
+              <a:rPr lang="zh-CN" altLang="en-US" dirty="0"/>
+              <a:t>准确控制上下文 </a:t>
+            </a:r>
+            <a:r>
+              <a:rPr lang="en-US" altLang="zh-CN" dirty="0"/>
+              <a:t>token </a:t>
+            </a:r>
+            <a:r>
+              <a:rPr lang="zh-CN" altLang="en-US" dirty="0"/>
+              <a:t>预算</a:t>
+            </a:r>
+            <a:endParaRPr lang="zh-CN" altLang="zh-CN" dirty="0"/>
+          </a:p>
+        </p:txBody>
+      </p:sp>
+    </p:spTree>
+  </p:cSld>
+  <p:clrMapOvr>
+    <a:masterClrMapping/>
+  </p:clrMapOvr>
+</p:sld>
+</file>
+
+<file path=ppt/slides/slide19.xml><?xml version="1.0" encoding="utf-8"?>
+<p:sld xmlns:a="http://schemas.openxmlformats.org/drawingml/2006/main" xmlns:r="http://schemas.openxmlformats.org/officeDocument/2006/relationships" xmlns:p="http://schemas.openxmlformats.org/presentationml/2006/main">
+  <p:cSld>
+    <p:spTree>
+      <p:nvGrpSpPr>
+        <p:cNvPr id="1" name=""/>
+        <p:cNvGrpSpPr/>
+        <p:nvPr/>
+      </p:nvGrpSpPr>
+      <p:grpSpPr>
+        <a:xfrm>
+          <a:off x="0" y="0"/>
+          <a:ext cx="0" cy="0"/>
+          <a:chOff x="0" y="0"/>
+          <a:chExt cx="0" cy="0"/>
+        </a:xfrm>
+      </p:grpSpPr>
+      <p:sp>
+        <p:nvSpPr>
           <p:cNvPr id="5" name="矩形 4"/>
           <p:cNvSpPr>
             <a:spLocks noGrp="1"/>
@@ -8871,6 +9950,7 @@
             <a:pPr algn="ctr">
               <a:buNone/>
             </a:pPr>
+            <a:endParaRPr/>
           </a:p>
         </p:txBody>
       </p:sp>
@@ -9023,6 +10103,7 @@
             <a:pPr algn="ctr">
               <a:buNone/>
             </a:pPr>
+            <a:endParaRPr/>
           </a:p>
         </p:txBody>
       </p:sp>
@@ -9072,6 +10153,7 @@
             <a:pPr algn="ctr">
               <a:buNone/>
             </a:pPr>
+            <a:endParaRPr/>
           </a:p>
         </p:txBody>
       </p:sp>
@@ -9121,6 +10203,7 @@
             <a:pPr algn="ctr">
               <a:buNone/>
             </a:pPr>
+            <a:endParaRPr/>
           </a:p>
         </p:txBody>
       </p:sp>
@@ -9170,6 +10253,7 @@
             <a:pPr algn="ctr">
               <a:buNone/>
             </a:pPr>
+            <a:endParaRPr/>
           </a:p>
         </p:txBody>
       </p:sp>
@@ -9221,6 +10305,7 @@
             <a:pPr algn="ctr">
               <a:buNone/>
             </a:pPr>
+            <a:endParaRPr/>
           </a:p>
         </p:txBody>
       </p:sp>
@@ -9233,7 +10318,7 @@
           <p:nvPr/>
         </p:nvPicPr>
         <p:blipFill>
-          <a:blip r:embed="rId1"/>
+          <a:blip r:embed="rId3"/>
           <a:stretch>
             <a:fillRect/>
           </a:stretch>
@@ -9338,20 +10423,6 @@
               </a:rPr>
               <a:t>01</a:t>
             </a:r>
-            <a:endParaRPr kumimoji="0" sz="13800" b="0" i="0" u="none" strike="noStrike" kern="1200" cap="none" spc="0" normalizeH="0" baseline="0" noProof="0" dirty="0">
-              <a:ln>
-                <a:noFill/>
-              </a:ln>
-              <a:solidFill>
-                <a:srgbClr val="F5F4F9"/>
-              </a:solidFill>
-              <a:effectLst/>
-              <a:uLnTx/>
-              <a:uFillTx/>
-              <a:latin typeface="Arial" panose="020B0604020202020204"/>
-              <a:ea typeface="华文中宋" panose="02010600040101010101" charset="-122"/>
-              <a:cs typeface="+mn-cs"/>
-            </a:endParaRPr>
           </a:p>
         </p:txBody>
       </p:sp>
@@ -9437,6 +10508,204 @@
 </file>
 
 <file path=ppt/slides/slide3.xml><?xml version="1.0" encoding="utf-8"?>
+<p:sld xmlns:a="http://schemas.openxmlformats.org/drawingml/2006/main" xmlns:r="http://schemas.openxmlformats.org/officeDocument/2006/relationships" xmlns:p="http://schemas.openxmlformats.org/presentationml/2006/main">
+  <p:cSld>
+    <p:spTree>
+      <p:nvGrpSpPr>
+        <p:cNvPr id="1" name=""/>
+        <p:cNvGrpSpPr/>
+        <p:nvPr/>
+      </p:nvGrpSpPr>
+      <p:grpSpPr>
+        <a:xfrm>
+          <a:off x="0" y="0"/>
+          <a:ext cx="0" cy="0"/>
+          <a:chOff x="0" y="0"/>
+          <a:chExt cx="0" cy="0"/>
+        </a:xfrm>
+      </p:grpSpPr>
+      <p:sp>
+        <p:nvSpPr>
+          <p:cNvPr id="13" name="矩形 12"/>
+          <p:cNvSpPr>
+            <a:spLocks noGrp="1"/>
+          </p:cNvSpPr>
+          <p:nvPr/>
+        </p:nvSpPr>
+        <p:spPr>
+          <a:xfrm>
+            <a:off x="0" y="0"/>
+            <a:ext cx="12192000" cy="114300"/>
+          </a:xfrm>
+          <a:prstGeom prst="rect">
+            <a:avLst/>
+          </a:prstGeom>
+          <a:solidFill>
+            <a:srgbClr val="2D4A33"/>
+          </a:solidFill>
+          <a:ln w="0">
+            <a:solidFill>
+              <a:srgbClr val="2D4A33"/>
+            </a:solidFill>
+            <a:prstDash val="solid"/>
+          </a:ln>
+        </p:spPr>
+      </p:sp>
+      <p:sp>
+        <p:nvSpPr>
+          <p:cNvPr id="2" name="矩形 1"/>
+          <p:cNvSpPr>
+            <a:spLocks noGrp="1"/>
+          </p:cNvSpPr>
+          <p:nvPr/>
+        </p:nvSpPr>
+        <p:spPr>
+          <a:xfrm>
+            <a:off x="762000" y="400050"/>
+            <a:ext cx="10668000" cy="457200"/>
+          </a:xfrm>
+          <a:prstGeom prst="rect">
+            <a:avLst/>
+          </a:prstGeom>
+          <a:solidFill>
+            <a:srgbClr val="000000">
+              <a:alpha val="0"/>
+            </a:srgbClr>
+          </a:solidFill>
+          <a:ln w="0">
+            <a:solidFill>
+              <a:srgbClr val="000000">
+                <a:alpha val="0"/>
+              </a:srgbClr>
+            </a:solidFill>
+            <a:prstDash val="solid"/>
+          </a:ln>
+        </p:spPr>
+        <p:txBody>
+          <a:bodyPr anchor="ctr"/>
+          <a:lstStyle/>
+          <a:p>
+            <a:pPr algn="ctr">
+              <a:defRPr sz="2550" b="1">
+                <a:solidFill>
+                  <a:srgbClr val="2D4A33"/>
+                </a:solidFill>
+              </a:defRPr>
+            </a:pPr>
+            <a:r>
+              <a:rPr lang="zh-CN" altLang="en-US" sz="2550" b="1" dirty="0">
+                <a:solidFill>
+                  <a:srgbClr val="2D4A33"/>
+                </a:solidFill>
+              </a:rPr>
+              <a:t>组内评分</a:t>
+            </a:r>
+            <a:endParaRPr sz="2550" b="1" dirty="0">
+              <a:solidFill>
+                <a:srgbClr val="2D4A33"/>
+              </a:solidFill>
+            </a:endParaRPr>
+          </a:p>
+        </p:txBody>
+      </p:sp>
+      <p:sp>
+        <p:nvSpPr>
+          <p:cNvPr id="10" name="矩形 9"/>
+          <p:cNvSpPr>
+            <a:spLocks noGrp="1"/>
+          </p:cNvSpPr>
+          <p:nvPr/>
+        </p:nvSpPr>
+        <p:spPr>
+          <a:xfrm>
+            <a:off x="2000250" y="1346200"/>
+            <a:ext cx="8191500" cy="3225800"/>
+          </a:xfrm>
+          <a:prstGeom prst="rect">
+            <a:avLst/>
+          </a:prstGeom>
+          <a:solidFill>
+            <a:srgbClr val="FFFFFF"/>
+          </a:solidFill>
+          <a:ln w="9525">
+            <a:solidFill>
+              <a:srgbClr val="C7D0C4"/>
+            </a:solidFill>
+            <a:prstDash val="solid"/>
+          </a:ln>
+        </p:spPr>
+      </p:sp>
+      <p:sp>
+        <p:nvSpPr>
+          <p:cNvPr id="12" name="矩形 11"/>
+          <p:cNvSpPr>
+            <a:spLocks noGrp="1"/>
+          </p:cNvSpPr>
+          <p:nvPr/>
+        </p:nvSpPr>
+        <p:spPr>
+          <a:xfrm>
+            <a:off x="2228850" y="2515870"/>
+            <a:ext cx="7734300" cy="913130"/>
+          </a:xfrm>
+          <a:prstGeom prst="rect">
+            <a:avLst/>
+          </a:prstGeom>
+          <a:solidFill>
+            <a:srgbClr val="000000">
+              <a:alpha val="0"/>
+            </a:srgbClr>
+          </a:solidFill>
+          <a:ln w="0">
+            <a:solidFill>
+              <a:srgbClr val="000000">
+                <a:alpha val="0"/>
+              </a:srgbClr>
+            </a:solidFill>
+            <a:prstDash val="solid"/>
+          </a:ln>
+        </p:spPr>
+        <p:txBody>
+          <a:bodyPr anchor="ctr"/>
+          <a:lstStyle/>
+          <a:p>
+            <a:pPr algn="l">
+              <a:defRPr sz="1350" b="0">
+                <a:solidFill>
+                  <a:srgbClr val="1F2D22"/>
+                </a:solidFill>
+              </a:defRPr>
+            </a:pPr>
+            <a:r>
+              <a:rPr lang="zh-CN" altLang="en-US" sz="4000" dirty="0">
+                <a:solidFill>
+                  <a:srgbClr val="1F2D22"/>
+                </a:solidFill>
+              </a:rPr>
+              <a:t>出于分工明确考虑，并非所有组员均参与了两个项目。但每个组员的总体贡献相近，组内评分所有组员相同平分。</a:t>
+            </a:r>
+            <a:endParaRPr sz="4000" b="0" dirty="0">
+              <a:solidFill>
+                <a:srgbClr val="1F2D22"/>
+              </a:solidFill>
+            </a:endParaRPr>
+          </a:p>
+        </p:txBody>
+      </p:sp>
+    </p:spTree>
+    <p:extLst>
+      <p:ext uri="{BB962C8B-B14F-4D97-AF65-F5344CB8AC3E}">
+        <p14:creationId xmlns:p14="http://schemas.microsoft.com/office/powerpoint/2010/main" val="1816285141"/>
+      </p:ext>
+    </p:extLst>
+  </p:cSld>
+  <p:clrMapOvr>
+    <a:masterClrMapping/>
+  </p:clrMapOvr>
+</p:sld>
+</file>
+
+<file path=ppt/slides/slide4.xml><?xml version="1.0" encoding="utf-8"?>
 <p:sld xmlns:a="http://schemas.openxmlformats.org/drawingml/2006/main" xmlns:r="http://schemas.openxmlformats.org/officeDocument/2006/relationships" xmlns:p="http://schemas.openxmlformats.org/presentationml/2006/main">
   <p:cSld>
     <p:bg>
@@ -9549,559 +10818,6 @@
             <a:endParaRPr sz="6600" b="1" dirty="0">
               <a:solidFill>
                 <a:srgbClr val="F5F4F9"/>
-              </a:solidFill>
-            </a:endParaRPr>
-          </a:p>
-        </p:txBody>
-      </p:sp>
-    </p:spTree>
-  </p:cSld>
-  <p:clrMapOvr>
-    <a:masterClrMapping/>
-  </p:clrMapOvr>
-</p:sld>
-</file>
-
-<file path=ppt/slides/slide4.xml><?xml version="1.0" encoding="utf-8"?>
-<p:sld xmlns:a="http://schemas.openxmlformats.org/drawingml/2006/main" xmlns:r="http://schemas.openxmlformats.org/officeDocument/2006/relationships" xmlns:p="http://schemas.openxmlformats.org/presentationml/2006/main">
-  <p:cSld>
-    <p:spTree>
-      <p:nvGrpSpPr>
-        <p:cNvPr id="1" name=""/>
-        <p:cNvGrpSpPr/>
-        <p:nvPr/>
-      </p:nvGrpSpPr>
-      <p:grpSpPr>
-        <a:xfrm>
-          <a:off x="0" y="0"/>
-          <a:ext cx="0" cy="0"/>
-          <a:chOff x="0" y="0"/>
-          <a:chExt cx="0" cy="0"/>
-        </a:xfrm>
-      </p:grpSpPr>
-      <p:sp>
-        <p:nvSpPr>
-          <p:cNvPr id="13" name="矩形 12"/>
-          <p:cNvSpPr>
-            <a:spLocks noGrp="1"/>
-          </p:cNvSpPr>
-          <p:nvPr/>
-        </p:nvSpPr>
-        <p:spPr>
-          <a:xfrm>
-            <a:off x="0" y="0"/>
-            <a:ext cx="12192000" cy="114300"/>
-          </a:xfrm>
-          <a:prstGeom prst="rect">
-            <a:avLst/>
-          </a:prstGeom>
-          <a:solidFill>
-            <a:srgbClr val="2D4A33"/>
-          </a:solidFill>
-          <a:ln w="0">
-            <a:solidFill>
-              <a:srgbClr val="2D4A33"/>
-            </a:solidFill>
-            <a:prstDash val="solid"/>
-          </a:ln>
-        </p:spPr>
-      </p:sp>
-      <p:sp>
-        <p:nvSpPr>
-          <p:cNvPr id="2" name="矩形 1"/>
-          <p:cNvSpPr>
-            <a:spLocks noGrp="1"/>
-          </p:cNvSpPr>
-          <p:nvPr/>
-        </p:nvSpPr>
-        <p:spPr>
-          <a:xfrm>
-            <a:off x="762000" y="400050"/>
-            <a:ext cx="10668000" cy="457200"/>
-          </a:xfrm>
-          <a:prstGeom prst="rect">
-            <a:avLst/>
-          </a:prstGeom>
-          <a:solidFill>
-            <a:srgbClr val="000000">
-              <a:alpha val="0"/>
-            </a:srgbClr>
-          </a:solidFill>
-          <a:ln w="0">
-            <a:solidFill>
-              <a:srgbClr val="000000">
-                <a:alpha val="0"/>
-              </a:srgbClr>
-            </a:solidFill>
-            <a:prstDash val="solid"/>
-          </a:ln>
-        </p:spPr>
-        <p:txBody>
-          <a:bodyPr anchor="ctr"/>
-          <a:lstStyle/>
-          <a:p>
-            <a:pPr algn="ctr">
-              <a:defRPr sz="2550" b="1">
-                <a:solidFill>
-                  <a:srgbClr val="2D4A33"/>
-                </a:solidFill>
-              </a:defRPr>
-            </a:pPr>
-            <a:r>
-              <a:rPr lang="zh-CN" altLang="en-US" sz="2550" b="1" dirty="0">
-                <a:solidFill>
-                  <a:srgbClr val="2D4A33"/>
-                </a:solidFill>
-              </a:rPr>
-              <a:t>王秀崧</a:t>
-            </a:r>
-            <a:endParaRPr sz="2550" b="1" dirty="0">
-              <a:solidFill>
-                <a:srgbClr val="2D4A33"/>
-              </a:solidFill>
-            </a:endParaRPr>
-          </a:p>
-        </p:txBody>
-      </p:sp>
-      <p:sp>
-        <p:nvSpPr>
-          <p:cNvPr id="4" name="矩形 3"/>
-          <p:cNvSpPr>
-            <a:spLocks noGrp="1"/>
-          </p:cNvSpPr>
-          <p:nvPr/>
-        </p:nvSpPr>
-        <p:spPr>
-          <a:xfrm>
-            <a:off x="2000250" y="1476375"/>
-            <a:ext cx="4762500" cy="1619250"/>
-          </a:xfrm>
-          <a:prstGeom prst="rect">
-            <a:avLst/>
-          </a:prstGeom>
-          <a:solidFill>
-            <a:srgbClr val="FFFFFF"/>
-          </a:solidFill>
-          <a:ln w="9525">
-            <a:solidFill>
-              <a:srgbClr val="C7D0C4"/>
-            </a:solidFill>
-            <a:prstDash val="solid"/>
-          </a:ln>
-        </p:spPr>
-      </p:sp>
-      <p:sp>
-        <p:nvSpPr>
-          <p:cNvPr id="5" name="矩形 4"/>
-          <p:cNvSpPr>
-            <a:spLocks noGrp="1"/>
-          </p:cNvSpPr>
-          <p:nvPr/>
-        </p:nvSpPr>
-        <p:spPr>
-          <a:xfrm>
-            <a:off x="2228850" y="1647825"/>
-            <a:ext cx="4305300" cy="323850"/>
-          </a:xfrm>
-          <a:prstGeom prst="rect">
-            <a:avLst/>
-          </a:prstGeom>
-          <a:solidFill>
-            <a:srgbClr val="000000">
-              <a:alpha val="0"/>
-            </a:srgbClr>
-          </a:solidFill>
-          <a:ln w="0">
-            <a:solidFill>
-              <a:srgbClr val="000000">
-                <a:alpha val="0"/>
-              </a:srgbClr>
-            </a:solidFill>
-            <a:prstDash val="solid"/>
-          </a:ln>
-        </p:spPr>
-        <p:txBody>
-          <a:bodyPr anchor="ctr"/>
-          <a:lstStyle/>
-          <a:p>
-            <a:pPr algn="l">
-              <a:defRPr sz="1650" b="1">
-                <a:solidFill>
-                  <a:srgbClr val="2D4A33"/>
-                </a:solidFill>
-              </a:defRPr>
-            </a:pPr>
-            <a:r>
-              <a:rPr lang="zh-CN" altLang="en-US" sz="1650" b="1" dirty="0">
-                <a:solidFill>
-                  <a:srgbClr val="2D4A33"/>
-                </a:solidFill>
-              </a:rPr>
-              <a:t>调试</a:t>
-            </a:r>
-            <a:endParaRPr sz="1650" b="1" dirty="0">
-              <a:solidFill>
-                <a:srgbClr val="2D4A33"/>
-              </a:solidFill>
-            </a:endParaRPr>
-          </a:p>
-        </p:txBody>
-      </p:sp>
-      <p:sp>
-        <p:nvSpPr>
-          <p:cNvPr id="6" name="矩形 5"/>
-          <p:cNvSpPr>
-            <a:spLocks noGrp="1"/>
-          </p:cNvSpPr>
-          <p:nvPr/>
-        </p:nvSpPr>
-        <p:spPr>
-          <a:xfrm>
-            <a:off x="2228850" y="2085975"/>
-            <a:ext cx="4305300" cy="857250"/>
-          </a:xfrm>
-          <a:prstGeom prst="rect">
-            <a:avLst/>
-          </a:prstGeom>
-          <a:solidFill>
-            <a:srgbClr val="000000">
-              <a:alpha val="0"/>
-            </a:srgbClr>
-          </a:solidFill>
-          <a:ln w="0">
-            <a:solidFill>
-              <a:srgbClr val="000000">
-                <a:alpha val="0"/>
-              </a:srgbClr>
-            </a:solidFill>
-            <a:prstDash val="solid"/>
-          </a:ln>
-        </p:spPr>
-        <p:txBody>
-          <a:bodyPr anchor="ctr"/>
-          <a:lstStyle/>
-          <a:p>
-            <a:pPr algn="l">
-              <a:defRPr sz="1350" b="0">
-                <a:solidFill>
-                  <a:srgbClr val="1F2D22"/>
-                </a:solidFill>
-              </a:defRPr>
-            </a:pPr>
-            <a:r>
-              <a:rPr lang="zh-CN" altLang="en-US" sz="1350" b="0" dirty="0">
-                <a:solidFill>
-                  <a:srgbClr val="1F2D22"/>
-                </a:solidFill>
-              </a:rPr>
-              <a:t>整理并配置环境，生成</a:t>
-            </a:r>
-            <a:r>
-              <a:rPr lang="en-US" altLang="zh-CN" sz="1350" b="0" dirty="0">
-                <a:solidFill>
-                  <a:srgbClr val="1F2D22"/>
-                </a:solidFill>
-              </a:rPr>
-              <a:t>requirements</a:t>
-            </a:r>
-            <a:r>
-              <a:rPr lang="zh-CN" altLang="en-US" sz="1350" b="0" dirty="0">
-                <a:solidFill>
-                  <a:srgbClr val="1F2D22"/>
-                </a:solidFill>
-              </a:rPr>
-              <a:t>配置文件</a:t>
-            </a:r>
-            <a:endParaRPr lang="en-US" altLang="zh-CN" sz="1350" b="0" dirty="0">
-              <a:solidFill>
-                <a:srgbClr val="1F2D22"/>
-              </a:solidFill>
-            </a:endParaRPr>
-          </a:p>
-          <a:p>
-            <a:pPr>
-              <a:defRPr sz="1350" b="0">
-                <a:solidFill>
-                  <a:srgbClr val="1F2D22"/>
-                </a:solidFill>
-              </a:defRPr>
-            </a:pPr>
-            <a:r>
-              <a:rPr lang="zh-CN" altLang="en-US" sz="1350" dirty="0">
-                <a:solidFill>
-                  <a:srgbClr val="1F2D22"/>
-                </a:solidFill>
-              </a:rPr>
-              <a:t>部署本地嵌入模型</a:t>
-            </a:r>
-            <a:r>
-              <a:rPr lang="zh-CN" altLang="zh-CN" sz="1350" dirty="0"/>
-              <a:t>BAAI/bge-small-zh-v1.5</a:t>
-            </a:r>
-            <a:endParaRPr lang="en-US" altLang="zh-CN" sz="1350" dirty="0">
-              <a:solidFill>
-                <a:srgbClr val="1F2D22"/>
-              </a:solidFill>
-            </a:endParaRPr>
-          </a:p>
-          <a:p>
-            <a:pPr algn="l">
-              <a:defRPr sz="1350" b="0">
-                <a:solidFill>
-                  <a:srgbClr val="1F2D22"/>
-                </a:solidFill>
-              </a:defRPr>
-            </a:pPr>
-            <a:r>
-              <a:rPr lang="zh-CN" altLang="en-US" sz="1350" dirty="0">
-                <a:solidFill>
-                  <a:srgbClr val="1F2D22"/>
-                </a:solidFill>
-              </a:rPr>
-              <a:t>支持</a:t>
-            </a:r>
-            <a:r>
-              <a:rPr lang="en-US" altLang="zh-CN" sz="1350" dirty="0" err="1">
-                <a:solidFill>
-                  <a:srgbClr val="1F2D22"/>
-                </a:solidFill>
-              </a:rPr>
-              <a:t>deepseek</a:t>
-            </a:r>
-            <a:r>
-              <a:rPr lang="zh-CN" altLang="en-US" sz="1350" dirty="0">
-                <a:solidFill>
-                  <a:srgbClr val="1F2D22"/>
-                </a:solidFill>
-              </a:rPr>
-              <a:t>和</a:t>
-            </a:r>
-            <a:r>
-              <a:rPr lang="en-US" altLang="zh-CN" sz="1350" dirty="0">
-                <a:solidFill>
-                  <a:srgbClr val="1F2D22"/>
-                </a:solidFill>
-              </a:rPr>
-              <a:t>Qwen</a:t>
-            </a:r>
-            <a:r>
-              <a:rPr lang="zh-CN" altLang="en-US" sz="1350" dirty="0">
-                <a:solidFill>
-                  <a:srgbClr val="1F2D22"/>
-                </a:solidFill>
-              </a:rPr>
-              <a:t>的</a:t>
-            </a:r>
-            <a:r>
-              <a:rPr lang="en-US" altLang="zh-CN" sz="1350" dirty="0">
-                <a:solidFill>
-                  <a:srgbClr val="1F2D22"/>
-                </a:solidFill>
-              </a:rPr>
-              <a:t>API</a:t>
-            </a:r>
-            <a:endParaRPr lang="en-US" altLang="zh-CN" sz="1350" dirty="0">
-              <a:solidFill>
-                <a:srgbClr val="1F2D22"/>
-              </a:solidFill>
-            </a:endParaRPr>
-          </a:p>
-          <a:p>
-            <a:pPr algn="l">
-              <a:defRPr sz="1350" b="0">
-                <a:solidFill>
-                  <a:srgbClr val="1F2D22"/>
-                </a:solidFill>
-              </a:defRPr>
-            </a:pPr>
-            <a:r>
-              <a:rPr lang="zh-CN" altLang="en-US" sz="1350" b="0" dirty="0">
-                <a:solidFill>
-                  <a:srgbClr val="1F2D22"/>
-                </a:solidFill>
-              </a:rPr>
-              <a:t>导入课程问答数据</a:t>
-            </a:r>
-            <a:endParaRPr sz="1350" b="0" dirty="0">
-              <a:solidFill>
-                <a:srgbClr val="1F2D22"/>
-              </a:solidFill>
-            </a:endParaRPr>
-          </a:p>
-        </p:txBody>
-      </p:sp>
-      <p:sp>
-        <p:nvSpPr>
-          <p:cNvPr id="10" name="矩形 9"/>
-          <p:cNvSpPr>
-            <a:spLocks noGrp="1"/>
-          </p:cNvSpPr>
-          <p:nvPr/>
-        </p:nvSpPr>
-        <p:spPr>
-          <a:xfrm>
-            <a:off x="2000250" y="3714750"/>
-            <a:ext cx="8191500" cy="1428750"/>
-          </a:xfrm>
-          <a:prstGeom prst="rect">
-            <a:avLst/>
-          </a:prstGeom>
-          <a:solidFill>
-            <a:srgbClr val="FFFFFF"/>
-          </a:solidFill>
-          <a:ln w="9525">
-            <a:solidFill>
-              <a:srgbClr val="C7D0C4"/>
-            </a:solidFill>
-            <a:prstDash val="solid"/>
-          </a:ln>
-        </p:spPr>
-      </p:sp>
-      <p:sp>
-        <p:nvSpPr>
-          <p:cNvPr id="11" name="矩形 10"/>
-          <p:cNvSpPr>
-            <a:spLocks noGrp="1"/>
-          </p:cNvSpPr>
-          <p:nvPr/>
-        </p:nvSpPr>
-        <p:spPr>
-          <a:xfrm>
-            <a:off x="2228850" y="3886200"/>
-            <a:ext cx="7734300" cy="323850"/>
-          </a:xfrm>
-          <a:prstGeom prst="rect">
-            <a:avLst/>
-          </a:prstGeom>
-          <a:solidFill>
-            <a:srgbClr val="000000">
-              <a:alpha val="0"/>
-            </a:srgbClr>
-          </a:solidFill>
-          <a:ln w="0">
-            <a:solidFill>
-              <a:srgbClr val="000000">
-                <a:alpha val="0"/>
-              </a:srgbClr>
-            </a:solidFill>
-            <a:prstDash val="solid"/>
-          </a:ln>
-        </p:spPr>
-        <p:txBody>
-          <a:bodyPr anchor="ctr"/>
-          <a:lstStyle/>
-          <a:p>
-            <a:pPr algn="l">
-              <a:defRPr sz="1650" b="1">
-                <a:solidFill>
-                  <a:srgbClr val="2D4A33"/>
-                </a:solidFill>
-              </a:defRPr>
-            </a:pPr>
-            <a:r>
-              <a:rPr sz="1650" b="1">
-                <a:solidFill>
-                  <a:srgbClr val="2D4A33"/>
-                </a:solidFill>
-              </a:rPr>
-              <a:t>结果</a:t>
-            </a:r>
-            <a:endParaRPr sz="1650" b="1">
-              <a:solidFill>
-                <a:srgbClr val="2D4A33"/>
-              </a:solidFill>
-            </a:endParaRPr>
-          </a:p>
-        </p:txBody>
-      </p:sp>
-      <p:sp>
-        <p:nvSpPr>
-          <p:cNvPr id="12" name="矩形 11"/>
-          <p:cNvSpPr>
-            <a:spLocks noGrp="1"/>
-          </p:cNvSpPr>
-          <p:nvPr/>
-        </p:nvSpPr>
-        <p:spPr>
-          <a:xfrm>
-            <a:off x="2228850" y="4324350"/>
-            <a:ext cx="7734300" cy="666750"/>
-          </a:xfrm>
-          <a:prstGeom prst="rect">
-            <a:avLst/>
-          </a:prstGeom>
-          <a:solidFill>
-            <a:srgbClr val="000000">
-              <a:alpha val="0"/>
-            </a:srgbClr>
-          </a:solidFill>
-          <a:ln w="0">
-            <a:solidFill>
-              <a:srgbClr val="000000">
-                <a:alpha val="0"/>
-              </a:srgbClr>
-            </a:solidFill>
-            <a:prstDash val="solid"/>
-          </a:ln>
-        </p:spPr>
-        <p:txBody>
-          <a:bodyPr anchor="ctr"/>
-          <a:lstStyle/>
-          <a:p>
-            <a:pPr algn="l">
-              <a:defRPr sz="1350" b="0">
-                <a:solidFill>
-                  <a:srgbClr val="1F2D22"/>
-                </a:solidFill>
-              </a:defRPr>
-            </a:pPr>
-            <a:r>
-              <a:rPr lang="zh-CN" altLang="en-US" sz="1350" b="0" dirty="0">
-                <a:solidFill>
-                  <a:srgbClr val="1F2D22"/>
-                </a:solidFill>
-              </a:rPr>
-              <a:t>消除部署过程中的环境依赖问题项目，环境开箱即用</a:t>
-            </a:r>
-            <a:endParaRPr lang="en-US" altLang="zh-CN" sz="1350" b="0" dirty="0">
-              <a:solidFill>
-                <a:srgbClr val="1F2D22"/>
-              </a:solidFill>
-            </a:endParaRPr>
-          </a:p>
-          <a:p>
-            <a:pPr algn="l">
-              <a:defRPr sz="1350" b="0">
-                <a:solidFill>
-                  <a:srgbClr val="1F2D22"/>
-                </a:solidFill>
-              </a:defRPr>
-            </a:pPr>
-            <a:r>
-              <a:rPr lang="zh-CN" altLang="en-US" sz="1350" dirty="0">
-                <a:solidFill>
-                  <a:srgbClr val="1F2D22"/>
-                </a:solidFill>
-              </a:rPr>
-              <a:t>嵌入模型和大语言模型开箱即用</a:t>
-            </a:r>
-            <a:endParaRPr lang="en-US" altLang="zh-CN" sz="1350" dirty="0">
-              <a:solidFill>
-                <a:srgbClr val="1F2D22"/>
-              </a:solidFill>
-            </a:endParaRPr>
-          </a:p>
-          <a:p>
-            <a:pPr algn="l">
-              <a:defRPr sz="1350" b="0">
-                <a:solidFill>
-                  <a:srgbClr val="1F2D22"/>
-                </a:solidFill>
-              </a:defRPr>
-            </a:pPr>
-            <a:endParaRPr sz="1350" b="0" dirty="0">
-              <a:solidFill>
-                <a:srgbClr val="1F2D22"/>
               </a:solidFill>
             </a:endParaRPr>
           </a:p>
@@ -10206,7 +10922,7 @@
                   <a:srgbClr val="2D4A33"/>
                 </a:solidFill>
               </a:rPr>
-              <a:t>项目界面演示</a:t>
+              <a:t>王秀崧</a:t>
             </a:r>
             <a:endParaRPr sz="2550" b="1" dirty="0">
               <a:solidFill>
@@ -10216,30 +10932,440 @@
           </a:p>
         </p:txBody>
       </p:sp>
-      <p:pic>
-        <p:nvPicPr>
-          <p:cNvPr id="7" name="图片 6"/>
-          <p:cNvPicPr>
-            <a:picLocks noChangeAspect="1"/>
-          </p:cNvPicPr>
+      <p:sp>
+        <p:nvSpPr>
+          <p:cNvPr id="4" name="矩形 3"/>
+          <p:cNvSpPr>
+            <a:spLocks noGrp="1"/>
+          </p:cNvSpPr>
           <p:nvPr/>
-        </p:nvPicPr>
-        <p:blipFill>
-          <a:blip r:embed="rId1"/>
-          <a:stretch>
-            <a:fillRect/>
-          </a:stretch>
-        </p:blipFill>
-        <p:spPr>
-          <a:xfrm>
-            <a:off x="829632" y="857250"/>
-            <a:ext cx="10532736" cy="5805413"/>
+        </p:nvSpPr>
+        <p:spPr>
+          <a:xfrm>
+            <a:off x="2000250" y="1476375"/>
+            <a:ext cx="4762500" cy="1619250"/>
           </a:xfrm>
           <a:prstGeom prst="rect">
             <a:avLst/>
           </a:prstGeom>
-        </p:spPr>
-      </p:pic>
+          <a:solidFill>
+            <a:srgbClr val="FFFFFF"/>
+          </a:solidFill>
+          <a:ln w="9525">
+            <a:solidFill>
+              <a:srgbClr val="C7D0C4"/>
+            </a:solidFill>
+            <a:prstDash val="solid"/>
+          </a:ln>
+        </p:spPr>
+      </p:sp>
+      <p:sp>
+        <p:nvSpPr>
+          <p:cNvPr id="5" name="矩形 4"/>
+          <p:cNvSpPr>
+            <a:spLocks noGrp="1"/>
+          </p:cNvSpPr>
+          <p:nvPr/>
+        </p:nvSpPr>
+        <p:spPr>
+          <a:xfrm>
+            <a:off x="2228850" y="1647825"/>
+            <a:ext cx="4305300" cy="323850"/>
+          </a:xfrm>
+          <a:prstGeom prst="rect">
+            <a:avLst/>
+          </a:prstGeom>
+          <a:solidFill>
+            <a:srgbClr val="000000">
+              <a:alpha val="0"/>
+            </a:srgbClr>
+          </a:solidFill>
+          <a:ln w="0">
+            <a:solidFill>
+              <a:srgbClr val="000000">
+                <a:alpha val="0"/>
+              </a:srgbClr>
+            </a:solidFill>
+            <a:prstDash val="solid"/>
+          </a:ln>
+        </p:spPr>
+        <p:txBody>
+          <a:bodyPr anchor="ctr"/>
+          <a:lstStyle/>
+          <a:p>
+            <a:pPr algn="l">
+              <a:defRPr sz="1650" b="1">
+                <a:solidFill>
+                  <a:srgbClr val="2D4A33"/>
+                </a:solidFill>
+              </a:defRPr>
+            </a:pPr>
+            <a:r>
+              <a:rPr lang="zh-CN" altLang="en-US" sz="1650" b="1" dirty="0">
+                <a:solidFill>
+                  <a:srgbClr val="2D4A33"/>
+                </a:solidFill>
+              </a:rPr>
+              <a:t>调试</a:t>
+            </a:r>
+            <a:endParaRPr sz="1650" b="1" dirty="0">
+              <a:solidFill>
+                <a:srgbClr val="2D4A33"/>
+              </a:solidFill>
+            </a:endParaRPr>
+          </a:p>
+        </p:txBody>
+      </p:sp>
+      <p:sp>
+        <p:nvSpPr>
+          <p:cNvPr id="6" name="矩形 5"/>
+          <p:cNvSpPr>
+            <a:spLocks noGrp="1"/>
+          </p:cNvSpPr>
+          <p:nvPr/>
+        </p:nvSpPr>
+        <p:spPr>
+          <a:xfrm>
+            <a:off x="2228850" y="2085975"/>
+            <a:ext cx="4305300" cy="857250"/>
+          </a:xfrm>
+          <a:prstGeom prst="rect">
+            <a:avLst/>
+          </a:prstGeom>
+          <a:solidFill>
+            <a:srgbClr val="000000">
+              <a:alpha val="0"/>
+            </a:srgbClr>
+          </a:solidFill>
+          <a:ln w="0">
+            <a:solidFill>
+              <a:srgbClr val="000000">
+                <a:alpha val="0"/>
+              </a:srgbClr>
+            </a:solidFill>
+            <a:prstDash val="solid"/>
+          </a:ln>
+        </p:spPr>
+        <p:txBody>
+          <a:bodyPr anchor="ctr"/>
+          <a:lstStyle/>
+          <a:p>
+            <a:pPr algn="l">
+              <a:defRPr sz="1350" b="0">
+                <a:solidFill>
+                  <a:srgbClr val="1F2D22"/>
+                </a:solidFill>
+              </a:defRPr>
+            </a:pPr>
+            <a:r>
+              <a:rPr lang="zh-CN" altLang="en-US" sz="1350" b="0" dirty="0">
+                <a:solidFill>
+                  <a:srgbClr val="1F2D22"/>
+                </a:solidFill>
+              </a:rPr>
+              <a:t>整理并配置环境，生成</a:t>
+            </a:r>
+            <a:r>
+              <a:rPr lang="en-US" altLang="zh-CN" sz="1350" b="0" dirty="0">
+                <a:solidFill>
+                  <a:srgbClr val="1F2D22"/>
+                </a:solidFill>
+              </a:rPr>
+              <a:t>requirements</a:t>
+            </a:r>
+            <a:r>
+              <a:rPr lang="zh-CN" altLang="en-US" sz="1350" b="0" dirty="0">
+                <a:solidFill>
+                  <a:srgbClr val="1F2D22"/>
+                </a:solidFill>
+              </a:rPr>
+              <a:t>配置文件</a:t>
+            </a:r>
+            <a:endParaRPr lang="en-US" altLang="zh-CN" sz="1350" b="0" dirty="0">
+              <a:solidFill>
+                <a:srgbClr val="1F2D22"/>
+              </a:solidFill>
+            </a:endParaRPr>
+          </a:p>
+          <a:p>
+            <a:pPr>
+              <a:defRPr sz="1350" b="0">
+                <a:solidFill>
+                  <a:srgbClr val="1F2D22"/>
+                </a:solidFill>
+              </a:defRPr>
+            </a:pPr>
+            <a:r>
+              <a:rPr lang="zh-CN" altLang="en-US" sz="1350" dirty="0">
+                <a:solidFill>
+                  <a:srgbClr val="1F2D22"/>
+                </a:solidFill>
+              </a:rPr>
+              <a:t>部署本地嵌入模型</a:t>
+            </a:r>
+            <a:r>
+              <a:rPr lang="zh-CN" altLang="zh-CN" sz="1350" dirty="0"/>
+              <a:t>BAAI/bge-small-zh-v1.5</a:t>
+            </a:r>
+            <a:endParaRPr lang="en-US" altLang="zh-CN" sz="1350" dirty="0">
+              <a:solidFill>
+                <a:srgbClr val="1F2D22"/>
+              </a:solidFill>
+            </a:endParaRPr>
+          </a:p>
+          <a:p>
+            <a:pPr algn="l">
+              <a:defRPr sz="1350" b="0">
+                <a:solidFill>
+                  <a:srgbClr val="1F2D22"/>
+                </a:solidFill>
+              </a:defRPr>
+            </a:pPr>
+            <a:r>
+              <a:rPr lang="zh-CN" altLang="en-US" sz="1350" dirty="0">
+                <a:solidFill>
+                  <a:srgbClr val="1F2D22"/>
+                </a:solidFill>
+              </a:rPr>
+              <a:t>支持</a:t>
+            </a:r>
+            <a:r>
+              <a:rPr lang="en-US" altLang="zh-CN" sz="1350" dirty="0" err="1">
+                <a:solidFill>
+                  <a:srgbClr val="1F2D22"/>
+                </a:solidFill>
+              </a:rPr>
+              <a:t>deepseek</a:t>
+            </a:r>
+            <a:r>
+              <a:rPr lang="zh-CN" altLang="en-US" sz="1350" dirty="0">
+                <a:solidFill>
+                  <a:srgbClr val="1F2D22"/>
+                </a:solidFill>
+              </a:rPr>
+              <a:t>和</a:t>
+            </a:r>
+            <a:r>
+              <a:rPr lang="en-US" altLang="zh-CN" sz="1350" dirty="0">
+                <a:solidFill>
+                  <a:srgbClr val="1F2D22"/>
+                </a:solidFill>
+              </a:rPr>
+              <a:t>Qwen</a:t>
+            </a:r>
+            <a:r>
+              <a:rPr lang="zh-CN" altLang="en-US" sz="1350" dirty="0">
+                <a:solidFill>
+                  <a:srgbClr val="1F2D22"/>
+                </a:solidFill>
+              </a:rPr>
+              <a:t>的</a:t>
+            </a:r>
+            <a:r>
+              <a:rPr lang="en-US" altLang="zh-CN" sz="1350" dirty="0">
+                <a:solidFill>
+                  <a:srgbClr val="1F2D22"/>
+                </a:solidFill>
+              </a:rPr>
+              <a:t>API</a:t>
+            </a:r>
+          </a:p>
+          <a:p>
+            <a:pPr algn="l">
+              <a:defRPr sz="1350" b="0">
+                <a:solidFill>
+                  <a:srgbClr val="1F2D22"/>
+                </a:solidFill>
+              </a:defRPr>
+            </a:pPr>
+            <a:r>
+              <a:rPr lang="zh-CN" altLang="en-US" sz="1350" b="0" dirty="0">
+                <a:solidFill>
+                  <a:srgbClr val="1F2D22"/>
+                </a:solidFill>
+              </a:rPr>
+              <a:t>导入课程问答数据</a:t>
+            </a:r>
+            <a:endParaRPr sz="1350" b="0" dirty="0">
+              <a:solidFill>
+                <a:srgbClr val="1F2D22"/>
+              </a:solidFill>
+            </a:endParaRPr>
+          </a:p>
+        </p:txBody>
+      </p:sp>
+      <p:sp>
+        <p:nvSpPr>
+          <p:cNvPr id="10" name="矩形 9"/>
+          <p:cNvSpPr>
+            <a:spLocks noGrp="1"/>
+          </p:cNvSpPr>
+          <p:nvPr/>
+        </p:nvSpPr>
+        <p:spPr>
+          <a:xfrm>
+            <a:off x="2000250" y="3714750"/>
+            <a:ext cx="8191500" cy="1428750"/>
+          </a:xfrm>
+          <a:prstGeom prst="rect">
+            <a:avLst/>
+          </a:prstGeom>
+          <a:solidFill>
+            <a:srgbClr val="FFFFFF"/>
+          </a:solidFill>
+          <a:ln w="9525">
+            <a:solidFill>
+              <a:srgbClr val="C7D0C4"/>
+            </a:solidFill>
+            <a:prstDash val="solid"/>
+          </a:ln>
+        </p:spPr>
+      </p:sp>
+      <p:sp>
+        <p:nvSpPr>
+          <p:cNvPr id="11" name="矩形 10"/>
+          <p:cNvSpPr>
+            <a:spLocks noGrp="1"/>
+          </p:cNvSpPr>
+          <p:nvPr/>
+        </p:nvSpPr>
+        <p:spPr>
+          <a:xfrm>
+            <a:off x="2228850" y="3886200"/>
+            <a:ext cx="7734300" cy="323850"/>
+          </a:xfrm>
+          <a:prstGeom prst="rect">
+            <a:avLst/>
+          </a:prstGeom>
+          <a:solidFill>
+            <a:srgbClr val="000000">
+              <a:alpha val="0"/>
+            </a:srgbClr>
+          </a:solidFill>
+          <a:ln w="0">
+            <a:solidFill>
+              <a:srgbClr val="000000">
+                <a:alpha val="0"/>
+              </a:srgbClr>
+            </a:solidFill>
+            <a:prstDash val="solid"/>
+          </a:ln>
+        </p:spPr>
+        <p:txBody>
+          <a:bodyPr anchor="ctr"/>
+          <a:lstStyle/>
+          <a:p>
+            <a:pPr algn="l">
+              <a:defRPr sz="1650" b="1">
+                <a:solidFill>
+                  <a:srgbClr val="2D4A33"/>
+                </a:solidFill>
+              </a:defRPr>
+            </a:pPr>
+            <a:r>
+              <a:rPr sz="1650" b="1">
+                <a:solidFill>
+                  <a:srgbClr val="2D4A33"/>
+                </a:solidFill>
+              </a:rPr>
+              <a:t>结果</a:t>
+            </a:r>
+          </a:p>
+        </p:txBody>
+      </p:sp>
+      <p:sp>
+        <p:nvSpPr>
+          <p:cNvPr id="12" name="矩形 11"/>
+          <p:cNvSpPr>
+            <a:spLocks noGrp="1"/>
+          </p:cNvSpPr>
+          <p:nvPr/>
+        </p:nvSpPr>
+        <p:spPr>
+          <a:xfrm>
+            <a:off x="2228850" y="4324350"/>
+            <a:ext cx="7734300" cy="666750"/>
+          </a:xfrm>
+          <a:prstGeom prst="rect">
+            <a:avLst/>
+          </a:prstGeom>
+          <a:solidFill>
+            <a:srgbClr val="000000">
+              <a:alpha val="0"/>
+            </a:srgbClr>
+          </a:solidFill>
+          <a:ln w="0">
+            <a:solidFill>
+              <a:srgbClr val="000000">
+                <a:alpha val="0"/>
+              </a:srgbClr>
+            </a:solidFill>
+            <a:prstDash val="solid"/>
+          </a:ln>
+        </p:spPr>
+        <p:txBody>
+          <a:bodyPr anchor="ctr"/>
+          <a:lstStyle/>
+          <a:p>
+            <a:pPr algn="l">
+              <a:defRPr sz="1350" b="0">
+                <a:solidFill>
+                  <a:srgbClr val="1F2D22"/>
+                </a:solidFill>
+              </a:defRPr>
+            </a:pPr>
+            <a:r>
+              <a:rPr lang="zh-CN" altLang="en-US" sz="1350" b="0" dirty="0">
+                <a:solidFill>
+                  <a:srgbClr val="1F2D22"/>
+                </a:solidFill>
+              </a:rPr>
+              <a:t>消除部署过程中的环境依赖问题项目，环境开箱即用</a:t>
+            </a:r>
+            <a:endParaRPr lang="en-US" altLang="zh-CN" sz="1350" b="0" dirty="0">
+              <a:solidFill>
+                <a:srgbClr val="1F2D22"/>
+              </a:solidFill>
+            </a:endParaRPr>
+          </a:p>
+          <a:p>
+            <a:pPr algn="l">
+              <a:defRPr sz="1350" b="0">
+                <a:solidFill>
+                  <a:srgbClr val="1F2D22"/>
+                </a:solidFill>
+              </a:defRPr>
+            </a:pPr>
+            <a:r>
+              <a:rPr lang="zh-CN" altLang="en-US" sz="1350" dirty="0">
+                <a:solidFill>
+                  <a:srgbClr val="1F2D22"/>
+                </a:solidFill>
+              </a:rPr>
+              <a:t>嵌入模型和大语言模型开箱即用</a:t>
+            </a:r>
+            <a:endParaRPr lang="en-US" altLang="zh-CN" sz="1350" dirty="0">
+              <a:solidFill>
+                <a:srgbClr val="1F2D22"/>
+              </a:solidFill>
+            </a:endParaRPr>
+          </a:p>
+          <a:p>
+            <a:pPr algn="l">
+              <a:defRPr sz="1350" b="0">
+                <a:solidFill>
+                  <a:srgbClr val="1F2D22"/>
+                </a:solidFill>
+              </a:defRPr>
+            </a:pPr>
+            <a:endParaRPr sz="1350" b="0" dirty="0">
+              <a:solidFill>
+                <a:srgbClr val="1F2D22"/>
+              </a:solidFill>
+            </a:endParaRPr>
+          </a:p>
+        </p:txBody>
+      </p:sp>
     </p:spTree>
   </p:cSld>
   <p:clrMapOvr>
@@ -10339,7 +11465,7 @@
                   <a:srgbClr val="2D4A33"/>
                 </a:solidFill>
               </a:rPr>
-              <a:t>嵌入模型演示</a:t>
+              <a:t>项目界面演示</a:t>
             </a:r>
             <a:endParaRPr sz="2550" b="1" dirty="0">
               <a:solidFill>
@@ -10351,22 +11477,22 @@
       </p:sp>
       <p:pic>
         <p:nvPicPr>
-          <p:cNvPr id="4" name="图片 3"/>
+          <p:cNvPr id="7" name="图片 6"/>
           <p:cNvPicPr>
             <a:picLocks noChangeAspect="1"/>
           </p:cNvPicPr>
           <p:nvPr/>
         </p:nvPicPr>
         <p:blipFill>
-          <a:blip r:embed="rId1"/>
+          <a:blip r:embed="rId3"/>
           <a:stretch>
             <a:fillRect/>
           </a:stretch>
         </p:blipFill>
         <p:spPr>
           <a:xfrm>
-            <a:off x="890984" y="857250"/>
-            <a:ext cx="10410032" cy="5737781"/>
+            <a:off x="829632" y="857250"/>
+            <a:ext cx="10532736" cy="5805413"/>
           </a:xfrm>
           <a:prstGeom prst="rect">
             <a:avLst/>
@@ -10472,7 +11598,7 @@
                   <a:srgbClr val="2D4A33"/>
                 </a:solidFill>
               </a:rPr>
-              <a:t>大模型生成演示</a:t>
+              <a:t>嵌入模型演示</a:t>
             </a:r>
             <a:endParaRPr sz="2550" b="1" dirty="0">
               <a:solidFill>
@@ -10484,22 +11610,22 @@
       </p:sp>
       <p:pic>
         <p:nvPicPr>
-          <p:cNvPr id="7" name="图片 6"/>
+          <p:cNvPr id="4" name="图片 3"/>
           <p:cNvPicPr>
             <a:picLocks noChangeAspect="1"/>
           </p:cNvPicPr>
           <p:nvPr/>
         </p:nvPicPr>
         <p:blipFill>
-          <a:blip r:embed="rId1"/>
+          <a:blip r:embed="rId3"/>
           <a:stretch>
             <a:fillRect/>
           </a:stretch>
         </p:blipFill>
         <p:spPr>
           <a:xfrm>
-            <a:off x="1320582" y="857250"/>
-            <a:ext cx="9550836" cy="5263193"/>
+            <a:off x="890984" y="857250"/>
+            <a:ext cx="10410032" cy="5737781"/>
           </a:xfrm>
           <a:prstGeom prst="rect">
             <a:avLst/>
@@ -10515,6 +11641,139 @@
 </file>
 
 <file path=ppt/slides/slide8.xml><?xml version="1.0" encoding="utf-8"?>
+<p:sld xmlns:a="http://schemas.openxmlformats.org/drawingml/2006/main" xmlns:r="http://schemas.openxmlformats.org/officeDocument/2006/relationships" xmlns:p="http://schemas.openxmlformats.org/presentationml/2006/main">
+  <p:cSld>
+    <p:spTree>
+      <p:nvGrpSpPr>
+        <p:cNvPr id="1" name=""/>
+        <p:cNvGrpSpPr/>
+        <p:nvPr/>
+      </p:nvGrpSpPr>
+      <p:grpSpPr>
+        <a:xfrm>
+          <a:off x="0" y="0"/>
+          <a:ext cx="0" cy="0"/>
+          <a:chOff x="0" y="0"/>
+          <a:chExt cx="0" cy="0"/>
+        </a:xfrm>
+      </p:grpSpPr>
+      <p:sp>
+        <p:nvSpPr>
+          <p:cNvPr id="13" name="矩形 12"/>
+          <p:cNvSpPr>
+            <a:spLocks noGrp="1"/>
+          </p:cNvSpPr>
+          <p:nvPr/>
+        </p:nvSpPr>
+        <p:spPr>
+          <a:xfrm>
+            <a:off x="0" y="0"/>
+            <a:ext cx="12192000" cy="114300"/>
+          </a:xfrm>
+          <a:prstGeom prst="rect">
+            <a:avLst/>
+          </a:prstGeom>
+          <a:solidFill>
+            <a:srgbClr val="2D4A33"/>
+          </a:solidFill>
+          <a:ln w="0">
+            <a:solidFill>
+              <a:srgbClr val="2D4A33"/>
+            </a:solidFill>
+            <a:prstDash val="solid"/>
+          </a:ln>
+        </p:spPr>
+      </p:sp>
+      <p:sp>
+        <p:nvSpPr>
+          <p:cNvPr id="2" name="矩形 1"/>
+          <p:cNvSpPr>
+            <a:spLocks noGrp="1"/>
+          </p:cNvSpPr>
+          <p:nvPr/>
+        </p:nvSpPr>
+        <p:spPr>
+          <a:xfrm>
+            <a:off x="762000" y="400050"/>
+            <a:ext cx="10668000" cy="457200"/>
+          </a:xfrm>
+          <a:prstGeom prst="rect">
+            <a:avLst/>
+          </a:prstGeom>
+          <a:solidFill>
+            <a:srgbClr val="000000">
+              <a:alpha val="0"/>
+            </a:srgbClr>
+          </a:solidFill>
+          <a:ln w="0">
+            <a:solidFill>
+              <a:srgbClr val="000000">
+                <a:alpha val="0"/>
+              </a:srgbClr>
+            </a:solidFill>
+            <a:prstDash val="solid"/>
+          </a:ln>
+        </p:spPr>
+        <p:txBody>
+          <a:bodyPr anchor="ctr"/>
+          <a:lstStyle/>
+          <a:p>
+            <a:pPr algn="ctr">
+              <a:defRPr sz="2550" b="1">
+                <a:solidFill>
+                  <a:srgbClr val="2D4A33"/>
+                </a:solidFill>
+              </a:defRPr>
+            </a:pPr>
+            <a:r>
+              <a:rPr lang="zh-CN" altLang="en-US" sz="2550" b="1" dirty="0">
+                <a:solidFill>
+                  <a:srgbClr val="2D4A33"/>
+                </a:solidFill>
+              </a:rPr>
+              <a:t>大模型生成演示</a:t>
+            </a:r>
+            <a:endParaRPr sz="2550" b="1" dirty="0">
+              <a:solidFill>
+                <a:srgbClr val="2D4A33"/>
+              </a:solidFill>
+            </a:endParaRPr>
+          </a:p>
+        </p:txBody>
+      </p:sp>
+      <p:pic>
+        <p:nvPicPr>
+          <p:cNvPr id="7" name="图片 6"/>
+          <p:cNvPicPr>
+            <a:picLocks noChangeAspect="1"/>
+          </p:cNvPicPr>
+          <p:nvPr/>
+        </p:nvPicPr>
+        <p:blipFill>
+          <a:blip r:embed="rId3"/>
+          <a:stretch>
+            <a:fillRect/>
+          </a:stretch>
+        </p:blipFill>
+        <p:spPr>
+          <a:xfrm>
+            <a:off x="1320582" y="857250"/>
+            <a:ext cx="9550836" cy="5263193"/>
+          </a:xfrm>
+          <a:prstGeom prst="rect">
+            <a:avLst/>
+          </a:prstGeom>
+        </p:spPr>
+      </p:pic>
+    </p:spTree>
+  </p:cSld>
+  <p:clrMapOvr>
+    <a:masterClrMapping/>
+  </p:clrMapOvr>
+</p:sld>
+</file>
+
+<file path=ppt/slides/slide9.xml><?xml version="1.0" encoding="utf-8"?>
 <p:sld xmlns:a="http://schemas.openxmlformats.org/drawingml/2006/main" xmlns:r="http://schemas.openxmlformats.org/officeDocument/2006/relationships" xmlns:p="http://schemas.openxmlformats.org/presentationml/2006/main">
   <p:cSld>
     <p:bg>
@@ -10640,1080 +11899,38 @@
 </p:sld>
 </file>
 
-<file path=ppt/slides/slide9.xml><?xml version="1.0" encoding="utf-8"?>
-<p:sld xmlns:a="http://schemas.openxmlformats.org/drawingml/2006/main" xmlns:r="http://schemas.openxmlformats.org/officeDocument/2006/relationships" xmlns:p="http://schemas.openxmlformats.org/presentationml/2006/main">
-  <p:cSld>
-    <p:spTree>
-      <p:nvGrpSpPr>
-        <p:cNvPr id="1" name=""/>
-        <p:cNvGrpSpPr/>
-        <p:nvPr/>
-      </p:nvGrpSpPr>
-      <p:grpSpPr>
-        <a:xfrm>
-          <a:off x="0" y="0"/>
-          <a:ext cx="0" cy="0"/>
-          <a:chOff x="0" y="0"/>
-          <a:chExt cx="0" cy="0"/>
-        </a:xfrm>
-      </p:grpSpPr>
-      <p:sp>
-        <p:nvSpPr>
-          <p:cNvPr id="13" name="矩形 12"/>
-          <p:cNvSpPr>
-            <a:spLocks noGrp="1"/>
-          </p:cNvSpPr>
-          <p:nvPr/>
-        </p:nvSpPr>
-        <p:spPr>
-          <a:xfrm>
-            <a:off x="0" y="0"/>
-            <a:ext cx="12192000" cy="114300"/>
-          </a:xfrm>
-          <a:prstGeom prst="rect">
-            <a:avLst/>
-          </a:prstGeom>
-          <a:solidFill>
-            <a:srgbClr val="2D4A33"/>
-          </a:solidFill>
-          <a:ln w="0">
-            <a:solidFill>
-              <a:srgbClr val="2D4A33"/>
-            </a:solidFill>
-            <a:prstDash val="solid"/>
-          </a:ln>
-        </p:spPr>
-      </p:sp>
-      <p:sp>
-        <p:nvSpPr>
-          <p:cNvPr id="2" name="矩形 1"/>
-          <p:cNvSpPr>
-            <a:spLocks noGrp="1"/>
-          </p:cNvSpPr>
-          <p:nvPr/>
-        </p:nvSpPr>
-        <p:spPr>
-          <a:xfrm>
-            <a:off x="762000" y="400050"/>
-            <a:ext cx="10668000" cy="457200"/>
-          </a:xfrm>
-          <a:prstGeom prst="rect">
-            <a:avLst/>
-          </a:prstGeom>
-          <a:solidFill>
-            <a:srgbClr val="000000">
-              <a:alpha val="0"/>
-            </a:srgbClr>
-          </a:solidFill>
-          <a:ln w="0">
-            <a:solidFill>
-              <a:srgbClr val="000000">
-                <a:alpha val="0"/>
-              </a:srgbClr>
-            </a:solidFill>
-            <a:prstDash val="solid"/>
-          </a:ln>
-        </p:spPr>
-        <p:txBody>
-          <a:bodyPr anchor="ctr"/>
-          <a:lstStyle/>
-          <a:p>
-            <a:pPr algn="ctr">
-              <a:defRPr sz="2550" b="1">
-                <a:solidFill>
-                  <a:srgbClr val="2D4A33"/>
-                </a:solidFill>
-              </a:defRPr>
-            </a:pPr>
-            <a:r>
-              <a:rPr lang="zh-CN" altLang="en-US" sz="2550" b="1" dirty="0">
-                <a:solidFill>
-                  <a:srgbClr val="2D4A33"/>
-                </a:solidFill>
-              </a:rPr>
-              <a:t>刘义群</a:t>
-            </a:r>
-            <a:endParaRPr sz="2550" b="1" dirty="0">
-              <a:solidFill>
-                <a:srgbClr val="2D4A33"/>
-              </a:solidFill>
-            </a:endParaRPr>
-          </a:p>
-        </p:txBody>
-      </p:sp>
-      <p:sp>
-        <p:nvSpPr>
-          <p:cNvPr id="4" name="矩形 3"/>
-          <p:cNvSpPr>
-            <a:spLocks noGrp="1"/>
-          </p:cNvSpPr>
-          <p:nvPr/>
-        </p:nvSpPr>
-        <p:spPr>
-          <a:xfrm>
-            <a:off x="857250" y="1619250"/>
-            <a:ext cx="4762500" cy="1809750"/>
-          </a:xfrm>
-          <a:prstGeom prst="rect">
-            <a:avLst/>
-          </a:prstGeom>
-          <a:solidFill>
-            <a:srgbClr val="FFFFFF"/>
-          </a:solidFill>
-          <a:ln w="9525">
-            <a:solidFill>
-              <a:srgbClr val="C7D0C4"/>
-            </a:solidFill>
-            <a:prstDash val="solid"/>
-          </a:ln>
-        </p:spPr>
-      </p:sp>
-      <p:sp>
-        <p:nvSpPr>
-          <p:cNvPr id="5" name="矩形 4"/>
-          <p:cNvSpPr>
-            <a:spLocks noGrp="1"/>
-          </p:cNvSpPr>
-          <p:nvPr/>
-        </p:nvSpPr>
-        <p:spPr>
-          <a:xfrm>
-            <a:off x="1157605" y="1666875"/>
-            <a:ext cx="4305300" cy="323850"/>
-          </a:xfrm>
-          <a:prstGeom prst="rect">
-            <a:avLst/>
-          </a:prstGeom>
-          <a:solidFill>
-            <a:srgbClr val="000000">
-              <a:alpha val="0"/>
-            </a:srgbClr>
-          </a:solidFill>
-          <a:ln w="0">
-            <a:solidFill>
-              <a:srgbClr val="000000">
-                <a:alpha val="0"/>
-              </a:srgbClr>
-            </a:solidFill>
-            <a:prstDash val="solid"/>
-          </a:ln>
-        </p:spPr>
-        <p:txBody>
-          <a:bodyPr anchor="ctr"/>
-          <a:lstStyle/>
-          <a:p>
-            <a:pPr algn="l">
-              <a:defRPr sz="1650" b="1">
-                <a:solidFill>
-                  <a:srgbClr val="2D4A33"/>
-                </a:solidFill>
-              </a:defRPr>
-            </a:pPr>
-            <a:r>
-              <a:rPr sz="1650" b="1">
-                <a:solidFill>
-                  <a:srgbClr val="2D4A33"/>
-                </a:solidFill>
-              </a:rPr>
-              <a:t>页面</a:t>
-            </a:r>
-            <a:endParaRPr sz="1650" b="1">
-              <a:solidFill>
-                <a:srgbClr val="2D4A33"/>
-              </a:solidFill>
-            </a:endParaRPr>
-          </a:p>
-        </p:txBody>
-      </p:sp>
-      <p:sp>
-        <p:nvSpPr>
-          <p:cNvPr id="6" name="矩形 5"/>
-          <p:cNvSpPr>
-            <a:spLocks noGrp="1"/>
-          </p:cNvSpPr>
-          <p:nvPr/>
-        </p:nvSpPr>
-        <p:spPr>
-          <a:xfrm>
-            <a:off x="1157605" y="2228850"/>
-            <a:ext cx="4305300" cy="857250"/>
-          </a:xfrm>
-          <a:prstGeom prst="rect">
-            <a:avLst/>
-          </a:prstGeom>
-          <a:solidFill>
-            <a:srgbClr val="000000">
-              <a:alpha val="0"/>
-            </a:srgbClr>
-          </a:solidFill>
-          <a:ln w="0">
-            <a:solidFill>
-              <a:srgbClr val="000000">
-                <a:alpha val="0"/>
-              </a:srgbClr>
-            </a:solidFill>
-            <a:prstDash val="solid"/>
-          </a:ln>
-        </p:spPr>
-        <p:txBody>
-          <a:bodyPr anchor="ctr"/>
-          <a:lstStyle/>
-          <a:p>
-            <a:pPr algn="l">
-              <a:defRPr sz="1350" b="0">
-                <a:solidFill>
-                  <a:srgbClr val="1F2D22"/>
-                </a:solidFill>
-              </a:defRPr>
-            </a:pPr>
-            <a:r>
-              <a:rPr lang="zh-CN" altLang="en-US" sz="1350" b="0">
-                <a:solidFill>
-                  <a:srgbClr val="1F2D22"/>
-                </a:solidFill>
-              </a:rPr>
-              <a:t>系统首页「数据概览」</a:t>
-            </a:r>
-            <a:r>
-              <a:rPr lang="en-US" altLang="zh-CN" sz="1350" b="0">
-                <a:solidFill>
-                  <a:srgbClr val="1F2D22"/>
-                </a:solidFill>
-              </a:rPr>
-              <a:t>Dashboard</a:t>
-            </a:r>
-            <a:endParaRPr lang="en-US" altLang="zh-CN" sz="1350" b="0">
-              <a:solidFill>
-                <a:srgbClr val="1F2D22"/>
-              </a:solidFill>
-            </a:endParaRPr>
-          </a:p>
-          <a:p>
-            <a:pPr algn="l">
-              <a:defRPr sz="1350" b="0">
-                <a:solidFill>
-                  <a:srgbClr val="1F2D22"/>
-                </a:solidFill>
-              </a:defRPr>
-            </a:pPr>
-            <a:r>
-              <a:rPr lang="zh-CN" altLang="en-US" sz="1350" b="0">
-                <a:solidFill>
-                  <a:srgbClr val="1F2D22"/>
-                </a:solidFill>
-              </a:rPr>
-              <a:t>顶部：</a:t>
-            </a:r>
-            <a:r>
-              <a:rPr lang="en-US" altLang="zh-CN" sz="1350" b="0">
-                <a:solidFill>
-                  <a:srgbClr val="1F2D22"/>
-                </a:solidFill>
-              </a:rPr>
-              <a:t>5 </a:t>
-            </a:r>
-            <a:r>
-              <a:rPr lang="zh-CN" altLang="en-US" sz="1350" b="0">
-                <a:solidFill>
-                  <a:srgbClr val="1F2D22"/>
-                </a:solidFill>
-              </a:rPr>
-              <a:t>张统计卡片（已导入文档</a:t>
-            </a:r>
-            <a:r>
-              <a:rPr lang="en-US" altLang="zh-CN" sz="1350" b="0">
-                <a:solidFill>
-                  <a:srgbClr val="1F2D22"/>
-                </a:solidFill>
-              </a:rPr>
-              <a:t> / </a:t>
-            </a:r>
-            <a:r>
-              <a:rPr lang="zh-CN" altLang="en-US" sz="1350" b="0">
-                <a:solidFill>
-                  <a:srgbClr val="1F2D22"/>
-                </a:solidFill>
-              </a:rPr>
-              <a:t>已分块</a:t>
-            </a:r>
-            <a:r>
-              <a:rPr lang="en-US" altLang="zh-CN" sz="1350" b="0">
-                <a:solidFill>
-                  <a:srgbClr val="1F2D22"/>
-                </a:solidFill>
-              </a:rPr>
-              <a:t> / </a:t>
-            </a:r>
-            <a:r>
-              <a:rPr lang="zh-CN" altLang="en-US" sz="1350" b="0">
-                <a:solidFill>
-                  <a:srgbClr val="1F2D22"/>
-                </a:solidFill>
-              </a:rPr>
-              <a:t>已嵌入</a:t>
-            </a:r>
-            <a:r>
-              <a:rPr lang="en-US" altLang="zh-CN" sz="1350" b="0">
-                <a:solidFill>
-                  <a:srgbClr val="1F2D22"/>
-                </a:solidFill>
-              </a:rPr>
-              <a:t> / </a:t>
-            </a:r>
-            <a:r>
-              <a:rPr lang="zh-CN" altLang="en-US" sz="1350" b="0">
-                <a:solidFill>
-                  <a:srgbClr val="1F2D22"/>
-                </a:solidFill>
-              </a:rPr>
-              <a:t>向量库集合</a:t>
-            </a:r>
-            <a:r>
-              <a:rPr lang="en-US" altLang="zh-CN" sz="1350" b="0">
-                <a:solidFill>
-                  <a:srgbClr val="1F2D22"/>
-                </a:solidFill>
-              </a:rPr>
-              <a:t> / </a:t>
-            </a:r>
-            <a:r>
-              <a:rPr lang="zh-CN" altLang="en-US" sz="1350" b="0">
-                <a:solidFill>
-                  <a:srgbClr val="1F2D22"/>
-                </a:solidFill>
-              </a:rPr>
-              <a:t>检索记录）</a:t>
-            </a:r>
-            <a:endParaRPr lang="zh-CN" altLang="en-US" sz="1350" b="0">
-              <a:solidFill>
-                <a:srgbClr val="1F2D22"/>
-              </a:solidFill>
-            </a:endParaRPr>
-          </a:p>
-          <a:p>
-            <a:pPr algn="l">
-              <a:defRPr sz="1350" b="0">
-                <a:solidFill>
-                  <a:srgbClr val="1F2D22"/>
-                </a:solidFill>
-              </a:defRPr>
-            </a:pPr>
-            <a:r>
-              <a:rPr lang="zh-CN" altLang="en-US" sz="1350" b="0">
-                <a:solidFill>
-                  <a:srgbClr val="1F2D22"/>
-                </a:solidFill>
-              </a:rPr>
-              <a:t>下方：文档列表区，含搜索筛选、单条删除、批量删除功能</a:t>
-            </a:r>
-            <a:endParaRPr lang="zh-CN" altLang="en-US" sz="1350" b="0">
-              <a:solidFill>
-                <a:srgbClr val="1F2D22"/>
-              </a:solidFill>
-            </a:endParaRPr>
-          </a:p>
-          <a:p>
-            <a:pPr algn="l">
-              <a:defRPr sz="1350" b="0">
-                <a:solidFill>
-                  <a:srgbClr val="1F2D22"/>
-                </a:solidFill>
-              </a:defRPr>
-            </a:pPr>
-            <a:r>
-              <a:rPr lang="zh-CN" altLang="en-US" sz="1350" b="0">
-                <a:solidFill>
-                  <a:srgbClr val="1F2D22"/>
-                </a:solidFill>
-              </a:rPr>
-              <a:t>点击卡片切换视图，选中高亮，无路由跳转</a:t>
-            </a:r>
-            <a:endParaRPr sz="1350" b="0">
-              <a:solidFill>
-                <a:srgbClr val="1F2D22"/>
-              </a:solidFill>
-            </a:endParaRPr>
-          </a:p>
-        </p:txBody>
-      </p:sp>
-      <p:sp>
-        <p:nvSpPr>
-          <p:cNvPr id="7" name="矩形 6"/>
-          <p:cNvSpPr>
-            <a:spLocks noGrp="1"/>
-          </p:cNvSpPr>
-          <p:nvPr/>
-        </p:nvSpPr>
-        <p:spPr>
-          <a:xfrm>
-            <a:off x="6572250" y="1619250"/>
-            <a:ext cx="4762500" cy="1619250"/>
-          </a:xfrm>
-          <a:prstGeom prst="rect">
-            <a:avLst/>
-          </a:prstGeom>
-          <a:solidFill>
-            <a:srgbClr val="FFFFFF"/>
-          </a:solidFill>
-          <a:ln w="9525">
-            <a:solidFill>
-              <a:srgbClr val="C7D0C4"/>
-            </a:solidFill>
-            <a:prstDash val="solid"/>
-          </a:ln>
-        </p:spPr>
-      </p:sp>
-      <p:sp>
-        <p:nvSpPr>
-          <p:cNvPr id="8" name="矩形 7"/>
-          <p:cNvSpPr>
-            <a:spLocks noGrp="1"/>
-          </p:cNvSpPr>
-          <p:nvPr/>
-        </p:nvSpPr>
-        <p:spPr>
-          <a:xfrm>
-            <a:off x="6800850" y="1728470"/>
-            <a:ext cx="4305300" cy="323850"/>
-          </a:xfrm>
-          <a:prstGeom prst="rect">
-            <a:avLst/>
-          </a:prstGeom>
-          <a:solidFill>
-            <a:srgbClr val="000000">
-              <a:alpha val="0"/>
-            </a:srgbClr>
-          </a:solidFill>
-          <a:ln w="0">
-            <a:solidFill>
-              <a:srgbClr val="000000">
-                <a:alpha val="0"/>
-              </a:srgbClr>
-            </a:solidFill>
-            <a:prstDash val="solid"/>
-          </a:ln>
-        </p:spPr>
-        <p:txBody>
-          <a:bodyPr anchor="ctr"/>
-          <a:lstStyle/>
-          <a:p>
-            <a:pPr algn="l">
-              <a:defRPr sz="1650" b="1">
-                <a:solidFill>
-                  <a:srgbClr val="2D4A33"/>
-                </a:solidFill>
-              </a:defRPr>
-            </a:pPr>
-            <a:r>
-              <a:rPr sz="1650" b="1">
-                <a:solidFill>
-                  <a:srgbClr val="2D4A33"/>
-                </a:solidFill>
-              </a:rPr>
-              <a:t>流程</a:t>
-            </a:r>
-            <a:endParaRPr sz="1650" b="1">
-              <a:solidFill>
-                <a:srgbClr val="2D4A33"/>
-              </a:solidFill>
-            </a:endParaRPr>
-          </a:p>
-        </p:txBody>
-      </p:sp>
-      <p:sp>
-        <p:nvSpPr>
-          <p:cNvPr id="9" name="矩形 8"/>
-          <p:cNvSpPr>
-            <a:spLocks noGrp="1"/>
-          </p:cNvSpPr>
-          <p:nvPr/>
-        </p:nvSpPr>
-        <p:spPr>
-          <a:xfrm>
-            <a:off x="6758940" y="2052320"/>
-            <a:ext cx="4671060" cy="1076960"/>
-          </a:xfrm>
-          <a:prstGeom prst="rect">
-            <a:avLst/>
-          </a:prstGeom>
-          <a:solidFill>
-            <a:srgbClr val="000000">
-              <a:alpha val="0"/>
-            </a:srgbClr>
-          </a:solidFill>
-          <a:ln w="0">
-            <a:solidFill>
-              <a:srgbClr val="000000">
-                <a:alpha val="0"/>
-              </a:srgbClr>
-            </a:solidFill>
-            <a:prstDash val="solid"/>
-          </a:ln>
-        </p:spPr>
-        <p:txBody>
-          <a:bodyPr anchor="ctr"/>
-          <a:lstStyle/>
-          <a:p>
-            <a:pPr algn="l">
-              <a:defRPr sz="1350" b="0">
-                <a:solidFill>
-                  <a:srgbClr val="1F2D22"/>
-                </a:solidFill>
-              </a:defRPr>
-            </a:pPr>
-            <a:r>
-              <a:rPr lang="zh-CN" altLang="en-US" sz="1350" b="0">
-                <a:solidFill>
-                  <a:srgbClr val="1F2D22"/>
-                </a:solidFill>
-              </a:rPr>
-              <a:t>页面加载</a:t>
-            </a:r>
-            <a:r>
-              <a:rPr lang="en-US" altLang="zh-CN" sz="1350" b="0">
-                <a:solidFill>
-                  <a:srgbClr val="1F2D22"/>
-                </a:solidFill>
-              </a:rPr>
-              <a:t> </a:t>
-            </a:r>
-            <a:r>
-              <a:rPr lang="en-US" altLang="en-US" sz="1350" b="0">
-                <a:solidFill>
-                  <a:srgbClr val="1F2D22"/>
-                </a:solidFill>
-              </a:rPr>
-              <a:t>→</a:t>
-            </a:r>
-            <a:r>
-              <a:rPr lang="en-US" altLang="zh-CN" sz="1350" b="0">
-                <a:solidFill>
-                  <a:srgbClr val="1F2D22"/>
-                </a:solidFill>
-              </a:rPr>
-              <a:t> </a:t>
-            </a:r>
-            <a:r>
-              <a:rPr lang="zh-CN" altLang="en-US" sz="1350" b="0">
-                <a:solidFill>
-                  <a:srgbClr val="1F2D22"/>
-                </a:solidFill>
-              </a:rPr>
-              <a:t>并发请求</a:t>
-            </a:r>
-            <a:r>
-              <a:rPr lang="en-US" altLang="zh-CN" sz="1350" b="0">
-                <a:solidFill>
-                  <a:srgbClr val="1F2D22"/>
-                </a:solidFill>
-              </a:rPr>
-              <a:t> 5 </a:t>
-            </a:r>
-            <a:r>
-              <a:rPr lang="zh-CN" altLang="en-US" sz="1350" b="0">
-                <a:solidFill>
-                  <a:srgbClr val="1F2D22"/>
-                </a:solidFill>
-              </a:rPr>
-              <a:t>个</a:t>
-            </a:r>
-            <a:r>
-              <a:rPr lang="en-US" altLang="zh-CN" sz="1350" b="0">
-                <a:solidFill>
-                  <a:srgbClr val="1F2D22"/>
-                </a:solidFill>
-              </a:rPr>
-              <a:t>GET  API</a:t>
-            </a:r>
-            <a:endParaRPr lang="zh-CN" altLang="en-US" sz="1350" b="0">
-              <a:solidFill>
-                <a:srgbClr val="1F2D22"/>
-              </a:solidFill>
-            </a:endParaRPr>
-          </a:p>
-          <a:p>
-            <a:pPr algn="l">
-              <a:defRPr sz="1350" b="0">
-                <a:solidFill>
-                  <a:srgbClr val="1F2D22"/>
-                </a:solidFill>
-              </a:defRPr>
-            </a:pPr>
-            <a:r>
-              <a:rPr lang="zh-CN" altLang="en-US" sz="1350" b="0">
-                <a:solidFill>
-                  <a:srgbClr val="1F2D22"/>
-                </a:solidFill>
-              </a:rPr>
-              <a:t>点击统计卡片</a:t>
-            </a:r>
-            <a:r>
-              <a:rPr lang="en-US" altLang="zh-CN" sz="1350" b="0">
-                <a:solidFill>
-                  <a:srgbClr val="1F2D22"/>
-                </a:solidFill>
-              </a:rPr>
-              <a:t> </a:t>
-            </a:r>
-            <a:r>
-              <a:rPr lang="en-US" altLang="en-US" sz="1350" b="0">
-                <a:solidFill>
-                  <a:srgbClr val="1F2D22"/>
-                </a:solidFill>
-              </a:rPr>
-              <a:t>→</a:t>
-            </a:r>
-            <a:r>
-              <a:rPr lang="en-US" altLang="zh-CN" sz="1350" b="0">
-                <a:solidFill>
-                  <a:srgbClr val="1F2D22"/>
-                </a:solidFill>
-              </a:rPr>
-              <a:t> </a:t>
-            </a:r>
-            <a:r>
-              <a:rPr lang="zh-CN" altLang="en-US" sz="1350" b="0">
-                <a:solidFill>
-                  <a:srgbClr val="1F2D22"/>
-                </a:solidFill>
-              </a:rPr>
-              <a:t>切换下方文档列表视图</a:t>
-            </a:r>
-            <a:endParaRPr lang="zh-CN" altLang="en-US" sz="1350" b="0">
-              <a:solidFill>
-                <a:srgbClr val="1F2D22"/>
-              </a:solidFill>
-            </a:endParaRPr>
-          </a:p>
-          <a:p>
-            <a:pPr algn="l">
-              <a:defRPr sz="1350" b="0">
-                <a:solidFill>
-                  <a:srgbClr val="1F2D22"/>
-                </a:solidFill>
-              </a:defRPr>
-            </a:pPr>
-            <a:r>
-              <a:rPr lang="zh-CN" altLang="en-US" sz="1350" b="0">
-                <a:solidFill>
-                  <a:srgbClr val="1F2D22"/>
-                </a:solidFill>
-              </a:rPr>
-              <a:t>输入关键词</a:t>
-            </a:r>
-            <a:r>
-              <a:rPr lang="en-US" altLang="zh-CN" sz="1350" b="0">
-                <a:solidFill>
-                  <a:srgbClr val="1F2D22"/>
-                </a:solidFill>
-              </a:rPr>
-              <a:t> </a:t>
-            </a:r>
-            <a:r>
-              <a:rPr lang="en-US" altLang="en-US" sz="1350" b="0">
-                <a:solidFill>
-                  <a:srgbClr val="1F2D22"/>
-                </a:solidFill>
-              </a:rPr>
-              <a:t>→</a:t>
-            </a:r>
-            <a:r>
-              <a:rPr lang="en-US" altLang="zh-CN" sz="1350" b="0">
-                <a:solidFill>
-                  <a:srgbClr val="1F2D22"/>
-                </a:solidFill>
-              </a:rPr>
-              <a:t> </a:t>
-            </a:r>
-            <a:r>
-              <a:rPr lang="zh-CN" altLang="en-US" sz="1350" b="0">
-                <a:solidFill>
-                  <a:srgbClr val="1F2D22"/>
-                </a:solidFill>
-              </a:rPr>
-              <a:t>前端实时过滤列表</a:t>
-            </a:r>
-            <a:endParaRPr lang="zh-CN" altLang="en-US" sz="1350" b="0">
-              <a:solidFill>
-                <a:srgbClr val="1F2D22"/>
-              </a:solidFill>
-            </a:endParaRPr>
-          </a:p>
-          <a:p>
-            <a:pPr algn="l">
-              <a:defRPr sz="1350" b="0">
-                <a:solidFill>
-                  <a:srgbClr val="1F2D22"/>
-                </a:solidFill>
-              </a:defRPr>
-            </a:pPr>
-            <a:r>
-              <a:rPr lang="zh-CN" altLang="en-US" sz="1350" b="0">
-                <a:solidFill>
-                  <a:srgbClr val="1F2D22"/>
-                </a:solidFill>
-              </a:rPr>
-              <a:t>删除的确认弹窗</a:t>
-            </a:r>
-            <a:r>
-              <a:rPr lang="en-US" altLang="zh-CN" sz="1350" b="0">
-                <a:solidFill>
-                  <a:srgbClr val="1F2D22"/>
-                </a:solidFill>
-              </a:rPr>
-              <a:t> </a:t>
-            </a:r>
-            <a:r>
-              <a:rPr lang="en-US" altLang="en-US" sz="1350" b="0">
-                <a:solidFill>
-                  <a:srgbClr val="1F2D22"/>
-                </a:solidFill>
-              </a:rPr>
-              <a:t>→</a:t>
-            </a:r>
-            <a:r>
-              <a:rPr lang="en-US" altLang="zh-CN" sz="1350" b="0">
-                <a:solidFill>
-                  <a:srgbClr val="1F2D22"/>
-                </a:solidFill>
-              </a:rPr>
-              <a:t> </a:t>
-            </a:r>
-            <a:r>
-              <a:rPr lang="zh-CN" altLang="en-US" sz="1350" b="0">
-                <a:solidFill>
-                  <a:srgbClr val="1F2D22"/>
-                </a:solidFill>
-              </a:rPr>
-              <a:t>调用</a:t>
-            </a:r>
-            <a:r>
-              <a:rPr lang="en-US" altLang="zh-CN" sz="1350" b="0">
-                <a:solidFill>
-                  <a:srgbClr val="1F2D22"/>
-                </a:solidFill>
-              </a:rPr>
-              <a:t> DELETE API </a:t>
-            </a:r>
-            <a:r>
-              <a:rPr lang="en-US" altLang="en-US" sz="1350" b="0">
-                <a:solidFill>
-                  <a:srgbClr val="1F2D22"/>
-                </a:solidFill>
-              </a:rPr>
-              <a:t>→</a:t>
-            </a:r>
-            <a:r>
-              <a:rPr lang="en-US" altLang="zh-CN" sz="1350" b="0">
-                <a:solidFill>
-                  <a:srgbClr val="1F2D22"/>
-                </a:solidFill>
-              </a:rPr>
-              <a:t> </a:t>
-            </a:r>
-            <a:r>
-              <a:rPr lang="zh-CN" altLang="en-US" sz="1350" b="0">
-                <a:solidFill>
-                  <a:srgbClr val="1F2D22"/>
-                </a:solidFill>
-              </a:rPr>
-              <a:t>刷新数据</a:t>
-            </a:r>
-            <a:endParaRPr lang="zh-CN" altLang="en-US" sz="1350" b="0">
-              <a:solidFill>
-                <a:srgbClr val="1F2D22"/>
-              </a:solidFill>
-            </a:endParaRPr>
-          </a:p>
-        </p:txBody>
-      </p:sp>
-      <p:sp>
-        <p:nvSpPr>
-          <p:cNvPr id="10" name="矩形 9"/>
-          <p:cNvSpPr>
-            <a:spLocks noGrp="1"/>
-          </p:cNvSpPr>
-          <p:nvPr/>
-        </p:nvSpPr>
-        <p:spPr>
-          <a:xfrm>
-            <a:off x="2000250" y="3714750"/>
-            <a:ext cx="8191500" cy="1995170"/>
-          </a:xfrm>
-          <a:prstGeom prst="rect">
-            <a:avLst/>
-          </a:prstGeom>
-          <a:solidFill>
-            <a:srgbClr val="FFFFFF"/>
-          </a:solidFill>
-          <a:ln w="9525">
-            <a:solidFill>
-              <a:srgbClr val="C7D0C4"/>
-            </a:solidFill>
-            <a:prstDash val="solid"/>
-          </a:ln>
-        </p:spPr>
-      </p:sp>
-      <p:sp>
-        <p:nvSpPr>
-          <p:cNvPr id="11" name="矩形 10"/>
-          <p:cNvSpPr>
-            <a:spLocks noGrp="1"/>
-          </p:cNvSpPr>
-          <p:nvPr/>
-        </p:nvSpPr>
-        <p:spPr>
-          <a:xfrm>
-            <a:off x="2228850" y="3886200"/>
-            <a:ext cx="7734300" cy="323850"/>
-          </a:xfrm>
-          <a:prstGeom prst="rect">
-            <a:avLst/>
-          </a:prstGeom>
-          <a:solidFill>
-            <a:srgbClr val="000000">
-              <a:alpha val="0"/>
-            </a:srgbClr>
-          </a:solidFill>
-          <a:ln w="0">
-            <a:solidFill>
-              <a:srgbClr val="000000">
-                <a:alpha val="0"/>
-              </a:srgbClr>
-            </a:solidFill>
-            <a:prstDash val="solid"/>
-          </a:ln>
-        </p:spPr>
-        <p:txBody>
-          <a:bodyPr anchor="ctr"/>
-          <a:lstStyle/>
-          <a:p>
-            <a:pPr algn="l">
-              <a:defRPr sz="1650" b="1">
-                <a:solidFill>
-                  <a:srgbClr val="2D4A33"/>
-                </a:solidFill>
-              </a:defRPr>
-            </a:pPr>
-            <a:r>
-              <a:rPr sz="1650" b="1">
-                <a:solidFill>
-                  <a:srgbClr val="2D4A33"/>
-                </a:solidFill>
-              </a:rPr>
-              <a:t>结果</a:t>
-            </a:r>
-            <a:endParaRPr sz="1650" b="1">
-              <a:solidFill>
-                <a:srgbClr val="2D4A33"/>
-              </a:solidFill>
-            </a:endParaRPr>
-          </a:p>
-        </p:txBody>
-      </p:sp>
-      <p:sp>
-        <p:nvSpPr>
-          <p:cNvPr id="12" name="矩形 11"/>
-          <p:cNvSpPr>
-            <a:spLocks noGrp="1"/>
-          </p:cNvSpPr>
-          <p:nvPr/>
-        </p:nvSpPr>
-        <p:spPr>
-          <a:xfrm>
-            <a:off x="2228850" y="4324350"/>
-            <a:ext cx="7734300" cy="919480"/>
-          </a:xfrm>
-          <a:prstGeom prst="rect">
-            <a:avLst/>
-          </a:prstGeom>
-          <a:solidFill>
-            <a:srgbClr val="000000">
-              <a:alpha val="0"/>
-            </a:srgbClr>
-          </a:solidFill>
-          <a:ln w="0">
-            <a:solidFill>
-              <a:srgbClr val="000000">
-                <a:alpha val="0"/>
-              </a:srgbClr>
-            </a:solidFill>
-            <a:prstDash val="solid"/>
-          </a:ln>
-        </p:spPr>
-        <p:txBody>
-          <a:bodyPr anchor="ctr"/>
-          <a:lstStyle/>
-          <a:p>
-            <a:pPr algn="l">
-              <a:defRPr sz="1350" b="0">
-                <a:solidFill>
-                  <a:srgbClr val="1F2D22"/>
-                </a:solidFill>
-              </a:defRPr>
-            </a:pPr>
-            <a:r>
-              <a:rPr lang="zh-CN" altLang="en-US" sz="1350" b="0">
-                <a:solidFill>
-                  <a:srgbClr val="1F2D22"/>
-                </a:solidFill>
-              </a:rPr>
-              <a:t>一站式查看</a:t>
-            </a:r>
-            <a:r>
-              <a:rPr lang="en-US" altLang="zh-CN" sz="1350" b="0">
-                <a:solidFill>
-                  <a:srgbClr val="1F2D22"/>
-                </a:solidFill>
-              </a:rPr>
-              <a:t> RAG </a:t>
-            </a:r>
-            <a:r>
-              <a:rPr lang="zh-CN" altLang="en-US" sz="1350" b="0">
-                <a:solidFill>
-                  <a:srgbClr val="1F2D22"/>
-                </a:solidFill>
-              </a:rPr>
-              <a:t>流水线各阶段数据状态</a:t>
-            </a:r>
-            <a:endParaRPr lang="zh-CN" altLang="en-US" sz="1350" b="0">
-              <a:solidFill>
-                <a:srgbClr val="1F2D22"/>
-              </a:solidFill>
-            </a:endParaRPr>
-          </a:p>
-          <a:p>
-            <a:pPr algn="l">
-              <a:defRPr sz="1350" b="0">
-                <a:solidFill>
-                  <a:srgbClr val="1F2D22"/>
-                </a:solidFill>
-              </a:defRPr>
-            </a:pPr>
-            <a:r>
-              <a:rPr lang="zh-CN" altLang="en-US" sz="1350" b="0">
-                <a:solidFill>
-                  <a:srgbClr val="1F2D22"/>
-                </a:solidFill>
-              </a:rPr>
-              <a:t>支持知识库文档的搜索、单条</a:t>
-            </a:r>
-            <a:r>
-              <a:rPr lang="en-US" altLang="zh-CN" sz="1350" b="0">
-                <a:solidFill>
-                  <a:srgbClr val="1F2D22"/>
-                </a:solidFill>
-              </a:rPr>
-              <a:t>/</a:t>
-            </a:r>
-            <a:r>
-              <a:rPr lang="zh-CN" altLang="en-US" sz="1350" b="0">
-                <a:solidFill>
-                  <a:srgbClr val="1F2D22"/>
-                </a:solidFill>
-              </a:rPr>
-              <a:t>批量删除管理</a:t>
-            </a:r>
-            <a:endParaRPr lang="zh-CN" altLang="en-US" sz="1350" b="0">
-              <a:solidFill>
-                <a:srgbClr val="1F2D22"/>
-              </a:solidFill>
-            </a:endParaRPr>
-          </a:p>
-          <a:p>
-            <a:pPr algn="l">
-              <a:defRPr sz="1350" b="0">
-                <a:solidFill>
-                  <a:srgbClr val="1F2D22"/>
-                </a:solidFill>
-              </a:defRPr>
-            </a:pPr>
-            <a:r>
-              <a:rPr lang="zh-CN" altLang="en-US" sz="1350" b="0">
-                <a:solidFill>
-                  <a:srgbClr val="1F2D22"/>
-                </a:solidFill>
-              </a:rPr>
-              <a:t>纯</a:t>
-            </a:r>
-            <a:r>
-              <a:rPr lang="en-US" altLang="zh-CN" sz="1350" b="0">
-                <a:solidFill>
-                  <a:srgbClr val="1F2D22"/>
-                </a:solidFill>
-              </a:rPr>
-              <a:t> Tailwind CSS </a:t>
-            </a:r>
-            <a:r>
-              <a:rPr lang="zh-CN" altLang="en-US" sz="1350" b="0">
-                <a:solidFill>
-                  <a:srgbClr val="1F2D22"/>
-                </a:solidFill>
-              </a:rPr>
-              <a:t>实现，零额外依赖，加载快速</a:t>
-            </a:r>
-            <a:endParaRPr lang="zh-CN" altLang="en-US" sz="1350" b="0">
-              <a:solidFill>
-                <a:srgbClr val="1F2D22"/>
-              </a:solidFill>
-            </a:endParaRPr>
-          </a:p>
-          <a:p>
-            <a:pPr algn="l">
-              <a:defRPr sz="1350" b="0">
-                <a:solidFill>
-                  <a:srgbClr val="1F2D22"/>
-                </a:solidFill>
-              </a:defRPr>
-            </a:pPr>
-            <a:endParaRPr sz="1350" b="0">
-              <a:solidFill>
-                <a:srgbClr val="1F2D22"/>
-              </a:solidFill>
-            </a:endParaRPr>
-          </a:p>
-        </p:txBody>
-      </p:sp>
-    </p:spTree>
-  </p:cSld>
-  <p:clrMapOvr>
-    <a:masterClrMapping/>
-  </p:clrMapOvr>
-</p:sld>
-</file>
-
 <file path=ppt/tags/tag1.xml><?xml version="1.0" encoding="utf-8"?>
-<p:tagLst xmlns:p="http://schemas.openxmlformats.org/presentationml/2006/main">
+<p:tagLst xmlns:a="http://schemas.openxmlformats.org/drawingml/2006/main" xmlns:r="http://schemas.openxmlformats.org/officeDocument/2006/relationships" xmlns:p="http://schemas.openxmlformats.org/presentationml/2006/main">
   <p:tag name="KSO_WM_DIAGRAM_VIRTUALLY_FRAME" val="{&quot;height&quot;:284.25,&quot;left&quot;:67.5,&quot;top&quot;:78.35,&quot;width&quot;:825}"/>
 </p:tagLst>
 </file>
 
 <file path=ppt/tags/tag2.xml><?xml version="1.0" encoding="utf-8"?>
-<p:tagLst xmlns:p="http://schemas.openxmlformats.org/presentationml/2006/main">
+<p:tagLst xmlns:a="http://schemas.openxmlformats.org/drawingml/2006/main" xmlns:r="http://schemas.openxmlformats.org/officeDocument/2006/relationships" xmlns:p="http://schemas.openxmlformats.org/presentationml/2006/main">
   <p:tag name="KSO_WM_DIAGRAM_VIRTUALLY_FRAME" val="{&quot;height&quot;:284.25,&quot;left&quot;:67.5,&quot;top&quot;:78.35,&quot;width&quot;:825}"/>
 </p:tagLst>
 </file>
 
 <file path=ppt/tags/tag3.xml><?xml version="1.0" encoding="utf-8"?>
-<p:tagLst xmlns:p="http://schemas.openxmlformats.org/presentationml/2006/main">
+<p:tagLst xmlns:a="http://schemas.openxmlformats.org/drawingml/2006/main" xmlns:r="http://schemas.openxmlformats.org/officeDocument/2006/relationships" xmlns:p="http://schemas.openxmlformats.org/presentationml/2006/main">
   <p:tag name="KSO_WM_DIAGRAM_VIRTUALLY_FRAME" val="{&quot;height&quot;:284.25,&quot;left&quot;:67.5,&quot;top&quot;:78.35,&quot;width&quot;:825}"/>
 </p:tagLst>
 </file>
 
 <file path=ppt/tags/tag4.xml><?xml version="1.0" encoding="utf-8"?>
-<p:tagLst xmlns:p="http://schemas.openxmlformats.org/presentationml/2006/main">
+<p:tagLst xmlns:a="http://schemas.openxmlformats.org/drawingml/2006/main" xmlns:r="http://schemas.openxmlformats.org/officeDocument/2006/relationships" xmlns:p="http://schemas.openxmlformats.org/presentationml/2006/main">
   <p:tag name="KSO_WM_DIAGRAM_VIRTUALLY_FRAME" val="{&quot;height&quot;:284.25,&quot;left&quot;:67.5,&quot;top&quot;:78.35,&quot;width&quot;:825}"/>
 </p:tagLst>
 </file>
 
 <file path=ppt/tags/tag5.xml><?xml version="1.0" encoding="utf-8"?>
-<p:tagLst xmlns:p="http://schemas.openxmlformats.org/presentationml/2006/main">
+<p:tagLst xmlns:a="http://schemas.openxmlformats.org/drawingml/2006/main" xmlns:r="http://schemas.openxmlformats.org/officeDocument/2006/relationships" xmlns:p="http://schemas.openxmlformats.org/presentationml/2006/main">
   <p:tag name="KSO_WM_DIAGRAM_VIRTUALLY_FRAME" val="{&quot;height&quot;:284.25,&quot;left&quot;:67.5,&quot;top&quot;:78.35,&quot;width&quot;:825}"/>
 </p:tagLst>
 </file>
 
 <file path=ppt/tags/tag6.xml><?xml version="1.0" encoding="utf-8"?>
-<p:tagLst xmlns:p="http://schemas.openxmlformats.org/presentationml/2006/main">
+<p:tagLst xmlns:a="http://schemas.openxmlformats.org/drawingml/2006/main" xmlns:r="http://schemas.openxmlformats.org/officeDocument/2006/relationships" xmlns:p="http://schemas.openxmlformats.org/presentationml/2006/main">
   <p:tag name="KSO_WM_DIAGRAM_VIRTUALLY_FRAME" val="{&quot;height&quot;:284.25,&quot;left&quot;:67.5,&quot;top&quot;:78.35,&quot;width&quot;:825}"/>
 </p:tagLst>
 </file>
@@ -11860,6 +12077,8 @@
       </a:bgFillStyleLst>
     </a:fmtScheme>
   </a:themeElements>
+  <a:objectDefaults/>
+  <a:extraClrSchemeLst/>
   <a:extLst>
     <a:ext uri="{05A4C25C-085E-4340-85A3-A5531E510DB2}">
       <thm15:themeFamily xmlns:thm15="http://schemas.microsoft.com/office/thememl/2012/main" name="Office Theme" id="{62F939B6-93AF-4DB8-9C6B-D6C7DFDC589F}" vid="{4A3C46E8-61CC-4603-A589-7422A47A8E4A}"/>
@@ -12010,6 +12229,8 @@
       </a:bgFillStyleLst>
     </a:fmtScheme>
   </a:themeElements>
+  <a:objectDefaults/>
+  <a:extraClrSchemeLst/>
   <a:extLst>
     <a:ext uri="{05A4C25C-085E-4340-85A3-A5531E510DB2}">
       <thm15:themeFamily xmlns:thm15="http://schemas.microsoft.com/office/thememl/2012/main" name="Office Theme" id="{62F939B6-93AF-4DB8-9C6B-D6C7DFDC589F}" vid="{4A3C46E8-61CC-4603-A589-7422A47A8E4A}"/>
